--- a/docs/logos.pptx
+++ b/docs/logos.pptx
@@ -3554,7 +3554,7 @@
       </p:sp>
       <p:pic>
         <p:nvPicPr>
-          <p:cNvPr id="18" name="Picture 17" descr="ファーストリテイリング.png"/>
+          <p:cNvPr id="18" name="Picture 17" descr="パナソニック.png"/>
           <p:cNvPicPr>
             <a:picLocks noChangeAspect="1"/>
           </p:cNvPicPr>
@@ -3568,8 +3568,8 @@
         </p:blipFill>
         <p:spPr>
           <a:xfrm>
-            <a:off x="7360737" y="2770072"/>
-            <a:ext cx="2072579" cy="1043536"/>
+            <a:off x="7360737" y="3103424"/>
+            <a:ext cx="2072578" cy="376832"/>
           </a:xfrm>
           <a:prstGeom prst="rect">
             <a:avLst/>
@@ -3605,14 +3605,14 @@
                   <a:srgbClr val="404040"/>
                 </a:solidFill>
               </a:rPr>
-              <a:t>ファーストリテイリング</a:t>
+              <a:t>パナソニック</a:t>
             </a:r>
           </a:p>
         </p:txBody>
       </p:sp>
       <p:pic>
         <p:nvPicPr>
-          <p:cNvPr id="20" name="Picture 19" descr="三井住友銀行.png"/>
+          <p:cNvPr id="20" name="Picture 19" descr="ファーストリテイリング.png"/>
           <p:cNvPicPr>
             <a:picLocks noChangeAspect="1"/>
           </p:cNvPicPr>
@@ -3626,8 +3626,8 @@
         </p:blipFill>
         <p:spPr>
           <a:xfrm>
-            <a:off x="9661916" y="2980144"/>
-            <a:ext cx="2072579" cy="623392"/>
+            <a:off x="9661916" y="2770072"/>
+            <a:ext cx="2072579" cy="1043536"/>
           </a:xfrm>
           <a:prstGeom prst="rect">
             <a:avLst/>
@@ -3663,14 +3663,14 @@
                   <a:srgbClr val="404040"/>
                 </a:solidFill>
               </a:rPr>
-              <a:t>三井住友銀行</a:t>
+              <a:t>ファーストリテイリング</a:t>
             </a:r>
           </a:p>
         </p:txBody>
       </p:sp>
       <p:pic>
         <p:nvPicPr>
-          <p:cNvPr id="22" name="Picture 21" descr="富士通.png"/>
+          <p:cNvPr id="22" name="Picture 21" descr="三井住友銀行.png"/>
           <p:cNvPicPr>
             <a:picLocks noChangeAspect="1"/>
           </p:cNvPicPr>
@@ -3684,8 +3684,8 @@
         </p:blipFill>
         <p:spPr>
           <a:xfrm>
-            <a:off x="457200" y="4824011"/>
-            <a:ext cx="2072579" cy="1050457"/>
+            <a:off x="457200" y="5037544"/>
+            <a:ext cx="2072579" cy="623392"/>
           </a:xfrm>
           <a:prstGeom prst="rect">
             <a:avLst/>
@@ -3721,14 +3721,14 @@
                   <a:srgbClr val="404040"/>
                 </a:solidFill>
               </a:rPr>
-              <a:t>富士通</a:t>
+              <a:t>三井住友銀行</a:t>
             </a:r>
           </a:p>
         </p:txBody>
       </p:sp>
       <p:pic>
         <p:nvPicPr>
-          <p:cNvPr id="24" name="Picture 23" descr="楽天グループ.png"/>
+          <p:cNvPr id="24" name="Picture 23" descr="富士通.png"/>
           <p:cNvPicPr>
             <a:picLocks noChangeAspect="1"/>
           </p:cNvPicPr>
@@ -3742,8 +3742,8 @@
         </p:blipFill>
         <p:spPr>
           <a:xfrm>
-            <a:off x="2758379" y="5008788"/>
-            <a:ext cx="2072579" cy="680904"/>
+            <a:off x="2758379" y="4824011"/>
+            <a:ext cx="2072579" cy="1050457"/>
           </a:xfrm>
           <a:prstGeom prst="rect">
             <a:avLst/>
@@ -3779,14 +3779,14 @@
                   <a:srgbClr val="404040"/>
                 </a:solidFill>
               </a:rPr>
-              <a:t>楽天グループ</a:t>
+              <a:t>富士通</a:t>
             </a:r>
           </a:p>
         </p:txBody>
       </p:sp>
       <p:pic>
         <p:nvPicPr>
-          <p:cNvPr id="26" name="Picture 25" descr="資生堂.png"/>
+          <p:cNvPr id="26" name="Picture 25" descr="楽天グループ.png"/>
           <p:cNvPicPr>
             <a:picLocks noChangeAspect="1"/>
           </p:cNvPicPr>
@@ -3800,8 +3800,8 @@
         </p:blipFill>
         <p:spPr>
           <a:xfrm>
-            <a:off x="5059558" y="5141780"/>
-            <a:ext cx="2072579" cy="414920"/>
+            <a:off x="5059558" y="5008788"/>
+            <a:ext cx="2072579" cy="680904"/>
           </a:xfrm>
           <a:prstGeom prst="rect">
             <a:avLst/>
@@ -3817,6 +3817,64 @@
         <p:spPr>
           <a:xfrm>
             <a:off x="5059558" y="6126480"/>
+            <a:ext cx="2072579" cy="274320"/>
+          </a:xfrm>
+          <a:prstGeom prst="rect">
+            <a:avLst/>
+          </a:prstGeom>
+          <a:noFill/>
+        </p:spPr>
+        <p:txBody>
+          <a:bodyPr wrap="square">
+            <a:spAutoFit/>
+          </a:bodyPr>
+          <a:lstStyle/>
+          <a:p>
+            <a:pPr algn="ctr"/>
+            <a:r>
+              <a:rPr sz="1000">
+                <a:solidFill>
+                  <a:srgbClr val="404040"/>
+                </a:solidFill>
+              </a:rPr>
+              <a:t>楽天グループ</a:t>
+            </a:r>
+          </a:p>
+        </p:txBody>
+      </p:sp>
+      <p:pic>
+        <p:nvPicPr>
+          <p:cNvPr id="28" name="Picture 27" descr="資生堂.png"/>
+          <p:cNvPicPr>
+            <a:picLocks noChangeAspect="1"/>
+          </p:cNvPicPr>
+          <p:nvPr/>
+        </p:nvPicPr>
+        <p:blipFill>
+          <a:blip r:embed="rId15"/>
+          <a:stretch>
+            <a:fillRect/>
+          </a:stretch>
+        </p:blipFill>
+        <p:spPr>
+          <a:xfrm>
+            <a:off x="7360737" y="5141780"/>
+            <a:ext cx="2072579" cy="414920"/>
+          </a:xfrm>
+          <a:prstGeom prst="rect">
+            <a:avLst/>
+          </a:prstGeom>
+        </p:spPr>
+      </p:pic>
+      <p:sp>
+        <p:nvSpPr>
+          <p:cNvPr id="29" name="TextBox 28"/>
+          <p:cNvSpPr txBox="1"/>
+          <p:nvPr/>
+        </p:nvSpPr>
+        <p:spPr>
+          <a:xfrm>
+            <a:off x="7360737" y="6126480"/>
             <a:ext cx="2072579" cy="274320"/>
           </a:xfrm>
           <a:prstGeom prst="rect">

--- a/docs/logos.pptx
+++ b/docs/logos.pptx
@@ -3104,8 +3104,8 @@
         </p:blipFill>
         <p:spPr>
           <a:xfrm>
-            <a:off x="457200" y="750838"/>
-            <a:ext cx="2072578" cy="967203"/>
+            <a:off x="709718" y="457200"/>
+            <a:ext cx="1567542" cy="731520"/>
           </a:xfrm>
           <a:prstGeom prst="rect">
             <a:avLst/>
@@ -3120,7 +3120,7 @@
         </p:nvSpPr>
         <p:spPr>
           <a:xfrm>
-            <a:off x="457200" y="2011680"/>
+            <a:off x="457200" y="1188720"/>
             <a:ext cx="2072579" cy="274320"/>
           </a:xfrm>
           <a:prstGeom prst="rect">
@@ -3162,7 +3162,7 @@
         </p:blipFill>
         <p:spPr>
           <a:xfrm>
-            <a:off x="2758379" y="928816"/>
+            <a:off x="2758379" y="517336"/>
             <a:ext cx="2072579" cy="611248"/>
           </a:xfrm>
           <a:prstGeom prst="rect">
@@ -3178,7 +3178,7 @@
         </p:nvSpPr>
         <p:spPr>
           <a:xfrm>
-            <a:off x="2758379" y="2011680"/>
+            <a:off x="2758379" y="1188720"/>
             <a:ext cx="2072579" cy="274320"/>
           </a:xfrm>
           <a:prstGeom prst="rect">
@@ -3220,7 +3220,7 @@
         </p:blipFill>
         <p:spPr>
           <a:xfrm>
-            <a:off x="5059558" y="988572"/>
+            <a:off x="5059558" y="577092"/>
             <a:ext cx="2072579" cy="491736"/>
           </a:xfrm>
           <a:prstGeom prst="rect">
@@ -3236,7 +3236,7 @@
         </p:nvSpPr>
         <p:spPr>
           <a:xfrm>
-            <a:off x="5059558" y="2011680"/>
+            <a:off x="5059558" y="1188720"/>
             <a:ext cx="2072579" cy="274320"/>
           </a:xfrm>
           <a:prstGeom prst="rect">
@@ -3278,7 +3278,7 @@
         </p:blipFill>
         <p:spPr>
           <a:xfrm>
-            <a:off x="7360737" y="1005898"/>
+            <a:off x="7360737" y="594418"/>
             <a:ext cx="2072579" cy="457083"/>
           </a:xfrm>
           <a:prstGeom prst="rect">
@@ -3294,7 +3294,7 @@
         </p:nvSpPr>
         <p:spPr>
           <a:xfrm>
-            <a:off x="7360737" y="2011680"/>
+            <a:off x="7360737" y="1188720"/>
             <a:ext cx="2072579" cy="274320"/>
           </a:xfrm>
           <a:prstGeom prst="rect">
@@ -3322,7 +3322,7 @@
       </p:sp>
       <p:pic>
         <p:nvPicPr>
-          <p:cNvPr id="10" name="Picture 9" descr="セブン&amp;アイ・ホールディングス.png"/>
+          <p:cNvPr id="10" name="Picture 9" descr="キーエンス.png"/>
           <p:cNvPicPr>
             <a:picLocks noChangeAspect="1"/>
           </p:cNvPicPr>
@@ -3336,8 +3336,8 @@
         </p:blipFill>
         <p:spPr>
           <a:xfrm>
-            <a:off x="9661916" y="1018038"/>
-            <a:ext cx="2072579" cy="432803"/>
+            <a:off x="9661916" y="600413"/>
+            <a:ext cx="2072579" cy="445094"/>
           </a:xfrm>
           <a:prstGeom prst="rect">
             <a:avLst/>
@@ -3352,7 +3352,7 @@
         </p:nvSpPr>
         <p:spPr>
           <a:xfrm>
-            <a:off x="9661916" y="2011680"/>
+            <a:off x="9661916" y="1188720"/>
             <a:ext cx="2072579" cy="274320"/>
           </a:xfrm>
           <a:prstGeom prst="rect">
@@ -3373,14 +3373,14 @@
                   <a:srgbClr val="404040"/>
                 </a:solidFill>
               </a:rPr>
-              <a:t>セブン&amp;アイ・ホールディングス</a:t>
+              <a:t>キーエンス</a:t>
             </a:r>
           </a:p>
         </p:txBody>
       </p:sp>
       <p:pic>
         <p:nvPicPr>
-          <p:cNvPr id="12" name="Picture 11" descr="ソニーグループ.png"/>
+          <p:cNvPr id="12" name="Picture 11" descr="コマツ.png"/>
           <p:cNvPicPr>
             <a:picLocks noChangeAspect="1"/>
           </p:cNvPicPr>
@@ -3394,8 +3394,8 @@
         </p:blipFill>
         <p:spPr>
           <a:xfrm>
-            <a:off x="457200" y="3075035"/>
-            <a:ext cx="2072579" cy="433610"/>
+            <a:off x="457200" y="1830712"/>
+            <a:ext cx="2072579" cy="453376"/>
           </a:xfrm>
           <a:prstGeom prst="rect">
             <a:avLst/>
@@ -3410,7 +3410,7 @@
         </p:nvSpPr>
         <p:spPr>
           <a:xfrm>
-            <a:off x="457200" y="4069080"/>
+            <a:off x="457200" y="2423160"/>
             <a:ext cx="2072579" cy="274320"/>
           </a:xfrm>
           <a:prstGeom prst="rect">
@@ -3431,14 +3431,14 @@
                   <a:srgbClr val="404040"/>
                 </a:solidFill>
               </a:rPr>
-              <a:t>ソニーグループ</a:t>
+              <a:t>コマツ</a:t>
             </a:r>
           </a:p>
         </p:txBody>
       </p:sp>
       <p:pic>
         <p:nvPicPr>
-          <p:cNvPr id="14" name="Picture 13" descr="ダイキン工業.png"/>
+          <p:cNvPr id="14" name="Picture 13" descr="セブン&amp;アイ・ホールディングス.png"/>
           <p:cNvPicPr>
             <a:picLocks noChangeAspect="1"/>
           </p:cNvPicPr>
@@ -3452,8 +3452,8 @@
         </p:blipFill>
         <p:spPr>
           <a:xfrm>
-            <a:off x="2758379" y="3042246"/>
-            <a:ext cx="2072578" cy="499188"/>
+            <a:off x="2758379" y="1840998"/>
+            <a:ext cx="2072579" cy="432803"/>
           </a:xfrm>
           <a:prstGeom prst="rect">
             <a:avLst/>
@@ -3468,7 +3468,7 @@
         </p:nvSpPr>
         <p:spPr>
           <a:xfrm>
-            <a:off x="2758379" y="4069080"/>
+            <a:off x="2758379" y="2423160"/>
             <a:ext cx="2072579" cy="274320"/>
           </a:xfrm>
           <a:prstGeom prst="rect">
@@ -3489,14 +3489,14 @@
                   <a:srgbClr val="404040"/>
                 </a:solidFill>
               </a:rPr>
-              <a:t>ダイキン工業</a:t>
+              <a:t>セブン&amp;アイ・ホールディングス</a:t>
             </a:r>
           </a:p>
         </p:txBody>
       </p:sp>
       <p:pic>
         <p:nvPicPr>
-          <p:cNvPr id="16" name="Picture 15" descr="トヨタ自動車.png"/>
+          <p:cNvPr id="16" name="Picture 15" descr="ソニーグループ.png"/>
           <p:cNvPicPr>
             <a:picLocks noChangeAspect="1"/>
           </p:cNvPicPr>
@@ -3510,8 +3510,8 @@
         </p:blipFill>
         <p:spPr>
           <a:xfrm>
-            <a:off x="5059558" y="2571953"/>
-            <a:ext cx="2072578" cy="1439774"/>
+            <a:off x="5059558" y="1840595"/>
+            <a:ext cx="2072579" cy="433610"/>
           </a:xfrm>
           <a:prstGeom prst="rect">
             <a:avLst/>
@@ -3526,7 +3526,7 @@
         </p:nvSpPr>
         <p:spPr>
           <a:xfrm>
-            <a:off x="5059558" y="4069080"/>
+            <a:off x="5059558" y="2423160"/>
             <a:ext cx="2072579" cy="274320"/>
           </a:xfrm>
           <a:prstGeom prst="rect">
@@ -3547,14 +3547,14 @@
                   <a:srgbClr val="404040"/>
                 </a:solidFill>
               </a:rPr>
-              <a:t>トヨタ自動車</a:t>
+              <a:t>ソニーグループ</a:t>
             </a:r>
           </a:p>
         </p:txBody>
       </p:sp>
       <p:pic>
         <p:nvPicPr>
-          <p:cNvPr id="18" name="Picture 17" descr="パナソニック.png"/>
+          <p:cNvPr id="18" name="Picture 17" descr="ダイキン工業.png"/>
           <p:cNvPicPr>
             <a:picLocks noChangeAspect="1"/>
           </p:cNvPicPr>
@@ -3568,8 +3568,8 @@
         </p:blipFill>
         <p:spPr>
           <a:xfrm>
-            <a:off x="7360737" y="3103424"/>
-            <a:ext cx="2072578" cy="376832"/>
+            <a:off x="7360737" y="1807806"/>
+            <a:ext cx="2072578" cy="499188"/>
           </a:xfrm>
           <a:prstGeom prst="rect">
             <a:avLst/>
@@ -3584,7 +3584,7 @@
         </p:nvSpPr>
         <p:spPr>
           <a:xfrm>
-            <a:off x="7360737" y="4069080"/>
+            <a:off x="7360737" y="2423160"/>
             <a:ext cx="2072579" cy="274320"/>
           </a:xfrm>
           <a:prstGeom prst="rect">
@@ -3605,14 +3605,14 @@
                   <a:srgbClr val="404040"/>
                 </a:solidFill>
               </a:rPr>
-              <a:t>パナソニック</a:t>
+              <a:t>ダイキン工業</a:t>
             </a:r>
           </a:p>
         </p:txBody>
       </p:sp>
       <p:pic>
         <p:nvPicPr>
-          <p:cNvPr id="20" name="Picture 19" descr="ファーストリテイリング.png"/>
+          <p:cNvPr id="20" name="Picture 19" descr="トヨタ自動車.png"/>
           <p:cNvPicPr>
             <a:picLocks noChangeAspect="1"/>
           </p:cNvPicPr>
@@ -3626,8 +3626,8 @@
         </p:blipFill>
         <p:spPr>
           <a:xfrm>
-            <a:off x="9661916" y="2770072"/>
-            <a:ext cx="2072579" cy="1043536"/>
+            <a:off x="10171688" y="1691640"/>
+            <a:ext cx="1053034" cy="731520"/>
           </a:xfrm>
           <a:prstGeom prst="rect">
             <a:avLst/>
@@ -3642,7 +3642,7 @@
         </p:nvSpPr>
         <p:spPr>
           <a:xfrm>
-            <a:off x="9661916" y="4069080"/>
+            <a:off x="9661916" y="2423160"/>
             <a:ext cx="2072579" cy="274320"/>
           </a:xfrm>
           <a:prstGeom prst="rect">
@@ -3663,14 +3663,14 @@
                   <a:srgbClr val="404040"/>
                 </a:solidFill>
               </a:rPr>
-              <a:t>ファーストリテイリング</a:t>
+              <a:t>トヨタ自動車</a:t>
             </a:r>
           </a:p>
         </p:txBody>
       </p:sp>
       <p:pic>
         <p:nvPicPr>
-          <p:cNvPr id="22" name="Picture 21" descr="三井住友銀行.png"/>
+          <p:cNvPr id="22" name="Picture 21" descr="パナソニック.png"/>
           <p:cNvPicPr>
             <a:picLocks noChangeAspect="1"/>
           </p:cNvPicPr>
@@ -3684,8 +3684,8 @@
         </p:blipFill>
         <p:spPr>
           <a:xfrm>
-            <a:off x="457200" y="5037544"/>
-            <a:ext cx="2072579" cy="623392"/>
+            <a:off x="457200" y="3103424"/>
+            <a:ext cx="2072578" cy="376832"/>
           </a:xfrm>
           <a:prstGeom prst="rect">
             <a:avLst/>
@@ -3700,7 +3700,7 @@
         </p:nvSpPr>
         <p:spPr>
           <a:xfrm>
-            <a:off x="457200" y="6126480"/>
+            <a:off x="457200" y="3657600"/>
             <a:ext cx="2072579" cy="274320"/>
           </a:xfrm>
           <a:prstGeom prst="rect">
@@ -3721,14 +3721,14 @@
                   <a:srgbClr val="404040"/>
                 </a:solidFill>
               </a:rPr>
-              <a:t>三井住友銀行</a:t>
+              <a:t>パナソニック</a:t>
             </a:r>
           </a:p>
         </p:txBody>
       </p:sp>
       <p:pic>
         <p:nvPicPr>
-          <p:cNvPr id="24" name="Picture 23" descr="富士通.png"/>
+          <p:cNvPr id="24" name="Picture 23" descr="ファーストリテイリング.png"/>
           <p:cNvPicPr>
             <a:picLocks noChangeAspect="1"/>
           </p:cNvPicPr>
@@ -3742,8 +3742,8 @@
         </p:blipFill>
         <p:spPr>
           <a:xfrm>
-            <a:off x="2758379" y="4824011"/>
-            <a:ext cx="2072579" cy="1050457"/>
+            <a:off x="3068228" y="2926080"/>
+            <a:ext cx="1452880" cy="731520"/>
           </a:xfrm>
           <a:prstGeom prst="rect">
             <a:avLst/>
@@ -3758,7 +3758,7 @@
         </p:nvSpPr>
         <p:spPr>
           <a:xfrm>
-            <a:off x="2758379" y="6126480"/>
+            <a:off x="2758379" y="3657600"/>
             <a:ext cx="2072579" cy="274320"/>
           </a:xfrm>
           <a:prstGeom prst="rect">
@@ -3779,14 +3779,14 @@
                   <a:srgbClr val="404040"/>
                 </a:solidFill>
               </a:rPr>
-              <a:t>富士通</a:t>
+              <a:t>ファーストリテイリング</a:t>
             </a:r>
           </a:p>
         </p:txBody>
       </p:sp>
       <p:pic>
         <p:nvPicPr>
-          <p:cNvPr id="26" name="Picture 25" descr="楽天グループ.png"/>
+          <p:cNvPr id="26" name="Picture 25" descr="リクルートホールディングス.png"/>
           <p:cNvPicPr>
             <a:picLocks noChangeAspect="1"/>
           </p:cNvPicPr>
@@ -3800,8 +3800,8 @@
         </p:blipFill>
         <p:spPr>
           <a:xfrm>
-            <a:off x="5059558" y="5008788"/>
-            <a:ext cx="2072579" cy="680904"/>
+            <a:off x="5059558" y="2990399"/>
+            <a:ext cx="2072579" cy="602881"/>
           </a:xfrm>
           <a:prstGeom prst="rect">
             <a:avLst/>
@@ -3816,7 +3816,7 @@
         </p:nvSpPr>
         <p:spPr>
           <a:xfrm>
-            <a:off x="5059558" y="6126480"/>
+            <a:off x="5059558" y="3657600"/>
             <a:ext cx="2072579" cy="274320"/>
           </a:xfrm>
           <a:prstGeom prst="rect">
@@ -3837,14 +3837,14 @@
                   <a:srgbClr val="404040"/>
                 </a:solidFill>
               </a:rPr>
-              <a:t>楽天グループ</a:t>
+              <a:t>リクルートホールディングス</a:t>
             </a:r>
           </a:p>
         </p:txBody>
       </p:sp>
       <p:pic>
         <p:nvPicPr>
-          <p:cNvPr id="28" name="Picture 27" descr="資生堂.png"/>
+          <p:cNvPr id="28" name="Picture 27" descr="三井住友銀行.png"/>
           <p:cNvPicPr>
             <a:picLocks noChangeAspect="1"/>
           </p:cNvPicPr>
@@ -3858,7 +3858,587 @@
         </p:blipFill>
         <p:spPr>
           <a:xfrm>
-            <a:off x="7360737" y="5141780"/>
+            <a:off x="7360737" y="2980144"/>
+            <a:ext cx="2072579" cy="623392"/>
+          </a:xfrm>
+          <a:prstGeom prst="rect">
+            <a:avLst/>
+          </a:prstGeom>
+        </p:spPr>
+      </p:pic>
+      <p:sp>
+        <p:nvSpPr>
+          <p:cNvPr id="29" name="TextBox 28"/>
+          <p:cNvSpPr txBox="1"/>
+          <p:nvPr/>
+        </p:nvSpPr>
+        <p:spPr>
+          <a:xfrm>
+            <a:off x="7360737" y="3657600"/>
+            <a:ext cx="2072579" cy="274320"/>
+          </a:xfrm>
+          <a:prstGeom prst="rect">
+            <a:avLst/>
+          </a:prstGeom>
+          <a:noFill/>
+        </p:spPr>
+        <p:txBody>
+          <a:bodyPr wrap="square">
+            <a:spAutoFit/>
+          </a:bodyPr>
+          <a:lstStyle/>
+          <a:p>
+            <a:pPr algn="ctr"/>
+            <a:r>
+              <a:rPr sz="1000">
+                <a:solidFill>
+                  <a:srgbClr val="404040"/>
+                </a:solidFill>
+              </a:rPr>
+              <a:t>三井住友銀行</a:t>
+            </a:r>
+          </a:p>
+        </p:txBody>
+      </p:sp>
+      <p:pic>
+        <p:nvPicPr>
+          <p:cNvPr id="30" name="Picture 29" descr="任天堂.png"/>
+          <p:cNvPicPr>
+            <a:picLocks noChangeAspect="1"/>
+          </p:cNvPicPr>
+          <p:nvPr/>
+        </p:nvPicPr>
+        <p:blipFill>
+          <a:blip r:embed="rId16"/>
+          <a:stretch>
+            <a:fillRect/>
+          </a:stretch>
+        </p:blipFill>
+        <p:spPr>
+          <a:xfrm>
+            <a:off x="9661916" y="3006153"/>
+            <a:ext cx="2072579" cy="571374"/>
+          </a:xfrm>
+          <a:prstGeom prst="rect">
+            <a:avLst/>
+          </a:prstGeom>
+        </p:spPr>
+      </p:pic>
+      <p:sp>
+        <p:nvSpPr>
+          <p:cNvPr id="31" name="TextBox 30"/>
+          <p:cNvSpPr txBox="1"/>
+          <p:nvPr/>
+        </p:nvSpPr>
+        <p:spPr>
+          <a:xfrm>
+            <a:off x="9661916" y="3657600"/>
+            <a:ext cx="2072579" cy="274320"/>
+          </a:xfrm>
+          <a:prstGeom prst="rect">
+            <a:avLst/>
+          </a:prstGeom>
+          <a:noFill/>
+        </p:spPr>
+        <p:txBody>
+          <a:bodyPr wrap="square">
+            <a:spAutoFit/>
+          </a:bodyPr>
+          <a:lstStyle/>
+          <a:p>
+            <a:pPr algn="ctr"/>
+            <a:r>
+              <a:rPr sz="1000">
+                <a:solidFill>
+                  <a:srgbClr val="404040"/>
+                </a:solidFill>
+              </a:rPr>
+              <a:t>任天堂</a:t>
+            </a:r>
+          </a:p>
+        </p:txBody>
+      </p:sp>
+      <p:pic>
+        <p:nvPicPr>
+          <p:cNvPr id="32" name="Picture 31" descr="伊藤忠商事.png"/>
+          <p:cNvPicPr>
+            <a:picLocks noChangeAspect="1"/>
+          </p:cNvPicPr>
+          <p:nvPr/>
+        </p:nvPicPr>
+        <p:blipFill>
+          <a:blip r:embed="rId17"/>
+          <a:stretch>
+            <a:fillRect/>
+          </a:stretch>
+        </p:blipFill>
+        <p:spPr>
+          <a:xfrm>
+            <a:off x="649629" y="4160520"/>
+            <a:ext cx="1687721" cy="731520"/>
+          </a:xfrm>
+          <a:prstGeom prst="rect">
+            <a:avLst/>
+          </a:prstGeom>
+        </p:spPr>
+      </p:pic>
+      <p:sp>
+        <p:nvSpPr>
+          <p:cNvPr id="33" name="TextBox 32"/>
+          <p:cNvSpPr txBox="1"/>
+          <p:nvPr/>
+        </p:nvSpPr>
+        <p:spPr>
+          <a:xfrm>
+            <a:off x="457200" y="4892040"/>
+            <a:ext cx="2072579" cy="274320"/>
+          </a:xfrm>
+          <a:prstGeom prst="rect">
+            <a:avLst/>
+          </a:prstGeom>
+          <a:noFill/>
+        </p:spPr>
+        <p:txBody>
+          <a:bodyPr wrap="square">
+            <a:spAutoFit/>
+          </a:bodyPr>
+          <a:lstStyle/>
+          <a:p>
+            <a:pPr algn="ctr"/>
+            <a:r>
+              <a:rPr sz="1000">
+                <a:solidFill>
+                  <a:srgbClr val="404040"/>
+                </a:solidFill>
+              </a:rPr>
+              <a:t>伊藤忠商事</a:t>
+            </a:r>
+          </a:p>
+        </p:txBody>
+      </p:sp>
+      <p:pic>
+        <p:nvPicPr>
+          <p:cNvPr id="34" name="Picture 33" descr="信越化学工業.png"/>
+          <p:cNvPicPr>
+            <a:picLocks noChangeAspect="1"/>
+          </p:cNvPicPr>
+          <p:nvPr/>
+        </p:nvPicPr>
+        <p:blipFill>
+          <a:blip r:embed="rId18"/>
+          <a:stretch>
+            <a:fillRect/>
+          </a:stretch>
+        </p:blipFill>
+        <p:spPr>
+          <a:xfrm>
+            <a:off x="3104311" y="4160520"/>
+            <a:ext cx="1380714" cy="731520"/>
+          </a:xfrm>
+          <a:prstGeom prst="rect">
+            <a:avLst/>
+          </a:prstGeom>
+        </p:spPr>
+      </p:pic>
+      <p:sp>
+        <p:nvSpPr>
+          <p:cNvPr id="35" name="TextBox 34"/>
+          <p:cNvSpPr txBox="1"/>
+          <p:nvPr/>
+        </p:nvSpPr>
+        <p:spPr>
+          <a:xfrm>
+            <a:off x="2758379" y="4892040"/>
+            <a:ext cx="2072579" cy="274320"/>
+          </a:xfrm>
+          <a:prstGeom prst="rect">
+            <a:avLst/>
+          </a:prstGeom>
+          <a:noFill/>
+        </p:spPr>
+        <p:txBody>
+          <a:bodyPr wrap="square">
+            <a:spAutoFit/>
+          </a:bodyPr>
+          <a:lstStyle/>
+          <a:p>
+            <a:pPr algn="ctr"/>
+            <a:r>
+              <a:rPr sz="1000">
+                <a:solidFill>
+                  <a:srgbClr val="404040"/>
+                </a:solidFill>
+              </a:rPr>
+              <a:t>信越化学工業</a:t>
+            </a:r>
+          </a:p>
+        </p:txBody>
+      </p:sp>
+      <p:pic>
+        <p:nvPicPr>
+          <p:cNvPr id="36" name="Picture 35" descr="味の素.png"/>
+          <p:cNvPicPr>
+            <a:picLocks noChangeAspect="1"/>
+          </p:cNvPicPr>
+          <p:nvPr/>
+        </p:nvPicPr>
+        <p:blipFill>
+          <a:blip r:embed="rId19"/>
+          <a:stretch>
+            <a:fillRect/>
+          </a:stretch>
+        </p:blipFill>
+        <p:spPr>
+          <a:xfrm>
+            <a:off x="5447629" y="4160520"/>
+            <a:ext cx="1296437" cy="731520"/>
+          </a:xfrm>
+          <a:prstGeom prst="rect">
+            <a:avLst/>
+          </a:prstGeom>
+        </p:spPr>
+      </p:pic>
+      <p:sp>
+        <p:nvSpPr>
+          <p:cNvPr id="37" name="TextBox 36"/>
+          <p:cNvSpPr txBox="1"/>
+          <p:nvPr/>
+        </p:nvSpPr>
+        <p:spPr>
+          <a:xfrm>
+            <a:off x="5059558" y="4892040"/>
+            <a:ext cx="2072579" cy="274320"/>
+          </a:xfrm>
+          <a:prstGeom prst="rect">
+            <a:avLst/>
+          </a:prstGeom>
+          <a:noFill/>
+        </p:spPr>
+        <p:txBody>
+          <a:bodyPr wrap="square">
+            <a:spAutoFit/>
+          </a:bodyPr>
+          <a:lstStyle/>
+          <a:p>
+            <a:pPr algn="ctr"/>
+            <a:r>
+              <a:rPr sz="1000">
+                <a:solidFill>
+                  <a:srgbClr val="404040"/>
+                </a:solidFill>
+              </a:rPr>
+              <a:t>味の素</a:t>
+            </a:r>
+          </a:p>
+        </p:txBody>
+      </p:sp>
+      <p:pic>
+        <p:nvPicPr>
+          <p:cNvPr id="38" name="Picture 37" descr="富士通.png"/>
+          <p:cNvPicPr>
+            <a:picLocks noChangeAspect="1"/>
+          </p:cNvPicPr>
+          <p:nvPr/>
+        </p:nvPicPr>
+        <p:blipFill>
+          <a:blip r:embed="rId20"/>
+          <a:stretch>
+            <a:fillRect/>
+          </a:stretch>
+        </p:blipFill>
+        <p:spPr>
+          <a:xfrm>
+            <a:off x="7675373" y="4160520"/>
+            <a:ext cx="1443307" cy="731520"/>
+          </a:xfrm>
+          <a:prstGeom prst="rect">
+            <a:avLst/>
+          </a:prstGeom>
+        </p:spPr>
+      </p:pic>
+      <p:sp>
+        <p:nvSpPr>
+          <p:cNvPr id="39" name="TextBox 38"/>
+          <p:cNvSpPr txBox="1"/>
+          <p:nvPr/>
+        </p:nvSpPr>
+        <p:spPr>
+          <a:xfrm>
+            <a:off x="7360737" y="4892040"/>
+            <a:ext cx="2072579" cy="274320"/>
+          </a:xfrm>
+          <a:prstGeom prst="rect">
+            <a:avLst/>
+          </a:prstGeom>
+          <a:noFill/>
+        </p:spPr>
+        <p:txBody>
+          <a:bodyPr wrap="square">
+            <a:spAutoFit/>
+          </a:bodyPr>
+          <a:lstStyle/>
+          <a:p>
+            <a:pPr algn="ctr"/>
+            <a:r>
+              <a:rPr sz="1000">
+                <a:solidFill>
+                  <a:srgbClr val="404040"/>
+                </a:solidFill>
+              </a:rPr>
+              <a:t>富士通</a:t>
+            </a:r>
+          </a:p>
+        </p:txBody>
+      </p:sp>
+      <p:pic>
+        <p:nvPicPr>
+          <p:cNvPr id="40" name="Picture 39" descr="日本郵政.png"/>
+          <p:cNvPicPr>
+            <a:picLocks noChangeAspect="1"/>
+          </p:cNvPicPr>
+          <p:nvPr/>
+        </p:nvPicPr>
+        <p:blipFill>
+          <a:blip r:embed="rId21"/>
+          <a:stretch>
+            <a:fillRect/>
+          </a:stretch>
+        </p:blipFill>
+        <p:spPr>
+          <a:xfrm>
+            <a:off x="10182816" y="4160520"/>
+            <a:ext cx="1030778" cy="731520"/>
+          </a:xfrm>
+          <a:prstGeom prst="rect">
+            <a:avLst/>
+          </a:prstGeom>
+        </p:spPr>
+      </p:pic>
+      <p:sp>
+        <p:nvSpPr>
+          <p:cNvPr id="41" name="TextBox 40"/>
+          <p:cNvSpPr txBox="1"/>
+          <p:nvPr/>
+        </p:nvSpPr>
+        <p:spPr>
+          <a:xfrm>
+            <a:off x="9661916" y="4892040"/>
+            <a:ext cx="2072579" cy="274320"/>
+          </a:xfrm>
+          <a:prstGeom prst="rect">
+            <a:avLst/>
+          </a:prstGeom>
+          <a:noFill/>
+        </p:spPr>
+        <p:txBody>
+          <a:bodyPr wrap="square">
+            <a:spAutoFit/>
+          </a:bodyPr>
+          <a:lstStyle/>
+          <a:p>
+            <a:pPr algn="ctr"/>
+            <a:r>
+              <a:rPr sz="1000">
+                <a:solidFill>
+                  <a:srgbClr val="404040"/>
+                </a:solidFill>
+              </a:rPr>
+              <a:t>日本郵政</a:t>
+            </a:r>
+          </a:p>
+        </p:txBody>
+      </p:sp>
+      <p:pic>
+        <p:nvPicPr>
+          <p:cNvPr id="42" name="Picture 41" descr="村田製作所.png"/>
+          <p:cNvPicPr>
+            <a:picLocks noChangeAspect="1"/>
+          </p:cNvPicPr>
+          <p:nvPr/>
+        </p:nvPicPr>
+        <p:blipFill>
+          <a:blip r:embed="rId22"/>
+          <a:stretch>
+            <a:fillRect/>
+          </a:stretch>
+        </p:blipFill>
+        <p:spPr>
+          <a:xfrm>
+            <a:off x="513889" y="5394960"/>
+            <a:ext cx="1959201" cy="731520"/>
+          </a:xfrm>
+          <a:prstGeom prst="rect">
+            <a:avLst/>
+          </a:prstGeom>
+        </p:spPr>
+      </p:pic>
+      <p:sp>
+        <p:nvSpPr>
+          <p:cNvPr id="43" name="TextBox 42"/>
+          <p:cNvSpPr txBox="1"/>
+          <p:nvPr/>
+        </p:nvSpPr>
+        <p:spPr>
+          <a:xfrm>
+            <a:off x="457200" y="6126480"/>
+            <a:ext cx="2072579" cy="274320"/>
+          </a:xfrm>
+          <a:prstGeom prst="rect">
+            <a:avLst/>
+          </a:prstGeom>
+          <a:noFill/>
+        </p:spPr>
+        <p:txBody>
+          <a:bodyPr wrap="square">
+            <a:spAutoFit/>
+          </a:bodyPr>
+          <a:lstStyle/>
+          <a:p>
+            <a:pPr algn="ctr"/>
+            <a:r>
+              <a:rPr sz="1000">
+                <a:solidFill>
+                  <a:srgbClr val="404040"/>
+                </a:solidFill>
+              </a:rPr>
+              <a:t>村田製作所</a:t>
+            </a:r>
+          </a:p>
+        </p:txBody>
+      </p:sp>
+      <p:pic>
+        <p:nvPicPr>
+          <p:cNvPr id="44" name="Picture 43" descr="東京ガス.png"/>
+          <p:cNvPicPr>
+            <a:picLocks noChangeAspect="1"/>
+          </p:cNvPicPr>
+          <p:nvPr/>
+        </p:nvPicPr>
+        <p:blipFill>
+          <a:blip r:embed="rId23"/>
+          <a:stretch>
+            <a:fillRect/>
+          </a:stretch>
+        </p:blipFill>
+        <p:spPr>
+          <a:xfrm>
+            <a:off x="3240081" y="5394960"/>
+            <a:ext cx="1109174" cy="731520"/>
+          </a:xfrm>
+          <a:prstGeom prst="rect">
+            <a:avLst/>
+          </a:prstGeom>
+        </p:spPr>
+      </p:pic>
+      <p:sp>
+        <p:nvSpPr>
+          <p:cNvPr id="45" name="TextBox 44"/>
+          <p:cNvSpPr txBox="1"/>
+          <p:nvPr/>
+        </p:nvSpPr>
+        <p:spPr>
+          <a:xfrm>
+            <a:off x="2758379" y="6126480"/>
+            <a:ext cx="2072579" cy="274320"/>
+          </a:xfrm>
+          <a:prstGeom prst="rect">
+            <a:avLst/>
+          </a:prstGeom>
+          <a:noFill/>
+        </p:spPr>
+        <p:txBody>
+          <a:bodyPr wrap="square">
+            <a:spAutoFit/>
+          </a:bodyPr>
+          <a:lstStyle/>
+          <a:p>
+            <a:pPr algn="ctr"/>
+            <a:r>
+              <a:rPr sz="1000">
+                <a:solidFill>
+                  <a:srgbClr val="404040"/>
+                </a:solidFill>
+              </a:rPr>
+              <a:t>東京ガス</a:t>
+            </a:r>
+          </a:p>
+        </p:txBody>
+      </p:sp>
+      <p:pic>
+        <p:nvPicPr>
+          <p:cNvPr id="46" name="Picture 45" descr="楽天グループ.png"/>
+          <p:cNvPicPr>
+            <a:picLocks noChangeAspect="1"/>
+          </p:cNvPicPr>
+          <p:nvPr/>
+        </p:nvPicPr>
+        <p:blipFill>
+          <a:blip r:embed="rId24"/>
+          <a:stretch>
+            <a:fillRect/>
+          </a:stretch>
+        </p:blipFill>
+        <p:spPr>
+          <a:xfrm>
+            <a:off x="5059558" y="5420268"/>
+            <a:ext cx="2072579" cy="680904"/>
+          </a:xfrm>
+          <a:prstGeom prst="rect">
+            <a:avLst/>
+          </a:prstGeom>
+        </p:spPr>
+      </p:pic>
+      <p:sp>
+        <p:nvSpPr>
+          <p:cNvPr id="47" name="TextBox 46"/>
+          <p:cNvSpPr txBox="1"/>
+          <p:nvPr/>
+        </p:nvSpPr>
+        <p:spPr>
+          <a:xfrm>
+            <a:off x="5059558" y="6126480"/>
+            <a:ext cx="2072579" cy="274320"/>
+          </a:xfrm>
+          <a:prstGeom prst="rect">
+            <a:avLst/>
+          </a:prstGeom>
+          <a:noFill/>
+        </p:spPr>
+        <p:txBody>
+          <a:bodyPr wrap="square">
+            <a:spAutoFit/>
+          </a:bodyPr>
+          <a:lstStyle/>
+          <a:p>
+            <a:pPr algn="ctr"/>
+            <a:r>
+              <a:rPr sz="1000">
+                <a:solidFill>
+                  <a:srgbClr val="404040"/>
+                </a:solidFill>
+              </a:rPr>
+              <a:t>楽天グループ</a:t>
+            </a:r>
+          </a:p>
+        </p:txBody>
+      </p:sp>
+      <p:pic>
+        <p:nvPicPr>
+          <p:cNvPr id="48" name="Picture 47" descr="資生堂.png"/>
+          <p:cNvPicPr>
+            <a:picLocks noChangeAspect="1"/>
+          </p:cNvPicPr>
+          <p:nvPr/>
+        </p:nvPicPr>
+        <p:blipFill>
+          <a:blip r:embed="rId25"/>
+          <a:stretch>
+            <a:fillRect/>
+          </a:stretch>
+        </p:blipFill>
+        <p:spPr>
+          <a:xfrm>
+            <a:off x="7360737" y="5553260"/>
             <a:ext cx="2072579" cy="414920"/>
           </a:xfrm>
           <a:prstGeom prst="rect">
@@ -3868,7 +4448,7 @@
       </p:pic>
       <p:sp>
         <p:nvSpPr>
-          <p:cNvPr id="29" name="TextBox 28"/>
+          <p:cNvPr id="49" name="TextBox 48"/>
           <p:cNvSpPr txBox="1"/>
           <p:nvPr/>
         </p:nvSpPr>

--- a/docs/logos.pptx
+++ b/docs/logos.pptx
@@ -3916,8 +3916,8 @@
         </p:blipFill>
         <p:spPr>
           <a:xfrm>
-            <a:off x="9661916" y="3006153"/>
-            <a:ext cx="2072579" cy="571374"/>
+            <a:off x="10333800" y="2926080"/>
+            <a:ext cx="728810" cy="731520"/>
           </a:xfrm>
           <a:prstGeom prst="rect">
             <a:avLst/>

--- a/docs/logos.pptx
+++ b/docs/logos.pptx
@@ -3916,8 +3916,8 @@
         </p:blipFill>
         <p:spPr>
           <a:xfrm>
-            <a:off x="10333800" y="2926080"/>
-            <a:ext cx="728810" cy="731520"/>
+            <a:off x="9661916" y="3006456"/>
+            <a:ext cx="2072579" cy="570768"/>
           </a:xfrm>
           <a:prstGeom prst="rect">
             <a:avLst/>

--- a/docs/logos.pptx
+++ b/docs/logos.pptx
@@ -4090,8 +4090,8 @@
         </p:blipFill>
         <p:spPr>
           <a:xfrm>
-            <a:off x="5447629" y="4160520"/>
-            <a:ext cx="1296437" cy="731520"/>
+            <a:off x="5594469" y="4160520"/>
+            <a:ext cx="1002757" cy="731520"/>
           </a:xfrm>
           <a:prstGeom prst="rect">
             <a:avLst/>

--- a/docs/logos.pptx
+++ b/docs/logos.pptx
@@ -4090,8 +4090,8 @@
         </p:blipFill>
         <p:spPr>
           <a:xfrm>
-            <a:off x="5594469" y="4160520"/>
-            <a:ext cx="1002757" cy="731520"/>
+            <a:off x="5059558" y="4358233"/>
+            <a:ext cx="2072579" cy="336093"/>
           </a:xfrm>
           <a:prstGeom prst="rect">
             <a:avLst/>

--- a/docs/logos.pptx
+++ b/docs/logos.pptx
@@ -3090,7 +3090,7 @@
       <p:grpSpPr/>
       <p:pic>
         <p:nvPicPr>
-          <p:cNvPr id="2" name="Picture 1" descr="KDDI.png"/>
+          <p:cNvPr id="2" name="Picture 1" descr="JR東日本.png"/>
           <p:cNvPicPr>
             <a:picLocks noChangeAspect="1"/>
           </p:cNvPicPr>
@@ -3104,8 +3104,8 @@
         </p:blipFill>
         <p:spPr>
           <a:xfrm>
-            <a:off x="709718" y="457200"/>
-            <a:ext cx="1567542" cy="731520"/>
+            <a:off x="1174432" y="457200"/>
+            <a:ext cx="638114" cy="378822"/>
           </a:xfrm>
           <a:prstGeom prst="rect">
             <a:avLst/>
@@ -3120,7 +3120,7 @@
         </p:nvSpPr>
         <p:spPr>
           <a:xfrm>
-            <a:off x="457200" y="1188720"/>
+            <a:off x="457200" y="836022"/>
             <a:ext cx="2072579" cy="274320"/>
           </a:xfrm>
           <a:prstGeom prst="rect">
@@ -3141,14 +3141,14 @@
                   <a:srgbClr val="404040"/>
                 </a:solidFill>
               </a:rPr>
-              <a:t>KDDI</a:t>
+              <a:t>JR東日本</a:t>
             </a:r>
           </a:p>
         </p:txBody>
       </p:sp>
       <p:pic>
         <p:nvPicPr>
-          <p:cNvPr id="4" name="Picture 3" descr="NEC.png"/>
+          <p:cNvPr id="4" name="Picture 3" descr="KDDI.png"/>
           <p:cNvPicPr>
             <a:picLocks noChangeAspect="1"/>
           </p:cNvPicPr>
@@ -3162,8 +3162,8 @@
         </p:blipFill>
         <p:spPr>
           <a:xfrm>
-            <a:off x="2758379" y="517336"/>
-            <a:ext cx="2072579" cy="611248"/>
+            <a:off x="3388787" y="457200"/>
+            <a:ext cx="811763" cy="378822"/>
           </a:xfrm>
           <a:prstGeom prst="rect">
             <a:avLst/>
@@ -3178,7 +3178,7 @@
         </p:nvSpPr>
         <p:spPr>
           <a:xfrm>
-            <a:off x="2758379" y="1188720"/>
+            <a:off x="2758379" y="836022"/>
             <a:ext cx="2072579" cy="274320"/>
           </a:xfrm>
           <a:prstGeom prst="rect">
@@ -3199,14 +3199,14 @@
                   <a:srgbClr val="404040"/>
                 </a:solidFill>
               </a:rPr>
-              <a:t>NEC</a:t>
+              <a:t>KDDI</a:t>
             </a:r>
           </a:p>
         </p:txBody>
       </p:sp>
       <p:pic>
         <p:nvPicPr>
-          <p:cNvPr id="6" name="Picture 5" descr="NTTデータ.png"/>
+          <p:cNvPr id="6" name="Picture 5" descr="NEC.png"/>
           <p:cNvPicPr>
             <a:picLocks noChangeAspect="1"/>
           </p:cNvPicPr>
@@ -3220,8 +3220,8 @@
         </p:blipFill>
         <p:spPr>
           <a:xfrm>
-            <a:off x="5059558" y="577092"/>
-            <a:ext cx="2072579" cy="491736"/>
+            <a:off x="5453605" y="457200"/>
+            <a:ext cx="1284485" cy="378822"/>
           </a:xfrm>
           <a:prstGeom prst="rect">
             <a:avLst/>
@@ -3236,7 +3236,7 @@
         </p:nvSpPr>
         <p:spPr>
           <a:xfrm>
-            <a:off x="5059558" y="1188720"/>
+            <a:off x="5059558" y="836022"/>
             <a:ext cx="2072579" cy="274320"/>
           </a:xfrm>
           <a:prstGeom prst="rect">
@@ -3257,14 +3257,14 @@
                   <a:srgbClr val="404040"/>
                 </a:solidFill>
               </a:rPr>
-              <a:t>NTTデータ</a:t>
+              <a:t>NEC</a:t>
             </a:r>
           </a:p>
         </p:txBody>
       </p:sp>
       <p:pic>
         <p:nvPicPr>
-          <p:cNvPr id="8" name="Picture 7" descr="オリンパス.png"/>
+          <p:cNvPr id="8" name="Picture 7" descr="NTTデータ.png"/>
           <p:cNvPicPr>
             <a:picLocks noChangeAspect="1"/>
           </p:cNvPicPr>
@@ -3278,8 +3278,8 @@
         </p:blipFill>
         <p:spPr>
           <a:xfrm>
-            <a:off x="7360737" y="594418"/>
-            <a:ext cx="2072579" cy="457083"/>
+            <a:off x="7598692" y="457200"/>
+            <a:ext cx="1596668" cy="378822"/>
           </a:xfrm>
           <a:prstGeom prst="rect">
             <a:avLst/>
@@ -3294,7 +3294,7 @@
         </p:nvSpPr>
         <p:spPr>
           <a:xfrm>
-            <a:off x="7360737" y="1188720"/>
+            <a:off x="7360737" y="836022"/>
             <a:ext cx="2072579" cy="274320"/>
           </a:xfrm>
           <a:prstGeom prst="rect">
@@ -3315,14 +3315,14 @@
                   <a:srgbClr val="404040"/>
                 </a:solidFill>
               </a:rPr>
-              <a:t>オリンパス</a:t>
+              <a:t>NTTデータ</a:t>
             </a:r>
           </a:p>
         </p:txBody>
       </p:sp>
       <p:pic>
         <p:nvPicPr>
-          <p:cNvPr id="10" name="Picture 9" descr="キーエンス.png"/>
+          <p:cNvPr id="10" name="Picture 9" descr="アサヒグループホールディングス.png"/>
           <p:cNvPicPr>
             <a:picLocks noChangeAspect="1"/>
           </p:cNvPicPr>
@@ -3336,8 +3336,8 @@
         </p:blipFill>
         <p:spPr>
           <a:xfrm>
-            <a:off x="9661916" y="600413"/>
-            <a:ext cx="2072579" cy="445094"/>
+            <a:off x="10431708" y="457200"/>
+            <a:ext cx="532994" cy="378822"/>
           </a:xfrm>
           <a:prstGeom prst="rect">
             <a:avLst/>
@@ -3352,7 +3352,7 @@
         </p:nvSpPr>
         <p:spPr>
           <a:xfrm>
-            <a:off x="9661916" y="1188720"/>
+            <a:off x="9661916" y="836022"/>
             <a:ext cx="2072579" cy="274320"/>
           </a:xfrm>
           <a:prstGeom prst="rect">
@@ -3373,14 +3373,14 @@
                   <a:srgbClr val="404040"/>
                 </a:solidFill>
               </a:rPr>
-              <a:t>キーエンス</a:t>
+              <a:t>アサヒグループホールディングス</a:t>
             </a:r>
           </a:p>
         </p:txBody>
       </p:sp>
       <p:pic>
         <p:nvPicPr>
-          <p:cNvPr id="12" name="Picture 11" descr="コマツ.png"/>
+          <p:cNvPr id="12" name="Picture 11" descr="オリエンタルランド.png"/>
           <p:cNvPicPr>
             <a:picLocks noChangeAspect="1"/>
           </p:cNvPicPr>
@@ -3394,8 +3394,8 @@
         </p:blipFill>
         <p:spPr>
           <a:xfrm>
-            <a:off x="457200" y="1830712"/>
-            <a:ext cx="2072579" cy="453376"/>
+            <a:off x="1131886" y="1338943"/>
+            <a:ext cx="723207" cy="378822"/>
           </a:xfrm>
           <a:prstGeom prst="rect">
             <a:avLst/>
@@ -3410,7 +3410,7 @@
         </p:nvSpPr>
         <p:spPr>
           <a:xfrm>
-            <a:off x="457200" y="2423160"/>
+            <a:off x="457200" y="1717765"/>
             <a:ext cx="2072579" cy="274320"/>
           </a:xfrm>
           <a:prstGeom prst="rect">
@@ -3431,14 +3431,14 @@
                   <a:srgbClr val="404040"/>
                 </a:solidFill>
               </a:rPr>
-              <a:t>コマツ</a:t>
+              <a:t>オリエンタルランド</a:t>
             </a:r>
           </a:p>
         </p:txBody>
       </p:sp>
       <p:pic>
         <p:nvPicPr>
-          <p:cNvPr id="14" name="Picture 13" descr="セブン&amp;アイ・ホールディングス.png"/>
+          <p:cNvPr id="14" name="Picture 13" descr="オリンパス.png"/>
           <p:cNvPicPr>
             <a:picLocks noChangeAspect="1"/>
           </p:cNvPicPr>
@@ -3452,8 +3452,8 @@
         </p:blipFill>
         <p:spPr>
           <a:xfrm>
-            <a:off x="2758379" y="1840998"/>
-            <a:ext cx="2072579" cy="432803"/>
+            <a:off x="2935811" y="1338943"/>
+            <a:ext cx="1717715" cy="378822"/>
           </a:xfrm>
           <a:prstGeom prst="rect">
             <a:avLst/>
@@ -3468,7 +3468,7 @@
         </p:nvSpPr>
         <p:spPr>
           <a:xfrm>
-            <a:off x="2758379" y="2423160"/>
+            <a:off x="2758379" y="1717765"/>
             <a:ext cx="2072579" cy="274320"/>
           </a:xfrm>
           <a:prstGeom prst="rect">
@@ -3489,14 +3489,14 @@
                   <a:srgbClr val="404040"/>
                 </a:solidFill>
               </a:rPr>
-              <a:t>セブン&amp;アイ・ホールディングス</a:t>
+              <a:t>オリンパス</a:t>
             </a:r>
           </a:p>
         </p:txBody>
       </p:sp>
       <p:pic>
         <p:nvPicPr>
-          <p:cNvPr id="16" name="Picture 15" descr="ソニーグループ.png"/>
+          <p:cNvPr id="16" name="Picture 15" descr="キーエンス.png"/>
           <p:cNvPicPr>
             <a:picLocks noChangeAspect="1"/>
           </p:cNvPicPr>
@@ -3510,8 +3510,8 @@
         </p:blipFill>
         <p:spPr>
           <a:xfrm>
-            <a:off x="5059558" y="1840595"/>
-            <a:ext cx="2072579" cy="433610"/>
+            <a:off x="5213855" y="1338943"/>
+            <a:ext cx="1763984" cy="378822"/>
           </a:xfrm>
           <a:prstGeom prst="rect">
             <a:avLst/>
@@ -3526,7 +3526,7 @@
         </p:nvSpPr>
         <p:spPr>
           <a:xfrm>
-            <a:off x="5059558" y="2423160"/>
+            <a:off x="5059558" y="1717765"/>
             <a:ext cx="2072579" cy="274320"/>
           </a:xfrm>
           <a:prstGeom prst="rect">
@@ -3547,14 +3547,14 @@
                   <a:srgbClr val="404040"/>
                 </a:solidFill>
               </a:rPr>
-              <a:t>ソニーグループ</a:t>
+              <a:t>キーエンス</a:t>
             </a:r>
           </a:p>
         </p:txBody>
       </p:sp>
       <p:pic>
         <p:nvPicPr>
-          <p:cNvPr id="18" name="Picture 17" descr="ダイキン工業.png"/>
+          <p:cNvPr id="18" name="Picture 17" descr="コマツ.png"/>
           <p:cNvPicPr>
             <a:picLocks noChangeAspect="1"/>
           </p:cNvPicPr>
@@ -3568,8 +3568,8 @@
         </p:blipFill>
         <p:spPr>
           <a:xfrm>
-            <a:off x="7360737" y="1807806"/>
-            <a:ext cx="2072578" cy="499188"/>
+            <a:off x="7531146" y="1338943"/>
+            <a:ext cx="1731761" cy="378822"/>
           </a:xfrm>
           <a:prstGeom prst="rect">
             <a:avLst/>
@@ -3584,7 +3584,7 @@
         </p:nvSpPr>
         <p:spPr>
           <a:xfrm>
-            <a:off x="7360737" y="2423160"/>
+            <a:off x="7360737" y="1717765"/>
             <a:ext cx="2072579" cy="274320"/>
           </a:xfrm>
           <a:prstGeom prst="rect">
@@ -3605,14 +3605,14 @@
                   <a:srgbClr val="404040"/>
                 </a:solidFill>
               </a:rPr>
-              <a:t>ダイキン工業</a:t>
+              <a:t>コマツ</a:t>
             </a:r>
           </a:p>
         </p:txBody>
       </p:sp>
       <p:pic>
         <p:nvPicPr>
-          <p:cNvPr id="20" name="Picture 19" descr="トヨタ自動車.png"/>
+          <p:cNvPr id="20" name="Picture 19" descr="セコム.png"/>
           <p:cNvPicPr>
             <a:picLocks noChangeAspect="1"/>
           </p:cNvPicPr>
@@ -3626,8 +3626,8 @@
         </p:blipFill>
         <p:spPr>
           <a:xfrm>
-            <a:off x="10171688" y="1691640"/>
-            <a:ext cx="1053034" cy="731520"/>
+            <a:off x="10207791" y="1338943"/>
+            <a:ext cx="980828" cy="378822"/>
           </a:xfrm>
           <a:prstGeom prst="rect">
             <a:avLst/>
@@ -3642,7 +3642,7 @@
         </p:nvSpPr>
         <p:spPr>
           <a:xfrm>
-            <a:off x="9661916" y="2423160"/>
+            <a:off x="9661916" y="1717765"/>
             <a:ext cx="2072579" cy="274320"/>
           </a:xfrm>
           <a:prstGeom prst="rect">
@@ -3663,14 +3663,14 @@
                   <a:srgbClr val="404040"/>
                 </a:solidFill>
               </a:rPr>
-              <a:t>トヨタ自動車</a:t>
+              <a:t>セコム</a:t>
             </a:r>
           </a:p>
         </p:txBody>
       </p:sp>
       <p:pic>
         <p:nvPicPr>
-          <p:cNvPr id="22" name="Picture 21" descr="パナソニック.png"/>
+          <p:cNvPr id="22" name="Picture 21" descr="セブン&amp;アイ・ホールディングス.png"/>
           <p:cNvPicPr>
             <a:picLocks noChangeAspect="1"/>
           </p:cNvPicPr>
@@ -3684,8 +3684,8 @@
         </p:blipFill>
         <p:spPr>
           <a:xfrm>
-            <a:off x="457200" y="3103424"/>
-            <a:ext cx="2072578" cy="376832"/>
+            <a:off x="586449" y="2220686"/>
+            <a:ext cx="1814081" cy="378822"/>
           </a:xfrm>
           <a:prstGeom prst="rect">
             <a:avLst/>
@@ -3700,7 +3700,7 @@
         </p:nvSpPr>
         <p:spPr>
           <a:xfrm>
-            <a:off x="457200" y="3657600"/>
+            <a:off x="457200" y="2599508"/>
             <a:ext cx="2072579" cy="274320"/>
           </a:xfrm>
           <a:prstGeom prst="rect">
@@ -3721,14 +3721,14 @@
                   <a:srgbClr val="404040"/>
                 </a:solidFill>
               </a:rPr>
-              <a:t>パナソニック</a:t>
+              <a:t>セブン&amp;アイ・ホールディングス</a:t>
             </a:r>
           </a:p>
         </p:txBody>
       </p:sp>
       <p:pic>
         <p:nvPicPr>
-          <p:cNvPr id="24" name="Picture 23" descr="ファーストリテイリング.png"/>
+          <p:cNvPr id="24" name="Picture 23" descr="ソニーグループ.png"/>
           <p:cNvPicPr>
             <a:picLocks noChangeAspect="1"/>
           </p:cNvPicPr>
@@ -3742,8 +3742,8 @@
         </p:blipFill>
         <p:spPr>
           <a:xfrm>
-            <a:off x="3068228" y="2926080"/>
-            <a:ext cx="1452880" cy="731520"/>
+            <a:off x="2889317" y="2220686"/>
+            <a:ext cx="1810703" cy="378822"/>
           </a:xfrm>
           <a:prstGeom prst="rect">
             <a:avLst/>
@@ -3758,7 +3758,7 @@
         </p:nvSpPr>
         <p:spPr>
           <a:xfrm>
-            <a:off x="2758379" y="3657600"/>
+            <a:off x="2758379" y="2599508"/>
             <a:ext cx="2072579" cy="274320"/>
           </a:xfrm>
           <a:prstGeom prst="rect">
@@ -3779,14 +3779,14 @@
                   <a:srgbClr val="404040"/>
                 </a:solidFill>
               </a:rPr>
-              <a:t>ファーストリテイリング</a:t>
+              <a:t>ソニーグループ</a:t>
             </a:r>
           </a:p>
         </p:txBody>
       </p:sp>
       <p:pic>
         <p:nvPicPr>
-          <p:cNvPr id="26" name="Picture 25" descr="リクルートホールディングス.png"/>
+          <p:cNvPr id="26" name="Picture 25" descr="ダイキン工業.png"/>
           <p:cNvPicPr>
             <a:picLocks noChangeAspect="1"/>
           </p:cNvPicPr>
@@ -3800,8 +3800,8 @@
         </p:blipFill>
         <p:spPr>
           <a:xfrm>
-            <a:off x="5059558" y="2990399"/>
-            <a:ext cx="2072579" cy="602881"/>
+            <a:off x="5309430" y="2220686"/>
+            <a:ext cx="1572834" cy="378822"/>
           </a:xfrm>
           <a:prstGeom prst="rect">
             <a:avLst/>
@@ -3816,7 +3816,7 @@
         </p:nvSpPr>
         <p:spPr>
           <a:xfrm>
-            <a:off x="5059558" y="3657600"/>
+            <a:off x="5059558" y="2599508"/>
             <a:ext cx="2072579" cy="274320"/>
           </a:xfrm>
           <a:prstGeom prst="rect">
@@ -3837,14 +3837,14 @@
                   <a:srgbClr val="404040"/>
                 </a:solidFill>
               </a:rPr>
-              <a:t>リクルートホールディングス</a:t>
+              <a:t>ダイキン工業</a:t>
             </a:r>
           </a:p>
         </p:txBody>
       </p:sp>
       <p:pic>
         <p:nvPicPr>
-          <p:cNvPr id="28" name="Picture 27" descr="三井住友銀行.png"/>
+          <p:cNvPr id="28" name="Picture 27" descr="トヨタ自動車.png"/>
           <p:cNvPicPr>
             <a:picLocks noChangeAspect="1"/>
           </p:cNvPicPr>
@@ -3858,8 +3858,8 @@
         </p:blipFill>
         <p:spPr>
           <a:xfrm>
-            <a:off x="7360737" y="2980144"/>
-            <a:ext cx="2072579" cy="623392"/>
+            <a:off x="8124366" y="2220686"/>
+            <a:ext cx="545321" cy="378822"/>
           </a:xfrm>
           <a:prstGeom prst="rect">
             <a:avLst/>
@@ -3874,7 +3874,7 @@
         </p:nvSpPr>
         <p:spPr>
           <a:xfrm>
-            <a:off x="7360737" y="3657600"/>
+            <a:off x="7360737" y="2599508"/>
             <a:ext cx="2072579" cy="274320"/>
           </a:xfrm>
           <a:prstGeom prst="rect">
@@ -3895,14 +3895,14 @@
                   <a:srgbClr val="404040"/>
                 </a:solidFill>
               </a:rPr>
-              <a:t>三井住友銀行</a:t>
+              <a:t>トヨタ自動車</a:t>
             </a:r>
           </a:p>
         </p:txBody>
       </p:sp>
       <p:pic>
         <p:nvPicPr>
-          <p:cNvPr id="30" name="Picture 29" descr="任天堂.png"/>
+          <p:cNvPr id="30" name="Picture 29" descr="パナソニック.png"/>
           <p:cNvPicPr>
             <a:picLocks noChangeAspect="1"/>
           </p:cNvPicPr>
@@ -3916,8 +3916,8 @@
         </p:blipFill>
         <p:spPr>
           <a:xfrm>
-            <a:off x="9661916" y="3006456"/>
-            <a:ext cx="2072579" cy="570768"/>
+            <a:off x="9661916" y="2221681"/>
+            <a:ext cx="2072578" cy="376832"/>
           </a:xfrm>
           <a:prstGeom prst="rect">
             <a:avLst/>
@@ -3932,7 +3932,7 @@
         </p:nvSpPr>
         <p:spPr>
           <a:xfrm>
-            <a:off x="9661916" y="3657600"/>
+            <a:off x="9661916" y="2599508"/>
             <a:ext cx="2072579" cy="274320"/>
           </a:xfrm>
           <a:prstGeom prst="rect">
@@ -3953,14 +3953,14 @@
                   <a:srgbClr val="404040"/>
                 </a:solidFill>
               </a:rPr>
-              <a:t>任天堂</a:t>
+              <a:t>パナソニック</a:t>
             </a:r>
           </a:p>
         </p:txBody>
       </p:sp>
       <p:pic>
         <p:nvPicPr>
-          <p:cNvPr id="32" name="Picture 31" descr="伊藤忠商事.png"/>
+          <p:cNvPr id="32" name="Picture 31" descr="ファーストリテイリング.png"/>
           <p:cNvPicPr>
             <a:picLocks noChangeAspect="1"/>
           </p:cNvPicPr>
@@ -3974,8 +3974,8 @@
         </p:blipFill>
         <p:spPr>
           <a:xfrm>
-            <a:off x="649629" y="4160520"/>
-            <a:ext cx="1687721" cy="731520"/>
+            <a:off x="1117297" y="3102429"/>
+            <a:ext cx="752384" cy="378822"/>
           </a:xfrm>
           <a:prstGeom prst="rect">
             <a:avLst/>
@@ -3990,7 +3990,7 @@
         </p:nvSpPr>
         <p:spPr>
           <a:xfrm>
-            <a:off x="457200" y="4892040"/>
+            <a:off x="457200" y="3481251"/>
             <a:ext cx="2072579" cy="274320"/>
           </a:xfrm>
           <a:prstGeom prst="rect">
@@ -4011,14 +4011,14 @@
                   <a:srgbClr val="404040"/>
                 </a:solidFill>
               </a:rPr>
-              <a:t>伊藤忠商事</a:t>
+              <a:t>ファーストリテイリング</a:t>
             </a:r>
           </a:p>
         </p:txBody>
       </p:sp>
       <p:pic>
         <p:nvPicPr>
-          <p:cNvPr id="34" name="Picture 33" descr="信越化学工業.png"/>
+          <p:cNvPr id="34" name="Picture 33" descr="ホンダ.png"/>
           <p:cNvPicPr>
             <a:picLocks noChangeAspect="1"/>
           </p:cNvPicPr>
@@ -4032,8 +4032,8 @@
         </p:blipFill>
         <p:spPr>
           <a:xfrm>
-            <a:off x="3104311" y="4160520"/>
-            <a:ext cx="1380714" cy="731520"/>
+            <a:off x="2758379" y="3125805"/>
+            <a:ext cx="2072578" cy="332070"/>
           </a:xfrm>
           <a:prstGeom prst="rect">
             <a:avLst/>
@@ -4048,7 +4048,7 @@
         </p:nvSpPr>
         <p:spPr>
           <a:xfrm>
-            <a:off x="2758379" y="4892040"/>
+            <a:off x="2758379" y="3481251"/>
             <a:ext cx="2072579" cy="274320"/>
           </a:xfrm>
           <a:prstGeom prst="rect">
@@ -4069,14 +4069,14 @@
                   <a:srgbClr val="404040"/>
                 </a:solidFill>
               </a:rPr>
-              <a:t>信越化学工業</a:t>
+              <a:t>ホンダ</a:t>
             </a:r>
           </a:p>
         </p:txBody>
       </p:sp>
       <p:pic>
         <p:nvPicPr>
-          <p:cNvPr id="36" name="Picture 35" descr="味の素.png"/>
+          <p:cNvPr id="36" name="Picture 35" descr="リクルートホールディングス.png"/>
           <p:cNvPicPr>
             <a:picLocks noChangeAspect="1"/>
           </p:cNvPicPr>
@@ -4090,8 +4090,8 @@
         </p:blipFill>
         <p:spPr>
           <a:xfrm>
-            <a:off x="5059558" y="4358233"/>
-            <a:ext cx="2072579" cy="336093"/>
+            <a:off x="5444691" y="3102429"/>
+            <a:ext cx="1302312" cy="378822"/>
           </a:xfrm>
           <a:prstGeom prst="rect">
             <a:avLst/>
@@ -4106,7 +4106,7 @@
         </p:nvSpPr>
         <p:spPr>
           <a:xfrm>
-            <a:off x="5059558" y="4892040"/>
+            <a:off x="5059558" y="3481251"/>
             <a:ext cx="2072579" cy="274320"/>
           </a:xfrm>
           <a:prstGeom prst="rect">
@@ -4127,14 +4127,14 @@
                   <a:srgbClr val="404040"/>
                 </a:solidFill>
               </a:rPr>
-              <a:t>味の素</a:t>
+              <a:t>リクルートホールディングス</a:t>
             </a:r>
           </a:p>
         </p:txBody>
       </p:sp>
       <p:pic>
         <p:nvPicPr>
-          <p:cNvPr id="38" name="Picture 37" descr="富士通.png"/>
+          <p:cNvPr id="38" name="Picture 37" descr="三井住友銀行.png"/>
           <p:cNvPicPr>
             <a:picLocks noChangeAspect="1"/>
           </p:cNvPicPr>
@@ -4148,8 +4148,8 @@
         </p:blipFill>
         <p:spPr>
           <a:xfrm>
-            <a:off x="7675373" y="4160520"/>
-            <a:ext cx="1443307" cy="731520"/>
+            <a:off x="7767295" y="3102429"/>
+            <a:ext cx="1259463" cy="378822"/>
           </a:xfrm>
           <a:prstGeom prst="rect">
             <a:avLst/>
@@ -4164,7 +4164,7 @@
         </p:nvSpPr>
         <p:spPr>
           <a:xfrm>
-            <a:off x="7360737" y="4892040"/>
+            <a:off x="7360737" y="3481251"/>
             <a:ext cx="2072579" cy="274320"/>
           </a:xfrm>
           <a:prstGeom prst="rect">
@@ -4185,14 +4185,14 @@
                   <a:srgbClr val="404040"/>
                 </a:solidFill>
               </a:rPr>
-              <a:t>富士通</a:t>
+              <a:t>三井住友銀行</a:t>
             </a:r>
           </a:p>
         </p:txBody>
       </p:sp>
       <p:pic>
         <p:nvPicPr>
-          <p:cNvPr id="40" name="Picture 39" descr="日本郵政.png"/>
+          <p:cNvPr id="40" name="Picture 39" descr="三菱電機.png"/>
           <p:cNvPicPr>
             <a:picLocks noChangeAspect="1"/>
           </p:cNvPicPr>
@@ -4206,8 +4206,8 @@
         </p:blipFill>
         <p:spPr>
           <a:xfrm>
-            <a:off x="10182816" y="4160520"/>
-            <a:ext cx="1030778" cy="731520"/>
+            <a:off x="10115401" y="3102429"/>
+            <a:ext cx="1165608" cy="378822"/>
           </a:xfrm>
           <a:prstGeom prst="rect">
             <a:avLst/>
@@ -4222,7 +4222,7 @@
         </p:nvSpPr>
         <p:spPr>
           <a:xfrm>
-            <a:off x="9661916" y="4892040"/>
+            <a:off x="9661916" y="3481251"/>
             <a:ext cx="2072579" cy="274320"/>
           </a:xfrm>
           <a:prstGeom prst="rect">
@@ -4243,14 +4243,14 @@
                   <a:srgbClr val="404040"/>
                 </a:solidFill>
               </a:rPr>
-              <a:t>日本郵政</a:t>
+              <a:t>三菱電機</a:t>
             </a:r>
           </a:p>
         </p:txBody>
       </p:sp>
       <p:pic>
         <p:nvPicPr>
-          <p:cNvPr id="42" name="Picture 41" descr="村田製作所.png"/>
+          <p:cNvPr id="42" name="Picture 41" descr="任天堂.png"/>
           <p:cNvPicPr>
             <a:picLocks noChangeAspect="1"/>
           </p:cNvPicPr>
@@ -4264,8 +4264,8 @@
         </p:blipFill>
         <p:spPr>
           <a:xfrm>
-            <a:off x="513889" y="5394960"/>
-            <a:ext cx="1959201" cy="731520"/>
+            <a:off x="805698" y="3984171"/>
+            <a:ext cx="1375583" cy="378822"/>
           </a:xfrm>
           <a:prstGeom prst="rect">
             <a:avLst/>
@@ -4280,7 +4280,7 @@
         </p:nvSpPr>
         <p:spPr>
           <a:xfrm>
-            <a:off x="457200" y="6126480"/>
+            <a:off x="457200" y="4362994"/>
             <a:ext cx="2072579" cy="274320"/>
           </a:xfrm>
           <a:prstGeom prst="rect">
@@ -4301,14 +4301,14 @@
                   <a:srgbClr val="404040"/>
                 </a:solidFill>
               </a:rPr>
-              <a:t>村田製作所</a:t>
+              <a:t>任天堂</a:t>
             </a:r>
           </a:p>
         </p:txBody>
       </p:sp>
       <p:pic>
         <p:nvPicPr>
-          <p:cNvPr id="44" name="Picture 43" descr="東京ガス.png"/>
+          <p:cNvPr id="44" name="Picture 43" descr="伊藤忠商事.png"/>
           <p:cNvPicPr>
             <a:picLocks noChangeAspect="1"/>
           </p:cNvPicPr>
@@ -4322,8 +4322,8 @@
         </p:blipFill>
         <p:spPr>
           <a:xfrm>
-            <a:off x="3240081" y="5394960"/>
-            <a:ext cx="1109174" cy="731520"/>
+            <a:off x="3357669" y="3984171"/>
+            <a:ext cx="873998" cy="378822"/>
           </a:xfrm>
           <a:prstGeom prst="rect">
             <a:avLst/>
@@ -4338,7 +4338,7 @@
         </p:nvSpPr>
         <p:spPr>
           <a:xfrm>
-            <a:off x="2758379" y="6126480"/>
+            <a:off x="2758379" y="4362994"/>
             <a:ext cx="2072579" cy="274320"/>
           </a:xfrm>
           <a:prstGeom prst="rect">
@@ -4359,14 +4359,14 @@
                   <a:srgbClr val="404040"/>
                 </a:solidFill>
               </a:rPr>
-              <a:t>東京ガス</a:t>
+              <a:t>伊藤忠商事</a:t>
             </a:r>
           </a:p>
         </p:txBody>
       </p:sp>
       <p:pic>
         <p:nvPicPr>
-          <p:cNvPr id="46" name="Picture 45" descr="楽天グループ.png"/>
+          <p:cNvPr id="46" name="Picture 45" descr="信越化学工業.png"/>
           <p:cNvPicPr>
             <a:picLocks noChangeAspect="1"/>
           </p:cNvPicPr>
@@ -4380,8 +4380,8 @@
         </p:blipFill>
         <p:spPr>
           <a:xfrm>
-            <a:off x="5059558" y="5420268"/>
-            <a:ext cx="2072579" cy="680904"/>
+            <a:off x="5738341" y="3984171"/>
+            <a:ext cx="715012" cy="378822"/>
           </a:xfrm>
           <a:prstGeom prst="rect">
             <a:avLst/>
@@ -4396,7 +4396,7 @@
         </p:nvSpPr>
         <p:spPr>
           <a:xfrm>
-            <a:off x="5059558" y="6126480"/>
+            <a:off x="5059558" y="4362994"/>
             <a:ext cx="2072579" cy="274320"/>
           </a:xfrm>
           <a:prstGeom prst="rect">
@@ -4417,14 +4417,14 @@
                   <a:srgbClr val="404040"/>
                 </a:solidFill>
               </a:rPr>
-              <a:t>楽天グループ</a:t>
+              <a:t>信越化学工業</a:t>
             </a:r>
           </a:p>
         </p:txBody>
       </p:sp>
       <p:pic>
         <p:nvPicPr>
-          <p:cNvPr id="48" name="Picture 47" descr="資生堂.png"/>
+          <p:cNvPr id="48" name="Picture 47" descr="味の素.png"/>
           <p:cNvPicPr>
             <a:picLocks noChangeAspect="1"/>
           </p:cNvPicPr>
@@ -4438,8 +4438,8 @@
         </p:blipFill>
         <p:spPr>
           <a:xfrm>
-            <a:off x="7360737" y="5553260"/>
-            <a:ext cx="2072579" cy="414920"/>
+            <a:off x="7360737" y="4005536"/>
+            <a:ext cx="2072579" cy="336093"/>
           </a:xfrm>
           <a:prstGeom prst="rect">
             <a:avLst/>
@@ -4454,7 +4454,7 @@
         </p:nvSpPr>
         <p:spPr>
           <a:xfrm>
-            <a:off x="7360737" y="6126480"/>
+            <a:off x="7360737" y="4362994"/>
             <a:ext cx="2072579" cy="274320"/>
           </a:xfrm>
           <a:prstGeom prst="rect">
@@ -4475,7 +4475,587 @@
                   <a:srgbClr val="404040"/>
                 </a:solidFill>
               </a:rPr>
+              <a:t>味の素</a:t>
+            </a:r>
+          </a:p>
+        </p:txBody>
+      </p:sp>
+      <p:pic>
+        <p:nvPicPr>
+          <p:cNvPr id="50" name="Picture 49" descr="大和ハウス工業.png"/>
+          <p:cNvPicPr>
+            <a:picLocks noChangeAspect="1"/>
+          </p:cNvPicPr>
+          <p:nvPr/>
+        </p:nvPicPr>
+        <p:blipFill>
+          <a:blip r:embed="rId26"/>
+          <a:stretch>
+            <a:fillRect/>
+          </a:stretch>
+        </p:blipFill>
+        <p:spPr>
+          <a:xfrm>
+            <a:off x="10460804" y="3984171"/>
+            <a:ext cx="474803" cy="378822"/>
+          </a:xfrm>
+          <a:prstGeom prst="rect">
+            <a:avLst/>
+          </a:prstGeom>
+        </p:spPr>
+      </p:pic>
+      <p:sp>
+        <p:nvSpPr>
+          <p:cNvPr id="51" name="TextBox 50"/>
+          <p:cNvSpPr txBox="1"/>
+          <p:nvPr/>
+        </p:nvSpPr>
+        <p:spPr>
+          <a:xfrm>
+            <a:off x="9661916" y="4362994"/>
+            <a:ext cx="2072579" cy="274320"/>
+          </a:xfrm>
+          <a:prstGeom prst="rect">
+            <a:avLst/>
+          </a:prstGeom>
+          <a:noFill/>
+        </p:spPr>
+        <p:txBody>
+          <a:bodyPr wrap="square">
+            <a:spAutoFit/>
+          </a:bodyPr>
+          <a:lstStyle/>
+          <a:p>
+            <a:pPr algn="ctr"/>
+            <a:r>
+              <a:rPr sz="1000">
+                <a:solidFill>
+                  <a:srgbClr val="404040"/>
+                </a:solidFill>
+              </a:rPr>
+              <a:t>大和ハウス工業</a:t>
+            </a:r>
+          </a:p>
+        </p:txBody>
+      </p:sp>
+      <p:pic>
+        <p:nvPicPr>
+          <p:cNvPr id="52" name="Picture 51" descr="富士通.png"/>
+          <p:cNvPicPr>
+            <a:picLocks noChangeAspect="1"/>
+          </p:cNvPicPr>
+          <p:nvPr/>
+        </p:nvPicPr>
+        <p:blipFill>
+          <a:blip r:embed="rId27"/>
+          <a:stretch>
+            <a:fillRect/>
+          </a:stretch>
+        </p:blipFill>
+        <p:spPr>
+          <a:xfrm>
+            <a:off x="1119776" y="4865914"/>
+            <a:ext cx="747426" cy="378822"/>
+          </a:xfrm>
+          <a:prstGeom prst="rect">
+            <a:avLst/>
+          </a:prstGeom>
+        </p:spPr>
+      </p:pic>
+      <p:sp>
+        <p:nvSpPr>
+          <p:cNvPr id="53" name="TextBox 52"/>
+          <p:cNvSpPr txBox="1"/>
+          <p:nvPr/>
+        </p:nvSpPr>
+        <p:spPr>
+          <a:xfrm>
+            <a:off x="457200" y="5244737"/>
+            <a:ext cx="2072579" cy="274320"/>
+          </a:xfrm>
+          <a:prstGeom prst="rect">
+            <a:avLst/>
+          </a:prstGeom>
+          <a:noFill/>
+        </p:spPr>
+        <p:txBody>
+          <a:bodyPr wrap="square">
+            <a:spAutoFit/>
+          </a:bodyPr>
+          <a:lstStyle/>
+          <a:p>
+            <a:pPr algn="ctr"/>
+            <a:r>
+              <a:rPr sz="1000">
+                <a:solidFill>
+                  <a:srgbClr val="404040"/>
+                </a:solidFill>
+              </a:rPr>
+              <a:t>富士通</a:t>
+            </a:r>
+          </a:p>
+        </p:txBody>
+      </p:sp>
+      <p:pic>
+        <p:nvPicPr>
+          <p:cNvPr id="54" name="Picture 53" descr="日本郵政.png"/>
+          <p:cNvPicPr>
+            <a:picLocks noChangeAspect="1"/>
+          </p:cNvPicPr>
+          <p:nvPr/>
+        </p:nvPicPr>
+        <p:blipFill>
+          <a:blip r:embed="rId28"/>
+          <a:stretch>
+            <a:fillRect/>
+          </a:stretch>
+        </p:blipFill>
+        <p:spPr>
+          <a:xfrm>
+            <a:off x="3527771" y="4865914"/>
+            <a:ext cx="533795" cy="378822"/>
+          </a:xfrm>
+          <a:prstGeom prst="rect">
+            <a:avLst/>
+          </a:prstGeom>
+        </p:spPr>
+      </p:pic>
+      <p:sp>
+        <p:nvSpPr>
+          <p:cNvPr id="55" name="TextBox 54"/>
+          <p:cNvSpPr txBox="1"/>
+          <p:nvPr/>
+        </p:nvSpPr>
+        <p:spPr>
+          <a:xfrm>
+            <a:off x="2758379" y="5244737"/>
+            <a:ext cx="2072579" cy="274320"/>
+          </a:xfrm>
+          <a:prstGeom prst="rect">
+            <a:avLst/>
+          </a:prstGeom>
+          <a:noFill/>
+        </p:spPr>
+        <p:txBody>
+          <a:bodyPr wrap="square">
+            <a:spAutoFit/>
+          </a:bodyPr>
+          <a:lstStyle/>
+          <a:p>
+            <a:pPr algn="ctr"/>
+            <a:r>
+              <a:rPr sz="1000">
+                <a:solidFill>
+                  <a:srgbClr val="404040"/>
+                </a:solidFill>
+              </a:rPr>
+              <a:t>日本郵政</a:t>
+            </a:r>
+          </a:p>
+        </p:txBody>
+      </p:sp>
+      <p:pic>
+        <p:nvPicPr>
+          <p:cNvPr id="56" name="Picture 55" descr="日立製作所.png"/>
+          <p:cNvPicPr>
+            <a:picLocks noChangeAspect="1"/>
+          </p:cNvPicPr>
+          <p:nvPr/>
+        </p:nvPicPr>
+        <p:blipFill>
+          <a:blip r:embed="rId29"/>
+          <a:stretch>
+            <a:fillRect/>
+          </a:stretch>
+        </p:blipFill>
+        <p:spPr>
+          <a:xfrm>
+            <a:off x="5104703" y="4865914"/>
+            <a:ext cx="1982288" cy="378822"/>
+          </a:xfrm>
+          <a:prstGeom prst="rect">
+            <a:avLst/>
+          </a:prstGeom>
+        </p:spPr>
+      </p:pic>
+      <p:sp>
+        <p:nvSpPr>
+          <p:cNvPr id="57" name="TextBox 56"/>
+          <p:cNvSpPr txBox="1"/>
+          <p:nvPr/>
+        </p:nvSpPr>
+        <p:spPr>
+          <a:xfrm>
+            <a:off x="5059558" y="5244737"/>
+            <a:ext cx="2072579" cy="274320"/>
+          </a:xfrm>
+          <a:prstGeom prst="rect">
+            <a:avLst/>
+          </a:prstGeom>
+          <a:noFill/>
+        </p:spPr>
+        <p:txBody>
+          <a:bodyPr wrap="square">
+            <a:spAutoFit/>
+          </a:bodyPr>
+          <a:lstStyle/>
+          <a:p>
+            <a:pPr algn="ctr"/>
+            <a:r>
+              <a:rPr sz="1000">
+                <a:solidFill>
+                  <a:srgbClr val="404040"/>
+                </a:solidFill>
+              </a:rPr>
+              <a:t>日立製作所</a:t>
+            </a:r>
+          </a:p>
+        </p:txBody>
+      </p:sp>
+      <p:pic>
+        <p:nvPicPr>
+          <p:cNvPr id="58" name="Picture 57" descr="村田製作所.png"/>
+          <p:cNvPicPr>
+            <a:picLocks noChangeAspect="1"/>
+          </p:cNvPicPr>
+          <p:nvPr/>
+        </p:nvPicPr>
+        <p:blipFill>
+          <a:blip r:embed="rId30"/>
+          <a:stretch>
+            <a:fillRect/>
+          </a:stretch>
+        </p:blipFill>
+        <p:spPr>
+          <a:xfrm>
+            <a:off x="7889733" y="4865914"/>
+            <a:ext cx="1014586" cy="378822"/>
+          </a:xfrm>
+          <a:prstGeom prst="rect">
+            <a:avLst/>
+          </a:prstGeom>
+        </p:spPr>
+      </p:pic>
+      <p:sp>
+        <p:nvSpPr>
+          <p:cNvPr id="59" name="TextBox 58"/>
+          <p:cNvSpPr txBox="1"/>
+          <p:nvPr/>
+        </p:nvSpPr>
+        <p:spPr>
+          <a:xfrm>
+            <a:off x="7360737" y="5244737"/>
+            <a:ext cx="2072579" cy="274320"/>
+          </a:xfrm>
+          <a:prstGeom prst="rect">
+            <a:avLst/>
+          </a:prstGeom>
+          <a:noFill/>
+        </p:spPr>
+        <p:txBody>
+          <a:bodyPr wrap="square">
+            <a:spAutoFit/>
+          </a:bodyPr>
+          <a:lstStyle/>
+          <a:p>
+            <a:pPr algn="ctr"/>
+            <a:r>
+              <a:rPr sz="1000">
+                <a:solidFill>
+                  <a:srgbClr val="404040"/>
+                </a:solidFill>
+              </a:rPr>
+              <a:t>村田製作所</a:t>
+            </a:r>
+          </a:p>
+        </p:txBody>
+      </p:sp>
+      <p:pic>
+        <p:nvPicPr>
+          <p:cNvPr id="60" name="Picture 59" descr="東京ガス.png"/>
+          <p:cNvPicPr>
+            <a:picLocks noChangeAspect="1"/>
+          </p:cNvPicPr>
+          <p:nvPr/>
+        </p:nvPicPr>
+        <p:blipFill>
+          <a:blip r:embed="rId31"/>
+          <a:stretch>
+            <a:fillRect/>
+          </a:stretch>
+        </p:blipFill>
+        <p:spPr>
+          <a:xfrm>
+            <a:off x="10411008" y="4865914"/>
+            <a:ext cx="574394" cy="378822"/>
+          </a:xfrm>
+          <a:prstGeom prst="rect">
+            <a:avLst/>
+          </a:prstGeom>
+        </p:spPr>
+      </p:pic>
+      <p:sp>
+        <p:nvSpPr>
+          <p:cNvPr id="61" name="TextBox 60"/>
+          <p:cNvSpPr txBox="1"/>
+          <p:nvPr/>
+        </p:nvSpPr>
+        <p:spPr>
+          <a:xfrm>
+            <a:off x="9661916" y="5244737"/>
+            <a:ext cx="2072579" cy="274320"/>
+          </a:xfrm>
+          <a:prstGeom prst="rect">
+            <a:avLst/>
+          </a:prstGeom>
+          <a:noFill/>
+        </p:spPr>
+        <p:txBody>
+          <a:bodyPr wrap="square">
+            <a:spAutoFit/>
+          </a:bodyPr>
+          <a:lstStyle/>
+          <a:p>
+            <a:pPr algn="ctr"/>
+            <a:r>
+              <a:rPr sz="1000">
+                <a:solidFill>
+                  <a:srgbClr val="404040"/>
+                </a:solidFill>
+              </a:rPr>
+              <a:t>東京ガス</a:t>
+            </a:r>
+          </a:p>
+        </p:txBody>
+      </p:sp>
+      <p:pic>
+        <p:nvPicPr>
+          <p:cNvPr id="62" name="Picture 61" descr="楽天グループ.png"/>
+          <p:cNvPicPr>
+            <a:picLocks noChangeAspect="1"/>
+          </p:cNvPicPr>
+          <p:nvPr/>
+        </p:nvPicPr>
+        <p:blipFill>
+          <a:blip r:embed="rId32"/>
+          <a:stretch>
+            <a:fillRect/>
+          </a:stretch>
+        </p:blipFill>
+        <p:spPr>
+          <a:xfrm>
+            <a:off x="916948" y="5747657"/>
+            <a:ext cx="1153083" cy="378822"/>
+          </a:xfrm>
+          <a:prstGeom prst="rect">
+            <a:avLst/>
+          </a:prstGeom>
+        </p:spPr>
+      </p:pic>
+      <p:sp>
+        <p:nvSpPr>
+          <p:cNvPr id="63" name="TextBox 62"/>
+          <p:cNvSpPr txBox="1"/>
+          <p:nvPr/>
+        </p:nvSpPr>
+        <p:spPr>
+          <a:xfrm>
+            <a:off x="457200" y="6126480"/>
+            <a:ext cx="2072579" cy="274320"/>
+          </a:xfrm>
+          <a:prstGeom prst="rect">
+            <a:avLst/>
+          </a:prstGeom>
+          <a:noFill/>
+        </p:spPr>
+        <p:txBody>
+          <a:bodyPr wrap="square">
+            <a:spAutoFit/>
+          </a:bodyPr>
+          <a:lstStyle/>
+          <a:p>
+            <a:pPr algn="ctr"/>
+            <a:r>
+              <a:rPr sz="1000">
+                <a:solidFill>
+                  <a:srgbClr val="404040"/>
+                </a:solidFill>
+              </a:rPr>
+              <a:t>楽天グループ</a:t>
+            </a:r>
+          </a:p>
+        </p:txBody>
+      </p:sp>
+      <p:pic>
+        <p:nvPicPr>
+          <p:cNvPr id="64" name="Picture 63" descr="花王.png"/>
+          <p:cNvPicPr>
+            <a:picLocks noChangeAspect="1"/>
+          </p:cNvPicPr>
+          <p:nvPr/>
+        </p:nvPicPr>
+        <p:blipFill>
+          <a:blip r:embed="rId33"/>
+          <a:stretch>
+            <a:fillRect/>
+          </a:stretch>
+        </p:blipFill>
+        <p:spPr>
+          <a:xfrm>
+            <a:off x="3460706" y="5747657"/>
+            <a:ext cx="667924" cy="378822"/>
+          </a:xfrm>
+          <a:prstGeom prst="rect">
+            <a:avLst/>
+          </a:prstGeom>
+        </p:spPr>
+      </p:pic>
+      <p:sp>
+        <p:nvSpPr>
+          <p:cNvPr id="65" name="TextBox 64"/>
+          <p:cNvSpPr txBox="1"/>
+          <p:nvPr/>
+        </p:nvSpPr>
+        <p:spPr>
+          <a:xfrm>
+            <a:off x="2758379" y="6126480"/>
+            <a:ext cx="2072579" cy="274320"/>
+          </a:xfrm>
+          <a:prstGeom prst="rect">
+            <a:avLst/>
+          </a:prstGeom>
+          <a:noFill/>
+        </p:spPr>
+        <p:txBody>
+          <a:bodyPr wrap="square">
+            <a:spAutoFit/>
+          </a:bodyPr>
+          <a:lstStyle/>
+          <a:p>
+            <a:pPr algn="ctr"/>
+            <a:r>
+              <a:rPr sz="1000">
+                <a:solidFill>
+                  <a:srgbClr val="404040"/>
+                </a:solidFill>
+              </a:rPr>
+              <a:t>花王</a:t>
+            </a:r>
+          </a:p>
+        </p:txBody>
+      </p:sp>
+      <p:pic>
+        <p:nvPicPr>
+          <p:cNvPr id="66" name="Picture 65" descr="資生堂.png"/>
+          <p:cNvPicPr>
+            <a:picLocks noChangeAspect="1"/>
+          </p:cNvPicPr>
+          <p:nvPr/>
+        </p:nvPicPr>
+        <p:blipFill>
+          <a:blip r:embed="rId34"/>
+          <a:stretch>
+            <a:fillRect/>
+          </a:stretch>
+        </p:blipFill>
+        <p:spPr>
+          <a:xfrm>
+            <a:off x="5149714" y="5747657"/>
+            <a:ext cx="1892266" cy="378822"/>
+          </a:xfrm>
+          <a:prstGeom prst="rect">
+            <a:avLst/>
+          </a:prstGeom>
+        </p:spPr>
+      </p:pic>
+      <p:sp>
+        <p:nvSpPr>
+          <p:cNvPr id="67" name="TextBox 66"/>
+          <p:cNvSpPr txBox="1"/>
+          <p:nvPr/>
+        </p:nvSpPr>
+        <p:spPr>
+          <a:xfrm>
+            <a:off x="5059558" y="6126480"/>
+            <a:ext cx="2072579" cy="274320"/>
+          </a:xfrm>
+          <a:prstGeom prst="rect">
+            <a:avLst/>
+          </a:prstGeom>
+          <a:noFill/>
+        </p:spPr>
+        <p:txBody>
+          <a:bodyPr wrap="square">
+            <a:spAutoFit/>
+          </a:bodyPr>
+          <a:lstStyle/>
+          <a:p>
+            <a:pPr algn="ctr"/>
+            <a:r>
+              <a:rPr sz="1000">
+                <a:solidFill>
+                  <a:srgbClr val="404040"/>
+                </a:solidFill>
+              </a:rPr>
               <a:t>資生堂</a:t>
+            </a:r>
+          </a:p>
+        </p:txBody>
+      </p:sp>
+      <p:pic>
+        <p:nvPicPr>
+          <p:cNvPr id="68" name="Picture 67" descr="野村ホールディングス.png"/>
+          <p:cNvPicPr>
+            <a:picLocks noChangeAspect="1"/>
+          </p:cNvPicPr>
+          <p:nvPr/>
+        </p:nvPicPr>
+        <p:blipFill>
+          <a:blip r:embed="rId35"/>
+          <a:stretch>
+            <a:fillRect/>
+          </a:stretch>
+        </p:blipFill>
+        <p:spPr>
+          <a:xfrm>
+            <a:off x="7486429" y="5747657"/>
+            <a:ext cx="1821195" cy="378822"/>
+          </a:xfrm>
+          <a:prstGeom prst="rect">
+            <a:avLst/>
+          </a:prstGeom>
+        </p:spPr>
+      </p:pic>
+      <p:sp>
+        <p:nvSpPr>
+          <p:cNvPr id="69" name="TextBox 68"/>
+          <p:cNvSpPr txBox="1"/>
+          <p:nvPr/>
+        </p:nvSpPr>
+        <p:spPr>
+          <a:xfrm>
+            <a:off x="7360737" y="6126480"/>
+            <a:ext cx="2072579" cy="274320"/>
+          </a:xfrm>
+          <a:prstGeom prst="rect">
+            <a:avLst/>
+          </a:prstGeom>
+          <a:noFill/>
+        </p:spPr>
+        <p:txBody>
+          <a:bodyPr wrap="square">
+            <a:spAutoFit/>
+          </a:bodyPr>
+          <a:lstStyle/>
+          <a:p>
+            <a:pPr algn="ctr"/>
+            <a:r>
+              <a:rPr sz="1000">
+                <a:solidFill>
+                  <a:srgbClr val="404040"/>
+                </a:solidFill>
+              </a:rPr>
+              <a:t>野村ホールディングス</a:t>
             </a:r>
           </a:p>
         </p:txBody>

--- a/docs/logos.pptx
+++ b/docs/logos.pptx
@@ -4612,8 +4612,8 @@
         </p:blipFill>
         <p:spPr>
           <a:xfrm>
-            <a:off x="3527771" y="4865914"/>
-            <a:ext cx="533795" cy="378822"/>
+            <a:off x="2976411" y="4865914"/>
+            <a:ext cx="1636514" cy="378822"/>
           </a:xfrm>
           <a:prstGeom prst="rect">
             <a:avLst/>

--- a/docs/logos.pptx
+++ b/docs/logos.pptx
@@ -4612,8 +4612,8 @@
         </p:blipFill>
         <p:spPr>
           <a:xfrm>
-            <a:off x="2976411" y="4865914"/>
-            <a:ext cx="1636514" cy="378822"/>
+            <a:off x="3616949" y="4865914"/>
+            <a:ext cx="355438" cy="378822"/>
           </a:xfrm>
           <a:prstGeom prst="rect">
             <a:avLst/>

--- a/docs/logos.pptx
+++ b/docs/logos.pptx
@@ -3684,8 +3684,8 @@
         </p:blipFill>
         <p:spPr>
           <a:xfrm>
-            <a:off x="586449" y="2220686"/>
-            <a:ext cx="1814081" cy="378822"/>
+            <a:off x="1283964" y="2220686"/>
+            <a:ext cx="419051" cy="378822"/>
           </a:xfrm>
           <a:prstGeom prst="rect">
             <a:avLst/>
@@ -4786,8 +4786,8 @@
         </p:blipFill>
         <p:spPr>
           <a:xfrm>
-            <a:off x="10411008" y="4865914"/>
-            <a:ext cx="574394" cy="378822"/>
+            <a:off x="9790609" y="4865914"/>
+            <a:ext cx="1815192" cy="378822"/>
           </a:xfrm>
           <a:prstGeom prst="rect">
             <a:avLst/>

--- a/docs/logos.pptx
+++ b/docs/logos.pptx
@@ -3322,7 +3322,7 @@
       </p:sp>
       <p:pic>
         <p:nvPicPr>
-          <p:cNvPr id="10" name="Picture 9" descr="アサヒグループホールディングス.png"/>
+          <p:cNvPr id="10" name="Picture 9" descr="SyncMe.png"/>
           <p:cNvPicPr>
             <a:picLocks noChangeAspect="1"/>
           </p:cNvPicPr>
@@ -3336,8 +3336,8 @@
         </p:blipFill>
         <p:spPr>
           <a:xfrm>
-            <a:off x="10431708" y="457200"/>
-            <a:ext cx="532994" cy="378822"/>
+            <a:off x="9914939" y="457200"/>
+            <a:ext cx="1566533" cy="378822"/>
           </a:xfrm>
           <a:prstGeom prst="rect">
             <a:avLst/>
@@ -3373,14 +3373,14 @@
                   <a:srgbClr val="404040"/>
                 </a:solidFill>
               </a:rPr>
-              <a:t>アサヒグループホールディングス</a:t>
+              <a:t>SyncMe</a:t>
             </a:r>
           </a:p>
         </p:txBody>
       </p:sp>
       <p:pic>
         <p:nvPicPr>
-          <p:cNvPr id="12" name="Picture 11" descr="オリエンタルランド.png"/>
+          <p:cNvPr id="12" name="Picture 11" descr="アサヒグループホールディングス.png"/>
           <p:cNvPicPr>
             <a:picLocks noChangeAspect="1"/>
           </p:cNvPicPr>
@@ -3394,8 +3394,8 @@
         </p:blipFill>
         <p:spPr>
           <a:xfrm>
-            <a:off x="1131886" y="1338943"/>
-            <a:ext cx="723207" cy="378822"/>
+            <a:off x="1226992" y="1338943"/>
+            <a:ext cx="532994" cy="378822"/>
           </a:xfrm>
           <a:prstGeom prst="rect">
             <a:avLst/>
@@ -3431,14 +3431,14 @@
                   <a:srgbClr val="404040"/>
                 </a:solidFill>
               </a:rPr>
-              <a:t>オリエンタルランド</a:t>
+              <a:t>アサヒグループホールディングス</a:t>
             </a:r>
           </a:p>
         </p:txBody>
       </p:sp>
       <p:pic>
         <p:nvPicPr>
-          <p:cNvPr id="14" name="Picture 13" descr="オリンパス.png"/>
+          <p:cNvPr id="14" name="Picture 13" descr="オリエンタルランド.png"/>
           <p:cNvPicPr>
             <a:picLocks noChangeAspect="1"/>
           </p:cNvPicPr>
@@ -3452,8 +3452,8 @@
         </p:blipFill>
         <p:spPr>
           <a:xfrm>
-            <a:off x="2935811" y="1338943"/>
-            <a:ext cx="1717715" cy="378822"/>
+            <a:off x="3433065" y="1338943"/>
+            <a:ext cx="723207" cy="378822"/>
           </a:xfrm>
           <a:prstGeom prst="rect">
             <a:avLst/>
@@ -3489,14 +3489,14 @@
                   <a:srgbClr val="404040"/>
                 </a:solidFill>
               </a:rPr>
-              <a:t>オリンパス</a:t>
+              <a:t>オリエンタルランド</a:t>
             </a:r>
           </a:p>
         </p:txBody>
       </p:sp>
       <p:pic>
         <p:nvPicPr>
-          <p:cNvPr id="16" name="Picture 15" descr="キーエンス.png"/>
+          <p:cNvPr id="16" name="Picture 15" descr="オリンパス.png"/>
           <p:cNvPicPr>
             <a:picLocks noChangeAspect="1"/>
           </p:cNvPicPr>
@@ -3510,8 +3510,8 @@
         </p:blipFill>
         <p:spPr>
           <a:xfrm>
-            <a:off x="5213855" y="1338943"/>
-            <a:ext cx="1763984" cy="378822"/>
+            <a:off x="5236990" y="1338943"/>
+            <a:ext cx="1717715" cy="378822"/>
           </a:xfrm>
           <a:prstGeom prst="rect">
             <a:avLst/>
@@ -3547,14 +3547,14 @@
                   <a:srgbClr val="404040"/>
                 </a:solidFill>
               </a:rPr>
-              <a:t>キーエンス</a:t>
+              <a:t>オリンパス</a:t>
             </a:r>
           </a:p>
         </p:txBody>
       </p:sp>
       <p:pic>
         <p:nvPicPr>
-          <p:cNvPr id="18" name="Picture 17" descr="コマツ.png"/>
+          <p:cNvPr id="18" name="Picture 17" descr="キーエンス.png"/>
           <p:cNvPicPr>
             <a:picLocks noChangeAspect="1"/>
           </p:cNvPicPr>
@@ -3568,8 +3568,8 @@
         </p:blipFill>
         <p:spPr>
           <a:xfrm>
-            <a:off x="7531146" y="1338943"/>
-            <a:ext cx="1731761" cy="378822"/>
+            <a:off x="7515034" y="1338943"/>
+            <a:ext cx="1763984" cy="378822"/>
           </a:xfrm>
           <a:prstGeom prst="rect">
             <a:avLst/>
@@ -3605,14 +3605,14 @@
                   <a:srgbClr val="404040"/>
                 </a:solidFill>
               </a:rPr>
-              <a:t>コマツ</a:t>
+              <a:t>キーエンス</a:t>
             </a:r>
           </a:p>
         </p:txBody>
       </p:sp>
       <p:pic>
         <p:nvPicPr>
-          <p:cNvPr id="20" name="Picture 19" descr="セコム.png"/>
+          <p:cNvPr id="20" name="Picture 19" descr="コマツ.png"/>
           <p:cNvPicPr>
             <a:picLocks noChangeAspect="1"/>
           </p:cNvPicPr>
@@ -3626,8 +3626,8 @@
         </p:blipFill>
         <p:spPr>
           <a:xfrm>
-            <a:off x="10207791" y="1338943"/>
-            <a:ext cx="980828" cy="378822"/>
+            <a:off x="9832325" y="1338943"/>
+            <a:ext cx="1731761" cy="378822"/>
           </a:xfrm>
           <a:prstGeom prst="rect">
             <a:avLst/>
@@ -3663,14 +3663,14 @@
                   <a:srgbClr val="404040"/>
                 </a:solidFill>
               </a:rPr>
-              <a:t>セコム</a:t>
+              <a:t>コマツ</a:t>
             </a:r>
           </a:p>
         </p:txBody>
       </p:sp>
       <p:pic>
         <p:nvPicPr>
-          <p:cNvPr id="22" name="Picture 21" descr="セブン&amp;アイ・ホールディングス.png"/>
+          <p:cNvPr id="22" name="Picture 21" descr="セコム.png"/>
           <p:cNvPicPr>
             <a:picLocks noChangeAspect="1"/>
           </p:cNvPicPr>
@@ -3684,8 +3684,8 @@
         </p:blipFill>
         <p:spPr>
           <a:xfrm>
-            <a:off x="1283964" y="2220686"/>
-            <a:ext cx="419051" cy="378822"/>
+            <a:off x="1003075" y="2220686"/>
+            <a:ext cx="980828" cy="378822"/>
           </a:xfrm>
           <a:prstGeom prst="rect">
             <a:avLst/>
@@ -3721,14 +3721,14 @@
                   <a:srgbClr val="404040"/>
                 </a:solidFill>
               </a:rPr>
-              <a:t>セブン&amp;アイ・ホールディングス</a:t>
+              <a:t>セコム</a:t>
             </a:r>
           </a:p>
         </p:txBody>
       </p:sp>
       <p:pic>
         <p:nvPicPr>
-          <p:cNvPr id="24" name="Picture 23" descr="ソニーグループ.png"/>
+          <p:cNvPr id="24" name="Picture 23" descr="セブン&amp;アイ・ホールディングス.png"/>
           <p:cNvPicPr>
             <a:picLocks noChangeAspect="1"/>
           </p:cNvPicPr>
@@ -3742,8 +3742,8 @@
         </p:blipFill>
         <p:spPr>
           <a:xfrm>
-            <a:off x="2889317" y="2220686"/>
-            <a:ext cx="1810703" cy="378822"/>
+            <a:off x="3585143" y="2220686"/>
+            <a:ext cx="419051" cy="378822"/>
           </a:xfrm>
           <a:prstGeom prst="rect">
             <a:avLst/>
@@ -3779,14 +3779,14 @@
                   <a:srgbClr val="404040"/>
                 </a:solidFill>
               </a:rPr>
-              <a:t>ソニーグループ</a:t>
+              <a:t>セブン&amp;アイ・ホールディングス</a:t>
             </a:r>
           </a:p>
         </p:txBody>
       </p:sp>
       <p:pic>
         <p:nvPicPr>
-          <p:cNvPr id="26" name="Picture 25" descr="ダイキン工業.png"/>
+          <p:cNvPr id="26" name="Picture 25" descr="ソニーグループ.png"/>
           <p:cNvPicPr>
             <a:picLocks noChangeAspect="1"/>
           </p:cNvPicPr>
@@ -3800,8 +3800,8 @@
         </p:blipFill>
         <p:spPr>
           <a:xfrm>
-            <a:off x="5309430" y="2220686"/>
-            <a:ext cx="1572834" cy="378822"/>
+            <a:off x="5190496" y="2220686"/>
+            <a:ext cx="1810703" cy="378822"/>
           </a:xfrm>
           <a:prstGeom prst="rect">
             <a:avLst/>
@@ -3837,14 +3837,14 @@
                   <a:srgbClr val="404040"/>
                 </a:solidFill>
               </a:rPr>
-              <a:t>ダイキン工業</a:t>
+              <a:t>ソニーグループ</a:t>
             </a:r>
           </a:p>
         </p:txBody>
       </p:sp>
       <p:pic>
         <p:nvPicPr>
-          <p:cNvPr id="28" name="Picture 27" descr="トヨタ自動車.png"/>
+          <p:cNvPr id="28" name="Picture 27" descr="ダイキン工業.png"/>
           <p:cNvPicPr>
             <a:picLocks noChangeAspect="1"/>
           </p:cNvPicPr>
@@ -3858,8 +3858,8 @@
         </p:blipFill>
         <p:spPr>
           <a:xfrm>
-            <a:off x="8124366" y="2220686"/>
-            <a:ext cx="545321" cy="378822"/>
+            <a:off x="7610609" y="2220686"/>
+            <a:ext cx="1572834" cy="378822"/>
           </a:xfrm>
           <a:prstGeom prst="rect">
             <a:avLst/>
@@ -3895,14 +3895,14 @@
                   <a:srgbClr val="404040"/>
                 </a:solidFill>
               </a:rPr>
-              <a:t>トヨタ自動車</a:t>
+              <a:t>ダイキン工業</a:t>
             </a:r>
           </a:p>
         </p:txBody>
       </p:sp>
       <p:pic>
         <p:nvPicPr>
-          <p:cNvPr id="30" name="Picture 29" descr="パナソニック.png"/>
+          <p:cNvPr id="30" name="Picture 29" descr="トヨタ自動車.png"/>
           <p:cNvPicPr>
             <a:picLocks noChangeAspect="1"/>
           </p:cNvPicPr>
@@ -3916,8 +3916,8 @@
         </p:blipFill>
         <p:spPr>
           <a:xfrm>
-            <a:off x="9661916" y="2221681"/>
-            <a:ext cx="2072578" cy="376832"/>
+            <a:off x="10425545" y="2220686"/>
+            <a:ext cx="545321" cy="378822"/>
           </a:xfrm>
           <a:prstGeom prst="rect">
             <a:avLst/>
@@ -3953,14 +3953,14 @@
                   <a:srgbClr val="404040"/>
                 </a:solidFill>
               </a:rPr>
-              <a:t>パナソニック</a:t>
+              <a:t>トヨタ自動車</a:t>
             </a:r>
           </a:p>
         </p:txBody>
       </p:sp>
       <p:pic>
         <p:nvPicPr>
-          <p:cNvPr id="32" name="Picture 31" descr="ファーストリテイリング.png"/>
+          <p:cNvPr id="32" name="Picture 31" descr="パナソニック.png"/>
           <p:cNvPicPr>
             <a:picLocks noChangeAspect="1"/>
           </p:cNvPicPr>
@@ -3974,8 +3974,8 @@
         </p:blipFill>
         <p:spPr>
           <a:xfrm>
-            <a:off x="1117297" y="3102429"/>
-            <a:ext cx="752384" cy="378822"/>
+            <a:off x="457200" y="3103424"/>
+            <a:ext cx="2072578" cy="376832"/>
           </a:xfrm>
           <a:prstGeom prst="rect">
             <a:avLst/>
@@ -4011,14 +4011,14 @@
                   <a:srgbClr val="404040"/>
                 </a:solidFill>
               </a:rPr>
-              <a:t>ファーストリテイリング</a:t>
+              <a:t>パナソニック</a:t>
             </a:r>
           </a:p>
         </p:txBody>
       </p:sp>
       <p:pic>
         <p:nvPicPr>
-          <p:cNvPr id="34" name="Picture 33" descr="ホンダ.png"/>
+          <p:cNvPr id="34" name="Picture 33" descr="ファーストリテイリング.png"/>
           <p:cNvPicPr>
             <a:picLocks noChangeAspect="1"/>
           </p:cNvPicPr>
@@ -4032,8 +4032,8 @@
         </p:blipFill>
         <p:spPr>
           <a:xfrm>
-            <a:off x="2758379" y="3125805"/>
-            <a:ext cx="2072578" cy="332070"/>
+            <a:off x="3418476" y="3102429"/>
+            <a:ext cx="752384" cy="378822"/>
           </a:xfrm>
           <a:prstGeom prst="rect">
             <a:avLst/>
@@ -4069,14 +4069,14 @@
                   <a:srgbClr val="404040"/>
                 </a:solidFill>
               </a:rPr>
-              <a:t>ホンダ</a:t>
+              <a:t>ファーストリテイリング</a:t>
             </a:r>
           </a:p>
         </p:txBody>
       </p:sp>
       <p:pic>
         <p:nvPicPr>
-          <p:cNvPr id="36" name="Picture 35" descr="リクルートホールディングス.png"/>
+          <p:cNvPr id="36" name="Picture 35" descr="ホンダ.png"/>
           <p:cNvPicPr>
             <a:picLocks noChangeAspect="1"/>
           </p:cNvPicPr>
@@ -4090,8 +4090,8 @@
         </p:blipFill>
         <p:spPr>
           <a:xfrm>
-            <a:off x="5444691" y="3102429"/>
-            <a:ext cx="1302312" cy="378822"/>
+            <a:off x="5059558" y="3125805"/>
+            <a:ext cx="2072578" cy="332070"/>
           </a:xfrm>
           <a:prstGeom prst="rect">
             <a:avLst/>
@@ -4127,14 +4127,14 @@
                   <a:srgbClr val="404040"/>
                 </a:solidFill>
               </a:rPr>
-              <a:t>リクルートホールディングス</a:t>
+              <a:t>ホンダ</a:t>
             </a:r>
           </a:p>
         </p:txBody>
       </p:sp>
       <p:pic>
         <p:nvPicPr>
-          <p:cNvPr id="38" name="Picture 37" descr="三井住友銀行.png"/>
+          <p:cNvPr id="38" name="Picture 37" descr="リクルートホールディングス.png"/>
           <p:cNvPicPr>
             <a:picLocks noChangeAspect="1"/>
           </p:cNvPicPr>
@@ -4148,8 +4148,8 @@
         </p:blipFill>
         <p:spPr>
           <a:xfrm>
-            <a:off x="7767295" y="3102429"/>
-            <a:ext cx="1259463" cy="378822"/>
+            <a:off x="7745870" y="3102429"/>
+            <a:ext cx="1302312" cy="378822"/>
           </a:xfrm>
           <a:prstGeom prst="rect">
             <a:avLst/>
@@ -4185,14 +4185,14 @@
                   <a:srgbClr val="404040"/>
                 </a:solidFill>
               </a:rPr>
-              <a:t>三井住友銀行</a:t>
+              <a:t>リクルートホールディングス</a:t>
             </a:r>
           </a:p>
         </p:txBody>
       </p:sp>
       <p:pic>
         <p:nvPicPr>
-          <p:cNvPr id="40" name="Picture 39" descr="三菱電機.png"/>
+          <p:cNvPr id="40" name="Picture 39" descr="三井住友銀行.png"/>
           <p:cNvPicPr>
             <a:picLocks noChangeAspect="1"/>
           </p:cNvPicPr>
@@ -4206,8 +4206,8 @@
         </p:blipFill>
         <p:spPr>
           <a:xfrm>
-            <a:off x="10115401" y="3102429"/>
-            <a:ext cx="1165608" cy="378822"/>
+            <a:off x="10068474" y="3102429"/>
+            <a:ext cx="1259463" cy="378822"/>
           </a:xfrm>
           <a:prstGeom prst="rect">
             <a:avLst/>
@@ -4243,14 +4243,14 @@
                   <a:srgbClr val="404040"/>
                 </a:solidFill>
               </a:rPr>
-              <a:t>三菱電機</a:t>
+              <a:t>三井住友銀行</a:t>
             </a:r>
           </a:p>
         </p:txBody>
       </p:sp>
       <p:pic>
         <p:nvPicPr>
-          <p:cNvPr id="42" name="Picture 41" descr="任天堂.png"/>
+          <p:cNvPr id="42" name="Picture 41" descr="三菱電機.png"/>
           <p:cNvPicPr>
             <a:picLocks noChangeAspect="1"/>
           </p:cNvPicPr>
@@ -4264,8 +4264,8 @@
         </p:blipFill>
         <p:spPr>
           <a:xfrm>
-            <a:off x="805698" y="3984171"/>
-            <a:ext cx="1375583" cy="378822"/>
+            <a:off x="910685" y="3984171"/>
+            <a:ext cx="1165608" cy="378822"/>
           </a:xfrm>
           <a:prstGeom prst="rect">
             <a:avLst/>
@@ -4301,14 +4301,14 @@
                   <a:srgbClr val="404040"/>
                 </a:solidFill>
               </a:rPr>
-              <a:t>任天堂</a:t>
+              <a:t>三菱電機</a:t>
             </a:r>
           </a:p>
         </p:txBody>
       </p:sp>
       <p:pic>
         <p:nvPicPr>
-          <p:cNvPr id="44" name="Picture 43" descr="伊藤忠商事.png"/>
+          <p:cNvPr id="44" name="Picture 43" descr="任天堂.png"/>
           <p:cNvPicPr>
             <a:picLocks noChangeAspect="1"/>
           </p:cNvPicPr>
@@ -4322,8 +4322,8 @@
         </p:blipFill>
         <p:spPr>
           <a:xfrm>
-            <a:off x="3357669" y="3984171"/>
-            <a:ext cx="873998" cy="378822"/>
+            <a:off x="3106877" y="3984171"/>
+            <a:ext cx="1375583" cy="378822"/>
           </a:xfrm>
           <a:prstGeom prst="rect">
             <a:avLst/>
@@ -4359,14 +4359,14 @@
                   <a:srgbClr val="404040"/>
                 </a:solidFill>
               </a:rPr>
-              <a:t>伊藤忠商事</a:t>
+              <a:t>任天堂</a:t>
             </a:r>
           </a:p>
         </p:txBody>
       </p:sp>
       <p:pic>
         <p:nvPicPr>
-          <p:cNvPr id="46" name="Picture 45" descr="信越化学工業.png"/>
+          <p:cNvPr id="46" name="Picture 45" descr="伊藤忠商事.png"/>
           <p:cNvPicPr>
             <a:picLocks noChangeAspect="1"/>
           </p:cNvPicPr>
@@ -4380,8 +4380,8 @@
         </p:blipFill>
         <p:spPr>
           <a:xfrm>
-            <a:off x="5738341" y="3984171"/>
-            <a:ext cx="715012" cy="378822"/>
+            <a:off x="5658848" y="3984171"/>
+            <a:ext cx="873998" cy="378822"/>
           </a:xfrm>
           <a:prstGeom prst="rect">
             <a:avLst/>
@@ -4417,14 +4417,14 @@
                   <a:srgbClr val="404040"/>
                 </a:solidFill>
               </a:rPr>
-              <a:t>信越化学工業</a:t>
+              <a:t>伊藤忠商事</a:t>
             </a:r>
           </a:p>
         </p:txBody>
       </p:sp>
       <p:pic>
         <p:nvPicPr>
-          <p:cNvPr id="48" name="Picture 47" descr="味の素.png"/>
+          <p:cNvPr id="48" name="Picture 47" descr="信越化学工業.png"/>
           <p:cNvPicPr>
             <a:picLocks noChangeAspect="1"/>
           </p:cNvPicPr>
@@ -4438,8 +4438,8 @@
         </p:blipFill>
         <p:spPr>
           <a:xfrm>
-            <a:off x="7360737" y="4005536"/>
-            <a:ext cx="2072579" cy="336093"/>
+            <a:off x="8039520" y="3984171"/>
+            <a:ext cx="715012" cy="378822"/>
           </a:xfrm>
           <a:prstGeom prst="rect">
             <a:avLst/>
@@ -4475,14 +4475,14 @@
                   <a:srgbClr val="404040"/>
                 </a:solidFill>
               </a:rPr>
-              <a:t>味の素</a:t>
+              <a:t>信越化学工業</a:t>
             </a:r>
           </a:p>
         </p:txBody>
       </p:sp>
       <p:pic>
         <p:nvPicPr>
-          <p:cNvPr id="50" name="Picture 49" descr="大和ハウス工業.png"/>
+          <p:cNvPr id="50" name="Picture 49" descr="味の素.png"/>
           <p:cNvPicPr>
             <a:picLocks noChangeAspect="1"/>
           </p:cNvPicPr>
@@ -4496,8 +4496,8 @@
         </p:blipFill>
         <p:spPr>
           <a:xfrm>
-            <a:off x="10460804" y="3984171"/>
-            <a:ext cx="474803" cy="378822"/>
+            <a:off x="9661916" y="4005536"/>
+            <a:ext cx="2072579" cy="336093"/>
           </a:xfrm>
           <a:prstGeom prst="rect">
             <a:avLst/>
@@ -4533,14 +4533,14 @@
                   <a:srgbClr val="404040"/>
                 </a:solidFill>
               </a:rPr>
-              <a:t>大和ハウス工業</a:t>
+              <a:t>味の素</a:t>
             </a:r>
           </a:p>
         </p:txBody>
       </p:sp>
       <p:pic>
         <p:nvPicPr>
-          <p:cNvPr id="52" name="Picture 51" descr="富士通.png"/>
+          <p:cNvPr id="52" name="Picture 51" descr="大和ハウス工業.png"/>
           <p:cNvPicPr>
             <a:picLocks noChangeAspect="1"/>
           </p:cNvPicPr>
@@ -4554,8 +4554,8 @@
         </p:blipFill>
         <p:spPr>
           <a:xfrm>
-            <a:off x="1119776" y="4865914"/>
-            <a:ext cx="747426" cy="378822"/>
+            <a:off x="1256088" y="4865914"/>
+            <a:ext cx="474803" cy="378822"/>
           </a:xfrm>
           <a:prstGeom prst="rect">
             <a:avLst/>
@@ -4591,14 +4591,14 @@
                   <a:srgbClr val="404040"/>
                 </a:solidFill>
               </a:rPr>
-              <a:t>富士通</a:t>
+              <a:t>大和ハウス工業</a:t>
             </a:r>
           </a:p>
         </p:txBody>
       </p:sp>
       <p:pic>
         <p:nvPicPr>
-          <p:cNvPr id="54" name="Picture 53" descr="日本郵政.png"/>
+          <p:cNvPr id="54" name="Picture 53" descr="富士通.png"/>
           <p:cNvPicPr>
             <a:picLocks noChangeAspect="1"/>
           </p:cNvPicPr>
@@ -4612,8 +4612,8 @@
         </p:blipFill>
         <p:spPr>
           <a:xfrm>
-            <a:off x="3616949" y="4865914"/>
-            <a:ext cx="355438" cy="378822"/>
+            <a:off x="3420955" y="4865914"/>
+            <a:ext cx="747426" cy="378822"/>
           </a:xfrm>
           <a:prstGeom prst="rect">
             <a:avLst/>
@@ -4649,14 +4649,14 @@
                   <a:srgbClr val="404040"/>
                 </a:solidFill>
               </a:rPr>
-              <a:t>日本郵政</a:t>
+              <a:t>富士通</a:t>
             </a:r>
           </a:p>
         </p:txBody>
       </p:sp>
       <p:pic>
         <p:nvPicPr>
-          <p:cNvPr id="56" name="Picture 55" descr="日立製作所.png"/>
+          <p:cNvPr id="56" name="Picture 55" descr="日本郵政.png"/>
           <p:cNvPicPr>
             <a:picLocks noChangeAspect="1"/>
           </p:cNvPicPr>
@@ -4670,8 +4670,8 @@
         </p:blipFill>
         <p:spPr>
           <a:xfrm>
-            <a:off x="5104703" y="4865914"/>
-            <a:ext cx="1982288" cy="378822"/>
+            <a:off x="5918128" y="4865914"/>
+            <a:ext cx="355438" cy="378822"/>
           </a:xfrm>
           <a:prstGeom prst="rect">
             <a:avLst/>
@@ -4707,14 +4707,14 @@
                   <a:srgbClr val="404040"/>
                 </a:solidFill>
               </a:rPr>
-              <a:t>日立製作所</a:t>
+              <a:t>日本郵政</a:t>
             </a:r>
           </a:p>
         </p:txBody>
       </p:sp>
       <p:pic>
         <p:nvPicPr>
-          <p:cNvPr id="58" name="Picture 57" descr="村田製作所.png"/>
+          <p:cNvPr id="58" name="Picture 57" descr="日立製作所.png"/>
           <p:cNvPicPr>
             <a:picLocks noChangeAspect="1"/>
           </p:cNvPicPr>
@@ -4728,8 +4728,8 @@
         </p:blipFill>
         <p:spPr>
           <a:xfrm>
-            <a:off x="7889733" y="4865914"/>
-            <a:ext cx="1014586" cy="378822"/>
+            <a:off x="7405882" y="4865914"/>
+            <a:ext cx="1982288" cy="378822"/>
           </a:xfrm>
           <a:prstGeom prst="rect">
             <a:avLst/>
@@ -4765,14 +4765,14 @@
                   <a:srgbClr val="404040"/>
                 </a:solidFill>
               </a:rPr>
-              <a:t>村田製作所</a:t>
+              <a:t>日立製作所</a:t>
             </a:r>
           </a:p>
         </p:txBody>
       </p:sp>
       <p:pic>
         <p:nvPicPr>
-          <p:cNvPr id="60" name="Picture 59" descr="東京ガス.png"/>
+          <p:cNvPr id="60" name="Picture 59" descr="村田製作所.png"/>
           <p:cNvPicPr>
             <a:picLocks noChangeAspect="1"/>
           </p:cNvPicPr>
@@ -4786,8 +4786,8 @@
         </p:blipFill>
         <p:spPr>
           <a:xfrm>
-            <a:off x="9790609" y="4865914"/>
-            <a:ext cx="1815192" cy="378822"/>
+            <a:off x="10190912" y="4865914"/>
+            <a:ext cx="1014586" cy="378822"/>
           </a:xfrm>
           <a:prstGeom prst="rect">
             <a:avLst/>
@@ -4823,14 +4823,14 @@
                   <a:srgbClr val="404040"/>
                 </a:solidFill>
               </a:rPr>
-              <a:t>東京ガス</a:t>
+              <a:t>村田製作所</a:t>
             </a:r>
           </a:p>
         </p:txBody>
       </p:sp>
       <p:pic>
         <p:nvPicPr>
-          <p:cNvPr id="62" name="Picture 61" descr="楽天グループ.png"/>
+          <p:cNvPr id="62" name="Picture 61" descr="東京ガス.png"/>
           <p:cNvPicPr>
             <a:picLocks noChangeAspect="1"/>
           </p:cNvPicPr>
@@ -4844,8 +4844,8 @@
         </p:blipFill>
         <p:spPr>
           <a:xfrm>
-            <a:off x="916948" y="5747657"/>
-            <a:ext cx="1153083" cy="378822"/>
+            <a:off x="585893" y="5747657"/>
+            <a:ext cx="1815192" cy="378822"/>
           </a:xfrm>
           <a:prstGeom prst="rect">
             <a:avLst/>
@@ -4881,14 +4881,14 @@
                   <a:srgbClr val="404040"/>
                 </a:solidFill>
               </a:rPr>
-              <a:t>楽天グループ</a:t>
+              <a:t>東京ガス</a:t>
             </a:r>
           </a:p>
         </p:txBody>
       </p:sp>
       <p:pic>
         <p:nvPicPr>
-          <p:cNvPr id="64" name="Picture 63" descr="花王.png"/>
+          <p:cNvPr id="64" name="Picture 63" descr="楽天グループ.png"/>
           <p:cNvPicPr>
             <a:picLocks noChangeAspect="1"/>
           </p:cNvPicPr>
@@ -4902,8 +4902,8 @@
         </p:blipFill>
         <p:spPr>
           <a:xfrm>
-            <a:off x="3460706" y="5747657"/>
-            <a:ext cx="667924" cy="378822"/>
+            <a:off x="3218127" y="5747657"/>
+            <a:ext cx="1153083" cy="378822"/>
           </a:xfrm>
           <a:prstGeom prst="rect">
             <a:avLst/>
@@ -4939,14 +4939,14 @@
                   <a:srgbClr val="404040"/>
                 </a:solidFill>
               </a:rPr>
-              <a:t>花王</a:t>
+              <a:t>楽天グループ</a:t>
             </a:r>
           </a:p>
         </p:txBody>
       </p:sp>
       <p:pic>
         <p:nvPicPr>
-          <p:cNvPr id="66" name="Picture 65" descr="資生堂.png"/>
+          <p:cNvPr id="66" name="Picture 65" descr="花王.png"/>
           <p:cNvPicPr>
             <a:picLocks noChangeAspect="1"/>
           </p:cNvPicPr>
@@ -4960,8 +4960,8 @@
         </p:blipFill>
         <p:spPr>
           <a:xfrm>
-            <a:off x="5149714" y="5747657"/>
-            <a:ext cx="1892266" cy="378822"/>
+            <a:off x="5761885" y="5747657"/>
+            <a:ext cx="667924" cy="378822"/>
           </a:xfrm>
           <a:prstGeom prst="rect">
             <a:avLst/>
@@ -4997,14 +4997,14 @@
                   <a:srgbClr val="404040"/>
                 </a:solidFill>
               </a:rPr>
-              <a:t>資生堂</a:t>
+              <a:t>花王</a:t>
             </a:r>
           </a:p>
         </p:txBody>
       </p:sp>
       <p:pic>
         <p:nvPicPr>
-          <p:cNvPr id="68" name="Picture 67" descr="野村ホールディングス.png"/>
+          <p:cNvPr id="68" name="Picture 67" descr="資生堂.png"/>
           <p:cNvPicPr>
             <a:picLocks noChangeAspect="1"/>
           </p:cNvPicPr>
@@ -5018,8 +5018,8 @@
         </p:blipFill>
         <p:spPr>
           <a:xfrm>
-            <a:off x="7486429" y="5747657"/>
-            <a:ext cx="1821195" cy="378822"/>
+            <a:off x="7450893" y="5747657"/>
+            <a:ext cx="1892266" cy="378822"/>
           </a:xfrm>
           <a:prstGeom prst="rect">
             <a:avLst/>
@@ -5035,6 +5035,64 @@
         <p:spPr>
           <a:xfrm>
             <a:off x="7360737" y="6126480"/>
+            <a:ext cx="2072579" cy="274320"/>
+          </a:xfrm>
+          <a:prstGeom prst="rect">
+            <a:avLst/>
+          </a:prstGeom>
+          <a:noFill/>
+        </p:spPr>
+        <p:txBody>
+          <a:bodyPr wrap="square">
+            <a:spAutoFit/>
+          </a:bodyPr>
+          <a:lstStyle/>
+          <a:p>
+            <a:pPr algn="ctr"/>
+            <a:r>
+              <a:rPr sz="1000">
+                <a:solidFill>
+                  <a:srgbClr val="404040"/>
+                </a:solidFill>
+              </a:rPr>
+              <a:t>資生堂</a:t>
+            </a:r>
+          </a:p>
+        </p:txBody>
+      </p:sp>
+      <p:pic>
+        <p:nvPicPr>
+          <p:cNvPr id="70" name="Picture 69" descr="野村ホールディングス.png"/>
+          <p:cNvPicPr>
+            <a:picLocks noChangeAspect="1"/>
+          </p:cNvPicPr>
+          <p:nvPr/>
+        </p:nvPicPr>
+        <p:blipFill>
+          <a:blip r:embed="rId36"/>
+          <a:stretch>
+            <a:fillRect/>
+          </a:stretch>
+        </p:blipFill>
+        <p:spPr>
+          <a:xfrm>
+            <a:off x="9787608" y="5747657"/>
+            <a:ext cx="1821195" cy="378822"/>
+          </a:xfrm>
+          <a:prstGeom prst="rect">
+            <a:avLst/>
+          </a:prstGeom>
+        </p:spPr>
+      </p:pic>
+      <p:sp>
+        <p:nvSpPr>
+          <p:cNvPr id="71" name="TextBox 70"/>
+          <p:cNvSpPr txBox="1"/>
+          <p:nvPr/>
+        </p:nvSpPr>
+        <p:spPr>
+          <a:xfrm>
+            <a:off x="9661916" y="6126480"/>
             <a:ext cx="2072579" cy="274320"/>
           </a:xfrm>
           <a:prstGeom prst="rect">

--- a/docs/logos.pptx
+++ b/docs/logos.pptx
@@ -4366,7 +4366,7 @@
       </p:sp>
       <p:pic>
         <p:nvPicPr>
-          <p:cNvPr id="46" name="Picture 45" descr="伊藤忠商事.png"/>
+          <p:cNvPr id="46" name="Picture 45" descr="信越化学工業.png"/>
           <p:cNvPicPr>
             <a:picLocks noChangeAspect="1"/>
           </p:cNvPicPr>
@@ -4380,8 +4380,8 @@
         </p:blipFill>
         <p:spPr>
           <a:xfrm>
-            <a:off x="5658848" y="3984171"/>
-            <a:ext cx="873998" cy="378822"/>
+            <a:off x="5738341" y="3984171"/>
+            <a:ext cx="715012" cy="378822"/>
           </a:xfrm>
           <a:prstGeom prst="rect">
             <a:avLst/>
@@ -4417,14 +4417,14 @@
                   <a:srgbClr val="404040"/>
                 </a:solidFill>
               </a:rPr>
-              <a:t>伊藤忠商事</a:t>
+              <a:t>信越化学工業</a:t>
             </a:r>
           </a:p>
         </p:txBody>
       </p:sp>
       <p:pic>
         <p:nvPicPr>
-          <p:cNvPr id="48" name="Picture 47" descr="信越化学工業.png"/>
+          <p:cNvPr id="48" name="Picture 47" descr="味の素.png"/>
           <p:cNvPicPr>
             <a:picLocks noChangeAspect="1"/>
           </p:cNvPicPr>
@@ -4438,8 +4438,8 @@
         </p:blipFill>
         <p:spPr>
           <a:xfrm>
-            <a:off x="8039520" y="3984171"/>
-            <a:ext cx="715012" cy="378822"/>
+            <a:off x="7360737" y="4005536"/>
+            <a:ext cx="2072579" cy="336093"/>
           </a:xfrm>
           <a:prstGeom prst="rect">
             <a:avLst/>
@@ -4475,14 +4475,14 @@
                   <a:srgbClr val="404040"/>
                 </a:solidFill>
               </a:rPr>
-              <a:t>信越化学工業</a:t>
+              <a:t>味の素</a:t>
             </a:r>
           </a:p>
         </p:txBody>
       </p:sp>
       <p:pic>
         <p:nvPicPr>
-          <p:cNvPr id="50" name="Picture 49" descr="味の素.png"/>
+          <p:cNvPr id="50" name="Picture 49" descr="大和ハウス工業.png"/>
           <p:cNvPicPr>
             <a:picLocks noChangeAspect="1"/>
           </p:cNvPicPr>
@@ -4496,8 +4496,8 @@
         </p:blipFill>
         <p:spPr>
           <a:xfrm>
-            <a:off x="9661916" y="4005536"/>
-            <a:ext cx="2072579" cy="336093"/>
+            <a:off x="10460804" y="3984171"/>
+            <a:ext cx="474803" cy="378822"/>
           </a:xfrm>
           <a:prstGeom prst="rect">
             <a:avLst/>
@@ -4533,14 +4533,14 @@
                   <a:srgbClr val="404040"/>
                 </a:solidFill>
               </a:rPr>
-              <a:t>味の素</a:t>
+              <a:t>大和ハウス工業</a:t>
             </a:r>
           </a:p>
         </p:txBody>
       </p:sp>
       <p:pic>
         <p:nvPicPr>
-          <p:cNvPr id="52" name="Picture 51" descr="大和ハウス工業.png"/>
+          <p:cNvPr id="52" name="Picture 51" descr="富士通.png"/>
           <p:cNvPicPr>
             <a:picLocks noChangeAspect="1"/>
           </p:cNvPicPr>
@@ -4554,8 +4554,8 @@
         </p:blipFill>
         <p:spPr>
           <a:xfrm>
-            <a:off x="1256088" y="4865914"/>
-            <a:ext cx="474803" cy="378822"/>
+            <a:off x="1119776" y="4865914"/>
+            <a:ext cx="747426" cy="378822"/>
           </a:xfrm>
           <a:prstGeom prst="rect">
             <a:avLst/>
@@ -4591,14 +4591,14 @@
                   <a:srgbClr val="404040"/>
                 </a:solidFill>
               </a:rPr>
-              <a:t>大和ハウス工業</a:t>
+              <a:t>富士通</a:t>
             </a:r>
           </a:p>
         </p:txBody>
       </p:sp>
       <p:pic>
         <p:nvPicPr>
-          <p:cNvPr id="54" name="Picture 53" descr="富士通.png"/>
+          <p:cNvPr id="54" name="Picture 53" descr="日本郵政.png"/>
           <p:cNvPicPr>
             <a:picLocks noChangeAspect="1"/>
           </p:cNvPicPr>
@@ -4612,8 +4612,8 @@
         </p:blipFill>
         <p:spPr>
           <a:xfrm>
-            <a:off x="3420955" y="4865914"/>
-            <a:ext cx="747426" cy="378822"/>
+            <a:off x="3616949" y="4865914"/>
+            <a:ext cx="355438" cy="378822"/>
           </a:xfrm>
           <a:prstGeom prst="rect">
             <a:avLst/>
@@ -4649,14 +4649,14 @@
                   <a:srgbClr val="404040"/>
                 </a:solidFill>
               </a:rPr>
-              <a:t>富士通</a:t>
+              <a:t>日本郵政</a:t>
             </a:r>
           </a:p>
         </p:txBody>
       </p:sp>
       <p:pic>
         <p:nvPicPr>
-          <p:cNvPr id="56" name="Picture 55" descr="日本郵政.png"/>
+          <p:cNvPr id="56" name="Picture 55" descr="日立製作所.png"/>
           <p:cNvPicPr>
             <a:picLocks noChangeAspect="1"/>
           </p:cNvPicPr>
@@ -4670,8 +4670,8 @@
         </p:blipFill>
         <p:spPr>
           <a:xfrm>
-            <a:off x="5918128" y="4865914"/>
-            <a:ext cx="355438" cy="378822"/>
+            <a:off x="5104703" y="4865914"/>
+            <a:ext cx="1982288" cy="378822"/>
           </a:xfrm>
           <a:prstGeom prst="rect">
             <a:avLst/>
@@ -4707,14 +4707,14 @@
                   <a:srgbClr val="404040"/>
                 </a:solidFill>
               </a:rPr>
-              <a:t>日本郵政</a:t>
+              <a:t>日立製作所</a:t>
             </a:r>
           </a:p>
         </p:txBody>
       </p:sp>
       <p:pic>
         <p:nvPicPr>
-          <p:cNvPr id="58" name="Picture 57" descr="日立製作所.png"/>
+          <p:cNvPr id="58" name="Picture 57" descr="村田製作所.png"/>
           <p:cNvPicPr>
             <a:picLocks noChangeAspect="1"/>
           </p:cNvPicPr>
@@ -4728,8 +4728,8 @@
         </p:blipFill>
         <p:spPr>
           <a:xfrm>
-            <a:off x="7405882" y="4865914"/>
-            <a:ext cx="1982288" cy="378822"/>
+            <a:off x="7889733" y="4865914"/>
+            <a:ext cx="1014586" cy="378822"/>
           </a:xfrm>
           <a:prstGeom prst="rect">
             <a:avLst/>
@@ -4765,14 +4765,14 @@
                   <a:srgbClr val="404040"/>
                 </a:solidFill>
               </a:rPr>
-              <a:t>日立製作所</a:t>
+              <a:t>村田製作所</a:t>
             </a:r>
           </a:p>
         </p:txBody>
       </p:sp>
       <p:pic>
         <p:nvPicPr>
-          <p:cNvPr id="60" name="Picture 59" descr="村田製作所.png"/>
+          <p:cNvPr id="60" name="Picture 59" descr="東京ガス.png"/>
           <p:cNvPicPr>
             <a:picLocks noChangeAspect="1"/>
           </p:cNvPicPr>
@@ -4786,8 +4786,8 @@
         </p:blipFill>
         <p:spPr>
           <a:xfrm>
-            <a:off x="10190912" y="4865914"/>
-            <a:ext cx="1014586" cy="378822"/>
+            <a:off x="9790609" y="4865914"/>
+            <a:ext cx="1815192" cy="378822"/>
           </a:xfrm>
           <a:prstGeom prst="rect">
             <a:avLst/>
@@ -4823,14 +4823,14 @@
                   <a:srgbClr val="404040"/>
                 </a:solidFill>
               </a:rPr>
-              <a:t>村田製作所</a:t>
+              <a:t>東京ガス</a:t>
             </a:r>
           </a:p>
         </p:txBody>
       </p:sp>
       <p:pic>
         <p:nvPicPr>
-          <p:cNvPr id="62" name="Picture 61" descr="東京ガス.png"/>
+          <p:cNvPr id="62" name="Picture 61" descr="楽天グループ.png"/>
           <p:cNvPicPr>
             <a:picLocks noChangeAspect="1"/>
           </p:cNvPicPr>
@@ -4844,8 +4844,8 @@
         </p:blipFill>
         <p:spPr>
           <a:xfrm>
-            <a:off x="585893" y="5747657"/>
-            <a:ext cx="1815192" cy="378822"/>
+            <a:off x="916948" y="5747657"/>
+            <a:ext cx="1153083" cy="378822"/>
           </a:xfrm>
           <a:prstGeom prst="rect">
             <a:avLst/>
@@ -4881,14 +4881,14 @@
                   <a:srgbClr val="404040"/>
                 </a:solidFill>
               </a:rPr>
-              <a:t>東京ガス</a:t>
+              <a:t>楽天グループ</a:t>
             </a:r>
           </a:p>
         </p:txBody>
       </p:sp>
       <p:pic>
         <p:nvPicPr>
-          <p:cNvPr id="64" name="Picture 63" descr="楽天グループ.png"/>
+          <p:cNvPr id="64" name="Picture 63" descr="花王.png"/>
           <p:cNvPicPr>
             <a:picLocks noChangeAspect="1"/>
           </p:cNvPicPr>
@@ -4902,8 +4902,8 @@
         </p:blipFill>
         <p:spPr>
           <a:xfrm>
-            <a:off x="3218127" y="5747657"/>
-            <a:ext cx="1153083" cy="378822"/>
+            <a:off x="3460706" y="5747657"/>
+            <a:ext cx="667924" cy="378822"/>
           </a:xfrm>
           <a:prstGeom prst="rect">
             <a:avLst/>
@@ -4939,14 +4939,14 @@
                   <a:srgbClr val="404040"/>
                 </a:solidFill>
               </a:rPr>
-              <a:t>楽天グループ</a:t>
+              <a:t>花王</a:t>
             </a:r>
           </a:p>
         </p:txBody>
       </p:sp>
       <p:pic>
         <p:nvPicPr>
-          <p:cNvPr id="66" name="Picture 65" descr="花王.png"/>
+          <p:cNvPr id="66" name="Picture 65" descr="資生堂.png"/>
           <p:cNvPicPr>
             <a:picLocks noChangeAspect="1"/>
           </p:cNvPicPr>
@@ -4960,8 +4960,8 @@
         </p:blipFill>
         <p:spPr>
           <a:xfrm>
-            <a:off x="5761885" y="5747657"/>
-            <a:ext cx="667924" cy="378822"/>
+            <a:off x="5149714" y="5747657"/>
+            <a:ext cx="1892266" cy="378822"/>
           </a:xfrm>
           <a:prstGeom prst="rect">
             <a:avLst/>
@@ -4997,14 +4997,14 @@
                   <a:srgbClr val="404040"/>
                 </a:solidFill>
               </a:rPr>
-              <a:t>花王</a:t>
+              <a:t>資生堂</a:t>
             </a:r>
           </a:p>
         </p:txBody>
       </p:sp>
       <p:pic>
         <p:nvPicPr>
-          <p:cNvPr id="68" name="Picture 67" descr="資生堂.png"/>
+          <p:cNvPr id="68" name="Picture 67" descr="野村ホールディングス.png"/>
           <p:cNvPicPr>
             <a:picLocks noChangeAspect="1"/>
           </p:cNvPicPr>
@@ -5018,8 +5018,8 @@
         </p:blipFill>
         <p:spPr>
           <a:xfrm>
-            <a:off x="7450893" y="5747657"/>
-            <a:ext cx="1892266" cy="378822"/>
+            <a:off x="7486429" y="5747657"/>
+            <a:ext cx="1821195" cy="378822"/>
           </a:xfrm>
           <a:prstGeom prst="rect">
             <a:avLst/>
@@ -5035,64 +5035,6 @@
         <p:spPr>
           <a:xfrm>
             <a:off x="7360737" y="6126480"/>
-            <a:ext cx="2072579" cy="274320"/>
-          </a:xfrm>
-          <a:prstGeom prst="rect">
-            <a:avLst/>
-          </a:prstGeom>
-          <a:noFill/>
-        </p:spPr>
-        <p:txBody>
-          <a:bodyPr wrap="square">
-            <a:spAutoFit/>
-          </a:bodyPr>
-          <a:lstStyle/>
-          <a:p>
-            <a:pPr algn="ctr"/>
-            <a:r>
-              <a:rPr sz="1000">
-                <a:solidFill>
-                  <a:srgbClr val="404040"/>
-                </a:solidFill>
-              </a:rPr>
-              <a:t>資生堂</a:t>
-            </a:r>
-          </a:p>
-        </p:txBody>
-      </p:sp>
-      <p:pic>
-        <p:nvPicPr>
-          <p:cNvPr id="70" name="Picture 69" descr="野村ホールディングス.png"/>
-          <p:cNvPicPr>
-            <a:picLocks noChangeAspect="1"/>
-          </p:cNvPicPr>
-          <p:nvPr/>
-        </p:nvPicPr>
-        <p:blipFill>
-          <a:blip r:embed="rId36"/>
-          <a:stretch>
-            <a:fillRect/>
-          </a:stretch>
-        </p:blipFill>
-        <p:spPr>
-          <a:xfrm>
-            <a:off x="9787608" y="5747657"/>
-            <a:ext cx="1821195" cy="378822"/>
-          </a:xfrm>
-          <a:prstGeom prst="rect">
-            <a:avLst/>
-          </a:prstGeom>
-        </p:spPr>
-      </p:pic>
-      <p:sp>
-        <p:nvSpPr>
-          <p:cNvPr id="71" name="TextBox 70"/>
-          <p:cNvSpPr txBox="1"/>
-          <p:nvPr/>
-        </p:nvSpPr>
-        <p:spPr>
-          <a:xfrm>
-            <a:off x="9661916" y="6126480"/>
             <a:ext cx="2072579" cy="274320"/>
           </a:xfrm>
           <a:prstGeom prst="rect">

--- a/docs/logos.pptx
+++ b/docs/logos.pptx
@@ -4366,7 +4366,7 @@
       </p:sp>
       <p:pic>
         <p:nvPicPr>
-          <p:cNvPr id="46" name="Picture 45" descr="信越化学工業.png"/>
+          <p:cNvPr id="46" name="Picture 45" descr="味の素.png"/>
           <p:cNvPicPr>
             <a:picLocks noChangeAspect="1"/>
           </p:cNvPicPr>
@@ -4380,8 +4380,8 @@
         </p:blipFill>
         <p:spPr>
           <a:xfrm>
-            <a:off x="5738341" y="3984171"/>
-            <a:ext cx="715012" cy="378822"/>
+            <a:off x="5059558" y="4005536"/>
+            <a:ext cx="2072579" cy="336093"/>
           </a:xfrm>
           <a:prstGeom prst="rect">
             <a:avLst/>
@@ -4417,14 +4417,14 @@
                   <a:srgbClr val="404040"/>
                 </a:solidFill>
               </a:rPr>
-              <a:t>信越化学工業</a:t>
+              <a:t>味の素</a:t>
             </a:r>
           </a:p>
         </p:txBody>
       </p:sp>
       <p:pic>
         <p:nvPicPr>
-          <p:cNvPr id="48" name="Picture 47" descr="味の素.png"/>
+          <p:cNvPr id="48" name="Picture 47" descr="大和ハウス工業.png"/>
           <p:cNvPicPr>
             <a:picLocks noChangeAspect="1"/>
           </p:cNvPicPr>
@@ -4438,8 +4438,8 @@
         </p:blipFill>
         <p:spPr>
           <a:xfrm>
-            <a:off x="7360737" y="4005536"/>
-            <a:ext cx="2072579" cy="336093"/>
+            <a:off x="8159625" y="3984171"/>
+            <a:ext cx="474803" cy="378822"/>
           </a:xfrm>
           <a:prstGeom prst="rect">
             <a:avLst/>
@@ -4475,14 +4475,14 @@
                   <a:srgbClr val="404040"/>
                 </a:solidFill>
               </a:rPr>
-              <a:t>味の素</a:t>
+              <a:t>大和ハウス工業</a:t>
             </a:r>
           </a:p>
         </p:txBody>
       </p:sp>
       <p:pic>
         <p:nvPicPr>
-          <p:cNvPr id="50" name="Picture 49" descr="大和ハウス工業.png"/>
+          <p:cNvPr id="50" name="Picture 49" descr="富士通.png"/>
           <p:cNvPicPr>
             <a:picLocks noChangeAspect="1"/>
           </p:cNvPicPr>
@@ -4496,8 +4496,8 @@
         </p:blipFill>
         <p:spPr>
           <a:xfrm>
-            <a:off x="10460804" y="3984171"/>
-            <a:ext cx="474803" cy="378822"/>
+            <a:off x="10324492" y="3984171"/>
+            <a:ext cx="747426" cy="378822"/>
           </a:xfrm>
           <a:prstGeom prst="rect">
             <a:avLst/>
@@ -4533,14 +4533,14 @@
                   <a:srgbClr val="404040"/>
                 </a:solidFill>
               </a:rPr>
-              <a:t>大和ハウス工業</a:t>
+              <a:t>富士通</a:t>
             </a:r>
           </a:p>
         </p:txBody>
       </p:sp>
       <p:pic>
         <p:nvPicPr>
-          <p:cNvPr id="52" name="Picture 51" descr="富士通.png"/>
+          <p:cNvPr id="52" name="Picture 51" descr="日本郵政.png"/>
           <p:cNvPicPr>
             <a:picLocks noChangeAspect="1"/>
           </p:cNvPicPr>
@@ -4554,8 +4554,8 @@
         </p:blipFill>
         <p:spPr>
           <a:xfrm>
-            <a:off x="1119776" y="4865914"/>
-            <a:ext cx="747426" cy="378822"/>
+            <a:off x="1315770" y="4865914"/>
+            <a:ext cx="355438" cy="378822"/>
           </a:xfrm>
           <a:prstGeom prst="rect">
             <a:avLst/>
@@ -4591,14 +4591,14 @@
                   <a:srgbClr val="404040"/>
                 </a:solidFill>
               </a:rPr>
-              <a:t>富士通</a:t>
+              <a:t>日本郵政</a:t>
             </a:r>
           </a:p>
         </p:txBody>
       </p:sp>
       <p:pic>
         <p:nvPicPr>
-          <p:cNvPr id="54" name="Picture 53" descr="日本郵政.png"/>
+          <p:cNvPr id="54" name="Picture 53" descr="日立製作所.png"/>
           <p:cNvPicPr>
             <a:picLocks noChangeAspect="1"/>
           </p:cNvPicPr>
@@ -4612,8 +4612,8 @@
         </p:blipFill>
         <p:spPr>
           <a:xfrm>
-            <a:off x="3616949" y="4865914"/>
-            <a:ext cx="355438" cy="378822"/>
+            <a:off x="2803524" y="4865914"/>
+            <a:ext cx="1982288" cy="378822"/>
           </a:xfrm>
           <a:prstGeom prst="rect">
             <a:avLst/>
@@ -4649,14 +4649,14 @@
                   <a:srgbClr val="404040"/>
                 </a:solidFill>
               </a:rPr>
-              <a:t>日本郵政</a:t>
+              <a:t>日立製作所</a:t>
             </a:r>
           </a:p>
         </p:txBody>
       </p:sp>
       <p:pic>
         <p:nvPicPr>
-          <p:cNvPr id="56" name="Picture 55" descr="日立製作所.png"/>
+          <p:cNvPr id="56" name="Picture 55" descr="村田製作所.png"/>
           <p:cNvPicPr>
             <a:picLocks noChangeAspect="1"/>
           </p:cNvPicPr>
@@ -4670,8 +4670,8 @@
         </p:blipFill>
         <p:spPr>
           <a:xfrm>
-            <a:off x="5104703" y="4865914"/>
-            <a:ext cx="1982288" cy="378822"/>
+            <a:off x="5588554" y="4865914"/>
+            <a:ext cx="1014586" cy="378822"/>
           </a:xfrm>
           <a:prstGeom prst="rect">
             <a:avLst/>
@@ -4707,14 +4707,14 @@
                   <a:srgbClr val="404040"/>
                 </a:solidFill>
               </a:rPr>
-              <a:t>日立製作所</a:t>
+              <a:t>村田製作所</a:t>
             </a:r>
           </a:p>
         </p:txBody>
       </p:sp>
       <p:pic>
         <p:nvPicPr>
-          <p:cNvPr id="58" name="Picture 57" descr="村田製作所.png"/>
+          <p:cNvPr id="58" name="Picture 57" descr="東京ガス.png"/>
           <p:cNvPicPr>
             <a:picLocks noChangeAspect="1"/>
           </p:cNvPicPr>
@@ -4728,8 +4728,8 @@
         </p:blipFill>
         <p:spPr>
           <a:xfrm>
-            <a:off x="7889733" y="4865914"/>
-            <a:ext cx="1014586" cy="378822"/>
+            <a:off x="7489430" y="4865914"/>
+            <a:ext cx="1815192" cy="378822"/>
           </a:xfrm>
           <a:prstGeom prst="rect">
             <a:avLst/>
@@ -4765,14 +4765,14 @@
                   <a:srgbClr val="404040"/>
                 </a:solidFill>
               </a:rPr>
-              <a:t>村田製作所</a:t>
+              <a:t>東京ガス</a:t>
             </a:r>
           </a:p>
         </p:txBody>
       </p:sp>
       <p:pic>
         <p:nvPicPr>
-          <p:cNvPr id="60" name="Picture 59" descr="東京ガス.png"/>
+          <p:cNvPr id="60" name="Picture 59" descr="楽天グループ.png"/>
           <p:cNvPicPr>
             <a:picLocks noChangeAspect="1"/>
           </p:cNvPicPr>
@@ -4786,8 +4786,8 @@
         </p:blipFill>
         <p:spPr>
           <a:xfrm>
-            <a:off x="9790609" y="4865914"/>
-            <a:ext cx="1815192" cy="378822"/>
+            <a:off x="10121664" y="4865914"/>
+            <a:ext cx="1153083" cy="378822"/>
           </a:xfrm>
           <a:prstGeom prst="rect">
             <a:avLst/>
@@ -4823,14 +4823,14 @@
                   <a:srgbClr val="404040"/>
                 </a:solidFill>
               </a:rPr>
-              <a:t>東京ガス</a:t>
+              <a:t>楽天グループ</a:t>
             </a:r>
           </a:p>
         </p:txBody>
       </p:sp>
       <p:pic>
         <p:nvPicPr>
-          <p:cNvPr id="62" name="Picture 61" descr="楽天グループ.png"/>
+          <p:cNvPr id="62" name="Picture 61" descr="花王.png"/>
           <p:cNvPicPr>
             <a:picLocks noChangeAspect="1"/>
           </p:cNvPicPr>
@@ -4844,8 +4844,8 @@
         </p:blipFill>
         <p:spPr>
           <a:xfrm>
-            <a:off x="916948" y="5747657"/>
-            <a:ext cx="1153083" cy="378822"/>
+            <a:off x="1159527" y="5747657"/>
+            <a:ext cx="667924" cy="378822"/>
           </a:xfrm>
           <a:prstGeom prst="rect">
             <a:avLst/>
@@ -4881,14 +4881,14 @@
                   <a:srgbClr val="404040"/>
                 </a:solidFill>
               </a:rPr>
-              <a:t>楽天グループ</a:t>
+              <a:t>花王</a:t>
             </a:r>
           </a:p>
         </p:txBody>
       </p:sp>
       <p:pic>
         <p:nvPicPr>
-          <p:cNvPr id="64" name="Picture 63" descr="花王.png"/>
+          <p:cNvPr id="64" name="Picture 63" descr="資生堂.png"/>
           <p:cNvPicPr>
             <a:picLocks noChangeAspect="1"/>
           </p:cNvPicPr>
@@ -4902,8 +4902,8 @@
         </p:blipFill>
         <p:spPr>
           <a:xfrm>
-            <a:off x="3460706" y="5747657"/>
-            <a:ext cx="667924" cy="378822"/>
+            <a:off x="2848535" y="5747657"/>
+            <a:ext cx="1892266" cy="378822"/>
           </a:xfrm>
           <a:prstGeom prst="rect">
             <a:avLst/>
@@ -4939,14 +4939,14 @@
                   <a:srgbClr val="404040"/>
                 </a:solidFill>
               </a:rPr>
-              <a:t>花王</a:t>
+              <a:t>資生堂</a:t>
             </a:r>
           </a:p>
         </p:txBody>
       </p:sp>
       <p:pic>
         <p:nvPicPr>
-          <p:cNvPr id="66" name="Picture 65" descr="資生堂.png"/>
+          <p:cNvPr id="66" name="Picture 65" descr="野村ホールディングス.png"/>
           <p:cNvPicPr>
             <a:picLocks noChangeAspect="1"/>
           </p:cNvPicPr>
@@ -4960,8 +4960,8 @@
         </p:blipFill>
         <p:spPr>
           <a:xfrm>
-            <a:off x="5149714" y="5747657"/>
-            <a:ext cx="1892266" cy="378822"/>
+            <a:off x="5185250" y="5747657"/>
+            <a:ext cx="1821195" cy="378822"/>
           </a:xfrm>
           <a:prstGeom prst="rect">
             <a:avLst/>
@@ -4977,64 +4977,6 @@
         <p:spPr>
           <a:xfrm>
             <a:off x="5059558" y="6126480"/>
-            <a:ext cx="2072579" cy="274320"/>
-          </a:xfrm>
-          <a:prstGeom prst="rect">
-            <a:avLst/>
-          </a:prstGeom>
-          <a:noFill/>
-        </p:spPr>
-        <p:txBody>
-          <a:bodyPr wrap="square">
-            <a:spAutoFit/>
-          </a:bodyPr>
-          <a:lstStyle/>
-          <a:p>
-            <a:pPr algn="ctr"/>
-            <a:r>
-              <a:rPr sz="1000">
-                <a:solidFill>
-                  <a:srgbClr val="404040"/>
-                </a:solidFill>
-              </a:rPr>
-              <a:t>資生堂</a:t>
-            </a:r>
-          </a:p>
-        </p:txBody>
-      </p:sp>
-      <p:pic>
-        <p:nvPicPr>
-          <p:cNvPr id="68" name="Picture 67" descr="野村ホールディングス.png"/>
-          <p:cNvPicPr>
-            <a:picLocks noChangeAspect="1"/>
-          </p:cNvPicPr>
-          <p:nvPr/>
-        </p:nvPicPr>
-        <p:blipFill>
-          <a:blip r:embed="rId35"/>
-          <a:stretch>
-            <a:fillRect/>
-          </a:stretch>
-        </p:blipFill>
-        <p:spPr>
-          <a:xfrm>
-            <a:off x="7486429" y="5747657"/>
-            <a:ext cx="1821195" cy="378822"/>
-          </a:xfrm>
-          <a:prstGeom prst="rect">
-            <a:avLst/>
-          </a:prstGeom>
-        </p:spPr>
-      </p:pic>
-      <p:sp>
-        <p:nvSpPr>
-          <p:cNvPr id="69" name="TextBox 68"/>
-          <p:cNvSpPr txBox="1"/>
-          <p:nvPr/>
-        </p:nvSpPr>
-        <p:spPr>
-          <a:xfrm>
-            <a:off x="7360737" y="6126480"/>
             <a:ext cx="2072579" cy="274320"/>
           </a:xfrm>
           <a:prstGeom prst="rect">

--- a/docs/logos.pptx
+++ b/docs/logos.pptx
@@ -3104,8 +3104,8 @@
         </p:blipFill>
         <p:spPr>
           <a:xfrm>
-            <a:off x="1174432" y="457200"/>
-            <a:ext cx="638114" cy="378822"/>
+            <a:off x="1267262" y="457200"/>
+            <a:ext cx="452455" cy="268605"/>
           </a:xfrm>
           <a:prstGeom prst="rect">
             <a:avLst/>
@@ -3120,7 +3120,7 @@
         </p:nvSpPr>
         <p:spPr>
           <a:xfrm>
-            <a:off x="457200" y="836022"/>
+            <a:off x="457200" y="725805"/>
             <a:ext cx="2072579" cy="274320"/>
           </a:xfrm>
           <a:prstGeom prst="rect">
@@ -3162,8 +3162,8 @@
         </p:blipFill>
         <p:spPr>
           <a:xfrm>
-            <a:off x="3388787" y="457200"/>
-            <a:ext cx="811763" cy="378822"/>
+            <a:off x="3506877" y="457200"/>
+            <a:ext cx="575582" cy="268605"/>
           </a:xfrm>
           <a:prstGeom prst="rect">
             <a:avLst/>
@@ -3178,7 +3178,7 @@
         </p:nvSpPr>
         <p:spPr>
           <a:xfrm>
-            <a:off x="2758379" y="836022"/>
+            <a:off x="2758379" y="725805"/>
             <a:ext cx="2072579" cy="274320"/>
           </a:xfrm>
           <a:prstGeom prst="rect">
@@ -3220,8 +3220,8 @@
         </p:blipFill>
         <p:spPr>
           <a:xfrm>
-            <a:off x="5453605" y="457200"/>
-            <a:ext cx="1284485" cy="378822"/>
+            <a:off x="5640464" y="457200"/>
+            <a:ext cx="910766" cy="268605"/>
           </a:xfrm>
           <a:prstGeom prst="rect">
             <a:avLst/>
@@ -3236,7 +3236,7 @@
         </p:nvSpPr>
         <p:spPr>
           <a:xfrm>
-            <a:off x="5059558" y="836022"/>
+            <a:off x="5059558" y="725805"/>
             <a:ext cx="2072579" cy="274320"/>
           </a:xfrm>
           <a:prstGeom prst="rect">
@@ -3278,8 +3278,8 @@
         </p:blipFill>
         <p:spPr>
           <a:xfrm>
-            <a:off x="7598692" y="457200"/>
-            <a:ext cx="1596668" cy="378822"/>
+            <a:off x="7830966" y="457200"/>
+            <a:ext cx="1132120" cy="268605"/>
           </a:xfrm>
           <a:prstGeom prst="rect">
             <a:avLst/>
@@ -3294,7 +3294,7 @@
         </p:nvSpPr>
         <p:spPr>
           <a:xfrm>
-            <a:off x="7360737" y="836022"/>
+            <a:off x="7360737" y="725805"/>
             <a:ext cx="2072579" cy="274320"/>
           </a:xfrm>
           <a:prstGeom prst="rect">
@@ -3322,7 +3322,7 @@
       </p:sp>
       <p:pic>
         <p:nvPicPr>
-          <p:cNvPr id="10" name="Picture 9" descr="SyncMe.png"/>
+          <p:cNvPr id="10" name="Picture 9" descr="NTTドコモ.png"/>
           <p:cNvPicPr>
             <a:picLocks noChangeAspect="1"/>
           </p:cNvPicPr>
@@ -3336,8 +3336,8 @@
         </p:blipFill>
         <p:spPr>
           <a:xfrm>
-            <a:off x="9914939" y="457200"/>
-            <a:ext cx="1566533" cy="378822"/>
+            <a:off x="10440431" y="457200"/>
+            <a:ext cx="515548" cy="268605"/>
           </a:xfrm>
           <a:prstGeom prst="rect">
             <a:avLst/>
@@ -3352,7 +3352,7 @@
         </p:nvSpPr>
         <p:spPr>
           <a:xfrm>
-            <a:off x="9661916" y="836022"/>
+            <a:off x="9661916" y="725805"/>
             <a:ext cx="2072579" cy="274320"/>
           </a:xfrm>
           <a:prstGeom prst="rect">
@@ -3373,14 +3373,14 @@
                   <a:srgbClr val="404040"/>
                 </a:solidFill>
               </a:rPr>
-              <a:t>SyncMe</a:t>
+              <a:t>NTTドコモ</a:t>
             </a:r>
           </a:p>
         </p:txBody>
       </p:sp>
       <p:pic>
         <p:nvPicPr>
-          <p:cNvPr id="12" name="Picture 11" descr="アサヒグループホールディングス.png"/>
+          <p:cNvPr id="12" name="Picture 11" descr="SyncMe.png"/>
           <p:cNvPicPr>
             <a:picLocks noChangeAspect="1"/>
           </p:cNvPicPr>
@@ -3394,8 +3394,8 @@
         </p:blipFill>
         <p:spPr>
           <a:xfrm>
-            <a:off x="1226992" y="1338943"/>
-            <a:ext cx="532994" cy="378822"/>
+            <a:off x="938113" y="1228725"/>
+            <a:ext cx="1110753" cy="268605"/>
           </a:xfrm>
           <a:prstGeom prst="rect">
             <a:avLst/>
@@ -3410,7 +3410,7 @@
         </p:nvSpPr>
         <p:spPr>
           <a:xfrm>
-            <a:off x="457200" y="1717765"/>
+            <a:off x="457200" y="1497330"/>
             <a:ext cx="2072579" cy="274320"/>
           </a:xfrm>
           <a:prstGeom prst="rect">
@@ -3431,14 +3431,14 @@
                   <a:srgbClr val="404040"/>
                 </a:solidFill>
               </a:rPr>
-              <a:t>アサヒグループホールディングス</a:t>
+              <a:t>SyncMe</a:t>
             </a:r>
           </a:p>
         </p:txBody>
       </p:sp>
       <p:pic>
         <p:nvPicPr>
-          <p:cNvPr id="14" name="Picture 13" descr="オリエンタルランド.png"/>
+          <p:cNvPr id="14" name="Picture 13" descr="dアカウント.png"/>
           <p:cNvPicPr>
             <a:picLocks noChangeAspect="1"/>
           </p:cNvPicPr>
@@ -3452,8 +3452,8 @@
         </p:blipFill>
         <p:spPr>
           <a:xfrm>
-            <a:off x="3433065" y="1338943"/>
-            <a:ext cx="723207" cy="378822"/>
+            <a:off x="3659364" y="1228725"/>
+            <a:ext cx="270609" cy="268605"/>
           </a:xfrm>
           <a:prstGeom prst="rect">
             <a:avLst/>
@@ -3468,7 +3468,7 @@
         </p:nvSpPr>
         <p:spPr>
           <a:xfrm>
-            <a:off x="2758379" y="1717765"/>
+            <a:off x="2758379" y="1497330"/>
             <a:ext cx="2072579" cy="274320"/>
           </a:xfrm>
           <a:prstGeom prst="rect">
@@ -3489,14 +3489,14 @@
                   <a:srgbClr val="404040"/>
                 </a:solidFill>
               </a:rPr>
-              <a:t>オリエンタルランド</a:t>
+              <a:t>dアカウント</a:t>
             </a:r>
           </a:p>
         </p:txBody>
       </p:sp>
       <p:pic>
         <p:nvPicPr>
-          <p:cNvPr id="16" name="Picture 15" descr="オリンパス.png"/>
+          <p:cNvPr id="16" name="Picture 15" descr="dポイント.png"/>
           <p:cNvPicPr>
             <a:picLocks noChangeAspect="1"/>
           </p:cNvPicPr>
@@ -3510,8 +3510,8 @@
         </p:blipFill>
         <p:spPr>
           <a:xfrm>
-            <a:off x="5236990" y="1338943"/>
-            <a:ext cx="1717715" cy="378822"/>
+            <a:off x="5991535" y="1228725"/>
+            <a:ext cx="208625" cy="268605"/>
           </a:xfrm>
           <a:prstGeom prst="rect">
             <a:avLst/>
@@ -3526,7 +3526,7 @@
         </p:nvSpPr>
         <p:spPr>
           <a:xfrm>
-            <a:off x="5059558" y="1717765"/>
+            <a:off x="5059558" y="1497330"/>
             <a:ext cx="2072579" cy="274320"/>
           </a:xfrm>
           <a:prstGeom prst="rect">
@@ -3547,14 +3547,14 @@
                   <a:srgbClr val="404040"/>
                 </a:solidFill>
               </a:rPr>
-              <a:t>オリンパス</a:t>
+              <a:t>dポイント</a:t>
             </a:r>
           </a:p>
         </p:txBody>
       </p:sp>
       <p:pic>
         <p:nvPicPr>
-          <p:cNvPr id="18" name="Picture 17" descr="キーエンス.png"/>
+          <p:cNvPr id="18" name="Picture 17" descr="アサヒグループホールディングス.png"/>
           <p:cNvPicPr>
             <a:picLocks noChangeAspect="1"/>
           </p:cNvPicPr>
@@ -3568,8 +3568,8 @@
         </p:blipFill>
         <p:spPr>
           <a:xfrm>
-            <a:off x="7515034" y="1338943"/>
-            <a:ext cx="1763984" cy="378822"/>
+            <a:off x="8208066" y="1228725"/>
+            <a:ext cx="377920" cy="268605"/>
           </a:xfrm>
           <a:prstGeom prst="rect">
             <a:avLst/>
@@ -3584,7 +3584,7 @@
         </p:nvSpPr>
         <p:spPr>
           <a:xfrm>
-            <a:off x="7360737" y="1717765"/>
+            <a:off x="7360737" y="1497330"/>
             <a:ext cx="2072579" cy="274320"/>
           </a:xfrm>
           <a:prstGeom prst="rect">
@@ -3605,14 +3605,14 @@
                   <a:srgbClr val="404040"/>
                 </a:solidFill>
               </a:rPr>
-              <a:t>キーエンス</a:t>
+              <a:t>アサヒグループホールディングス</a:t>
             </a:r>
           </a:p>
         </p:txBody>
       </p:sp>
       <p:pic>
         <p:nvPicPr>
-          <p:cNvPr id="20" name="Picture 19" descr="コマツ.png"/>
+          <p:cNvPr id="20" name="Picture 19" descr="オリエンタルランド.png"/>
           <p:cNvPicPr>
             <a:picLocks noChangeAspect="1"/>
           </p:cNvPicPr>
@@ -3626,8 +3626,8 @@
         </p:blipFill>
         <p:spPr>
           <a:xfrm>
-            <a:off x="9832325" y="1338943"/>
-            <a:ext cx="1731761" cy="378822"/>
+            <a:off x="10441810" y="1228725"/>
+            <a:ext cx="512791" cy="268605"/>
           </a:xfrm>
           <a:prstGeom prst="rect">
             <a:avLst/>
@@ -3642,7 +3642,7 @@
         </p:nvSpPr>
         <p:spPr>
           <a:xfrm>
-            <a:off x="9661916" y="1717765"/>
+            <a:off x="9661916" y="1497330"/>
             <a:ext cx="2072579" cy="274320"/>
           </a:xfrm>
           <a:prstGeom prst="rect">
@@ -3663,14 +3663,14 @@
                   <a:srgbClr val="404040"/>
                 </a:solidFill>
               </a:rPr>
-              <a:t>コマツ</a:t>
+              <a:t>オリエンタルランド</a:t>
             </a:r>
           </a:p>
         </p:txBody>
       </p:sp>
       <p:pic>
         <p:nvPicPr>
-          <p:cNvPr id="22" name="Picture 21" descr="セコム.png"/>
+          <p:cNvPr id="22" name="Picture 21" descr="オリンパス.png"/>
           <p:cNvPicPr>
             <a:picLocks noChangeAspect="1"/>
           </p:cNvPicPr>
@@ -3684,8 +3684,8 @@
         </p:blipFill>
         <p:spPr>
           <a:xfrm>
-            <a:off x="1003075" y="2220686"/>
-            <a:ext cx="980828" cy="378822"/>
+            <a:off x="884515" y="2000250"/>
+            <a:ext cx="1217949" cy="268605"/>
           </a:xfrm>
           <a:prstGeom prst="rect">
             <a:avLst/>
@@ -3700,7 +3700,7 @@
         </p:nvSpPr>
         <p:spPr>
           <a:xfrm>
-            <a:off x="457200" y="2599508"/>
+            <a:off x="457200" y="2268855"/>
             <a:ext cx="2072579" cy="274320"/>
           </a:xfrm>
           <a:prstGeom prst="rect">
@@ -3721,14 +3721,14 @@
                   <a:srgbClr val="404040"/>
                 </a:solidFill>
               </a:rPr>
-              <a:t>セコム</a:t>
+              <a:t>オリンパス</a:t>
             </a:r>
           </a:p>
         </p:txBody>
       </p:sp>
       <p:pic>
         <p:nvPicPr>
-          <p:cNvPr id="24" name="Picture 23" descr="セブン&amp;アイ・ホールディングス.png"/>
+          <p:cNvPr id="24" name="Picture 23" descr="キーエンス.png"/>
           <p:cNvPicPr>
             <a:picLocks noChangeAspect="1"/>
           </p:cNvPicPr>
@@ -3742,8 +3742,8 @@
         </p:blipFill>
         <p:spPr>
           <a:xfrm>
-            <a:off x="3585143" y="2220686"/>
-            <a:ext cx="419051" cy="378822"/>
+            <a:off x="3169290" y="2000250"/>
+            <a:ext cx="1250756" cy="268605"/>
           </a:xfrm>
           <a:prstGeom prst="rect">
             <a:avLst/>
@@ -3758,7 +3758,7 @@
         </p:nvSpPr>
         <p:spPr>
           <a:xfrm>
-            <a:off x="2758379" y="2599508"/>
+            <a:off x="2758379" y="2268855"/>
             <a:ext cx="2072579" cy="274320"/>
           </a:xfrm>
           <a:prstGeom prst="rect">
@@ -3779,14 +3779,14 @@
                   <a:srgbClr val="404040"/>
                 </a:solidFill>
               </a:rPr>
-              <a:t>セブン&amp;アイ・ホールディングス</a:t>
+              <a:t>キーエンス</a:t>
             </a:r>
           </a:p>
         </p:txBody>
       </p:sp>
       <p:pic>
         <p:nvPicPr>
-          <p:cNvPr id="26" name="Picture 25" descr="ソニーグループ.png"/>
+          <p:cNvPr id="26" name="Picture 25" descr="コマツ.png"/>
           <p:cNvPicPr>
             <a:picLocks noChangeAspect="1"/>
           </p:cNvPicPr>
@@ -3800,8 +3800,8 @@
         </p:blipFill>
         <p:spPr>
           <a:xfrm>
-            <a:off x="5190496" y="2220686"/>
-            <a:ext cx="1810703" cy="378822"/>
+            <a:off x="5481893" y="2000250"/>
+            <a:ext cx="1227908" cy="268605"/>
           </a:xfrm>
           <a:prstGeom prst="rect">
             <a:avLst/>
@@ -3816,7 +3816,7 @@
         </p:nvSpPr>
         <p:spPr>
           <a:xfrm>
-            <a:off x="5059558" y="2599508"/>
+            <a:off x="5059558" y="2268855"/>
             <a:ext cx="2072579" cy="274320"/>
           </a:xfrm>
           <a:prstGeom prst="rect">
@@ -3837,14 +3837,14 @@
                   <a:srgbClr val="404040"/>
                 </a:solidFill>
               </a:rPr>
-              <a:t>ソニーグループ</a:t>
+              <a:t>コマツ</a:t>
             </a:r>
           </a:p>
         </p:txBody>
       </p:sp>
       <p:pic>
         <p:nvPicPr>
-          <p:cNvPr id="28" name="Picture 27" descr="ダイキン工業.png"/>
+          <p:cNvPr id="28" name="Picture 27" descr="セコム.png"/>
           <p:cNvPicPr>
             <a:picLocks noChangeAspect="1"/>
           </p:cNvPicPr>
@@ -3858,8 +3858,8 @@
         </p:blipFill>
         <p:spPr>
           <a:xfrm>
-            <a:off x="7610609" y="2220686"/>
-            <a:ext cx="1572834" cy="378822"/>
+            <a:off x="8049298" y="2000250"/>
+            <a:ext cx="695457" cy="268605"/>
           </a:xfrm>
           <a:prstGeom prst="rect">
             <a:avLst/>
@@ -3874,7 +3874,7 @@
         </p:nvSpPr>
         <p:spPr>
           <a:xfrm>
-            <a:off x="7360737" y="2599508"/>
+            <a:off x="7360737" y="2268855"/>
             <a:ext cx="2072579" cy="274320"/>
           </a:xfrm>
           <a:prstGeom prst="rect">
@@ -3895,14 +3895,14 @@
                   <a:srgbClr val="404040"/>
                 </a:solidFill>
               </a:rPr>
-              <a:t>ダイキン工業</a:t>
+              <a:t>セコム</a:t>
             </a:r>
           </a:p>
         </p:txBody>
       </p:sp>
       <p:pic>
         <p:nvPicPr>
-          <p:cNvPr id="30" name="Picture 29" descr="トヨタ自動車.png"/>
+          <p:cNvPr id="30" name="Picture 29" descr="セブン&amp;アイ・ホールディングス.png"/>
           <p:cNvPicPr>
             <a:picLocks noChangeAspect="1"/>
           </p:cNvPicPr>
@@ -3916,8 +3916,8 @@
         </p:blipFill>
         <p:spPr>
           <a:xfrm>
-            <a:off x="10425545" y="2220686"/>
-            <a:ext cx="545321" cy="378822"/>
+            <a:off x="10549641" y="2000250"/>
+            <a:ext cx="297129" cy="268605"/>
           </a:xfrm>
           <a:prstGeom prst="rect">
             <a:avLst/>
@@ -3932,7 +3932,7 @@
         </p:nvSpPr>
         <p:spPr>
           <a:xfrm>
-            <a:off x="9661916" y="2599508"/>
+            <a:off x="9661916" y="2268855"/>
             <a:ext cx="2072579" cy="274320"/>
           </a:xfrm>
           <a:prstGeom prst="rect">
@@ -3953,14 +3953,14 @@
                   <a:srgbClr val="404040"/>
                 </a:solidFill>
               </a:rPr>
-              <a:t>トヨタ自動車</a:t>
+              <a:t>セブン&amp;アイ・ホールディングス</a:t>
             </a:r>
           </a:p>
         </p:txBody>
       </p:sp>
       <p:pic>
         <p:nvPicPr>
-          <p:cNvPr id="32" name="Picture 31" descr="パナソニック.png"/>
+          <p:cNvPr id="32" name="Picture 31" descr="ソニーグループ.png"/>
           <p:cNvPicPr>
             <a:picLocks noChangeAspect="1"/>
           </p:cNvPicPr>
@@ -3974,8 +3974,8 @@
         </p:blipFill>
         <p:spPr>
           <a:xfrm>
-            <a:off x="457200" y="3103424"/>
-            <a:ext cx="2072578" cy="376832"/>
+            <a:off x="851548" y="2771775"/>
+            <a:ext cx="1283882" cy="268605"/>
           </a:xfrm>
           <a:prstGeom prst="rect">
             <a:avLst/>
@@ -3990,7 +3990,7 @@
         </p:nvSpPr>
         <p:spPr>
           <a:xfrm>
-            <a:off x="457200" y="3481251"/>
+            <a:off x="457200" y="3040380"/>
             <a:ext cx="2072579" cy="274320"/>
           </a:xfrm>
           <a:prstGeom prst="rect">
@@ -4011,14 +4011,14 @@
                   <a:srgbClr val="404040"/>
                 </a:solidFill>
               </a:rPr>
-              <a:t>パナソニック</a:t>
+              <a:t>ソニーグループ</a:t>
             </a:r>
           </a:p>
         </p:txBody>
       </p:sp>
       <p:pic>
         <p:nvPicPr>
-          <p:cNvPr id="34" name="Picture 33" descr="ファーストリテイリング.png"/>
+          <p:cNvPr id="34" name="Picture 33" descr="ダイキン工業.png"/>
           <p:cNvPicPr>
             <a:picLocks noChangeAspect="1"/>
           </p:cNvPicPr>
@@ -4032,8 +4032,8 @@
         </p:blipFill>
         <p:spPr>
           <a:xfrm>
-            <a:off x="3418476" y="3102429"/>
-            <a:ext cx="752384" cy="378822"/>
+            <a:off x="3237058" y="2771775"/>
+            <a:ext cx="1115220" cy="268605"/>
           </a:xfrm>
           <a:prstGeom prst="rect">
             <a:avLst/>
@@ -4048,7 +4048,7 @@
         </p:nvSpPr>
         <p:spPr>
           <a:xfrm>
-            <a:off x="2758379" y="3481251"/>
+            <a:off x="2758379" y="3040380"/>
             <a:ext cx="2072579" cy="274320"/>
           </a:xfrm>
           <a:prstGeom prst="rect">
@@ -4069,14 +4069,14 @@
                   <a:srgbClr val="404040"/>
                 </a:solidFill>
               </a:rPr>
-              <a:t>ファーストリテイリング</a:t>
+              <a:t>ダイキン工業</a:t>
             </a:r>
           </a:p>
         </p:txBody>
       </p:sp>
       <p:pic>
         <p:nvPicPr>
-          <p:cNvPr id="36" name="Picture 35" descr="ホンダ.png"/>
+          <p:cNvPr id="36" name="Picture 35" descr="トヨタ自動車.png"/>
           <p:cNvPicPr>
             <a:picLocks noChangeAspect="1"/>
           </p:cNvPicPr>
@@ -4090,8 +4090,8 @@
         </p:blipFill>
         <p:spPr>
           <a:xfrm>
-            <a:off x="5059558" y="3125805"/>
-            <a:ext cx="2072578" cy="332070"/>
+            <a:off x="5902517" y="2771775"/>
+            <a:ext cx="386661" cy="268605"/>
           </a:xfrm>
           <a:prstGeom prst="rect">
             <a:avLst/>
@@ -4106,7 +4106,7 @@
         </p:nvSpPr>
         <p:spPr>
           <a:xfrm>
-            <a:off x="5059558" y="3481251"/>
+            <a:off x="5059558" y="3040380"/>
             <a:ext cx="2072579" cy="274320"/>
           </a:xfrm>
           <a:prstGeom prst="rect">
@@ -4127,14 +4127,14 @@
                   <a:srgbClr val="404040"/>
                 </a:solidFill>
               </a:rPr>
-              <a:t>ホンダ</a:t>
+              <a:t>トヨタ自動車</a:t>
             </a:r>
           </a:p>
         </p:txBody>
       </p:sp>
       <p:pic>
         <p:nvPicPr>
-          <p:cNvPr id="38" name="Picture 37" descr="リクルートホールディングス.png"/>
+          <p:cNvPr id="38" name="Picture 37" descr="ドコモの銀行.png"/>
           <p:cNvPicPr>
             <a:picLocks noChangeAspect="1"/>
           </p:cNvPicPr>
@@ -4148,8 +4148,8 @@
         </p:blipFill>
         <p:spPr>
           <a:xfrm>
-            <a:off x="7745870" y="3102429"/>
-            <a:ext cx="1302312" cy="378822"/>
+            <a:off x="7957186" y="2771775"/>
+            <a:ext cx="879681" cy="268605"/>
           </a:xfrm>
           <a:prstGeom prst="rect">
             <a:avLst/>
@@ -4164,7 +4164,7 @@
         </p:nvSpPr>
         <p:spPr>
           <a:xfrm>
-            <a:off x="7360737" y="3481251"/>
+            <a:off x="7360737" y="3040380"/>
             <a:ext cx="2072579" cy="274320"/>
           </a:xfrm>
           <a:prstGeom prst="rect">
@@ -4185,14 +4185,14 @@
                   <a:srgbClr val="404040"/>
                 </a:solidFill>
               </a:rPr>
-              <a:t>リクルートホールディングス</a:t>
+              <a:t>ドコモの銀行</a:t>
             </a:r>
           </a:p>
         </p:txBody>
       </p:sp>
       <p:pic>
         <p:nvPicPr>
-          <p:cNvPr id="40" name="Picture 39" descr="三井住友銀行.png"/>
+          <p:cNvPr id="40" name="Picture 39" descr="パナソニック.png"/>
           <p:cNvPicPr>
             <a:picLocks noChangeAspect="1"/>
           </p:cNvPicPr>
@@ -4206,8 +4206,8 @@
         </p:blipFill>
         <p:spPr>
           <a:xfrm>
-            <a:off x="10068474" y="3102429"/>
-            <a:ext cx="1259463" cy="378822"/>
+            <a:off x="9959542" y="2771775"/>
+            <a:ext cx="1477327" cy="268605"/>
           </a:xfrm>
           <a:prstGeom prst="rect">
             <a:avLst/>
@@ -4222,7 +4222,7 @@
         </p:nvSpPr>
         <p:spPr>
           <a:xfrm>
-            <a:off x="9661916" y="3481251"/>
+            <a:off x="9661916" y="3040380"/>
             <a:ext cx="2072579" cy="274320"/>
           </a:xfrm>
           <a:prstGeom prst="rect">
@@ -4243,14 +4243,14 @@
                   <a:srgbClr val="404040"/>
                 </a:solidFill>
               </a:rPr>
-              <a:t>三井住友銀行</a:t>
+              <a:t>パナソニック</a:t>
             </a:r>
           </a:p>
         </p:txBody>
       </p:sp>
       <p:pic>
         <p:nvPicPr>
-          <p:cNvPr id="42" name="Picture 41" descr="三菱電機.png"/>
+          <p:cNvPr id="42" name="Picture 41" descr="ファーストリテイリング.png"/>
           <p:cNvPicPr>
             <a:picLocks noChangeAspect="1"/>
           </p:cNvPicPr>
@@ -4264,8 +4264,8 @@
         </p:blipFill>
         <p:spPr>
           <a:xfrm>
-            <a:off x="910685" y="3984171"/>
-            <a:ext cx="1165608" cy="378822"/>
+            <a:off x="1226750" y="3543300"/>
+            <a:ext cx="533479" cy="268605"/>
           </a:xfrm>
           <a:prstGeom prst="rect">
             <a:avLst/>
@@ -4280,7 +4280,7 @@
         </p:nvSpPr>
         <p:spPr>
           <a:xfrm>
-            <a:off x="457200" y="4362994"/>
+            <a:off x="457200" y="3811905"/>
             <a:ext cx="2072579" cy="274320"/>
           </a:xfrm>
           <a:prstGeom prst="rect">
@@ -4301,14 +4301,14 @@
                   <a:srgbClr val="404040"/>
                 </a:solidFill>
               </a:rPr>
-              <a:t>三菱電機</a:t>
+              <a:t>ファーストリテイリング</a:t>
             </a:r>
           </a:p>
         </p:txBody>
       </p:sp>
       <p:pic>
         <p:nvPicPr>
-          <p:cNvPr id="44" name="Picture 43" descr="任天堂.png"/>
+          <p:cNvPr id="44" name="Picture 43" descr="ホンダ.png"/>
           <p:cNvPicPr>
             <a:picLocks noChangeAspect="1"/>
           </p:cNvPicPr>
@@ -4322,8 +4322,8 @@
         </p:blipFill>
         <p:spPr>
           <a:xfrm>
-            <a:off x="3106877" y="3984171"/>
-            <a:ext cx="1375583" cy="378822"/>
+            <a:off x="2956436" y="3543300"/>
+            <a:ext cx="1676465" cy="268605"/>
           </a:xfrm>
           <a:prstGeom prst="rect">
             <a:avLst/>
@@ -4338,7 +4338,7 @@
         </p:nvSpPr>
         <p:spPr>
           <a:xfrm>
-            <a:off x="2758379" y="4362994"/>
+            <a:off x="2758379" y="3811905"/>
             <a:ext cx="2072579" cy="274320"/>
           </a:xfrm>
           <a:prstGeom prst="rect">
@@ -4359,14 +4359,14 @@
                   <a:srgbClr val="404040"/>
                 </a:solidFill>
               </a:rPr>
-              <a:t>任天堂</a:t>
+              <a:t>ホンダ</a:t>
             </a:r>
           </a:p>
         </p:txBody>
       </p:sp>
       <p:pic>
         <p:nvPicPr>
-          <p:cNvPr id="46" name="Picture 45" descr="味の素.png"/>
+          <p:cNvPr id="46" name="Picture 45" descr="リクルートホールディングス.png"/>
           <p:cNvPicPr>
             <a:picLocks noChangeAspect="1"/>
           </p:cNvPicPr>
@@ -4380,8 +4380,8 @@
         </p:blipFill>
         <p:spPr>
           <a:xfrm>
-            <a:off x="5059558" y="4005536"/>
-            <a:ext cx="2072579" cy="336093"/>
+            <a:off x="5634144" y="3543300"/>
+            <a:ext cx="923407" cy="268605"/>
           </a:xfrm>
           <a:prstGeom prst="rect">
             <a:avLst/>
@@ -4396,7 +4396,7 @@
         </p:nvSpPr>
         <p:spPr>
           <a:xfrm>
-            <a:off x="5059558" y="4362994"/>
+            <a:off x="5059558" y="3811905"/>
             <a:ext cx="2072579" cy="274320"/>
           </a:xfrm>
           <a:prstGeom prst="rect">
@@ -4417,14 +4417,14 @@
                   <a:srgbClr val="404040"/>
                 </a:solidFill>
               </a:rPr>
-              <a:t>味の素</a:t>
+              <a:t>リクルートホールディングス</a:t>
             </a:r>
           </a:p>
         </p:txBody>
       </p:sp>
       <p:pic>
         <p:nvPicPr>
-          <p:cNvPr id="48" name="Picture 47" descr="大和ハウス工業.png"/>
+          <p:cNvPr id="48" name="Picture 47" descr="三井住友銀行.png"/>
           <p:cNvPicPr>
             <a:picLocks noChangeAspect="1"/>
           </p:cNvPicPr>
@@ -4438,8 +4438,8 @@
         </p:blipFill>
         <p:spPr>
           <a:xfrm>
-            <a:off x="8159625" y="3984171"/>
-            <a:ext cx="474803" cy="378822"/>
+            <a:off x="7950514" y="3543300"/>
+            <a:ext cx="893024" cy="268605"/>
           </a:xfrm>
           <a:prstGeom prst="rect">
             <a:avLst/>
@@ -4454,7 +4454,7 @@
         </p:nvSpPr>
         <p:spPr>
           <a:xfrm>
-            <a:off x="7360737" y="4362994"/>
+            <a:off x="7360737" y="3811905"/>
             <a:ext cx="2072579" cy="274320"/>
           </a:xfrm>
           <a:prstGeom prst="rect">
@@ -4475,14 +4475,14 @@
                   <a:srgbClr val="404040"/>
                 </a:solidFill>
               </a:rPr>
-              <a:t>大和ハウス工業</a:t>
+              <a:t>三井住友銀行</a:t>
             </a:r>
           </a:p>
         </p:txBody>
       </p:sp>
       <p:pic>
         <p:nvPicPr>
-          <p:cNvPr id="50" name="Picture 49" descr="富士通.png"/>
+          <p:cNvPr id="50" name="Picture 49" descr="三菱電機.png"/>
           <p:cNvPicPr>
             <a:picLocks noChangeAspect="1"/>
           </p:cNvPicPr>
@@ -4496,8 +4496,8 @@
         </p:blipFill>
         <p:spPr>
           <a:xfrm>
-            <a:off x="10324492" y="3984171"/>
-            <a:ext cx="747426" cy="378822"/>
+            <a:off x="10284967" y="3543300"/>
+            <a:ext cx="826476" cy="268605"/>
           </a:xfrm>
           <a:prstGeom prst="rect">
             <a:avLst/>
@@ -4512,7 +4512,7 @@
         </p:nvSpPr>
         <p:spPr>
           <a:xfrm>
-            <a:off x="9661916" y="4362994"/>
+            <a:off x="9661916" y="3811905"/>
             <a:ext cx="2072579" cy="274320"/>
           </a:xfrm>
           <a:prstGeom prst="rect">
@@ -4533,14 +4533,14 @@
                   <a:srgbClr val="404040"/>
                 </a:solidFill>
               </a:rPr>
-              <a:t>富士通</a:t>
+              <a:t>三菱電機</a:t>
             </a:r>
           </a:p>
         </p:txBody>
       </p:sp>
       <p:pic>
         <p:nvPicPr>
-          <p:cNvPr id="52" name="Picture 51" descr="日本郵政.png"/>
+          <p:cNvPr id="52" name="Picture 51" descr="任天堂.png"/>
           <p:cNvPicPr>
             <a:picLocks noChangeAspect="1"/>
           </p:cNvPicPr>
@@ -4554,8 +4554,8 @@
         </p:blipFill>
         <p:spPr>
           <a:xfrm>
-            <a:off x="1315770" y="4865914"/>
-            <a:ext cx="355438" cy="378822"/>
+            <a:off x="1005809" y="4314825"/>
+            <a:ext cx="975360" cy="268605"/>
           </a:xfrm>
           <a:prstGeom prst="rect">
             <a:avLst/>
@@ -4570,7 +4570,7 @@
         </p:nvSpPr>
         <p:spPr>
           <a:xfrm>
-            <a:off x="457200" y="5244737"/>
+            <a:off x="457200" y="4583430"/>
             <a:ext cx="2072579" cy="274320"/>
           </a:xfrm>
           <a:prstGeom prst="rect">
@@ -4591,14 +4591,14 @@
                   <a:srgbClr val="404040"/>
                 </a:solidFill>
               </a:rPr>
-              <a:t>日本郵政</a:t>
+              <a:t>任天堂</a:t>
             </a:r>
           </a:p>
         </p:txBody>
       </p:sp>
       <p:pic>
         <p:nvPicPr>
-          <p:cNvPr id="54" name="Picture 53" descr="日立製作所.png"/>
+          <p:cNvPr id="54" name="Picture 53" descr="味の素.png"/>
           <p:cNvPicPr>
             <a:picLocks noChangeAspect="1"/>
           </p:cNvPicPr>
@@ -4612,8 +4612,8 @@
         </p:blipFill>
         <p:spPr>
           <a:xfrm>
-            <a:off x="2803524" y="4865914"/>
-            <a:ext cx="1982288" cy="378822"/>
+            <a:off x="2966470" y="4314825"/>
+            <a:ext cx="1656397" cy="268605"/>
           </a:xfrm>
           <a:prstGeom prst="rect">
             <a:avLst/>
@@ -4628,7 +4628,7 @@
         </p:nvSpPr>
         <p:spPr>
           <a:xfrm>
-            <a:off x="2758379" y="5244737"/>
+            <a:off x="2758379" y="4583430"/>
             <a:ext cx="2072579" cy="274320"/>
           </a:xfrm>
           <a:prstGeom prst="rect">
@@ -4649,14 +4649,14 @@
                   <a:srgbClr val="404040"/>
                 </a:solidFill>
               </a:rPr>
-              <a:t>日立製作所</a:t>
+              <a:t>味の素</a:t>
             </a:r>
           </a:p>
         </p:txBody>
       </p:sp>
       <p:pic>
         <p:nvPicPr>
-          <p:cNvPr id="56" name="Picture 55" descr="村田製作所.png"/>
+          <p:cNvPr id="56" name="Picture 55" descr="大和ハウス工業.png"/>
           <p:cNvPicPr>
             <a:picLocks noChangeAspect="1"/>
           </p:cNvPicPr>
@@ -4670,8 +4670,8 @@
         </p:blipFill>
         <p:spPr>
           <a:xfrm>
-            <a:off x="5588554" y="4865914"/>
-            <a:ext cx="1014586" cy="378822"/>
+            <a:off x="5927517" y="4314825"/>
+            <a:ext cx="336660" cy="268605"/>
           </a:xfrm>
           <a:prstGeom prst="rect">
             <a:avLst/>
@@ -4686,7 +4686,7 @@
         </p:nvSpPr>
         <p:spPr>
           <a:xfrm>
-            <a:off x="5059558" y="5244737"/>
+            <a:off x="5059558" y="4583430"/>
             <a:ext cx="2072579" cy="274320"/>
           </a:xfrm>
           <a:prstGeom prst="rect">
@@ -4707,14 +4707,14 @@
                   <a:srgbClr val="404040"/>
                 </a:solidFill>
               </a:rPr>
-              <a:t>村田製作所</a:t>
+              <a:t>大和ハウス工業</a:t>
             </a:r>
           </a:p>
         </p:txBody>
       </p:sp>
       <p:pic>
         <p:nvPicPr>
-          <p:cNvPr id="58" name="Picture 57" descr="東京ガス.png"/>
+          <p:cNvPr id="58" name="Picture 57" descr="富士通.png"/>
           <p:cNvPicPr>
             <a:picLocks noChangeAspect="1"/>
           </p:cNvPicPr>
@@ -4728,8 +4728,8 @@
         </p:blipFill>
         <p:spPr>
           <a:xfrm>
-            <a:off x="7489430" y="4865914"/>
-            <a:ext cx="1815192" cy="378822"/>
+            <a:off x="8132044" y="4314825"/>
+            <a:ext cx="529964" cy="268605"/>
           </a:xfrm>
           <a:prstGeom prst="rect">
             <a:avLst/>
@@ -4744,7 +4744,7 @@
         </p:nvSpPr>
         <p:spPr>
           <a:xfrm>
-            <a:off x="7360737" y="5244737"/>
+            <a:off x="7360737" y="4583430"/>
             <a:ext cx="2072579" cy="274320"/>
           </a:xfrm>
           <a:prstGeom prst="rect">
@@ -4765,14 +4765,14 @@
                   <a:srgbClr val="404040"/>
                 </a:solidFill>
               </a:rPr>
-              <a:t>東京ガス</a:t>
+              <a:t>富士通</a:t>
             </a:r>
           </a:p>
         </p:txBody>
       </p:sp>
       <p:pic>
         <p:nvPicPr>
-          <p:cNvPr id="60" name="Picture 59" descr="楽天グループ.png"/>
+          <p:cNvPr id="60" name="Picture 59" descr="日本郵政.png"/>
           <p:cNvPicPr>
             <a:picLocks noChangeAspect="1"/>
           </p:cNvPicPr>
@@ -4786,8 +4786,8 @@
         </p:blipFill>
         <p:spPr>
           <a:xfrm>
-            <a:off x="10121664" y="4865914"/>
-            <a:ext cx="1153083" cy="378822"/>
+            <a:off x="10572193" y="4314825"/>
+            <a:ext cx="252024" cy="268605"/>
           </a:xfrm>
           <a:prstGeom prst="rect">
             <a:avLst/>
@@ -4802,7 +4802,7 @@
         </p:nvSpPr>
         <p:spPr>
           <a:xfrm>
-            <a:off x="9661916" y="5244737"/>
+            <a:off x="9661916" y="4583430"/>
             <a:ext cx="2072579" cy="274320"/>
           </a:xfrm>
           <a:prstGeom prst="rect">
@@ -4823,14 +4823,14 @@
                   <a:srgbClr val="404040"/>
                 </a:solidFill>
               </a:rPr>
-              <a:t>楽天グループ</a:t>
+              <a:t>日本郵政</a:t>
             </a:r>
           </a:p>
         </p:txBody>
       </p:sp>
       <p:pic>
         <p:nvPicPr>
-          <p:cNvPr id="62" name="Picture 61" descr="花王.png"/>
+          <p:cNvPr id="62" name="Picture 61" descr="日立製作所.png"/>
           <p:cNvPicPr>
             <a:picLocks noChangeAspect="1"/>
           </p:cNvPicPr>
@@ -4844,8 +4844,8 @@
         </p:blipFill>
         <p:spPr>
           <a:xfrm>
-            <a:off x="1159527" y="5747657"/>
-            <a:ext cx="667924" cy="378822"/>
+            <a:off x="790717" y="5086350"/>
+            <a:ext cx="1405545" cy="268605"/>
           </a:xfrm>
           <a:prstGeom prst="rect">
             <a:avLst/>
@@ -4860,7 +4860,7 @@
         </p:nvSpPr>
         <p:spPr>
           <a:xfrm>
-            <a:off x="457200" y="6126480"/>
+            <a:off x="457200" y="5354955"/>
             <a:ext cx="2072579" cy="274320"/>
           </a:xfrm>
           <a:prstGeom prst="rect">
@@ -4881,14 +4881,14 @@
                   <a:srgbClr val="404040"/>
                 </a:solidFill>
               </a:rPr>
-              <a:t>花王</a:t>
+              <a:t>日立製作所</a:t>
             </a:r>
           </a:p>
         </p:txBody>
       </p:sp>
       <p:pic>
         <p:nvPicPr>
-          <p:cNvPr id="64" name="Picture 63" descr="資生堂.png"/>
+          <p:cNvPr id="64" name="Picture 63" descr="村田製作所.png"/>
           <p:cNvPicPr>
             <a:picLocks noChangeAspect="1"/>
           </p:cNvPicPr>
@@ -4902,8 +4902,8 @@
         </p:blipFill>
         <p:spPr>
           <a:xfrm>
-            <a:off x="2848535" y="5747657"/>
-            <a:ext cx="1892266" cy="378822"/>
+            <a:off x="3434971" y="5086350"/>
+            <a:ext cx="719394" cy="268605"/>
           </a:xfrm>
           <a:prstGeom prst="rect">
             <a:avLst/>
@@ -4918,7 +4918,7 @@
         </p:nvSpPr>
         <p:spPr>
           <a:xfrm>
-            <a:off x="2758379" y="6126480"/>
+            <a:off x="2758379" y="5354955"/>
             <a:ext cx="2072579" cy="274320"/>
           </a:xfrm>
           <a:prstGeom prst="rect">
@@ -4939,14 +4939,14 @@
                   <a:srgbClr val="404040"/>
                 </a:solidFill>
               </a:rPr>
-              <a:t>資生堂</a:t>
+              <a:t>村田製作所</a:t>
             </a:r>
           </a:p>
         </p:txBody>
       </p:sp>
       <p:pic>
         <p:nvPicPr>
-          <p:cNvPr id="66" name="Picture 65" descr="野村ホールディングス.png"/>
+          <p:cNvPr id="66" name="Picture 65" descr="東京ガス.png"/>
           <p:cNvPicPr>
             <a:picLocks noChangeAspect="1"/>
           </p:cNvPicPr>
@@ -4960,8 +4960,8 @@
         </p:blipFill>
         <p:spPr>
           <a:xfrm>
-            <a:off x="5185250" y="5747657"/>
-            <a:ext cx="1821195" cy="378822"/>
+            <a:off x="5452315" y="5086350"/>
+            <a:ext cx="1287065" cy="268605"/>
           </a:xfrm>
           <a:prstGeom prst="rect">
             <a:avLst/>
@@ -4976,7 +4976,239 @@
         </p:nvSpPr>
         <p:spPr>
           <a:xfrm>
-            <a:off x="5059558" y="6126480"/>
+            <a:off x="5059558" y="5354955"/>
+            <a:ext cx="2072579" cy="274320"/>
+          </a:xfrm>
+          <a:prstGeom prst="rect">
+            <a:avLst/>
+          </a:prstGeom>
+          <a:noFill/>
+        </p:spPr>
+        <p:txBody>
+          <a:bodyPr wrap="square">
+            <a:spAutoFit/>
+          </a:bodyPr>
+          <a:lstStyle/>
+          <a:p>
+            <a:pPr algn="ctr"/>
+            <a:r>
+              <a:rPr sz="1000">
+                <a:solidFill>
+                  <a:srgbClr val="404040"/>
+                </a:solidFill>
+              </a:rPr>
+              <a:t>東京ガス</a:t>
+            </a:r>
+          </a:p>
+        </p:txBody>
+      </p:sp>
+      <p:pic>
+        <p:nvPicPr>
+          <p:cNvPr id="68" name="Picture 67" descr="楽天グループ.png"/>
+          <p:cNvPicPr>
+            <a:picLocks noChangeAspect="1"/>
+          </p:cNvPicPr>
+          <p:nvPr/>
+        </p:nvPicPr>
+        <p:blipFill>
+          <a:blip r:embed="rId35"/>
+          <a:stretch>
+            <a:fillRect/>
+          </a:stretch>
+        </p:blipFill>
+        <p:spPr>
+          <a:xfrm>
+            <a:off x="7988229" y="5086350"/>
+            <a:ext cx="817595" cy="268605"/>
+          </a:xfrm>
+          <a:prstGeom prst="rect">
+            <a:avLst/>
+          </a:prstGeom>
+        </p:spPr>
+      </p:pic>
+      <p:sp>
+        <p:nvSpPr>
+          <p:cNvPr id="69" name="TextBox 68"/>
+          <p:cNvSpPr txBox="1"/>
+          <p:nvPr/>
+        </p:nvSpPr>
+        <p:spPr>
+          <a:xfrm>
+            <a:off x="7360737" y="5354955"/>
+            <a:ext cx="2072579" cy="274320"/>
+          </a:xfrm>
+          <a:prstGeom prst="rect">
+            <a:avLst/>
+          </a:prstGeom>
+          <a:noFill/>
+        </p:spPr>
+        <p:txBody>
+          <a:bodyPr wrap="square">
+            <a:spAutoFit/>
+          </a:bodyPr>
+          <a:lstStyle/>
+          <a:p>
+            <a:pPr algn="ctr"/>
+            <a:r>
+              <a:rPr sz="1000">
+                <a:solidFill>
+                  <a:srgbClr val="404040"/>
+                </a:solidFill>
+              </a:rPr>
+              <a:t>楽天グループ</a:t>
+            </a:r>
+          </a:p>
+        </p:txBody>
+      </p:sp>
+      <p:pic>
+        <p:nvPicPr>
+          <p:cNvPr id="70" name="Picture 69" descr="花王.png"/>
+          <p:cNvPicPr>
+            <a:picLocks noChangeAspect="1"/>
+          </p:cNvPicPr>
+          <p:nvPr/>
+        </p:nvPicPr>
+        <p:blipFill>
+          <a:blip r:embed="rId36"/>
+          <a:stretch>
+            <a:fillRect/>
+          </a:stretch>
+        </p:blipFill>
+        <p:spPr>
+          <a:xfrm>
+            <a:off x="10461409" y="5086350"/>
+            <a:ext cx="473593" cy="268605"/>
+          </a:xfrm>
+          <a:prstGeom prst="rect">
+            <a:avLst/>
+          </a:prstGeom>
+        </p:spPr>
+      </p:pic>
+      <p:sp>
+        <p:nvSpPr>
+          <p:cNvPr id="71" name="TextBox 70"/>
+          <p:cNvSpPr txBox="1"/>
+          <p:nvPr/>
+        </p:nvSpPr>
+        <p:spPr>
+          <a:xfrm>
+            <a:off x="9661916" y="5354955"/>
+            <a:ext cx="2072579" cy="274320"/>
+          </a:xfrm>
+          <a:prstGeom prst="rect">
+            <a:avLst/>
+          </a:prstGeom>
+          <a:noFill/>
+        </p:spPr>
+        <p:txBody>
+          <a:bodyPr wrap="square">
+            <a:spAutoFit/>
+          </a:bodyPr>
+          <a:lstStyle/>
+          <a:p>
+            <a:pPr algn="ctr"/>
+            <a:r>
+              <a:rPr sz="1000">
+                <a:solidFill>
+                  <a:srgbClr val="404040"/>
+                </a:solidFill>
+              </a:rPr>
+              <a:t>花王</a:t>
+            </a:r>
+          </a:p>
+        </p:txBody>
+      </p:sp>
+      <p:pic>
+        <p:nvPicPr>
+          <p:cNvPr id="72" name="Picture 71" descr="資生堂.png"/>
+          <p:cNvPicPr>
+            <a:picLocks noChangeAspect="1"/>
+          </p:cNvPicPr>
+          <p:nvPr/>
+        </p:nvPicPr>
+        <p:blipFill>
+          <a:blip r:embed="rId37"/>
+          <a:stretch>
+            <a:fillRect/>
+          </a:stretch>
+        </p:blipFill>
+        <p:spPr>
+          <a:xfrm>
+            <a:off x="822632" y="5857875"/>
+            <a:ext cx="1341714" cy="268605"/>
+          </a:xfrm>
+          <a:prstGeom prst="rect">
+            <a:avLst/>
+          </a:prstGeom>
+        </p:spPr>
+      </p:pic>
+      <p:sp>
+        <p:nvSpPr>
+          <p:cNvPr id="73" name="TextBox 72"/>
+          <p:cNvSpPr txBox="1"/>
+          <p:nvPr/>
+        </p:nvSpPr>
+        <p:spPr>
+          <a:xfrm>
+            <a:off x="457200" y="6126480"/>
+            <a:ext cx="2072579" cy="274320"/>
+          </a:xfrm>
+          <a:prstGeom prst="rect">
+            <a:avLst/>
+          </a:prstGeom>
+          <a:noFill/>
+        </p:spPr>
+        <p:txBody>
+          <a:bodyPr wrap="square">
+            <a:spAutoFit/>
+          </a:bodyPr>
+          <a:lstStyle/>
+          <a:p>
+            <a:pPr algn="ctr"/>
+            <a:r>
+              <a:rPr sz="1000">
+                <a:solidFill>
+                  <a:srgbClr val="404040"/>
+                </a:solidFill>
+              </a:rPr>
+              <a:t>資生堂</a:t>
+            </a:r>
+          </a:p>
+        </p:txBody>
+      </p:sp>
+      <p:pic>
+        <p:nvPicPr>
+          <p:cNvPr id="74" name="Picture 73" descr="野村ホールディングス.png"/>
+          <p:cNvPicPr>
+            <a:picLocks noChangeAspect="1"/>
+          </p:cNvPicPr>
+          <p:nvPr/>
+        </p:nvPicPr>
+        <p:blipFill>
+          <a:blip r:embed="rId38"/>
+          <a:stretch>
+            <a:fillRect/>
+          </a:stretch>
+        </p:blipFill>
+        <p:spPr>
+          <a:xfrm>
+            <a:off x="3149008" y="5857875"/>
+            <a:ext cx="1291321" cy="268605"/>
+          </a:xfrm>
+          <a:prstGeom prst="rect">
+            <a:avLst/>
+          </a:prstGeom>
+        </p:spPr>
+      </p:pic>
+      <p:sp>
+        <p:nvSpPr>
+          <p:cNvPr id="75" name="TextBox 74"/>
+          <p:cNvSpPr txBox="1"/>
+          <p:nvPr/>
+        </p:nvSpPr>
+        <p:spPr>
+          <a:xfrm>
+            <a:off x="2758379" y="6126480"/>
             <a:ext cx="2072579" cy="274320"/>
           </a:xfrm>
           <a:prstGeom prst="rect">

--- a/docs/logos.pptx
+++ b/docs/logos.pptx
@@ -3336,8 +3336,8 @@
         </p:blipFill>
         <p:spPr>
           <a:xfrm>
-            <a:off x="10440431" y="457200"/>
-            <a:ext cx="515548" cy="268605"/>
+            <a:off x="10485478" y="457200"/>
+            <a:ext cx="425454" cy="268605"/>
           </a:xfrm>
           <a:prstGeom prst="rect">
             <a:avLst/>

--- a/docs/logos.pptx
+++ b/docs/logos.pptx
@@ -3336,8 +3336,8 @@
         </p:blipFill>
         <p:spPr>
           <a:xfrm>
-            <a:off x="10485478" y="457200"/>
-            <a:ext cx="425454" cy="268605"/>
+            <a:off x="10075978" y="457200"/>
+            <a:ext cx="1244454" cy="268605"/>
           </a:xfrm>
           <a:prstGeom prst="rect">
             <a:avLst/>

--- a/docs/logos.pptx
+++ b/docs/logos.pptx
@@ -3104,8 +3104,8 @@
         </p:blipFill>
         <p:spPr>
           <a:xfrm>
-            <a:off x="1267262" y="457200"/>
-            <a:ext cx="452455" cy="268605"/>
+            <a:off x="1174432" y="457200"/>
+            <a:ext cx="638114" cy="378822"/>
           </a:xfrm>
           <a:prstGeom prst="rect">
             <a:avLst/>
@@ -3120,7 +3120,7 @@
         </p:nvSpPr>
         <p:spPr>
           <a:xfrm>
-            <a:off x="457200" y="725805"/>
+            <a:off x="457200" y="836022"/>
             <a:ext cx="2072579" cy="274320"/>
           </a:xfrm>
           <a:prstGeom prst="rect">
@@ -3162,8 +3162,8 @@
         </p:blipFill>
         <p:spPr>
           <a:xfrm>
-            <a:off x="3506877" y="457200"/>
-            <a:ext cx="575582" cy="268605"/>
+            <a:off x="3388787" y="457200"/>
+            <a:ext cx="811763" cy="378822"/>
           </a:xfrm>
           <a:prstGeom prst="rect">
             <a:avLst/>
@@ -3178,7 +3178,7 @@
         </p:nvSpPr>
         <p:spPr>
           <a:xfrm>
-            <a:off x="2758379" y="725805"/>
+            <a:off x="2758379" y="836022"/>
             <a:ext cx="2072579" cy="274320"/>
           </a:xfrm>
           <a:prstGeom prst="rect">
@@ -3220,8 +3220,8 @@
         </p:blipFill>
         <p:spPr>
           <a:xfrm>
-            <a:off x="5640464" y="457200"/>
-            <a:ext cx="910766" cy="268605"/>
+            <a:off x="5453605" y="457200"/>
+            <a:ext cx="1284485" cy="378822"/>
           </a:xfrm>
           <a:prstGeom prst="rect">
             <a:avLst/>
@@ -3236,7 +3236,7 @@
         </p:nvSpPr>
         <p:spPr>
           <a:xfrm>
-            <a:off x="5059558" y="725805"/>
+            <a:off x="5059558" y="836022"/>
             <a:ext cx="2072579" cy="274320"/>
           </a:xfrm>
           <a:prstGeom prst="rect">
@@ -3278,8 +3278,8 @@
         </p:blipFill>
         <p:spPr>
           <a:xfrm>
-            <a:off x="7830966" y="457200"/>
-            <a:ext cx="1132120" cy="268605"/>
+            <a:off x="7598692" y="457200"/>
+            <a:ext cx="1596668" cy="378822"/>
           </a:xfrm>
           <a:prstGeom prst="rect">
             <a:avLst/>
@@ -3294,7 +3294,7 @@
         </p:nvSpPr>
         <p:spPr>
           <a:xfrm>
-            <a:off x="7360737" y="725805"/>
+            <a:off x="7360737" y="836022"/>
             <a:ext cx="2072579" cy="274320"/>
           </a:xfrm>
           <a:prstGeom prst="rect">
@@ -3336,8 +3336,8 @@
         </p:blipFill>
         <p:spPr>
           <a:xfrm>
-            <a:off x="10075978" y="457200"/>
-            <a:ext cx="1244454" cy="268605"/>
+            <a:off x="9820657" y="457200"/>
+            <a:ext cx="1755096" cy="378822"/>
           </a:xfrm>
           <a:prstGeom prst="rect">
             <a:avLst/>
@@ -3352,7 +3352,7 @@
         </p:nvSpPr>
         <p:spPr>
           <a:xfrm>
-            <a:off x="9661916" y="725805"/>
+            <a:off x="9661916" y="836022"/>
             <a:ext cx="2072579" cy="274320"/>
           </a:xfrm>
           <a:prstGeom prst="rect">
@@ -3394,8 +3394,8 @@
         </p:blipFill>
         <p:spPr>
           <a:xfrm>
-            <a:off x="938113" y="1228725"/>
-            <a:ext cx="1110753" cy="268605"/>
+            <a:off x="710223" y="1338943"/>
+            <a:ext cx="1566533" cy="378822"/>
           </a:xfrm>
           <a:prstGeom prst="rect">
             <a:avLst/>
@@ -3410,7 +3410,7 @@
         </p:nvSpPr>
         <p:spPr>
           <a:xfrm>
-            <a:off x="457200" y="1497330"/>
+            <a:off x="457200" y="1717765"/>
             <a:ext cx="2072579" cy="274320"/>
           </a:xfrm>
           <a:prstGeom prst="rect">
@@ -3438,7 +3438,7 @@
       </p:sp>
       <p:pic>
         <p:nvPicPr>
-          <p:cNvPr id="14" name="Picture 13" descr="dアカウント.png"/>
+          <p:cNvPr id="14" name="Picture 13" descr="dポイント.png"/>
           <p:cNvPicPr>
             <a:picLocks noChangeAspect="1"/>
           </p:cNvPicPr>
@@ -3452,8 +3452,8 @@
         </p:blipFill>
         <p:spPr>
           <a:xfrm>
-            <a:off x="3659364" y="1228725"/>
-            <a:ext cx="270609" cy="268605"/>
+            <a:off x="3647553" y="1338943"/>
+            <a:ext cx="294231" cy="378822"/>
           </a:xfrm>
           <a:prstGeom prst="rect">
             <a:avLst/>
@@ -3468,7 +3468,7 @@
         </p:nvSpPr>
         <p:spPr>
           <a:xfrm>
-            <a:off x="2758379" y="1497330"/>
+            <a:off x="2758379" y="1717765"/>
             <a:ext cx="2072579" cy="274320"/>
           </a:xfrm>
           <a:prstGeom prst="rect">
@@ -3489,14 +3489,14 @@
                   <a:srgbClr val="404040"/>
                 </a:solidFill>
               </a:rPr>
-              <a:t>dアカウント</a:t>
+              <a:t>dポイント</a:t>
             </a:r>
           </a:p>
         </p:txBody>
       </p:sp>
       <p:pic>
         <p:nvPicPr>
-          <p:cNvPr id="16" name="Picture 15" descr="dポイント.png"/>
+          <p:cNvPr id="16" name="Picture 15" descr="アサヒグループホールディングス.png"/>
           <p:cNvPicPr>
             <a:picLocks noChangeAspect="1"/>
           </p:cNvPicPr>
@@ -3510,8 +3510,8 @@
         </p:blipFill>
         <p:spPr>
           <a:xfrm>
-            <a:off x="5991535" y="1228725"/>
-            <a:ext cx="208625" cy="268605"/>
+            <a:off x="5829350" y="1338943"/>
+            <a:ext cx="532994" cy="378822"/>
           </a:xfrm>
           <a:prstGeom prst="rect">
             <a:avLst/>
@@ -3526,7 +3526,7 @@
         </p:nvSpPr>
         <p:spPr>
           <a:xfrm>
-            <a:off x="5059558" y="1497330"/>
+            <a:off x="5059558" y="1717765"/>
             <a:ext cx="2072579" cy="274320"/>
           </a:xfrm>
           <a:prstGeom prst="rect">
@@ -3547,14 +3547,14 @@
                   <a:srgbClr val="404040"/>
                 </a:solidFill>
               </a:rPr>
-              <a:t>dポイント</a:t>
+              <a:t>アサヒグループホールディングス</a:t>
             </a:r>
           </a:p>
         </p:txBody>
       </p:sp>
       <p:pic>
         <p:nvPicPr>
-          <p:cNvPr id="18" name="Picture 17" descr="アサヒグループホールディングス.png"/>
+          <p:cNvPr id="18" name="Picture 17" descr="オリエンタルランド.png"/>
           <p:cNvPicPr>
             <a:picLocks noChangeAspect="1"/>
           </p:cNvPicPr>
@@ -3568,8 +3568,8 @@
         </p:blipFill>
         <p:spPr>
           <a:xfrm>
-            <a:off x="8208066" y="1228725"/>
-            <a:ext cx="377920" cy="268605"/>
+            <a:off x="8035423" y="1338943"/>
+            <a:ext cx="723207" cy="378822"/>
           </a:xfrm>
           <a:prstGeom prst="rect">
             <a:avLst/>
@@ -3584,7 +3584,7 @@
         </p:nvSpPr>
         <p:spPr>
           <a:xfrm>
-            <a:off x="7360737" y="1497330"/>
+            <a:off x="7360737" y="1717765"/>
             <a:ext cx="2072579" cy="274320"/>
           </a:xfrm>
           <a:prstGeom prst="rect">
@@ -3605,14 +3605,14 @@
                   <a:srgbClr val="404040"/>
                 </a:solidFill>
               </a:rPr>
-              <a:t>アサヒグループホールディングス</a:t>
+              <a:t>オリエンタルランド</a:t>
             </a:r>
           </a:p>
         </p:txBody>
       </p:sp>
       <p:pic>
         <p:nvPicPr>
-          <p:cNvPr id="20" name="Picture 19" descr="オリエンタルランド.png"/>
+          <p:cNvPr id="20" name="Picture 19" descr="オリンパス.png"/>
           <p:cNvPicPr>
             <a:picLocks noChangeAspect="1"/>
           </p:cNvPicPr>
@@ -3626,8 +3626,8 @@
         </p:blipFill>
         <p:spPr>
           <a:xfrm>
-            <a:off x="10441810" y="1228725"/>
-            <a:ext cx="512791" cy="268605"/>
+            <a:off x="9839348" y="1338943"/>
+            <a:ext cx="1717715" cy="378822"/>
           </a:xfrm>
           <a:prstGeom prst="rect">
             <a:avLst/>
@@ -3642,7 +3642,7 @@
         </p:nvSpPr>
         <p:spPr>
           <a:xfrm>
-            <a:off x="9661916" y="1497330"/>
+            <a:off x="9661916" y="1717765"/>
             <a:ext cx="2072579" cy="274320"/>
           </a:xfrm>
           <a:prstGeom prst="rect">
@@ -3663,14 +3663,14 @@
                   <a:srgbClr val="404040"/>
                 </a:solidFill>
               </a:rPr>
-              <a:t>オリエンタルランド</a:t>
+              <a:t>オリンパス</a:t>
             </a:r>
           </a:p>
         </p:txBody>
       </p:sp>
       <p:pic>
         <p:nvPicPr>
-          <p:cNvPr id="22" name="Picture 21" descr="オリンパス.png"/>
+          <p:cNvPr id="22" name="Picture 21" descr="キーエンス.png"/>
           <p:cNvPicPr>
             <a:picLocks noChangeAspect="1"/>
           </p:cNvPicPr>
@@ -3684,8 +3684,8 @@
         </p:blipFill>
         <p:spPr>
           <a:xfrm>
-            <a:off x="884515" y="2000250"/>
-            <a:ext cx="1217949" cy="268605"/>
+            <a:off x="611497" y="2220686"/>
+            <a:ext cx="1763984" cy="378822"/>
           </a:xfrm>
           <a:prstGeom prst="rect">
             <a:avLst/>
@@ -3700,7 +3700,7 @@
         </p:nvSpPr>
         <p:spPr>
           <a:xfrm>
-            <a:off x="457200" y="2268855"/>
+            <a:off x="457200" y="2599508"/>
             <a:ext cx="2072579" cy="274320"/>
           </a:xfrm>
           <a:prstGeom prst="rect">
@@ -3721,14 +3721,14 @@
                   <a:srgbClr val="404040"/>
                 </a:solidFill>
               </a:rPr>
-              <a:t>オリンパス</a:t>
+              <a:t>キーエンス</a:t>
             </a:r>
           </a:p>
         </p:txBody>
       </p:sp>
       <p:pic>
         <p:nvPicPr>
-          <p:cNvPr id="24" name="Picture 23" descr="キーエンス.png"/>
+          <p:cNvPr id="24" name="Picture 23" descr="コマツ.png"/>
           <p:cNvPicPr>
             <a:picLocks noChangeAspect="1"/>
           </p:cNvPicPr>
@@ -3742,8 +3742,8 @@
         </p:blipFill>
         <p:spPr>
           <a:xfrm>
-            <a:off x="3169290" y="2000250"/>
-            <a:ext cx="1250756" cy="268605"/>
+            <a:off x="2928788" y="2220686"/>
+            <a:ext cx="1731761" cy="378822"/>
           </a:xfrm>
           <a:prstGeom prst="rect">
             <a:avLst/>
@@ -3758,7 +3758,7 @@
         </p:nvSpPr>
         <p:spPr>
           <a:xfrm>
-            <a:off x="2758379" y="2268855"/>
+            <a:off x="2758379" y="2599508"/>
             <a:ext cx="2072579" cy="274320"/>
           </a:xfrm>
           <a:prstGeom prst="rect">
@@ -3779,14 +3779,14 @@
                   <a:srgbClr val="404040"/>
                 </a:solidFill>
               </a:rPr>
-              <a:t>キーエンス</a:t>
+              <a:t>コマツ</a:t>
             </a:r>
           </a:p>
         </p:txBody>
       </p:sp>
       <p:pic>
         <p:nvPicPr>
-          <p:cNvPr id="26" name="Picture 25" descr="コマツ.png"/>
+          <p:cNvPr id="26" name="Picture 25" descr="セコム.png"/>
           <p:cNvPicPr>
             <a:picLocks noChangeAspect="1"/>
           </p:cNvPicPr>
@@ -3800,8 +3800,8 @@
         </p:blipFill>
         <p:spPr>
           <a:xfrm>
-            <a:off x="5481893" y="2000250"/>
-            <a:ext cx="1227908" cy="268605"/>
+            <a:off x="5605433" y="2220686"/>
+            <a:ext cx="980828" cy="378822"/>
           </a:xfrm>
           <a:prstGeom prst="rect">
             <a:avLst/>
@@ -3816,7 +3816,7 @@
         </p:nvSpPr>
         <p:spPr>
           <a:xfrm>
-            <a:off x="5059558" y="2268855"/>
+            <a:off x="5059558" y="2599508"/>
             <a:ext cx="2072579" cy="274320"/>
           </a:xfrm>
           <a:prstGeom prst="rect">
@@ -3837,14 +3837,14 @@
                   <a:srgbClr val="404040"/>
                 </a:solidFill>
               </a:rPr>
-              <a:t>コマツ</a:t>
+              <a:t>セコム</a:t>
             </a:r>
           </a:p>
         </p:txBody>
       </p:sp>
       <p:pic>
         <p:nvPicPr>
-          <p:cNvPr id="28" name="Picture 27" descr="セコム.png"/>
+          <p:cNvPr id="28" name="Picture 27" descr="セブン&amp;アイ・ホールディングス.png"/>
           <p:cNvPicPr>
             <a:picLocks noChangeAspect="1"/>
           </p:cNvPicPr>
@@ -3858,8 +3858,8 @@
         </p:blipFill>
         <p:spPr>
           <a:xfrm>
-            <a:off x="8049298" y="2000250"/>
-            <a:ext cx="695457" cy="268605"/>
+            <a:off x="8187501" y="2220686"/>
+            <a:ext cx="419051" cy="378822"/>
           </a:xfrm>
           <a:prstGeom prst="rect">
             <a:avLst/>
@@ -3874,7 +3874,7 @@
         </p:nvSpPr>
         <p:spPr>
           <a:xfrm>
-            <a:off x="7360737" y="2268855"/>
+            <a:off x="7360737" y="2599508"/>
             <a:ext cx="2072579" cy="274320"/>
           </a:xfrm>
           <a:prstGeom prst="rect">
@@ -3895,14 +3895,14 @@
                   <a:srgbClr val="404040"/>
                 </a:solidFill>
               </a:rPr>
-              <a:t>セコム</a:t>
+              <a:t>セブン&amp;アイ・ホールディングス</a:t>
             </a:r>
           </a:p>
         </p:txBody>
       </p:sp>
       <p:pic>
         <p:nvPicPr>
-          <p:cNvPr id="30" name="Picture 29" descr="セブン&amp;アイ・ホールディングス.png"/>
+          <p:cNvPr id="30" name="Picture 29" descr="ソニーグループ.png"/>
           <p:cNvPicPr>
             <a:picLocks noChangeAspect="1"/>
           </p:cNvPicPr>
@@ -3916,8 +3916,8 @@
         </p:blipFill>
         <p:spPr>
           <a:xfrm>
-            <a:off x="10549641" y="2000250"/>
-            <a:ext cx="297129" cy="268605"/>
+            <a:off x="9792854" y="2220686"/>
+            <a:ext cx="1810703" cy="378822"/>
           </a:xfrm>
           <a:prstGeom prst="rect">
             <a:avLst/>
@@ -3932,7 +3932,7 @@
         </p:nvSpPr>
         <p:spPr>
           <a:xfrm>
-            <a:off x="9661916" y="2268855"/>
+            <a:off x="9661916" y="2599508"/>
             <a:ext cx="2072579" cy="274320"/>
           </a:xfrm>
           <a:prstGeom prst="rect">
@@ -3953,14 +3953,14 @@
                   <a:srgbClr val="404040"/>
                 </a:solidFill>
               </a:rPr>
-              <a:t>セブン&amp;アイ・ホールディングス</a:t>
+              <a:t>ソニーグループ</a:t>
             </a:r>
           </a:p>
         </p:txBody>
       </p:sp>
       <p:pic>
         <p:nvPicPr>
-          <p:cNvPr id="32" name="Picture 31" descr="ソニーグループ.png"/>
+          <p:cNvPr id="32" name="Picture 31" descr="ダイキン工業.png"/>
           <p:cNvPicPr>
             <a:picLocks noChangeAspect="1"/>
           </p:cNvPicPr>
@@ -3974,8 +3974,8 @@
         </p:blipFill>
         <p:spPr>
           <a:xfrm>
-            <a:off x="851548" y="2771775"/>
-            <a:ext cx="1283882" cy="268605"/>
+            <a:off x="707072" y="3102429"/>
+            <a:ext cx="1572834" cy="378822"/>
           </a:xfrm>
           <a:prstGeom prst="rect">
             <a:avLst/>
@@ -3990,7 +3990,7 @@
         </p:nvSpPr>
         <p:spPr>
           <a:xfrm>
-            <a:off x="457200" y="3040380"/>
+            <a:off x="457200" y="3481251"/>
             <a:ext cx="2072579" cy="274320"/>
           </a:xfrm>
           <a:prstGeom prst="rect">
@@ -4011,14 +4011,14 @@
                   <a:srgbClr val="404040"/>
                 </a:solidFill>
               </a:rPr>
-              <a:t>ソニーグループ</a:t>
+              <a:t>ダイキン工業</a:t>
             </a:r>
           </a:p>
         </p:txBody>
       </p:sp>
       <p:pic>
         <p:nvPicPr>
-          <p:cNvPr id="34" name="Picture 33" descr="ダイキン工業.png"/>
+          <p:cNvPr id="34" name="Picture 33" descr="トヨタ自動車.png"/>
           <p:cNvPicPr>
             <a:picLocks noChangeAspect="1"/>
           </p:cNvPicPr>
@@ -4032,8 +4032,8 @@
         </p:blipFill>
         <p:spPr>
           <a:xfrm>
-            <a:off x="3237058" y="2771775"/>
-            <a:ext cx="1115220" cy="268605"/>
+            <a:off x="3522008" y="3102429"/>
+            <a:ext cx="545321" cy="378822"/>
           </a:xfrm>
           <a:prstGeom prst="rect">
             <a:avLst/>
@@ -4048,7 +4048,7 @@
         </p:nvSpPr>
         <p:spPr>
           <a:xfrm>
-            <a:off x="2758379" y="3040380"/>
+            <a:off x="2758379" y="3481251"/>
             <a:ext cx="2072579" cy="274320"/>
           </a:xfrm>
           <a:prstGeom prst="rect">
@@ -4069,14 +4069,14 @@
                   <a:srgbClr val="404040"/>
                 </a:solidFill>
               </a:rPr>
-              <a:t>ダイキン工業</a:t>
+              <a:t>トヨタ自動車</a:t>
             </a:r>
           </a:p>
         </p:txBody>
       </p:sp>
       <p:pic>
         <p:nvPicPr>
-          <p:cNvPr id="36" name="Picture 35" descr="トヨタ自動車.png"/>
+          <p:cNvPr id="36" name="Picture 35" descr="ドコモの銀行.png"/>
           <p:cNvPicPr>
             <a:picLocks noChangeAspect="1"/>
           </p:cNvPicPr>
@@ -4090,8 +4090,8 @@
         </p:blipFill>
         <p:spPr>
           <a:xfrm>
-            <a:off x="5902517" y="2771775"/>
-            <a:ext cx="386661" cy="268605"/>
+            <a:off x="5475525" y="3102429"/>
+            <a:ext cx="1240644" cy="378822"/>
           </a:xfrm>
           <a:prstGeom prst="rect">
             <a:avLst/>
@@ -4106,7 +4106,7 @@
         </p:nvSpPr>
         <p:spPr>
           <a:xfrm>
-            <a:off x="5059558" y="3040380"/>
+            <a:off x="5059558" y="3481251"/>
             <a:ext cx="2072579" cy="274320"/>
           </a:xfrm>
           <a:prstGeom prst="rect">
@@ -4127,14 +4127,14 @@
                   <a:srgbClr val="404040"/>
                 </a:solidFill>
               </a:rPr>
-              <a:t>トヨタ自動車</a:t>
+              <a:t>ドコモの銀行</a:t>
             </a:r>
           </a:p>
         </p:txBody>
       </p:sp>
       <p:pic>
         <p:nvPicPr>
-          <p:cNvPr id="38" name="Picture 37" descr="ドコモの銀行.png"/>
+          <p:cNvPr id="38" name="Picture 37" descr="パナソニック.png"/>
           <p:cNvPicPr>
             <a:picLocks noChangeAspect="1"/>
           </p:cNvPicPr>
@@ -4148,8 +4148,8 @@
         </p:blipFill>
         <p:spPr>
           <a:xfrm>
-            <a:off x="7957186" y="2771775"/>
-            <a:ext cx="879681" cy="268605"/>
+            <a:off x="7360737" y="3103424"/>
+            <a:ext cx="2072578" cy="376832"/>
           </a:xfrm>
           <a:prstGeom prst="rect">
             <a:avLst/>
@@ -4164,7 +4164,7 @@
         </p:nvSpPr>
         <p:spPr>
           <a:xfrm>
-            <a:off x="7360737" y="3040380"/>
+            <a:off x="7360737" y="3481251"/>
             <a:ext cx="2072579" cy="274320"/>
           </a:xfrm>
           <a:prstGeom prst="rect">
@@ -4185,14 +4185,14 @@
                   <a:srgbClr val="404040"/>
                 </a:solidFill>
               </a:rPr>
-              <a:t>ドコモの銀行</a:t>
+              <a:t>パナソニック</a:t>
             </a:r>
           </a:p>
         </p:txBody>
       </p:sp>
       <p:pic>
         <p:nvPicPr>
-          <p:cNvPr id="40" name="Picture 39" descr="パナソニック.png"/>
+          <p:cNvPr id="40" name="Picture 39" descr="ファーストリテイリング.png"/>
           <p:cNvPicPr>
             <a:picLocks noChangeAspect="1"/>
           </p:cNvPicPr>
@@ -4206,8 +4206,8 @@
         </p:blipFill>
         <p:spPr>
           <a:xfrm>
-            <a:off x="9959542" y="2771775"/>
-            <a:ext cx="1477327" cy="268605"/>
+            <a:off x="10322013" y="3102429"/>
+            <a:ext cx="752384" cy="378822"/>
           </a:xfrm>
           <a:prstGeom prst="rect">
             <a:avLst/>
@@ -4222,7 +4222,7 @@
         </p:nvSpPr>
         <p:spPr>
           <a:xfrm>
-            <a:off x="9661916" y="3040380"/>
+            <a:off x="9661916" y="3481251"/>
             <a:ext cx="2072579" cy="274320"/>
           </a:xfrm>
           <a:prstGeom prst="rect">
@@ -4243,14 +4243,14 @@
                   <a:srgbClr val="404040"/>
                 </a:solidFill>
               </a:rPr>
-              <a:t>パナソニック</a:t>
+              <a:t>ファーストリテイリング</a:t>
             </a:r>
           </a:p>
         </p:txBody>
       </p:sp>
       <p:pic>
         <p:nvPicPr>
-          <p:cNvPr id="42" name="Picture 41" descr="ファーストリテイリング.png"/>
+          <p:cNvPr id="42" name="Picture 41" descr="ホンダ.png"/>
           <p:cNvPicPr>
             <a:picLocks noChangeAspect="1"/>
           </p:cNvPicPr>
@@ -4264,8 +4264,8 @@
         </p:blipFill>
         <p:spPr>
           <a:xfrm>
-            <a:off x="1226750" y="3543300"/>
-            <a:ext cx="533479" cy="268605"/>
+            <a:off x="457200" y="4007547"/>
+            <a:ext cx="2072578" cy="332070"/>
           </a:xfrm>
           <a:prstGeom prst="rect">
             <a:avLst/>
@@ -4280,7 +4280,7 @@
         </p:nvSpPr>
         <p:spPr>
           <a:xfrm>
-            <a:off x="457200" y="3811905"/>
+            <a:off x="457200" y="4362994"/>
             <a:ext cx="2072579" cy="274320"/>
           </a:xfrm>
           <a:prstGeom prst="rect">
@@ -4301,14 +4301,14 @@
                   <a:srgbClr val="404040"/>
                 </a:solidFill>
               </a:rPr>
-              <a:t>ファーストリテイリング</a:t>
+              <a:t>ホンダ</a:t>
             </a:r>
           </a:p>
         </p:txBody>
       </p:sp>
       <p:pic>
         <p:nvPicPr>
-          <p:cNvPr id="44" name="Picture 43" descr="ホンダ.png"/>
+          <p:cNvPr id="44" name="Picture 43" descr="リクルートホールディングス.png"/>
           <p:cNvPicPr>
             <a:picLocks noChangeAspect="1"/>
           </p:cNvPicPr>
@@ -4322,8 +4322,8 @@
         </p:blipFill>
         <p:spPr>
           <a:xfrm>
-            <a:off x="2956436" y="3543300"/>
-            <a:ext cx="1676465" cy="268605"/>
+            <a:off x="3143512" y="3984171"/>
+            <a:ext cx="1302312" cy="378822"/>
           </a:xfrm>
           <a:prstGeom prst="rect">
             <a:avLst/>
@@ -4338,7 +4338,7 @@
         </p:nvSpPr>
         <p:spPr>
           <a:xfrm>
-            <a:off x="2758379" y="3811905"/>
+            <a:off x="2758379" y="4362994"/>
             <a:ext cx="2072579" cy="274320"/>
           </a:xfrm>
           <a:prstGeom prst="rect">
@@ -4359,14 +4359,14 @@
                   <a:srgbClr val="404040"/>
                 </a:solidFill>
               </a:rPr>
-              <a:t>ホンダ</a:t>
+              <a:t>リクルートホールディングス</a:t>
             </a:r>
           </a:p>
         </p:txBody>
       </p:sp>
       <p:pic>
         <p:nvPicPr>
-          <p:cNvPr id="46" name="Picture 45" descr="リクルートホールディングス.png"/>
+          <p:cNvPr id="46" name="Picture 45" descr="三井住友銀行.png"/>
           <p:cNvPicPr>
             <a:picLocks noChangeAspect="1"/>
           </p:cNvPicPr>
@@ -4380,8 +4380,8 @@
         </p:blipFill>
         <p:spPr>
           <a:xfrm>
-            <a:off x="5634144" y="3543300"/>
-            <a:ext cx="923407" cy="268605"/>
+            <a:off x="5466116" y="3984171"/>
+            <a:ext cx="1259463" cy="378822"/>
           </a:xfrm>
           <a:prstGeom prst="rect">
             <a:avLst/>
@@ -4396,7 +4396,7 @@
         </p:nvSpPr>
         <p:spPr>
           <a:xfrm>
-            <a:off x="5059558" y="3811905"/>
+            <a:off x="5059558" y="4362994"/>
             <a:ext cx="2072579" cy="274320"/>
           </a:xfrm>
           <a:prstGeom prst="rect">
@@ -4417,14 +4417,14 @@
                   <a:srgbClr val="404040"/>
                 </a:solidFill>
               </a:rPr>
-              <a:t>リクルートホールディングス</a:t>
+              <a:t>三井住友銀行</a:t>
             </a:r>
           </a:p>
         </p:txBody>
       </p:sp>
       <p:pic>
         <p:nvPicPr>
-          <p:cNvPr id="48" name="Picture 47" descr="三井住友銀行.png"/>
+          <p:cNvPr id="48" name="Picture 47" descr="三菱電機.png"/>
           <p:cNvPicPr>
             <a:picLocks noChangeAspect="1"/>
           </p:cNvPicPr>
@@ -4438,8 +4438,8 @@
         </p:blipFill>
         <p:spPr>
           <a:xfrm>
-            <a:off x="7950514" y="3543300"/>
-            <a:ext cx="893024" cy="268605"/>
+            <a:off x="7814222" y="3984171"/>
+            <a:ext cx="1165608" cy="378822"/>
           </a:xfrm>
           <a:prstGeom prst="rect">
             <a:avLst/>
@@ -4454,7 +4454,7 @@
         </p:nvSpPr>
         <p:spPr>
           <a:xfrm>
-            <a:off x="7360737" y="3811905"/>
+            <a:off x="7360737" y="4362994"/>
             <a:ext cx="2072579" cy="274320"/>
           </a:xfrm>
           <a:prstGeom prst="rect">
@@ -4475,14 +4475,14 @@
                   <a:srgbClr val="404040"/>
                 </a:solidFill>
               </a:rPr>
-              <a:t>三井住友銀行</a:t>
+              <a:t>三菱電機</a:t>
             </a:r>
           </a:p>
         </p:txBody>
       </p:sp>
       <p:pic>
         <p:nvPicPr>
-          <p:cNvPr id="50" name="Picture 49" descr="三菱電機.png"/>
+          <p:cNvPr id="50" name="Picture 49" descr="任天堂.png"/>
           <p:cNvPicPr>
             <a:picLocks noChangeAspect="1"/>
           </p:cNvPicPr>
@@ -4496,8 +4496,8 @@
         </p:blipFill>
         <p:spPr>
           <a:xfrm>
-            <a:off x="10284967" y="3543300"/>
-            <a:ext cx="826476" cy="268605"/>
+            <a:off x="10010414" y="3984171"/>
+            <a:ext cx="1375583" cy="378822"/>
           </a:xfrm>
           <a:prstGeom prst="rect">
             <a:avLst/>
@@ -4512,7 +4512,7 @@
         </p:nvSpPr>
         <p:spPr>
           <a:xfrm>
-            <a:off x="9661916" y="3811905"/>
+            <a:off x="9661916" y="4362994"/>
             <a:ext cx="2072579" cy="274320"/>
           </a:xfrm>
           <a:prstGeom prst="rect">
@@ -4533,14 +4533,14 @@
                   <a:srgbClr val="404040"/>
                 </a:solidFill>
               </a:rPr>
-              <a:t>三菱電機</a:t>
+              <a:t>任天堂</a:t>
             </a:r>
           </a:p>
         </p:txBody>
       </p:sp>
       <p:pic>
         <p:nvPicPr>
-          <p:cNvPr id="52" name="Picture 51" descr="任天堂.png"/>
+          <p:cNvPr id="52" name="Picture 51" descr="味の素.png"/>
           <p:cNvPicPr>
             <a:picLocks noChangeAspect="1"/>
           </p:cNvPicPr>
@@ -4554,8 +4554,8 @@
         </p:blipFill>
         <p:spPr>
           <a:xfrm>
-            <a:off x="1005809" y="4314825"/>
-            <a:ext cx="975360" cy="268605"/>
+            <a:off x="457200" y="4887279"/>
+            <a:ext cx="2072579" cy="336093"/>
           </a:xfrm>
           <a:prstGeom prst="rect">
             <a:avLst/>
@@ -4570,7 +4570,7 @@
         </p:nvSpPr>
         <p:spPr>
           <a:xfrm>
-            <a:off x="457200" y="4583430"/>
+            <a:off x="457200" y="5244737"/>
             <a:ext cx="2072579" cy="274320"/>
           </a:xfrm>
           <a:prstGeom prst="rect">
@@ -4591,14 +4591,14 @@
                   <a:srgbClr val="404040"/>
                 </a:solidFill>
               </a:rPr>
-              <a:t>任天堂</a:t>
+              <a:t>味の素</a:t>
             </a:r>
           </a:p>
         </p:txBody>
       </p:sp>
       <p:pic>
         <p:nvPicPr>
-          <p:cNvPr id="54" name="Picture 53" descr="味の素.png"/>
+          <p:cNvPr id="54" name="Picture 53" descr="大和ハウス工業.png"/>
           <p:cNvPicPr>
             <a:picLocks noChangeAspect="1"/>
           </p:cNvPicPr>
@@ -4612,8 +4612,8 @@
         </p:blipFill>
         <p:spPr>
           <a:xfrm>
-            <a:off x="2966470" y="4314825"/>
-            <a:ext cx="1656397" cy="268605"/>
+            <a:off x="3557267" y="4865914"/>
+            <a:ext cx="474803" cy="378822"/>
           </a:xfrm>
           <a:prstGeom prst="rect">
             <a:avLst/>
@@ -4628,7 +4628,7 @@
         </p:nvSpPr>
         <p:spPr>
           <a:xfrm>
-            <a:off x="2758379" y="4583430"/>
+            <a:off x="2758379" y="5244737"/>
             <a:ext cx="2072579" cy="274320"/>
           </a:xfrm>
           <a:prstGeom prst="rect">
@@ -4649,14 +4649,14 @@
                   <a:srgbClr val="404040"/>
                 </a:solidFill>
               </a:rPr>
-              <a:t>味の素</a:t>
+              <a:t>大和ハウス工業</a:t>
             </a:r>
           </a:p>
         </p:txBody>
       </p:sp>
       <p:pic>
         <p:nvPicPr>
-          <p:cNvPr id="56" name="Picture 55" descr="大和ハウス工業.png"/>
+          <p:cNvPr id="56" name="Picture 55" descr="富士通.png"/>
           <p:cNvPicPr>
             <a:picLocks noChangeAspect="1"/>
           </p:cNvPicPr>
@@ -4670,8 +4670,8 @@
         </p:blipFill>
         <p:spPr>
           <a:xfrm>
-            <a:off x="5927517" y="4314825"/>
-            <a:ext cx="336660" cy="268605"/>
+            <a:off x="5722134" y="4865914"/>
+            <a:ext cx="747426" cy="378822"/>
           </a:xfrm>
           <a:prstGeom prst="rect">
             <a:avLst/>
@@ -4686,7 +4686,7 @@
         </p:nvSpPr>
         <p:spPr>
           <a:xfrm>
-            <a:off x="5059558" y="4583430"/>
+            <a:off x="5059558" y="5244737"/>
             <a:ext cx="2072579" cy="274320"/>
           </a:xfrm>
           <a:prstGeom prst="rect">
@@ -4707,14 +4707,14 @@
                   <a:srgbClr val="404040"/>
                 </a:solidFill>
               </a:rPr>
-              <a:t>大和ハウス工業</a:t>
+              <a:t>富士通</a:t>
             </a:r>
           </a:p>
         </p:txBody>
       </p:sp>
       <p:pic>
         <p:nvPicPr>
-          <p:cNvPr id="58" name="Picture 57" descr="富士通.png"/>
+          <p:cNvPr id="58" name="Picture 57" descr="日本郵政.png"/>
           <p:cNvPicPr>
             <a:picLocks noChangeAspect="1"/>
           </p:cNvPicPr>
@@ -4728,8 +4728,8 @@
         </p:blipFill>
         <p:spPr>
           <a:xfrm>
-            <a:off x="8132044" y="4314825"/>
-            <a:ext cx="529964" cy="268605"/>
+            <a:off x="8219307" y="4865914"/>
+            <a:ext cx="355438" cy="378822"/>
           </a:xfrm>
           <a:prstGeom prst="rect">
             <a:avLst/>
@@ -4744,7 +4744,7 @@
         </p:nvSpPr>
         <p:spPr>
           <a:xfrm>
-            <a:off x="7360737" y="4583430"/>
+            <a:off x="7360737" y="5244737"/>
             <a:ext cx="2072579" cy="274320"/>
           </a:xfrm>
           <a:prstGeom prst="rect">
@@ -4765,14 +4765,14 @@
                   <a:srgbClr val="404040"/>
                 </a:solidFill>
               </a:rPr>
-              <a:t>富士通</a:t>
+              <a:t>日本郵政</a:t>
             </a:r>
           </a:p>
         </p:txBody>
       </p:sp>
       <p:pic>
         <p:nvPicPr>
-          <p:cNvPr id="60" name="Picture 59" descr="日本郵政.png"/>
+          <p:cNvPr id="60" name="Picture 59" descr="日立製作所.png"/>
           <p:cNvPicPr>
             <a:picLocks noChangeAspect="1"/>
           </p:cNvPicPr>
@@ -4786,8 +4786,8 @@
         </p:blipFill>
         <p:spPr>
           <a:xfrm>
-            <a:off x="10572193" y="4314825"/>
-            <a:ext cx="252024" cy="268605"/>
+            <a:off x="9707061" y="4865914"/>
+            <a:ext cx="1982288" cy="378822"/>
           </a:xfrm>
           <a:prstGeom prst="rect">
             <a:avLst/>
@@ -4802,7 +4802,7 @@
         </p:nvSpPr>
         <p:spPr>
           <a:xfrm>
-            <a:off x="9661916" y="4583430"/>
+            <a:off x="9661916" y="5244737"/>
             <a:ext cx="2072579" cy="274320"/>
           </a:xfrm>
           <a:prstGeom prst="rect">
@@ -4823,14 +4823,14 @@
                   <a:srgbClr val="404040"/>
                 </a:solidFill>
               </a:rPr>
-              <a:t>日本郵政</a:t>
+              <a:t>日立製作所</a:t>
             </a:r>
           </a:p>
         </p:txBody>
       </p:sp>
       <p:pic>
         <p:nvPicPr>
-          <p:cNvPr id="62" name="Picture 61" descr="日立製作所.png"/>
+          <p:cNvPr id="62" name="Picture 61" descr="東京ガス.png"/>
           <p:cNvPicPr>
             <a:picLocks noChangeAspect="1"/>
           </p:cNvPicPr>
@@ -4844,8 +4844,8 @@
         </p:blipFill>
         <p:spPr>
           <a:xfrm>
-            <a:off x="790717" y="5086350"/>
-            <a:ext cx="1405545" cy="268605"/>
+            <a:off x="585893" y="5747657"/>
+            <a:ext cx="1815192" cy="378822"/>
           </a:xfrm>
           <a:prstGeom prst="rect">
             <a:avLst/>
@@ -4860,7 +4860,7 @@
         </p:nvSpPr>
         <p:spPr>
           <a:xfrm>
-            <a:off x="457200" y="5354955"/>
+            <a:off x="457200" y="6126480"/>
             <a:ext cx="2072579" cy="274320"/>
           </a:xfrm>
           <a:prstGeom prst="rect">
@@ -4881,14 +4881,14 @@
                   <a:srgbClr val="404040"/>
                 </a:solidFill>
               </a:rPr>
-              <a:t>日立製作所</a:t>
+              <a:t>東京ガス</a:t>
             </a:r>
           </a:p>
         </p:txBody>
       </p:sp>
       <p:pic>
         <p:nvPicPr>
-          <p:cNvPr id="64" name="Picture 63" descr="村田製作所.png"/>
+          <p:cNvPr id="64" name="Picture 63" descr="楽天グループ.png"/>
           <p:cNvPicPr>
             <a:picLocks noChangeAspect="1"/>
           </p:cNvPicPr>
@@ -4902,8 +4902,8 @@
         </p:blipFill>
         <p:spPr>
           <a:xfrm>
-            <a:off x="3434971" y="5086350"/>
-            <a:ext cx="719394" cy="268605"/>
+            <a:off x="3218127" y="5747657"/>
+            <a:ext cx="1153083" cy="378822"/>
           </a:xfrm>
           <a:prstGeom prst="rect">
             <a:avLst/>
@@ -4918,7 +4918,7 @@
         </p:nvSpPr>
         <p:spPr>
           <a:xfrm>
-            <a:off x="2758379" y="5354955"/>
+            <a:off x="2758379" y="6126480"/>
             <a:ext cx="2072579" cy="274320"/>
           </a:xfrm>
           <a:prstGeom prst="rect">
@@ -4939,14 +4939,14 @@
                   <a:srgbClr val="404040"/>
                 </a:solidFill>
               </a:rPr>
-              <a:t>村田製作所</a:t>
+              <a:t>楽天グループ</a:t>
             </a:r>
           </a:p>
         </p:txBody>
       </p:sp>
       <p:pic>
         <p:nvPicPr>
-          <p:cNvPr id="66" name="Picture 65" descr="東京ガス.png"/>
+          <p:cNvPr id="66" name="Picture 65" descr="花王.png"/>
           <p:cNvPicPr>
             <a:picLocks noChangeAspect="1"/>
           </p:cNvPicPr>
@@ -4960,8 +4960,8 @@
         </p:blipFill>
         <p:spPr>
           <a:xfrm>
-            <a:off x="5452315" y="5086350"/>
-            <a:ext cx="1287065" cy="268605"/>
+            <a:off x="5761885" y="5747657"/>
+            <a:ext cx="667924" cy="378822"/>
           </a:xfrm>
           <a:prstGeom prst="rect">
             <a:avLst/>
@@ -4976,7 +4976,7 @@
         </p:nvSpPr>
         <p:spPr>
           <a:xfrm>
-            <a:off x="5059558" y="5354955"/>
+            <a:off x="5059558" y="6126480"/>
             <a:ext cx="2072579" cy="274320"/>
           </a:xfrm>
           <a:prstGeom prst="rect">
@@ -4997,14 +4997,14 @@
                   <a:srgbClr val="404040"/>
                 </a:solidFill>
               </a:rPr>
-              <a:t>東京ガス</a:t>
+              <a:t>花王</a:t>
             </a:r>
           </a:p>
         </p:txBody>
       </p:sp>
       <p:pic>
         <p:nvPicPr>
-          <p:cNvPr id="68" name="Picture 67" descr="楽天グループ.png"/>
+          <p:cNvPr id="68" name="Picture 67" descr="資生堂.png"/>
           <p:cNvPicPr>
             <a:picLocks noChangeAspect="1"/>
           </p:cNvPicPr>
@@ -5018,8 +5018,8 @@
         </p:blipFill>
         <p:spPr>
           <a:xfrm>
-            <a:off x="7988229" y="5086350"/>
-            <a:ext cx="817595" cy="268605"/>
+            <a:off x="7450893" y="5747657"/>
+            <a:ext cx="1892266" cy="378822"/>
           </a:xfrm>
           <a:prstGeom prst="rect">
             <a:avLst/>
@@ -5034,7 +5034,7 @@
         </p:nvSpPr>
         <p:spPr>
           <a:xfrm>
-            <a:off x="7360737" y="5354955"/>
+            <a:off x="7360737" y="6126480"/>
             <a:ext cx="2072579" cy="274320"/>
           </a:xfrm>
           <a:prstGeom prst="rect">
@@ -5055,14 +5055,14 @@
                   <a:srgbClr val="404040"/>
                 </a:solidFill>
               </a:rPr>
-              <a:t>楽天グループ</a:t>
+              <a:t>資生堂</a:t>
             </a:r>
           </a:p>
         </p:txBody>
       </p:sp>
       <p:pic>
         <p:nvPicPr>
-          <p:cNvPr id="70" name="Picture 69" descr="花王.png"/>
+          <p:cNvPr id="70" name="Picture 69" descr="野村ホールディングス.png"/>
           <p:cNvPicPr>
             <a:picLocks noChangeAspect="1"/>
           </p:cNvPicPr>
@@ -5076,8 +5076,8 @@
         </p:blipFill>
         <p:spPr>
           <a:xfrm>
-            <a:off x="10461409" y="5086350"/>
-            <a:ext cx="473593" cy="268605"/>
+            <a:off x="9787608" y="5747657"/>
+            <a:ext cx="1821195" cy="378822"/>
           </a:xfrm>
           <a:prstGeom prst="rect">
             <a:avLst/>
@@ -5092,123 +5092,7 @@
         </p:nvSpPr>
         <p:spPr>
           <a:xfrm>
-            <a:off x="9661916" y="5354955"/>
-            <a:ext cx="2072579" cy="274320"/>
-          </a:xfrm>
-          <a:prstGeom prst="rect">
-            <a:avLst/>
-          </a:prstGeom>
-          <a:noFill/>
-        </p:spPr>
-        <p:txBody>
-          <a:bodyPr wrap="square">
-            <a:spAutoFit/>
-          </a:bodyPr>
-          <a:lstStyle/>
-          <a:p>
-            <a:pPr algn="ctr"/>
-            <a:r>
-              <a:rPr sz="1000">
-                <a:solidFill>
-                  <a:srgbClr val="404040"/>
-                </a:solidFill>
-              </a:rPr>
-              <a:t>花王</a:t>
-            </a:r>
-          </a:p>
-        </p:txBody>
-      </p:sp>
-      <p:pic>
-        <p:nvPicPr>
-          <p:cNvPr id="72" name="Picture 71" descr="資生堂.png"/>
-          <p:cNvPicPr>
-            <a:picLocks noChangeAspect="1"/>
-          </p:cNvPicPr>
-          <p:nvPr/>
-        </p:nvPicPr>
-        <p:blipFill>
-          <a:blip r:embed="rId37"/>
-          <a:stretch>
-            <a:fillRect/>
-          </a:stretch>
-        </p:blipFill>
-        <p:spPr>
-          <a:xfrm>
-            <a:off x="822632" y="5857875"/>
-            <a:ext cx="1341714" cy="268605"/>
-          </a:xfrm>
-          <a:prstGeom prst="rect">
-            <a:avLst/>
-          </a:prstGeom>
-        </p:spPr>
-      </p:pic>
-      <p:sp>
-        <p:nvSpPr>
-          <p:cNvPr id="73" name="TextBox 72"/>
-          <p:cNvSpPr txBox="1"/>
-          <p:nvPr/>
-        </p:nvSpPr>
-        <p:spPr>
-          <a:xfrm>
-            <a:off x="457200" y="6126480"/>
-            <a:ext cx="2072579" cy="274320"/>
-          </a:xfrm>
-          <a:prstGeom prst="rect">
-            <a:avLst/>
-          </a:prstGeom>
-          <a:noFill/>
-        </p:spPr>
-        <p:txBody>
-          <a:bodyPr wrap="square">
-            <a:spAutoFit/>
-          </a:bodyPr>
-          <a:lstStyle/>
-          <a:p>
-            <a:pPr algn="ctr"/>
-            <a:r>
-              <a:rPr sz="1000">
-                <a:solidFill>
-                  <a:srgbClr val="404040"/>
-                </a:solidFill>
-              </a:rPr>
-              <a:t>資生堂</a:t>
-            </a:r>
-          </a:p>
-        </p:txBody>
-      </p:sp>
-      <p:pic>
-        <p:nvPicPr>
-          <p:cNvPr id="74" name="Picture 73" descr="野村ホールディングス.png"/>
-          <p:cNvPicPr>
-            <a:picLocks noChangeAspect="1"/>
-          </p:cNvPicPr>
-          <p:nvPr/>
-        </p:nvPicPr>
-        <p:blipFill>
-          <a:blip r:embed="rId38"/>
-          <a:stretch>
-            <a:fillRect/>
-          </a:stretch>
-        </p:blipFill>
-        <p:spPr>
-          <a:xfrm>
-            <a:off x="3149008" y="5857875"/>
-            <a:ext cx="1291321" cy="268605"/>
-          </a:xfrm>
-          <a:prstGeom prst="rect">
-            <a:avLst/>
-          </a:prstGeom>
-        </p:spPr>
-      </p:pic>
-      <p:sp>
-        <p:nvSpPr>
-          <p:cNvPr id="75" name="TextBox 74"/>
-          <p:cNvSpPr txBox="1"/>
-          <p:nvPr/>
-        </p:nvSpPr>
-        <p:spPr>
-          <a:xfrm>
-            <a:off x="2758379" y="6126480"/>
+            <a:off x="9661916" y="6126480"/>
             <a:ext cx="2072579" cy="274320"/>
           </a:xfrm>
           <a:prstGeom prst="rect">

--- a/docs/logos.pptx
+++ b/docs/logos.pptx
@@ -3322,7 +3322,7 @@
       </p:sp>
       <p:pic>
         <p:nvPicPr>
-          <p:cNvPr id="10" name="Picture 9" descr="NTTドコモ.png"/>
+          <p:cNvPr id="10" name="Picture 9" descr="SyncMe.png"/>
           <p:cNvPicPr>
             <a:picLocks noChangeAspect="1"/>
           </p:cNvPicPr>
@@ -3336,8 +3336,8 @@
         </p:blipFill>
         <p:spPr>
           <a:xfrm>
-            <a:off x="9820657" y="457200"/>
-            <a:ext cx="1755096" cy="378822"/>
+            <a:off x="9914939" y="457200"/>
+            <a:ext cx="1566533" cy="378822"/>
           </a:xfrm>
           <a:prstGeom prst="rect">
             <a:avLst/>
@@ -3373,14 +3373,14 @@
                   <a:srgbClr val="404040"/>
                 </a:solidFill>
               </a:rPr>
-              <a:t>NTTドコモ</a:t>
+              <a:t>SyncMe</a:t>
             </a:r>
           </a:p>
         </p:txBody>
       </p:sp>
       <p:pic>
         <p:nvPicPr>
-          <p:cNvPr id="12" name="Picture 11" descr="SyncMe.png"/>
+          <p:cNvPr id="12" name="Picture 11" descr="dポイント.png"/>
           <p:cNvPicPr>
             <a:picLocks noChangeAspect="1"/>
           </p:cNvPicPr>
@@ -3394,8 +3394,8 @@
         </p:blipFill>
         <p:spPr>
           <a:xfrm>
-            <a:off x="710223" y="1338943"/>
-            <a:ext cx="1566533" cy="378822"/>
+            <a:off x="1346374" y="1338943"/>
+            <a:ext cx="294231" cy="378822"/>
           </a:xfrm>
           <a:prstGeom prst="rect">
             <a:avLst/>
@@ -3431,14 +3431,14 @@
                   <a:srgbClr val="404040"/>
                 </a:solidFill>
               </a:rPr>
-              <a:t>SyncMe</a:t>
+              <a:t>dポイント</a:t>
             </a:r>
           </a:p>
         </p:txBody>
       </p:sp>
       <p:pic>
         <p:nvPicPr>
-          <p:cNvPr id="14" name="Picture 13" descr="dポイント.png"/>
+          <p:cNvPr id="14" name="Picture 13" descr="アサヒグループホールディングス.png"/>
           <p:cNvPicPr>
             <a:picLocks noChangeAspect="1"/>
           </p:cNvPicPr>
@@ -3452,8 +3452,8 @@
         </p:blipFill>
         <p:spPr>
           <a:xfrm>
-            <a:off x="3647553" y="1338943"/>
-            <a:ext cx="294231" cy="378822"/>
+            <a:off x="3528171" y="1338943"/>
+            <a:ext cx="532994" cy="378822"/>
           </a:xfrm>
           <a:prstGeom prst="rect">
             <a:avLst/>
@@ -3489,14 +3489,14 @@
                   <a:srgbClr val="404040"/>
                 </a:solidFill>
               </a:rPr>
-              <a:t>dポイント</a:t>
+              <a:t>アサヒグループホールディングス</a:t>
             </a:r>
           </a:p>
         </p:txBody>
       </p:sp>
       <p:pic>
         <p:nvPicPr>
-          <p:cNvPr id="16" name="Picture 15" descr="アサヒグループホールディングス.png"/>
+          <p:cNvPr id="16" name="Picture 15" descr="オリエンタルランド.png"/>
           <p:cNvPicPr>
             <a:picLocks noChangeAspect="1"/>
           </p:cNvPicPr>
@@ -3510,8 +3510,8 @@
         </p:blipFill>
         <p:spPr>
           <a:xfrm>
-            <a:off x="5829350" y="1338943"/>
-            <a:ext cx="532994" cy="378822"/>
+            <a:off x="5734244" y="1338943"/>
+            <a:ext cx="723207" cy="378822"/>
           </a:xfrm>
           <a:prstGeom prst="rect">
             <a:avLst/>
@@ -3547,14 +3547,14 @@
                   <a:srgbClr val="404040"/>
                 </a:solidFill>
               </a:rPr>
-              <a:t>アサヒグループホールディングス</a:t>
+              <a:t>オリエンタルランド</a:t>
             </a:r>
           </a:p>
         </p:txBody>
       </p:sp>
       <p:pic>
         <p:nvPicPr>
-          <p:cNvPr id="18" name="Picture 17" descr="オリエンタルランド.png"/>
+          <p:cNvPr id="18" name="Picture 17" descr="オリンパス.png"/>
           <p:cNvPicPr>
             <a:picLocks noChangeAspect="1"/>
           </p:cNvPicPr>
@@ -3568,8 +3568,8 @@
         </p:blipFill>
         <p:spPr>
           <a:xfrm>
-            <a:off x="8035423" y="1338943"/>
-            <a:ext cx="723207" cy="378822"/>
+            <a:off x="7538169" y="1338943"/>
+            <a:ext cx="1717715" cy="378822"/>
           </a:xfrm>
           <a:prstGeom prst="rect">
             <a:avLst/>
@@ -3605,14 +3605,14 @@
                   <a:srgbClr val="404040"/>
                 </a:solidFill>
               </a:rPr>
-              <a:t>オリエンタルランド</a:t>
+              <a:t>オリンパス</a:t>
             </a:r>
           </a:p>
         </p:txBody>
       </p:sp>
       <p:pic>
         <p:nvPicPr>
-          <p:cNvPr id="20" name="Picture 19" descr="オリンパス.png"/>
+          <p:cNvPr id="20" name="Picture 19" descr="キーエンス.png"/>
           <p:cNvPicPr>
             <a:picLocks noChangeAspect="1"/>
           </p:cNvPicPr>
@@ -3626,8 +3626,8 @@
         </p:blipFill>
         <p:spPr>
           <a:xfrm>
-            <a:off x="9839348" y="1338943"/>
-            <a:ext cx="1717715" cy="378822"/>
+            <a:off x="9816213" y="1338943"/>
+            <a:ext cx="1763984" cy="378822"/>
           </a:xfrm>
           <a:prstGeom prst="rect">
             <a:avLst/>
@@ -3663,14 +3663,14 @@
                   <a:srgbClr val="404040"/>
                 </a:solidFill>
               </a:rPr>
-              <a:t>オリンパス</a:t>
+              <a:t>キーエンス</a:t>
             </a:r>
           </a:p>
         </p:txBody>
       </p:sp>
       <p:pic>
         <p:nvPicPr>
-          <p:cNvPr id="22" name="Picture 21" descr="キーエンス.png"/>
+          <p:cNvPr id="22" name="Picture 21" descr="コマツ.png"/>
           <p:cNvPicPr>
             <a:picLocks noChangeAspect="1"/>
           </p:cNvPicPr>
@@ -3684,8 +3684,8 @@
         </p:blipFill>
         <p:spPr>
           <a:xfrm>
-            <a:off x="611497" y="2220686"/>
-            <a:ext cx="1763984" cy="378822"/>
+            <a:off x="627609" y="2220686"/>
+            <a:ext cx="1731761" cy="378822"/>
           </a:xfrm>
           <a:prstGeom prst="rect">
             <a:avLst/>
@@ -3721,14 +3721,14 @@
                   <a:srgbClr val="404040"/>
                 </a:solidFill>
               </a:rPr>
-              <a:t>キーエンス</a:t>
+              <a:t>コマツ</a:t>
             </a:r>
           </a:p>
         </p:txBody>
       </p:sp>
       <p:pic>
         <p:nvPicPr>
-          <p:cNvPr id="24" name="Picture 23" descr="コマツ.png"/>
+          <p:cNvPr id="24" name="Picture 23" descr="セコム.png"/>
           <p:cNvPicPr>
             <a:picLocks noChangeAspect="1"/>
           </p:cNvPicPr>
@@ -3742,8 +3742,8 @@
         </p:blipFill>
         <p:spPr>
           <a:xfrm>
-            <a:off x="2928788" y="2220686"/>
-            <a:ext cx="1731761" cy="378822"/>
+            <a:off x="3304254" y="2220686"/>
+            <a:ext cx="980828" cy="378822"/>
           </a:xfrm>
           <a:prstGeom prst="rect">
             <a:avLst/>
@@ -3779,14 +3779,14 @@
                   <a:srgbClr val="404040"/>
                 </a:solidFill>
               </a:rPr>
-              <a:t>コマツ</a:t>
+              <a:t>セコム</a:t>
             </a:r>
           </a:p>
         </p:txBody>
       </p:sp>
       <p:pic>
         <p:nvPicPr>
-          <p:cNvPr id="26" name="Picture 25" descr="セコム.png"/>
+          <p:cNvPr id="26" name="Picture 25" descr="セブン&amp;アイ・ホールディングス.png"/>
           <p:cNvPicPr>
             <a:picLocks noChangeAspect="1"/>
           </p:cNvPicPr>
@@ -3800,8 +3800,8 @@
         </p:blipFill>
         <p:spPr>
           <a:xfrm>
-            <a:off x="5605433" y="2220686"/>
-            <a:ext cx="980828" cy="378822"/>
+            <a:off x="5886322" y="2220686"/>
+            <a:ext cx="419051" cy="378822"/>
           </a:xfrm>
           <a:prstGeom prst="rect">
             <a:avLst/>
@@ -3837,14 +3837,14 @@
                   <a:srgbClr val="404040"/>
                 </a:solidFill>
               </a:rPr>
-              <a:t>セコム</a:t>
+              <a:t>セブン&amp;アイ・ホールディングス</a:t>
             </a:r>
           </a:p>
         </p:txBody>
       </p:sp>
       <p:pic>
         <p:nvPicPr>
-          <p:cNvPr id="28" name="Picture 27" descr="セブン&amp;アイ・ホールディングス.png"/>
+          <p:cNvPr id="28" name="Picture 27" descr="ソニーグループ.png"/>
           <p:cNvPicPr>
             <a:picLocks noChangeAspect="1"/>
           </p:cNvPicPr>
@@ -3858,8 +3858,8 @@
         </p:blipFill>
         <p:spPr>
           <a:xfrm>
-            <a:off x="8187501" y="2220686"/>
-            <a:ext cx="419051" cy="378822"/>
+            <a:off x="7491675" y="2220686"/>
+            <a:ext cx="1810703" cy="378822"/>
           </a:xfrm>
           <a:prstGeom prst="rect">
             <a:avLst/>
@@ -3895,14 +3895,14 @@
                   <a:srgbClr val="404040"/>
                 </a:solidFill>
               </a:rPr>
-              <a:t>セブン&amp;アイ・ホールディングス</a:t>
+              <a:t>ソニーグループ</a:t>
             </a:r>
           </a:p>
         </p:txBody>
       </p:sp>
       <p:pic>
         <p:nvPicPr>
-          <p:cNvPr id="30" name="Picture 29" descr="ソニーグループ.png"/>
+          <p:cNvPr id="30" name="Picture 29" descr="ダイキン工業.png"/>
           <p:cNvPicPr>
             <a:picLocks noChangeAspect="1"/>
           </p:cNvPicPr>
@@ -3916,8 +3916,8 @@
         </p:blipFill>
         <p:spPr>
           <a:xfrm>
-            <a:off x="9792854" y="2220686"/>
-            <a:ext cx="1810703" cy="378822"/>
+            <a:off x="9911788" y="2220686"/>
+            <a:ext cx="1572834" cy="378822"/>
           </a:xfrm>
           <a:prstGeom prst="rect">
             <a:avLst/>
@@ -3953,14 +3953,14 @@
                   <a:srgbClr val="404040"/>
                 </a:solidFill>
               </a:rPr>
-              <a:t>ソニーグループ</a:t>
+              <a:t>ダイキン工業</a:t>
             </a:r>
           </a:p>
         </p:txBody>
       </p:sp>
       <p:pic>
         <p:nvPicPr>
-          <p:cNvPr id="32" name="Picture 31" descr="ダイキン工業.png"/>
+          <p:cNvPr id="32" name="Picture 31" descr="トヨタ自動車.png"/>
           <p:cNvPicPr>
             <a:picLocks noChangeAspect="1"/>
           </p:cNvPicPr>
@@ -3974,8 +3974,8 @@
         </p:blipFill>
         <p:spPr>
           <a:xfrm>
-            <a:off x="707072" y="3102429"/>
-            <a:ext cx="1572834" cy="378822"/>
+            <a:off x="1220829" y="3102429"/>
+            <a:ext cx="545321" cy="378822"/>
           </a:xfrm>
           <a:prstGeom prst="rect">
             <a:avLst/>
@@ -4011,14 +4011,14 @@
                   <a:srgbClr val="404040"/>
                 </a:solidFill>
               </a:rPr>
-              <a:t>ダイキン工業</a:t>
+              <a:t>トヨタ自動車</a:t>
             </a:r>
           </a:p>
         </p:txBody>
       </p:sp>
       <p:pic>
         <p:nvPicPr>
-          <p:cNvPr id="34" name="Picture 33" descr="トヨタ自動車.png"/>
+          <p:cNvPr id="34" name="Picture 33" descr="ドコモの銀行.png"/>
           <p:cNvPicPr>
             <a:picLocks noChangeAspect="1"/>
           </p:cNvPicPr>
@@ -4032,8 +4032,8 @@
         </p:blipFill>
         <p:spPr>
           <a:xfrm>
-            <a:off x="3522008" y="3102429"/>
-            <a:ext cx="545321" cy="378822"/>
+            <a:off x="3174346" y="3102429"/>
+            <a:ext cx="1240644" cy="378822"/>
           </a:xfrm>
           <a:prstGeom prst="rect">
             <a:avLst/>
@@ -4069,14 +4069,14 @@
                   <a:srgbClr val="404040"/>
                 </a:solidFill>
               </a:rPr>
-              <a:t>トヨタ自動車</a:t>
+              <a:t>ドコモの銀行</a:t>
             </a:r>
           </a:p>
         </p:txBody>
       </p:sp>
       <p:pic>
         <p:nvPicPr>
-          <p:cNvPr id="36" name="Picture 35" descr="ドコモの銀行.png"/>
+          <p:cNvPr id="36" name="Picture 35" descr="パナソニック.png"/>
           <p:cNvPicPr>
             <a:picLocks noChangeAspect="1"/>
           </p:cNvPicPr>
@@ -4090,8 +4090,8 @@
         </p:blipFill>
         <p:spPr>
           <a:xfrm>
-            <a:off x="5475525" y="3102429"/>
-            <a:ext cx="1240644" cy="378822"/>
+            <a:off x="5059558" y="3103424"/>
+            <a:ext cx="2072578" cy="376832"/>
           </a:xfrm>
           <a:prstGeom prst="rect">
             <a:avLst/>
@@ -4127,14 +4127,14 @@
                   <a:srgbClr val="404040"/>
                 </a:solidFill>
               </a:rPr>
-              <a:t>ドコモの銀行</a:t>
+              <a:t>パナソニック</a:t>
             </a:r>
           </a:p>
         </p:txBody>
       </p:sp>
       <p:pic>
         <p:nvPicPr>
-          <p:cNvPr id="38" name="Picture 37" descr="パナソニック.png"/>
+          <p:cNvPr id="38" name="Picture 37" descr="ファーストリテイリング.png"/>
           <p:cNvPicPr>
             <a:picLocks noChangeAspect="1"/>
           </p:cNvPicPr>
@@ -4148,8 +4148,8 @@
         </p:blipFill>
         <p:spPr>
           <a:xfrm>
-            <a:off x="7360737" y="3103424"/>
-            <a:ext cx="2072578" cy="376832"/>
+            <a:off x="8020834" y="3102429"/>
+            <a:ext cx="752384" cy="378822"/>
           </a:xfrm>
           <a:prstGeom prst="rect">
             <a:avLst/>
@@ -4185,14 +4185,14 @@
                   <a:srgbClr val="404040"/>
                 </a:solidFill>
               </a:rPr>
-              <a:t>パナソニック</a:t>
+              <a:t>ファーストリテイリング</a:t>
             </a:r>
           </a:p>
         </p:txBody>
       </p:sp>
       <p:pic>
         <p:nvPicPr>
-          <p:cNvPr id="40" name="Picture 39" descr="ファーストリテイリング.png"/>
+          <p:cNvPr id="40" name="Picture 39" descr="ホンダ.png"/>
           <p:cNvPicPr>
             <a:picLocks noChangeAspect="1"/>
           </p:cNvPicPr>
@@ -4206,8 +4206,8 @@
         </p:blipFill>
         <p:spPr>
           <a:xfrm>
-            <a:off x="10322013" y="3102429"/>
-            <a:ext cx="752384" cy="378822"/>
+            <a:off x="9661916" y="3125805"/>
+            <a:ext cx="2072578" cy="332070"/>
           </a:xfrm>
           <a:prstGeom prst="rect">
             <a:avLst/>
@@ -4243,14 +4243,14 @@
                   <a:srgbClr val="404040"/>
                 </a:solidFill>
               </a:rPr>
-              <a:t>ファーストリテイリング</a:t>
+              <a:t>ホンダ</a:t>
             </a:r>
           </a:p>
         </p:txBody>
       </p:sp>
       <p:pic>
         <p:nvPicPr>
-          <p:cNvPr id="42" name="Picture 41" descr="ホンダ.png"/>
+          <p:cNvPr id="42" name="Picture 41" descr="リクルートホールディングス.png"/>
           <p:cNvPicPr>
             <a:picLocks noChangeAspect="1"/>
           </p:cNvPicPr>
@@ -4264,8 +4264,8 @@
         </p:blipFill>
         <p:spPr>
           <a:xfrm>
-            <a:off x="457200" y="4007547"/>
-            <a:ext cx="2072578" cy="332070"/>
+            <a:off x="842333" y="3984171"/>
+            <a:ext cx="1302312" cy="378822"/>
           </a:xfrm>
           <a:prstGeom prst="rect">
             <a:avLst/>
@@ -4301,14 +4301,14 @@
                   <a:srgbClr val="404040"/>
                 </a:solidFill>
               </a:rPr>
-              <a:t>ホンダ</a:t>
+              <a:t>リクルートホールディングス</a:t>
             </a:r>
           </a:p>
         </p:txBody>
       </p:sp>
       <p:pic>
         <p:nvPicPr>
-          <p:cNvPr id="44" name="Picture 43" descr="リクルートホールディングス.png"/>
+          <p:cNvPr id="44" name="Picture 43" descr="三井住友銀行.png"/>
           <p:cNvPicPr>
             <a:picLocks noChangeAspect="1"/>
           </p:cNvPicPr>
@@ -4322,8 +4322,8 @@
         </p:blipFill>
         <p:spPr>
           <a:xfrm>
-            <a:off x="3143512" y="3984171"/>
-            <a:ext cx="1302312" cy="378822"/>
+            <a:off x="3164937" y="3984171"/>
+            <a:ext cx="1259463" cy="378822"/>
           </a:xfrm>
           <a:prstGeom prst="rect">
             <a:avLst/>
@@ -4359,14 +4359,14 @@
                   <a:srgbClr val="404040"/>
                 </a:solidFill>
               </a:rPr>
-              <a:t>リクルートホールディングス</a:t>
+              <a:t>三井住友銀行</a:t>
             </a:r>
           </a:p>
         </p:txBody>
       </p:sp>
       <p:pic>
         <p:nvPicPr>
-          <p:cNvPr id="46" name="Picture 45" descr="三井住友銀行.png"/>
+          <p:cNvPr id="46" name="Picture 45" descr="三菱電機.png"/>
           <p:cNvPicPr>
             <a:picLocks noChangeAspect="1"/>
           </p:cNvPicPr>
@@ -4380,8 +4380,8 @@
         </p:blipFill>
         <p:spPr>
           <a:xfrm>
-            <a:off x="5466116" y="3984171"/>
-            <a:ext cx="1259463" cy="378822"/>
+            <a:off x="5513043" y="3984171"/>
+            <a:ext cx="1165608" cy="378822"/>
           </a:xfrm>
           <a:prstGeom prst="rect">
             <a:avLst/>
@@ -4417,14 +4417,14 @@
                   <a:srgbClr val="404040"/>
                 </a:solidFill>
               </a:rPr>
-              <a:t>三井住友銀行</a:t>
+              <a:t>三菱電機</a:t>
             </a:r>
           </a:p>
         </p:txBody>
       </p:sp>
       <p:pic>
         <p:nvPicPr>
-          <p:cNvPr id="48" name="Picture 47" descr="三菱電機.png"/>
+          <p:cNvPr id="48" name="Picture 47" descr="任天堂.png"/>
           <p:cNvPicPr>
             <a:picLocks noChangeAspect="1"/>
           </p:cNvPicPr>
@@ -4438,8 +4438,8 @@
         </p:blipFill>
         <p:spPr>
           <a:xfrm>
-            <a:off x="7814222" y="3984171"/>
-            <a:ext cx="1165608" cy="378822"/>
+            <a:off x="7709235" y="3984171"/>
+            <a:ext cx="1375583" cy="378822"/>
           </a:xfrm>
           <a:prstGeom prst="rect">
             <a:avLst/>
@@ -4475,14 +4475,14 @@
                   <a:srgbClr val="404040"/>
                 </a:solidFill>
               </a:rPr>
-              <a:t>三菱電機</a:t>
+              <a:t>任天堂</a:t>
             </a:r>
           </a:p>
         </p:txBody>
       </p:sp>
       <p:pic>
         <p:nvPicPr>
-          <p:cNvPr id="50" name="Picture 49" descr="任天堂.png"/>
+          <p:cNvPr id="50" name="Picture 49" descr="味の素.png"/>
           <p:cNvPicPr>
             <a:picLocks noChangeAspect="1"/>
           </p:cNvPicPr>
@@ -4496,8 +4496,8 @@
         </p:blipFill>
         <p:spPr>
           <a:xfrm>
-            <a:off x="10010414" y="3984171"/>
-            <a:ext cx="1375583" cy="378822"/>
+            <a:off x="9661916" y="4005536"/>
+            <a:ext cx="2072579" cy="336093"/>
           </a:xfrm>
           <a:prstGeom prst="rect">
             <a:avLst/>
@@ -4533,14 +4533,14 @@
                   <a:srgbClr val="404040"/>
                 </a:solidFill>
               </a:rPr>
-              <a:t>任天堂</a:t>
+              <a:t>味の素</a:t>
             </a:r>
           </a:p>
         </p:txBody>
       </p:sp>
       <p:pic>
         <p:nvPicPr>
-          <p:cNvPr id="52" name="Picture 51" descr="味の素.png"/>
+          <p:cNvPr id="52" name="Picture 51" descr="大和ハウス工業.png"/>
           <p:cNvPicPr>
             <a:picLocks noChangeAspect="1"/>
           </p:cNvPicPr>
@@ -4554,8 +4554,8 @@
         </p:blipFill>
         <p:spPr>
           <a:xfrm>
-            <a:off x="457200" y="4887279"/>
-            <a:ext cx="2072579" cy="336093"/>
+            <a:off x="1256088" y="4865914"/>
+            <a:ext cx="474803" cy="378822"/>
           </a:xfrm>
           <a:prstGeom prst="rect">
             <a:avLst/>
@@ -4591,14 +4591,14 @@
                   <a:srgbClr val="404040"/>
                 </a:solidFill>
               </a:rPr>
-              <a:t>味の素</a:t>
+              <a:t>大和ハウス工業</a:t>
             </a:r>
           </a:p>
         </p:txBody>
       </p:sp>
       <p:pic>
         <p:nvPicPr>
-          <p:cNvPr id="54" name="Picture 53" descr="大和ハウス工業.png"/>
+          <p:cNvPr id="54" name="Picture 53" descr="富士通.png"/>
           <p:cNvPicPr>
             <a:picLocks noChangeAspect="1"/>
           </p:cNvPicPr>
@@ -4612,8 +4612,8 @@
         </p:blipFill>
         <p:spPr>
           <a:xfrm>
-            <a:off x="3557267" y="4865914"/>
-            <a:ext cx="474803" cy="378822"/>
+            <a:off x="3420955" y="4865914"/>
+            <a:ext cx="747426" cy="378822"/>
           </a:xfrm>
           <a:prstGeom prst="rect">
             <a:avLst/>
@@ -4649,14 +4649,14 @@
                   <a:srgbClr val="404040"/>
                 </a:solidFill>
               </a:rPr>
-              <a:t>大和ハウス工業</a:t>
+              <a:t>富士通</a:t>
             </a:r>
           </a:p>
         </p:txBody>
       </p:sp>
       <p:pic>
         <p:nvPicPr>
-          <p:cNvPr id="56" name="Picture 55" descr="富士通.png"/>
+          <p:cNvPr id="56" name="Picture 55" descr="日本郵政.png"/>
           <p:cNvPicPr>
             <a:picLocks noChangeAspect="1"/>
           </p:cNvPicPr>
@@ -4670,8 +4670,8 @@
         </p:blipFill>
         <p:spPr>
           <a:xfrm>
-            <a:off x="5722134" y="4865914"/>
-            <a:ext cx="747426" cy="378822"/>
+            <a:off x="5918128" y="4865914"/>
+            <a:ext cx="355438" cy="378822"/>
           </a:xfrm>
           <a:prstGeom prst="rect">
             <a:avLst/>
@@ -4707,14 +4707,14 @@
                   <a:srgbClr val="404040"/>
                 </a:solidFill>
               </a:rPr>
-              <a:t>富士通</a:t>
+              <a:t>日本郵政</a:t>
             </a:r>
           </a:p>
         </p:txBody>
       </p:sp>
       <p:pic>
         <p:nvPicPr>
-          <p:cNvPr id="58" name="Picture 57" descr="日本郵政.png"/>
+          <p:cNvPr id="58" name="Picture 57" descr="日立製作所.png"/>
           <p:cNvPicPr>
             <a:picLocks noChangeAspect="1"/>
           </p:cNvPicPr>
@@ -4728,8 +4728,8 @@
         </p:blipFill>
         <p:spPr>
           <a:xfrm>
-            <a:off x="8219307" y="4865914"/>
-            <a:ext cx="355438" cy="378822"/>
+            <a:off x="7405882" y="4865914"/>
+            <a:ext cx="1982288" cy="378822"/>
           </a:xfrm>
           <a:prstGeom prst="rect">
             <a:avLst/>
@@ -4765,14 +4765,14 @@
                   <a:srgbClr val="404040"/>
                 </a:solidFill>
               </a:rPr>
-              <a:t>日本郵政</a:t>
+              <a:t>日立製作所</a:t>
             </a:r>
           </a:p>
         </p:txBody>
       </p:sp>
       <p:pic>
         <p:nvPicPr>
-          <p:cNvPr id="60" name="Picture 59" descr="日立製作所.png"/>
+          <p:cNvPr id="60" name="Picture 59" descr="東京ガス.png"/>
           <p:cNvPicPr>
             <a:picLocks noChangeAspect="1"/>
           </p:cNvPicPr>
@@ -4786,8 +4786,8 @@
         </p:blipFill>
         <p:spPr>
           <a:xfrm>
-            <a:off x="9707061" y="4865914"/>
-            <a:ext cx="1982288" cy="378822"/>
+            <a:off x="9790609" y="4865914"/>
+            <a:ext cx="1815192" cy="378822"/>
           </a:xfrm>
           <a:prstGeom prst="rect">
             <a:avLst/>
@@ -4823,14 +4823,14 @@
                   <a:srgbClr val="404040"/>
                 </a:solidFill>
               </a:rPr>
-              <a:t>日立製作所</a:t>
+              <a:t>東京ガス</a:t>
             </a:r>
           </a:p>
         </p:txBody>
       </p:sp>
       <p:pic>
         <p:nvPicPr>
-          <p:cNvPr id="62" name="Picture 61" descr="東京ガス.png"/>
+          <p:cNvPr id="62" name="Picture 61" descr="楽天グループ.png"/>
           <p:cNvPicPr>
             <a:picLocks noChangeAspect="1"/>
           </p:cNvPicPr>
@@ -4844,8 +4844,8 @@
         </p:blipFill>
         <p:spPr>
           <a:xfrm>
-            <a:off x="585893" y="5747657"/>
-            <a:ext cx="1815192" cy="378822"/>
+            <a:off x="916948" y="5747657"/>
+            <a:ext cx="1153083" cy="378822"/>
           </a:xfrm>
           <a:prstGeom prst="rect">
             <a:avLst/>
@@ -4881,14 +4881,14 @@
                   <a:srgbClr val="404040"/>
                 </a:solidFill>
               </a:rPr>
-              <a:t>東京ガス</a:t>
+              <a:t>楽天グループ</a:t>
             </a:r>
           </a:p>
         </p:txBody>
       </p:sp>
       <p:pic>
         <p:nvPicPr>
-          <p:cNvPr id="64" name="Picture 63" descr="楽天グループ.png"/>
+          <p:cNvPr id="64" name="Picture 63" descr="花王.png"/>
           <p:cNvPicPr>
             <a:picLocks noChangeAspect="1"/>
           </p:cNvPicPr>
@@ -4902,8 +4902,8 @@
         </p:blipFill>
         <p:spPr>
           <a:xfrm>
-            <a:off x="3218127" y="5747657"/>
-            <a:ext cx="1153083" cy="378822"/>
+            <a:off x="3460706" y="5747657"/>
+            <a:ext cx="667924" cy="378822"/>
           </a:xfrm>
           <a:prstGeom prst="rect">
             <a:avLst/>
@@ -4939,14 +4939,14 @@
                   <a:srgbClr val="404040"/>
                 </a:solidFill>
               </a:rPr>
-              <a:t>楽天グループ</a:t>
+              <a:t>花王</a:t>
             </a:r>
           </a:p>
         </p:txBody>
       </p:sp>
       <p:pic>
         <p:nvPicPr>
-          <p:cNvPr id="66" name="Picture 65" descr="花王.png"/>
+          <p:cNvPr id="66" name="Picture 65" descr="資生堂.png"/>
           <p:cNvPicPr>
             <a:picLocks noChangeAspect="1"/>
           </p:cNvPicPr>
@@ -4960,8 +4960,8 @@
         </p:blipFill>
         <p:spPr>
           <a:xfrm>
-            <a:off x="5761885" y="5747657"/>
-            <a:ext cx="667924" cy="378822"/>
+            <a:off x="5149714" y="5747657"/>
+            <a:ext cx="1892266" cy="378822"/>
           </a:xfrm>
           <a:prstGeom prst="rect">
             <a:avLst/>
@@ -4997,14 +4997,14 @@
                   <a:srgbClr val="404040"/>
                 </a:solidFill>
               </a:rPr>
-              <a:t>花王</a:t>
+              <a:t>資生堂</a:t>
             </a:r>
           </a:p>
         </p:txBody>
       </p:sp>
       <p:pic>
         <p:nvPicPr>
-          <p:cNvPr id="68" name="Picture 67" descr="資生堂.png"/>
+          <p:cNvPr id="68" name="Picture 67" descr="野村ホールディングス.png"/>
           <p:cNvPicPr>
             <a:picLocks noChangeAspect="1"/>
           </p:cNvPicPr>
@@ -5018,8 +5018,8 @@
         </p:blipFill>
         <p:spPr>
           <a:xfrm>
-            <a:off x="7450893" y="5747657"/>
-            <a:ext cx="1892266" cy="378822"/>
+            <a:off x="7486429" y="5747657"/>
+            <a:ext cx="1821195" cy="378822"/>
           </a:xfrm>
           <a:prstGeom prst="rect">
             <a:avLst/>
@@ -5035,64 +5035,6 @@
         <p:spPr>
           <a:xfrm>
             <a:off x="7360737" y="6126480"/>
-            <a:ext cx="2072579" cy="274320"/>
-          </a:xfrm>
-          <a:prstGeom prst="rect">
-            <a:avLst/>
-          </a:prstGeom>
-          <a:noFill/>
-        </p:spPr>
-        <p:txBody>
-          <a:bodyPr wrap="square">
-            <a:spAutoFit/>
-          </a:bodyPr>
-          <a:lstStyle/>
-          <a:p>
-            <a:pPr algn="ctr"/>
-            <a:r>
-              <a:rPr sz="1000">
-                <a:solidFill>
-                  <a:srgbClr val="404040"/>
-                </a:solidFill>
-              </a:rPr>
-              <a:t>資生堂</a:t>
-            </a:r>
-          </a:p>
-        </p:txBody>
-      </p:sp>
-      <p:pic>
-        <p:nvPicPr>
-          <p:cNvPr id="70" name="Picture 69" descr="野村ホールディングス.png"/>
-          <p:cNvPicPr>
-            <a:picLocks noChangeAspect="1"/>
-          </p:cNvPicPr>
-          <p:nvPr/>
-        </p:nvPicPr>
-        <p:blipFill>
-          <a:blip r:embed="rId36"/>
-          <a:stretch>
-            <a:fillRect/>
-          </a:stretch>
-        </p:blipFill>
-        <p:spPr>
-          <a:xfrm>
-            <a:off x="9787608" y="5747657"/>
-            <a:ext cx="1821195" cy="378822"/>
-          </a:xfrm>
-          <a:prstGeom prst="rect">
-            <a:avLst/>
-          </a:prstGeom>
-        </p:spPr>
-      </p:pic>
-      <p:sp>
-        <p:nvSpPr>
-          <p:cNvPr id="71" name="TextBox 70"/>
-          <p:cNvSpPr txBox="1"/>
-          <p:nvPr/>
-        </p:nvSpPr>
-        <p:spPr>
-          <a:xfrm>
-            <a:off x="9661916" y="6126480"/>
             <a:ext cx="2072579" cy="274320"/>
           </a:xfrm>
           <a:prstGeom prst="rect">

--- a/docs/logos.pptx
+++ b/docs/logos.pptx
@@ -3104,8 +3104,8 @@
         </p:blipFill>
         <p:spPr>
           <a:xfrm>
-            <a:off x="1174432" y="457200"/>
-            <a:ext cx="638114" cy="378822"/>
+            <a:off x="1339462" y="457200"/>
+            <a:ext cx="308055" cy="182880"/>
           </a:xfrm>
           <a:prstGeom prst="rect">
             <a:avLst/>
@@ -3120,7 +3120,7 @@
         </p:nvSpPr>
         <p:spPr>
           <a:xfrm>
-            <a:off x="457200" y="836022"/>
+            <a:off x="457200" y="640080"/>
             <a:ext cx="2072579" cy="274320"/>
           </a:xfrm>
           <a:prstGeom prst="rect">
@@ -3162,8 +3162,8 @@
         </p:blipFill>
         <p:spPr>
           <a:xfrm>
-            <a:off x="3388787" y="457200"/>
-            <a:ext cx="811763" cy="378822"/>
+            <a:off x="3598726" y="457200"/>
+            <a:ext cx="391885" cy="182880"/>
           </a:xfrm>
           <a:prstGeom prst="rect">
             <a:avLst/>
@@ -3178,7 +3178,7 @@
         </p:nvSpPr>
         <p:spPr>
           <a:xfrm>
-            <a:off x="2758379" y="836022"/>
+            <a:off x="2758379" y="640080"/>
             <a:ext cx="2072579" cy="274320"/>
           </a:xfrm>
           <a:prstGeom prst="rect">
@@ -3220,8 +3220,8 @@
         </p:blipFill>
         <p:spPr>
           <a:xfrm>
-            <a:off x="5453605" y="457200"/>
-            <a:ext cx="1284485" cy="378822"/>
+            <a:off x="5785799" y="457200"/>
+            <a:ext cx="620096" cy="182880"/>
           </a:xfrm>
           <a:prstGeom prst="rect">
             <a:avLst/>
@@ -3236,7 +3236,7 @@
         </p:nvSpPr>
         <p:spPr>
           <a:xfrm>
-            <a:off x="5059558" y="836022"/>
+            <a:off x="5059558" y="640080"/>
             <a:ext cx="2072579" cy="274320"/>
           </a:xfrm>
           <a:prstGeom prst="rect">
@@ -3278,8 +3278,8 @@
         </p:blipFill>
         <p:spPr>
           <a:xfrm>
-            <a:off x="7598692" y="457200"/>
-            <a:ext cx="1596668" cy="378822"/>
+            <a:off x="8011624" y="457200"/>
+            <a:ext cx="770805" cy="182880"/>
           </a:xfrm>
           <a:prstGeom prst="rect">
             <a:avLst/>
@@ -3294,7 +3294,7 @@
         </p:nvSpPr>
         <p:spPr>
           <a:xfrm>
-            <a:off x="7360737" y="836022"/>
+            <a:off x="7360737" y="640080"/>
             <a:ext cx="2072579" cy="274320"/>
           </a:xfrm>
           <a:prstGeom prst="rect">
@@ -3336,8 +3336,8 @@
         </p:blipFill>
         <p:spPr>
           <a:xfrm>
-            <a:off x="9914939" y="457200"/>
-            <a:ext cx="1566533" cy="378822"/>
+            <a:off x="10320077" y="457200"/>
+            <a:ext cx="756257" cy="182880"/>
           </a:xfrm>
           <a:prstGeom prst="rect">
             <a:avLst/>
@@ -3352,7 +3352,7 @@
         </p:nvSpPr>
         <p:spPr>
           <a:xfrm>
-            <a:off x="9661916" y="836022"/>
+            <a:off x="9661916" y="640080"/>
             <a:ext cx="2072579" cy="274320"/>
           </a:xfrm>
           <a:prstGeom prst="rect">
@@ -3380,7 +3380,7 @@
       </p:sp>
       <p:pic>
         <p:nvPicPr>
-          <p:cNvPr id="12" name="Picture 11" descr="dポイント.png"/>
+          <p:cNvPr id="12" name="Picture 11" descr="ahamo.png"/>
           <p:cNvPicPr>
             <a:picLocks noChangeAspect="1"/>
           </p:cNvPicPr>
@@ -3394,8 +3394,8 @@
         </p:blipFill>
         <p:spPr>
           <a:xfrm>
-            <a:off x="1346374" y="1338943"/>
-            <a:ext cx="294231" cy="378822"/>
+            <a:off x="1325146" y="1143000"/>
+            <a:ext cx="336686" cy="182880"/>
           </a:xfrm>
           <a:prstGeom prst="rect">
             <a:avLst/>
@@ -3410,7 +3410,7 @@
         </p:nvSpPr>
         <p:spPr>
           <a:xfrm>
-            <a:off x="457200" y="1717765"/>
+            <a:off x="457200" y="1325880"/>
             <a:ext cx="2072579" cy="274320"/>
           </a:xfrm>
           <a:prstGeom prst="rect">
@@ -3431,14 +3431,14 @@
                   <a:srgbClr val="404040"/>
                 </a:solidFill>
               </a:rPr>
-              <a:t>dポイント</a:t>
+              <a:t>ahamo</a:t>
             </a:r>
           </a:p>
         </p:txBody>
       </p:sp>
       <p:pic>
         <p:nvPicPr>
-          <p:cNvPr id="14" name="Picture 13" descr="アサヒグループホールディングス.png"/>
+          <p:cNvPr id="14" name="Picture 13" descr="dTV.png"/>
           <p:cNvPicPr>
             <a:picLocks noChangeAspect="1"/>
           </p:cNvPicPr>
@@ -3452,8 +3452,8 @@
         </p:blipFill>
         <p:spPr>
           <a:xfrm>
-            <a:off x="3528171" y="1338943"/>
-            <a:ext cx="532994" cy="378822"/>
+            <a:off x="3585118" y="1143000"/>
+            <a:ext cx="419100" cy="182880"/>
           </a:xfrm>
           <a:prstGeom prst="rect">
             <a:avLst/>
@@ -3468,7 +3468,7 @@
         </p:nvSpPr>
         <p:spPr>
           <a:xfrm>
-            <a:off x="2758379" y="1717765"/>
+            <a:off x="2758379" y="1325880"/>
             <a:ext cx="2072579" cy="274320"/>
           </a:xfrm>
           <a:prstGeom prst="rect">
@@ -3489,14 +3489,14 @@
                   <a:srgbClr val="404040"/>
                 </a:solidFill>
               </a:rPr>
-              <a:t>アサヒグループホールディングス</a:t>
+              <a:t>dTV</a:t>
             </a:r>
           </a:p>
         </p:txBody>
       </p:sp>
       <p:pic>
         <p:nvPicPr>
-          <p:cNvPr id="16" name="Picture 15" descr="オリエンタルランド.png"/>
+          <p:cNvPr id="16" name="Picture 15" descr="dゲーム.png"/>
           <p:cNvPicPr>
             <a:picLocks noChangeAspect="1"/>
           </p:cNvPicPr>
@@ -3510,8 +3510,8 @@
         </p:blipFill>
         <p:spPr>
           <a:xfrm>
-            <a:off x="5734244" y="1338943"/>
-            <a:ext cx="723207" cy="378822"/>
+            <a:off x="5846819" y="1143000"/>
+            <a:ext cx="498056" cy="182880"/>
           </a:xfrm>
           <a:prstGeom prst="rect">
             <a:avLst/>
@@ -3526,7 +3526,7 @@
         </p:nvSpPr>
         <p:spPr>
           <a:xfrm>
-            <a:off x="5059558" y="1717765"/>
+            <a:off x="5059558" y="1325880"/>
             <a:ext cx="2072579" cy="274320"/>
           </a:xfrm>
           <a:prstGeom prst="rect">
@@ -3547,14 +3547,14 @@
                   <a:srgbClr val="404040"/>
                 </a:solidFill>
               </a:rPr>
-              <a:t>オリエンタルランド</a:t>
+              <a:t>dゲーム</a:t>
             </a:r>
           </a:p>
         </p:txBody>
       </p:sp>
       <p:pic>
         <p:nvPicPr>
-          <p:cNvPr id="18" name="Picture 17" descr="オリンパス.png"/>
+          <p:cNvPr id="18" name="Picture 17" descr="dポイント.png"/>
           <p:cNvPicPr>
             <a:picLocks noChangeAspect="1"/>
           </p:cNvPicPr>
@@ -3568,8 +3568,8 @@
         </p:blipFill>
         <p:spPr>
           <a:xfrm>
-            <a:off x="7538169" y="1338943"/>
-            <a:ext cx="1717715" cy="378822"/>
+            <a:off x="8326005" y="1143000"/>
+            <a:ext cx="142042" cy="182880"/>
           </a:xfrm>
           <a:prstGeom prst="rect">
             <a:avLst/>
@@ -3584,7 +3584,7 @@
         </p:nvSpPr>
         <p:spPr>
           <a:xfrm>
-            <a:off x="7360737" y="1717765"/>
+            <a:off x="7360737" y="1325880"/>
             <a:ext cx="2072579" cy="274320"/>
           </a:xfrm>
           <a:prstGeom prst="rect">
@@ -3605,14 +3605,14 @@
                   <a:srgbClr val="404040"/>
                 </a:solidFill>
               </a:rPr>
-              <a:t>オリンパス</a:t>
+              <a:t>dポイント</a:t>
             </a:r>
           </a:p>
         </p:txBody>
       </p:sp>
       <p:pic>
         <p:nvPicPr>
-          <p:cNvPr id="20" name="Picture 19" descr="キーエンス.png"/>
+          <p:cNvPr id="20" name="Picture 19" descr="dマガジン.png"/>
           <p:cNvPicPr>
             <a:picLocks noChangeAspect="1"/>
           </p:cNvPicPr>
@@ -3626,8 +3626,8 @@
         </p:blipFill>
         <p:spPr>
           <a:xfrm>
-            <a:off x="9816213" y="1338943"/>
-            <a:ext cx="1763984" cy="378822"/>
+            <a:off x="10606468" y="1143000"/>
+            <a:ext cx="183475" cy="182880"/>
           </a:xfrm>
           <a:prstGeom prst="rect">
             <a:avLst/>
@@ -3642,7 +3642,7 @@
         </p:nvSpPr>
         <p:spPr>
           <a:xfrm>
-            <a:off x="9661916" y="1717765"/>
+            <a:off x="9661916" y="1325880"/>
             <a:ext cx="2072579" cy="274320"/>
           </a:xfrm>
           <a:prstGeom prst="rect">
@@ -3663,14 +3663,14 @@
                   <a:srgbClr val="404040"/>
                 </a:solidFill>
               </a:rPr>
-              <a:t>キーエンス</a:t>
+              <a:t>dマガジン</a:t>
             </a:r>
           </a:p>
         </p:txBody>
       </p:sp>
       <p:pic>
         <p:nvPicPr>
-          <p:cNvPr id="22" name="Picture 21" descr="コマツ.png"/>
+          <p:cNvPr id="22" name="Picture 21" descr="d払い.png"/>
           <p:cNvPicPr>
             <a:picLocks noChangeAspect="1"/>
           </p:cNvPicPr>
@@ -3684,8 +3684,8 @@
         </p:blipFill>
         <p:spPr>
           <a:xfrm>
-            <a:off x="627609" y="2220686"/>
-            <a:ext cx="1731761" cy="378822"/>
+            <a:off x="1203599" y="1828800"/>
+            <a:ext cx="579780" cy="182880"/>
           </a:xfrm>
           <a:prstGeom prst="rect">
             <a:avLst/>
@@ -3700,7 +3700,7 @@
         </p:nvSpPr>
         <p:spPr>
           <a:xfrm>
-            <a:off x="457200" y="2599508"/>
+            <a:off x="457200" y="2011680"/>
             <a:ext cx="2072579" cy="274320"/>
           </a:xfrm>
           <a:prstGeom prst="rect">
@@ -3721,14 +3721,14 @@
                   <a:srgbClr val="404040"/>
                 </a:solidFill>
               </a:rPr>
-              <a:t>コマツ</a:t>
+              <a:t>d払い</a:t>
             </a:r>
           </a:p>
         </p:txBody>
       </p:sp>
       <p:pic>
         <p:nvPicPr>
-          <p:cNvPr id="24" name="Picture 23" descr="セコム.png"/>
+          <p:cNvPr id="24" name="Picture 23" descr="imode.png"/>
           <p:cNvPicPr>
             <a:picLocks noChangeAspect="1"/>
           </p:cNvPicPr>
@@ -3742,8 +3742,8 @@
         </p:blipFill>
         <p:spPr>
           <a:xfrm>
-            <a:off x="3304254" y="2220686"/>
-            <a:ext cx="980828" cy="378822"/>
+            <a:off x="3572151" y="1828800"/>
+            <a:ext cx="445034" cy="182880"/>
           </a:xfrm>
           <a:prstGeom prst="rect">
             <a:avLst/>
@@ -3758,7 +3758,7 @@
         </p:nvSpPr>
         <p:spPr>
           <a:xfrm>
-            <a:off x="2758379" y="2599508"/>
+            <a:off x="2758379" y="2011680"/>
             <a:ext cx="2072579" cy="274320"/>
           </a:xfrm>
           <a:prstGeom prst="rect">
@@ -3779,14 +3779,14 @@
                   <a:srgbClr val="404040"/>
                 </a:solidFill>
               </a:rPr>
-              <a:t>セコム</a:t>
+              <a:t>imode</a:t>
             </a:r>
           </a:p>
         </p:txBody>
       </p:sp>
       <p:pic>
         <p:nvPicPr>
-          <p:cNvPr id="26" name="Picture 25" descr="セブン&amp;アイ・ホールディングス.png"/>
+          <p:cNvPr id="26" name="Picture 25" descr="アサヒグループホールディングス.png"/>
           <p:cNvPicPr>
             <a:picLocks noChangeAspect="1"/>
           </p:cNvPicPr>
@@ -3800,8 +3800,8 @@
         </p:blipFill>
         <p:spPr>
           <a:xfrm>
-            <a:off x="5886322" y="2220686"/>
-            <a:ext cx="419051" cy="378822"/>
+            <a:off x="5967194" y="1828800"/>
+            <a:ext cx="257307" cy="182880"/>
           </a:xfrm>
           <a:prstGeom prst="rect">
             <a:avLst/>
@@ -3816,7 +3816,7 @@
         </p:nvSpPr>
         <p:spPr>
           <a:xfrm>
-            <a:off x="5059558" y="2599508"/>
+            <a:off x="5059558" y="2011680"/>
             <a:ext cx="2072579" cy="274320"/>
           </a:xfrm>
           <a:prstGeom prst="rect">
@@ -3837,14 +3837,14 @@
                   <a:srgbClr val="404040"/>
                 </a:solidFill>
               </a:rPr>
-              <a:t>セブン&amp;アイ・ホールディングス</a:t>
+              <a:t>アサヒグループホールディングス</a:t>
             </a:r>
           </a:p>
         </p:txBody>
       </p:sp>
       <p:pic>
         <p:nvPicPr>
-          <p:cNvPr id="28" name="Picture 27" descr="ソニーグループ.png"/>
+          <p:cNvPr id="28" name="Picture 27" descr="オリエンタルランド.png"/>
           <p:cNvPicPr>
             <a:picLocks noChangeAspect="1"/>
           </p:cNvPicPr>
@@ -3858,8 +3858,8 @@
         </p:blipFill>
         <p:spPr>
           <a:xfrm>
-            <a:off x="7491675" y="2220686"/>
-            <a:ext cx="1810703" cy="378822"/>
+            <a:off x="8222459" y="1828800"/>
+            <a:ext cx="349134" cy="182880"/>
           </a:xfrm>
           <a:prstGeom prst="rect">
             <a:avLst/>
@@ -3874,7 +3874,7 @@
         </p:nvSpPr>
         <p:spPr>
           <a:xfrm>
-            <a:off x="7360737" y="2599508"/>
+            <a:off x="7360737" y="2011680"/>
             <a:ext cx="2072579" cy="274320"/>
           </a:xfrm>
           <a:prstGeom prst="rect">
@@ -3895,14 +3895,14 @@
                   <a:srgbClr val="404040"/>
                 </a:solidFill>
               </a:rPr>
-              <a:t>ソニーグループ</a:t>
+              <a:t>オリエンタルランド</a:t>
             </a:r>
           </a:p>
         </p:txBody>
       </p:sp>
       <p:pic>
         <p:nvPicPr>
-          <p:cNvPr id="30" name="Picture 29" descr="ダイキン工業.png"/>
+          <p:cNvPr id="30" name="Picture 29" descr="オリンパス.png"/>
           <p:cNvPicPr>
             <a:picLocks noChangeAspect="1"/>
           </p:cNvPicPr>
@@ -3916,8 +3916,8 @@
         </p:blipFill>
         <p:spPr>
           <a:xfrm>
-            <a:off x="9911788" y="2220686"/>
-            <a:ext cx="1572834" cy="378822"/>
+            <a:off x="10283584" y="1828800"/>
+            <a:ext cx="829242" cy="182880"/>
           </a:xfrm>
           <a:prstGeom prst="rect">
             <a:avLst/>
@@ -3932,7 +3932,7 @@
         </p:nvSpPr>
         <p:spPr>
           <a:xfrm>
-            <a:off x="9661916" y="2599508"/>
+            <a:off x="9661916" y="2011680"/>
             <a:ext cx="2072579" cy="274320"/>
           </a:xfrm>
           <a:prstGeom prst="rect">
@@ -3953,14 +3953,14 @@
                   <a:srgbClr val="404040"/>
                 </a:solidFill>
               </a:rPr>
-              <a:t>ダイキン工業</a:t>
+              <a:t>オリンパス</a:t>
             </a:r>
           </a:p>
         </p:txBody>
       </p:sp>
       <p:pic>
         <p:nvPicPr>
-          <p:cNvPr id="32" name="Picture 31" descr="トヨタ自動車.png"/>
+          <p:cNvPr id="32" name="Picture 31" descr="キーエンス.png"/>
           <p:cNvPicPr>
             <a:picLocks noChangeAspect="1"/>
           </p:cNvPicPr>
@@ -3974,8 +3974,8 @@
         </p:blipFill>
         <p:spPr>
           <a:xfrm>
-            <a:off x="1220829" y="3102429"/>
-            <a:ext cx="545321" cy="378822"/>
+            <a:off x="1067700" y="2514600"/>
+            <a:ext cx="851578" cy="182880"/>
           </a:xfrm>
           <a:prstGeom prst="rect">
             <a:avLst/>
@@ -3990,7 +3990,7 @@
         </p:nvSpPr>
         <p:spPr>
           <a:xfrm>
-            <a:off x="457200" y="3481251"/>
+            <a:off x="457200" y="2697480"/>
             <a:ext cx="2072579" cy="274320"/>
           </a:xfrm>
           <a:prstGeom prst="rect">
@@ -4011,14 +4011,14 @@
                   <a:srgbClr val="404040"/>
                 </a:solidFill>
               </a:rPr>
-              <a:t>トヨタ自動車</a:t>
+              <a:t>キーエンス</a:t>
             </a:r>
           </a:p>
         </p:txBody>
       </p:sp>
       <p:pic>
         <p:nvPicPr>
-          <p:cNvPr id="34" name="Picture 33" descr="ドコモの銀行.png"/>
+          <p:cNvPr id="34" name="Picture 33" descr="コマツ.png"/>
           <p:cNvPicPr>
             <a:picLocks noChangeAspect="1"/>
           </p:cNvPicPr>
@@ -4032,8 +4032,8 @@
         </p:blipFill>
         <p:spPr>
           <a:xfrm>
-            <a:off x="3174346" y="3102429"/>
-            <a:ext cx="1240644" cy="378822"/>
+            <a:off x="3376657" y="2514600"/>
+            <a:ext cx="836022" cy="182880"/>
           </a:xfrm>
           <a:prstGeom prst="rect">
             <a:avLst/>
@@ -4048,7 +4048,7 @@
         </p:nvSpPr>
         <p:spPr>
           <a:xfrm>
-            <a:off x="2758379" y="3481251"/>
+            <a:off x="2758379" y="2697480"/>
             <a:ext cx="2072579" cy="274320"/>
           </a:xfrm>
           <a:prstGeom prst="rect">
@@ -4069,14 +4069,14 @@
                   <a:srgbClr val="404040"/>
                 </a:solidFill>
               </a:rPr>
-              <a:t>ドコモの銀行</a:t>
+              <a:t>コマツ</a:t>
             </a:r>
           </a:p>
         </p:txBody>
       </p:sp>
       <p:pic>
         <p:nvPicPr>
-          <p:cNvPr id="36" name="Picture 35" descr="パナソニック.png"/>
+          <p:cNvPr id="36" name="Picture 35" descr="セコム.png"/>
           <p:cNvPicPr>
             <a:picLocks noChangeAspect="1"/>
           </p:cNvPicPr>
@@ -4090,8 +4090,8 @@
         </p:blipFill>
         <p:spPr>
           <a:xfrm>
-            <a:off x="5059558" y="3103424"/>
-            <a:ext cx="2072578" cy="376832"/>
+            <a:off x="5859096" y="2514600"/>
+            <a:ext cx="473503" cy="182880"/>
           </a:xfrm>
           <a:prstGeom prst="rect">
             <a:avLst/>
@@ -4106,7 +4106,7 @@
         </p:nvSpPr>
         <p:spPr>
           <a:xfrm>
-            <a:off x="5059558" y="3481251"/>
+            <a:off x="5059558" y="2697480"/>
             <a:ext cx="2072579" cy="274320"/>
           </a:xfrm>
           <a:prstGeom prst="rect">
@@ -4127,14 +4127,14 @@
                   <a:srgbClr val="404040"/>
                 </a:solidFill>
               </a:rPr>
-              <a:t>パナソニック</a:t>
+              <a:t>セコム</a:t>
             </a:r>
           </a:p>
         </p:txBody>
       </p:sp>
       <p:pic>
         <p:nvPicPr>
-          <p:cNvPr id="38" name="Picture 37" descr="ファーストリテイリング.png"/>
+          <p:cNvPr id="38" name="Picture 37" descr="セブン&amp;アイ・ホールディングス.png"/>
           <p:cNvPicPr>
             <a:picLocks noChangeAspect="1"/>
           </p:cNvPicPr>
@@ -4148,8 +4148,8 @@
         </p:blipFill>
         <p:spPr>
           <a:xfrm>
-            <a:off x="8020834" y="3102429"/>
-            <a:ext cx="752384" cy="378822"/>
+            <a:off x="8295876" y="2514600"/>
+            <a:ext cx="202300" cy="182880"/>
           </a:xfrm>
           <a:prstGeom prst="rect">
             <a:avLst/>
@@ -4164,7 +4164,7 @@
         </p:nvSpPr>
         <p:spPr>
           <a:xfrm>
-            <a:off x="7360737" y="3481251"/>
+            <a:off x="7360737" y="2697480"/>
             <a:ext cx="2072579" cy="274320"/>
           </a:xfrm>
           <a:prstGeom prst="rect">
@@ -4185,14 +4185,14 @@
                   <a:srgbClr val="404040"/>
                 </a:solidFill>
               </a:rPr>
-              <a:t>ファーストリテイリング</a:t>
+              <a:t>セブン&amp;アイ・ホールディングス</a:t>
             </a:r>
           </a:p>
         </p:txBody>
       </p:sp>
       <p:pic>
         <p:nvPicPr>
-          <p:cNvPr id="40" name="Picture 39" descr="ホンダ.png"/>
+          <p:cNvPr id="40" name="Picture 39" descr="ソニーグループ.png"/>
           <p:cNvPicPr>
             <a:picLocks noChangeAspect="1"/>
           </p:cNvPicPr>
@@ -4206,8 +4206,8 @@
         </p:blipFill>
         <p:spPr>
           <a:xfrm>
-            <a:off x="9661916" y="3125805"/>
-            <a:ext cx="2072578" cy="332070"/>
+            <a:off x="10261139" y="2514600"/>
+            <a:ext cx="874132" cy="182880"/>
           </a:xfrm>
           <a:prstGeom prst="rect">
             <a:avLst/>
@@ -4222,7 +4222,7 @@
         </p:nvSpPr>
         <p:spPr>
           <a:xfrm>
-            <a:off x="9661916" y="3481251"/>
+            <a:off x="9661916" y="2697480"/>
             <a:ext cx="2072579" cy="274320"/>
           </a:xfrm>
           <a:prstGeom prst="rect">
@@ -4243,14 +4243,14 @@
                   <a:srgbClr val="404040"/>
                 </a:solidFill>
               </a:rPr>
-              <a:t>ホンダ</a:t>
+              <a:t>ソニーグループ</a:t>
             </a:r>
           </a:p>
         </p:txBody>
       </p:sp>
       <p:pic>
         <p:nvPicPr>
-          <p:cNvPr id="42" name="Picture 41" descr="リクルートホールディングス.png"/>
+          <p:cNvPr id="42" name="Picture 41" descr="ダイキン工業.png"/>
           <p:cNvPicPr>
             <a:picLocks noChangeAspect="1"/>
           </p:cNvPicPr>
@@ -4264,8 +4264,8 @@
         </p:blipFill>
         <p:spPr>
           <a:xfrm>
-            <a:off x="842333" y="3984171"/>
-            <a:ext cx="1302312" cy="378822"/>
+            <a:off x="1113840" y="3200400"/>
+            <a:ext cx="759299" cy="182880"/>
           </a:xfrm>
           <a:prstGeom prst="rect">
             <a:avLst/>
@@ -4280,7 +4280,7 @@
         </p:nvSpPr>
         <p:spPr>
           <a:xfrm>
-            <a:off x="457200" y="4362994"/>
+            <a:off x="457200" y="3383280"/>
             <a:ext cx="2072579" cy="274320"/>
           </a:xfrm>
           <a:prstGeom prst="rect">
@@ -4301,14 +4301,14 @@
                   <a:srgbClr val="404040"/>
                 </a:solidFill>
               </a:rPr>
-              <a:t>リクルートホールディングス</a:t>
+              <a:t>ダイキン工業</a:t>
             </a:r>
           </a:p>
         </p:txBody>
       </p:sp>
       <p:pic>
         <p:nvPicPr>
-          <p:cNvPr id="44" name="Picture 43" descr="三井住友銀行.png"/>
+          <p:cNvPr id="44" name="Picture 43" descr="トヨタ自動車.png"/>
           <p:cNvPicPr>
             <a:picLocks noChangeAspect="1"/>
           </p:cNvPicPr>
@@ -4322,8 +4322,8 @@
         </p:blipFill>
         <p:spPr>
           <a:xfrm>
-            <a:off x="3164937" y="3984171"/>
-            <a:ext cx="1259463" cy="378822"/>
+            <a:off x="3663039" y="3200400"/>
+            <a:ext cx="263258" cy="182880"/>
           </a:xfrm>
           <a:prstGeom prst="rect">
             <a:avLst/>
@@ -4338,7 +4338,7 @@
         </p:nvSpPr>
         <p:spPr>
           <a:xfrm>
-            <a:off x="2758379" y="4362994"/>
+            <a:off x="2758379" y="3383280"/>
             <a:ext cx="2072579" cy="274320"/>
           </a:xfrm>
           <a:prstGeom prst="rect">
@@ -4359,14 +4359,14 @@
                   <a:srgbClr val="404040"/>
                 </a:solidFill>
               </a:rPr>
-              <a:t>三井住友銀行</a:t>
+              <a:t>トヨタ自動車</a:t>
             </a:r>
           </a:p>
         </p:txBody>
       </p:sp>
       <p:pic>
         <p:nvPicPr>
-          <p:cNvPr id="46" name="Picture 45" descr="三菱電機.png"/>
+          <p:cNvPr id="46" name="Picture 45" descr="ドコモの銀行.png"/>
           <p:cNvPicPr>
             <a:picLocks noChangeAspect="1"/>
           </p:cNvPicPr>
@@ -4380,8 +4380,8 @@
         </p:blipFill>
         <p:spPr>
           <a:xfrm>
-            <a:off x="5513043" y="3984171"/>
-            <a:ext cx="1165608" cy="378822"/>
+            <a:off x="5796381" y="3200400"/>
+            <a:ext cx="598932" cy="182880"/>
           </a:xfrm>
           <a:prstGeom prst="rect">
             <a:avLst/>
@@ -4396,7 +4396,7 @@
         </p:nvSpPr>
         <p:spPr>
           <a:xfrm>
-            <a:off x="5059558" y="4362994"/>
+            <a:off x="5059558" y="3383280"/>
             <a:ext cx="2072579" cy="274320"/>
           </a:xfrm>
           <a:prstGeom prst="rect">
@@ -4417,14 +4417,14 @@
                   <a:srgbClr val="404040"/>
                 </a:solidFill>
               </a:rPr>
-              <a:t>三菱電機</a:t>
+              <a:t>ドコモの銀行</a:t>
             </a:r>
           </a:p>
         </p:txBody>
       </p:sp>
       <p:pic>
         <p:nvPicPr>
-          <p:cNvPr id="48" name="Picture 47" descr="任天堂.png"/>
+          <p:cNvPr id="48" name="Picture 47" descr="ドコモ光.png"/>
           <p:cNvPicPr>
             <a:picLocks noChangeAspect="1"/>
           </p:cNvPicPr>
@@ -4438,8 +4438,8 @@
         </p:blipFill>
         <p:spPr>
           <a:xfrm>
-            <a:off x="7709235" y="3984171"/>
-            <a:ext cx="1375583" cy="378822"/>
+            <a:off x="8105825" y="3200400"/>
+            <a:ext cx="582402" cy="182880"/>
           </a:xfrm>
           <a:prstGeom prst="rect">
             <a:avLst/>
@@ -4454,7 +4454,7 @@
         </p:nvSpPr>
         <p:spPr>
           <a:xfrm>
-            <a:off x="7360737" y="4362994"/>
+            <a:off x="7360737" y="3383280"/>
             <a:ext cx="2072579" cy="274320"/>
           </a:xfrm>
           <a:prstGeom prst="rect">
@@ -4475,14 +4475,14 @@
                   <a:srgbClr val="404040"/>
                 </a:solidFill>
               </a:rPr>
-              <a:t>任天堂</a:t>
+              <a:t>ドコモ光</a:t>
             </a:r>
           </a:p>
         </p:txBody>
       </p:sp>
       <p:pic>
         <p:nvPicPr>
-          <p:cNvPr id="50" name="Picture 49" descr="味の素.png"/>
+          <p:cNvPr id="50" name="Picture 49" descr="パナソニック.png"/>
           <p:cNvPicPr>
             <a:picLocks noChangeAspect="1"/>
           </p:cNvPicPr>
@@ -4496,8 +4496,8 @@
         </p:blipFill>
         <p:spPr>
           <a:xfrm>
-            <a:off x="9661916" y="4005536"/>
-            <a:ext cx="2072579" cy="336093"/>
+            <a:off x="10195285" y="3200400"/>
+            <a:ext cx="1005840" cy="182880"/>
           </a:xfrm>
           <a:prstGeom prst="rect">
             <a:avLst/>
@@ -4512,7 +4512,7 @@
         </p:nvSpPr>
         <p:spPr>
           <a:xfrm>
-            <a:off x="9661916" y="4362994"/>
+            <a:off x="9661916" y="3383280"/>
             <a:ext cx="2072579" cy="274320"/>
           </a:xfrm>
           <a:prstGeom prst="rect">
@@ -4533,14 +4533,14 @@
                   <a:srgbClr val="404040"/>
                 </a:solidFill>
               </a:rPr>
-              <a:t>味の素</a:t>
+              <a:t>パナソニック</a:t>
             </a:r>
           </a:p>
         </p:txBody>
       </p:sp>
       <p:pic>
         <p:nvPicPr>
-          <p:cNvPr id="52" name="Picture 51" descr="大和ハウス工業.png"/>
+          <p:cNvPr id="52" name="Picture 51" descr="ファーストリテイリング.png"/>
           <p:cNvPicPr>
             <a:picLocks noChangeAspect="1"/>
           </p:cNvPicPr>
@@ -4554,8 +4554,8 @@
         </p:blipFill>
         <p:spPr>
           <a:xfrm>
-            <a:off x="1256088" y="4865914"/>
-            <a:ext cx="474803" cy="378822"/>
+            <a:off x="1311879" y="3886200"/>
+            <a:ext cx="363220" cy="182880"/>
           </a:xfrm>
           <a:prstGeom prst="rect">
             <a:avLst/>
@@ -4570,7 +4570,7 @@
         </p:nvSpPr>
         <p:spPr>
           <a:xfrm>
-            <a:off x="457200" y="5244737"/>
+            <a:off x="457200" y="4069080"/>
             <a:ext cx="2072579" cy="274320"/>
           </a:xfrm>
           <a:prstGeom prst="rect">
@@ -4591,14 +4591,14 @@
                   <a:srgbClr val="404040"/>
                 </a:solidFill>
               </a:rPr>
-              <a:t>大和ハウス工業</a:t>
+              <a:t>ファーストリテイリング</a:t>
             </a:r>
           </a:p>
         </p:txBody>
       </p:sp>
       <p:pic>
         <p:nvPicPr>
-          <p:cNvPr id="54" name="Picture 53" descr="富士通.png"/>
+          <p:cNvPr id="54" name="Picture 53" descr="ホンダ.png"/>
           <p:cNvPicPr>
             <a:picLocks noChangeAspect="1"/>
           </p:cNvPicPr>
@@ -4612,8 +4612,8 @@
         </p:blipFill>
         <p:spPr>
           <a:xfrm>
-            <a:off x="3420955" y="4865914"/>
-            <a:ext cx="747426" cy="378822"/>
+            <a:off x="3223957" y="3886200"/>
+            <a:ext cx="1141423" cy="182880"/>
           </a:xfrm>
           <a:prstGeom prst="rect">
             <a:avLst/>
@@ -4628,7 +4628,7 @@
         </p:nvSpPr>
         <p:spPr>
           <a:xfrm>
-            <a:off x="2758379" y="5244737"/>
+            <a:off x="2758379" y="4069080"/>
             <a:ext cx="2072579" cy="274320"/>
           </a:xfrm>
           <a:prstGeom prst="rect">
@@ -4649,14 +4649,14 @@
                   <a:srgbClr val="404040"/>
                 </a:solidFill>
               </a:rPr>
-              <a:t>富士通</a:t>
+              <a:t>ホンダ</a:t>
             </a:r>
           </a:p>
         </p:txBody>
       </p:sp>
       <p:pic>
         <p:nvPicPr>
-          <p:cNvPr id="56" name="Picture 55" descr="日本郵政.png"/>
+          <p:cNvPr id="56" name="Picture 55" descr="リクルートホールディングス.png"/>
           <p:cNvPicPr>
             <a:picLocks noChangeAspect="1"/>
           </p:cNvPicPr>
@@ -4670,8 +4670,8 @@
         </p:blipFill>
         <p:spPr>
           <a:xfrm>
-            <a:off x="5918128" y="4865914"/>
-            <a:ext cx="355438" cy="378822"/>
+            <a:off x="5781496" y="3886200"/>
+            <a:ext cx="628702" cy="182880"/>
           </a:xfrm>
           <a:prstGeom prst="rect">
             <a:avLst/>
@@ -4686,7 +4686,7 @@
         </p:nvSpPr>
         <p:spPr>
           <a:xfrm>
-            <a:off x="5059558" y="5244737"/>
+            <a:off x="5059558" y="4069080"/>
             <a:ext cx="2072579" cy="274320"/>
           </a:xfrm>
           <a:prstGeom prst="rect">
@@ -4707,14 +4707,14 @@
                   <a:srgbClr val="404040"/>
                 </a:solidFill>
               </a:rPr>
-              <a:t>日本郵政</a:t>
+              <a:t>リクルートホールディングス</a:t>
             </a:r>
           </a:p>
         </p:txBody>
       </p:sp>
       <p:pic>
         <p:nvPicPr>
-          <p:cNvPr id="58" name="Picture 57" descr="日立製作所.png"/>
+          <p:cNvPr id="58" name="Picture 57" descr="三井住友銀行.png"/>
           <p:cNvPicPr>
             <a:picLocks noChangeAspect="1"/>
           </p:cNvPicPr>
@@ -4728,8 +4728,8 @@
         </p:blipFill>
         <p:spPr>
           <a:xfrm>
-            <a:off x="7405882" y="4865914"/>
-            <a:ext cx="1982288" cy="378822"/>
+            <a:off x="8093018" y="3886200"/>
+            <a:ext cx="608016" cy="182880"/>
           </a:xfrm>
           <a:prstGeom prst="rect">
             <a:avLst/>
@@ -4744,7 +4744,7 @@
         </p:nvSpPr>
         <p:spPr>
           <a:xfrm>
-            <a:off x="7360737" y="5244737"/>
+            <a:off x="7360737" y="4069080"/>
             <a:ext cx="2072579" cy="274320"/>
           </a:xfrm>
           <a:prstGeom prst="rect">
@@ -4765,14 +4765,14 @@
                   <a:srgbClr val="404040"/>
                 </a:solidFill>
               </a:rPr>
-              <a:t>日立製作所</a:t>
+              <a:t>三井住友銀行</a:t>
             </a:r>
           </a:p>
         </p:txBody>
       </p:sp>
       <p:pic>
         <p:nvPicPr>
-          <p:cNvPr id="60" name="Picture 59" descr="東京ガス.png"/>
+          <p:cNvPr id="60" name="Picture 59" descr="三菱電機.png"/>
           <p:cNvPicPr>
             <a:picLocks noChangeAspect="1"/>
           </p:cNvPicPr>
@@ -4786,8 +4786,8 @@
         </p:blipFill>
         <p:spPr>
           <a:xfrm>
-            <a:off x="9790609" y="4865914"/>
-            <a:ext cx="1815192" cy="378822"/>
+            <a:off x="10416852" y="3886200"/>
+            <a:ext cx="562707" cy="182880"/>
           </a:xfrm>
           <a:prstGeom prst="rect">
             <a:avLst/>
@@ -4802,7 +4802,7 @@
         </p:nvSpPr>
         <p:spPr>
           <a:xfrm>
-            <a:off x="9661916" y="5244737"/>
+            <a:off x="9661916" y="4069080"/>
             <a:ext cx="2072579" cy="274320"/>
           </a:xfrm>
           <a:prstGeom prst="rect">
@@ -4823,14 +4823,14 @@
                   <a:srgbClr val="404040"/>
                 </a:solidFill>
               </a:rPr>
-              <a:t>東京ガス</a:t>
+              <a:t>三菱電機</a:t>
             </a:r>
           </a:p>
         </p:txBody>
       </p:sp>
       <p:pic>
         <p:nvPicPr>
-          <p:cNvPr id="62" name="Picture 61" descr="楽天グループ.png"/>
+          <p:cNvPr id="62" name="Picture 61" descr="任天堂.png"/>
           <p:cNvPicPr>
             <a:picLocks noChangeAspect="1"/>
           </p:cNvPicPr>
@@ -4844,8 +4844,8 @@
         </p:blipFill>
         <p:spPr>
           <a:xfrm>
-            <a:off x="916948" y="5747657"/>
-            <a:ext cx="1153083" cy="378822"/>
+            <a:off x="1161452" y="4572000"/>
+            <a:ext cx="664074" cy="182880"/>
           </a:xfrm>
           <a:prstGeom prst="rect">
             <a:avLst/>
@@ -4860,7 +4860,7 @@
         </p:nvSpPr>
         <p:spPr>
           <a:xfrm>
-            <a:off x="457200" y="6126480"/>
+            <a:off x="457200" y="4754880"/>
             <a:ext cx="2072579" cy="274320"/>
           </a:xfrm>
           <a:prstGeom prst="rect">
@@ -4881,14 +4881,14 @@
                   <a:srgbClr val="404040"/>
                 </a:solidFill>
               </a:rPr>
-              <a:t>楽天グループ</a:t>
+              <a:t>任天堂</a:t>
             </a:r>
           </a:p>
         </p:txBody>
       </p:sp>
       <p:pic>
         <p:nvPicPr>
-          <p:cNvPr id="64" name="Picture 63" descr="花王.png"/>
+          <p:cNvPr id="64" name="Picture 63" descr="味の素.png"/>
           <p:cNvPicPr>
             <a:picLocks noChangeAspect="1"/>
           </p:cNvPicPr>
@@ -4902,8 +4902,8 @@
         </p:blipFill>
         <p:spPr>
           <a:xfrm>
-            <a:off x="3460706" y="5747657"/>
-            <a:ext cx="667924" cy="378822"/>
+            <a:off x="3230788" y="4572000"/>
+            <a:ext cx="1127760" cy="182880"/>
           </a:xfrm>
           <a:prstGeom prst="rect">
             <a:avLst/>
@@ -4918,7 +4918,7 @@
         </p:nvSpPr>
         <p:spPr>
           <a:xfrm>
-            <a:off x="2758379" y="6126480"/>
+            <a:off x="2758379" y="4754880"/>
             <a:ext cx="2072579" cy="274320"/>
           </a:xfrm>
           <a:prstGeom prst="rect">
@@ -4939,14 +4939,14 @@
                   <a:srgbClr val="404040"/>
                 </a:solidFill>
               </a:rPr>
-              <a:t>花王</a:t>
+              <a:t>味の素</a:t>
             </a:r>
           </a:p>
         </p:txBody>
       </p:sp>
       <p:pic>
         <p:nvPicPr>
-          <p:cNvPr id="66" name="Picture 65" descr="資生堂.png"/>
+          <p:cNvPr id="66" name="Picture 65" descr="大和ハウス工業.png"/>
           <p:cNvPicPr>
             <a:picLocks noChangeAspect="1"/>
           </p:cNvPicPr>
@@ -4960,8 +4960,8 @@
         </p:blipFill>
         <p:spPr>
           <a:xfrm>
-            <a:off x="5149714" y="5747657"/>
-            <a:ext cx="1892266" cy="378822"/>
+            <a:off x="5981240" y="4572000"/>
+            <a:ext cx="229215" cy="182880"/>
           </a:xfrm>
           <a:prstGeom prst="rect">
             <a:avLst/>
@@ -4976,7 +4976,7 @@
         </p:nvSpPr>
         <p:spPr>
           <a:xfrm>
-            <a:off x="5059558" y="6126480"/>
+            <a:off x="5059558" y="4754880"/>
             <a:ext cx="2072579" cy="274320"/>
           </a:xfrm>
           <a:prstGeom prst="rect">
@@ -4997,14 +4997,14 @@
                   <a:srgbClr val="404040"/>
                 </a:solidFill>
               </a:rPr>
-              <a:t>資生堂</a:t>
+              <a:t>大和ハウス工業</a:t>
             </a:r>
           </a:p>
         </p:txBody>
       </p:sp>
       <p:pic>
         <p:nvPicPr>
-          <p:cNvPr id="68" name="Picture 67" descr="野村ホールディングス.png"/>
+          <p:cNvPr id="68" name="Picture 67" descr="富士通.png"/>
           <p:cNvPicPr>
             <a:picLocks noChangeAspect="1"/>
           </p:cNvPicPr>
@@ -5018,8 +5018,8 @@
         </p:blipFill>
         <p:spPr>
           <a:xfrm>
-            <a:off x="7486429" y="5747657"/>
-            <a:ext cx="1821195" cy="378822"/>
+            <a:off x="8216613" y="4572000"/>
+            <a:ext cx="360826" cy="182880"/>
           </a:xfrm>
           <a:prstGeom prst="rect">
             <a:avLst/>
@@ -5034,7 +5034,471 @@
         </p:nvSpPr>
         <p:spPr>
           <a:xfrm>
-            <a:off x="7360737" y="6126480"/>
+            <a:off x="7360737" y="4754880"/>
+            <a:ext cx="2072579" cy="274320"/>
+          </a:xfrm>
+          <a:prstGeom prst="rect">
+            <a:avLst/>
+          </a:prstGeom>
+          <a:noFill/>
+        </p:spPr>
+        <p:txBody>
+          <a:bodyPr wrap="square">
+            <a:spAutoFit/>
+          </a:bodyPr>
+          <a:lstStyle/>
+          <a:p>
+            <a:pPr algn="ctr"/>
+            <a:r>
+              <a:rPr sz="1000">
+                <a:solidFill>
+                  <a:srgbClr val="404040"/>
+                </a:solidFill>
+              </a:rPr>
+              <a:t>富士通</a:t>
+            </a:r>
+          </a:p>
+        </p:txBody>
+      </p:sp>
+      <p:pic>
+        <p:nvPicPr>
+          <p:cNvPr id="70" name="Picture 69" descr="日本郵政.png"/>
+          <p:cNvPicPr>
+            <a:picLocks noChangeAspect="1"/>
+          </p:cNvPicPr>
+          <p:nvPr/>
+        </p:nvPicPr>
+        <p:blipFill>
+          <a:blip r:embed="rId36"/>
+          <a:stretch>
+            <a:fillRect/>
+          </a:stretch>
+        </p:blipFill>
+        <p:spPr>
+          <a:xfrm>
+            <a:off x="10612410" y="4572000"/>
+            <a:ext cx="171591" cy="182880"/>
+          </a:xfrm>
+          <a:prstGeom prst="rect">
+            <a:avLst/>
+          </a:prstGeom>
+        </p:spPr>
+      </p:pic>
+      <p:sp>
+        <p:nvSpPr>
+          <p:cNvPr id="71" name="TextBox 70"/>
+          <p:cNvSpPr txBox="1"/>
+          <p:nvPr/>
+        </p:nvSpPr>
+        <p:spPr>
+          <a:xfrm>
+            <a:off x="9661916" y="4754880"/>
+            <a:ext cx="2072579" cy="274320"/>
+          </a:xfrm>
+          <a:prstGeom prst="rect">
+            <a:avLst/>
+          </a:prstGeom>
+          <a:noFill/>
+        </p:spPr>
+        <p:txBody>
+          <a:bodyPr wrap="square">
+            <a:spAutoFit/>
+          </a:bodyPr>
+          <a:lstStyle/>
+          <a:p>
+            <a:pPr algn="ctr"/>
+            <a:r>
+              <a:rPr sz="1000">
+                <a:solidFill>
+                  <a:srgbClr val="404040"/>
+                </a:solidFill>
+              </a:rPr>
+              <a:t>日本郵政</a:t>
+            </a:r>
+          </a:p>
+        </p:txBody>
+      </p:sp>
+      <p:pic>
+        <p:nvPicPr>
+          <p:cNvPr id="72" name="Picture 71" descr="日立製作所.png"/>
+          <p:cNvPicPr>
+            <a:picLocks noChangeAspect="1"/>
+          </p:cNvPicPr>
+          <p:nvPr/>
+        </p:nvPicPr>
+        <p:blipFill>
+          <a:blip r:embed="rId37"/>
+          <a:stretch>
+            <a:fillRect/>
+          </a:stretch>
+        </p:blipFill>
+        <p:spPr>
+          <a:xfrm>
+            <a:off x="1015006" y="5257800"/>
+            <a:ext cx="956966" cy="182880"/>
+          </a:xfrm>
+          <a:prstGeom prst="rect">
+            <a:avLst/>
+          </a:prstGeom>
+        </p:spPr>
+      </p:pic>
+      <p:sp>
+        <p:nvSpPr>
+          <p:cNvPr id="73" name="TextBox 72"/>
+          <p:cNvSpPr txBox="1"/>
+          <p:nvPr/>
+        </p:nvSpPr>
+        <p:spPr>
+          <a:xfrm>
+            <a:off x="457200" y="5440680"/>
+            <a:ext cx="2072579" cy="274320"/>
+          </a:xfrm>
+          <a:prstGeom prst="rect">
+            <a:avLst/>
+          </a:prstGeom>
+          <a:noFill/>
+        </p:spPr>
+        <p:txBody>
+          <a:bodyPr wrap="square">
+            <a:spAutoFit/>
+          </a:bodyPr>
+          <a:lstStyle/>
+          <a:p>
+            <a:pPr algn="ctr"/>
+            <a:r>
+              <a:rPr sz="1000">
+                <a:solidFill>
+                  <a:srgbClr val="404040"/>
+                </a:solidFill>
+              </a:rPr>
+              <a:t>日立製作所</a:t>
+            </a:r>
+          </a:p>
+        </p:txBody>
+      </p:sp>
+      <p:pic>
+        <p:nvPicPr>
+          <p:cNvPr id="74" name="Picture 73" descr="東京ガス.png"/>
+          <p:cNvPicPr>
+            <a:picLocks noChangeAspect="1"/>
+          </p:cNvPicPr>
+          <p:nvPr/>
+        </p:nvPicPr>
+        <p:blipFill>
+          <a:blip r:embed="rId38"/>
+          <a:stretch>
+            <a:fillRect/>
+          </a:stretch>
+        </p:blipFill>
+        <p:spPr>
+          <a:xfrm>
+            <a:off x="3356518" y="5257800"/>
+            <a:ext cx="876300" cy="182880"/>
+          </a:xfrm>
+          <a:prstGeom prst="rect">
+            <a:avLst/>
+          </a:prstGeom>
+        </p:spPr>
+      </p:pic>
+      <p:sp>
+        <p:nvSpPr>
+          <p:cNvPr id="75" name="TextBox 74"/>
+          <p:cNvSpPr txBox="1"/>
+          <p:nvPr/>
+        </p:nvSpPr>
+        <p:spPr>
+          <a:xfrm>
+            <a:off x="2758379" y="5440680"/>
+            <a:ext cx="2072579" cy="274320"/>
+          </a:xfrm>
+          <a:prstGeom prst="rect">
+            <a:avLst/>
+          </a:prstGeom>
+          <a:noFill/>
+        </p:spPr>
+        <p:txBody>
+          <a:bodyPr wrap="square">
+            <a:spAutoFit/>
+          </a:bodyPr>
+          <a:lstStyle/>
+          <a:p>
+            <a:pPr algn="ctr"/>
+            <a:r>
+              <a:rPr sz="1000">
+                <a:solidFill>
+                  <a:srgbClr val="404040"/>
+                </a:solidFill>
+              </a:rPr>
+              <a:t>東京ガス</a:t>
+            </a:r>
+          </a:p>
+        </p:txBody>
+      </p:sp>
+      <p:pic>
+        <p:nvPicPr>
+          <p:cNvPr id="76" name="Picture 75" descr="株式会社NTTドコモ.png"/>
+          <p:cNvPicPr>
+            <a:picLocks noChangeAspect="1"/>
+          </p:cNvPicPr>
+          <p:nvPr/>
+        </p:nvPicPr>
+        <p:blipFill>
+          <a:blip r:embed="rId39"/>
+          <a:stretch>
+            <a:fillRect/>
+          </a:stretch>
+        </p:blipFill>
+        <p:spPr>
+          <a:xfrm>
+            <a:off x="5920342" y="5257800"/>
+            <a:ext cx="351011" cy="182880"/>
+          </a:xfrm>
+          <a:prstGeom prst="rect">
+            <a:avLst/>
+          </a:prstGeom>
+        </p:spPr>
+      </p:pic>
+      <p:sp>
+        <p:nvSpPr>
+          <p:cNvPr id="77" name="TextBox 76"/>
+          <p:cNvSpPr txBox="1"/>
+          <p:nvPr/>
+        </p:nvSpPr>
+        <p:spPr>
+          <a:xfrm>
+            <a:off x="5059558" y="5440680"/>
+            <a:ext cx="2072579" cy="274320"/>
+          </a:xfrm>
+          <a:prstGeom prst="rect">
+            <a:avLst/>
+          </a:prstGeom>
+          <a:noFill/>
+        </p:spPr>
+        <p:txBody>
+          <a:bodyPr wrap="square">
+            <a:spAutoFit/>
+          </a:bodyPr>
+          <a:lstStyle/>
+          <a:p>
+            <a:pPr algn="ctr"/>
+            <a:r>
+              <a:rPr sz="1000">
+                <a:solidFill>
+                  <a:srgbClr val="404040"/>
+                </a:solidFill>
+              </a:rPr>
+              <a:t>株式会社NTTドコモ</a:t>
+            </a:r>
+          </a:p>
+        </p:txBody>
+      </p:sp>
+      <p:pic>
+        <p:nvPicPr>
+          <p:cNvPr id="78" name="Picture 77" descr="楽天グループ.png"/>
+          <p:cNvPicPr>
+            <a:picLocks noChangeAspect="1"/>
+          </p:cNvPicPr>
+          <p:nvPr/>
+        </p:nvPicPr>
+        <p:blipFill>
+          <a:blip r:embed="rId40"/>
+          <a:stretch>
+            <a:fillRect/>
+          </a:stretch>
+        </p:blipFill>
+        <p:spPr>
+          <a:xfrm>
+            <a:off x="8118696" y="5257800"/>
+            <a:ext cx="556661" cy="182880"/>
+          </a:xfrm>
+          <a:prstGeom prst="rect">
+            <a:avLst/>
+          </a:prstGeom>
+        </p:spPr>
+      </p:pic>
+      <p:sp>
+        <p:nvSpPr>
+          <p:cNvPr id="79" name="TextBox 78"/>
+          <p:cNvSpPr txBox="1"/>
+          <p:nvPr/>
+        </p:nvSpPr>
+        <p:spPr>
+          <a:xfrm>
+            <a:off x="7360737" y="5440680"/>
+            <a:ext cx="2072579" cy="274320"/>
+          </a:xfrm>
+          <a:prstGeom prst="rect">
+            <a:avLst/>
+          </a:prstGeom>
+          <a:noFill/>
+        </p:spPr>
+        <p:txBody>
+          <a:bodyPr wrap="square">
+            <a:spAutoFit/>
+          </a:bodyPr>
+          <a:lstStyle/>
+          <a:p>
+            <a:pPr algn="ctr"/>
+            <a:r>
+              <a:rPr sz="1000">
+                <a:solidFill>
+                  <a:srgbClr val="404040"/>
+                </a:solidFill>
+              </a:rPr>
+              <a:t>楽天グループ</a:t>
+            </a:r>
+          </a:p>
+        </p:txBody>
+      </p:sp>
+      <p:pic>
+        <p:nvPicPr>
+          <p:cNvPr id="80" name="Picture 79" descr="花王.png"/>
+          <p:cNvPicPr>
+            <a:picLocks noChangeAspect="1"/>
+          </p:cNvPicPr>
+          <p:nvPr/>
+        </p:nvPicPr>
+        <p:blipFill>
+          <a:blip r:embed="rId41"/>
+          <a:stretch>
+            <a:fillRect/>
+          </a:stretch>
+        </p:blipFill>
+        <p:spPr>
+          <a:xfrm>
+            <a:off x="10536982" y="5257800"/>
+            <a:ext cx="322446" cy="182880"/>
+          </a:xfrm>
+          <a:prstGeom prst="rect">
+            <a:avLst/>
+          </a:prstGeom>
+        </p:spPr>
+      </p:pic>
+      <p:sp>
+        <p:nvSpPr>
+          <p:cNvPr id="81" name="TextBox 80"/>
+          <p:cNvSpPr txBox="1"/>
+          <p:nvPr/>
+        </p:nvSpPr>
+        <p:spPr>
+          <a:xfrm>
+            <a:off x="9661916" y="5440680"/>
+            <a:ext cx="2072579" cy="274320"/>
+          </a:xfrm>
+          <a:prstGeom prst="rect">
+            <a:avLst/>
+          </a:prstGeom>
+          <a:noFill/>
+        </p:spPr>
+        <p:txBody>
+          <a:bodyPr wrap="square">
+            <a:spAutoFit/>
+          </a:bodyPr>
+          <a:lstStyle/>
+          <a:p>
+            <a:pPr algn="ctr"/>
+            <a:r>
+              <a:rPr sz="1000">
+                <a:solidFill>
+                  <a:srgbClr val="404040"/>
+                </a:solidFill>
+              </a:rPr>
+              <a:t>花王</a:t>
+            </a:r>
+          </a:p>
+        </p:txBody>
+      </p:sp>
+      <p:pic>
+        <p:nvPicPr>
+          <p:cNvPr id="82" name="Picture 81" descr="資生堂.png"/>
+          <p:cNvPicPr>
+            <a:picLocks noChangeAspect="1"/>
+          </p:cNvPicPr>
+          <p:nvPr/>
+        </p:nvPicPr>
+        <p:blipFill>
+          <a:blip r:embed="rId42"/>
+          <a:stretch>
+            <a:fillRect/>
+          </a:stretch>
+        </p:blipFill>
+        <p:spPr>
+          <a:xfrm>
+            <a:off x="1036736" y="5943600"/>
+            <a:ext cx="913507" cy="182880"/>
+          </a:xfrm>
+          <a:prstGeom prst="rect">
+            <a:avLst/>
+          </a:prstGeom>
+        </p:spPr>
+      </p:pic>
+      <p:sp>
+        <p:nvSpPr>
+          <p:cNvPr id="83" name="TextBox 82"/>
+          <p:cNvSpPr txBox="1"/>
+          <p:nvPr/>
+        </p:nvSpPr>
+        <p:spPr>
+          <a:xfrm>
+            <a:off x="457200" y="6126480"/>
+            <a:ext cx="2072579" cy="274320"/>
+          </a:xfrm>
+          <a:prstGeom prst="rect">
+            <a:avLst/>
+          </a:prstGeom>
+          <a:noFill/>
+        </p:spPr>
+        <p:txBody>
+          <a:bodyPr wrap="square">
+            <a:spAutoFit/>
+          </a:bodyPr>
+          <a:lstStyle/>
+          <a:p>
+            <a:pPr algn="ctr"/>
+            <a:r>
+              <a:rPr sz="1000">
+                <a:solidFill>
+                  <a:srgbClr val="404040"/>
+                </a:solidFill>
+              </a:rPr>
+              <a:t>資生堂</a:t>
+            </a:r>
+          </a:p>
+        </p:txBody>
+      </p:sp>
+      <p:pic>
+        <p:nvPicPr>
+          <p:cNvPr id="84" name="Picture 83" descr="野村ホールディングス.png"/>
+          <p:cNvPicPr>
+            <a:picLocks noChangeAspect="1"/>
+          </p:cNvPicPr>
+          <p:nvPr/>
+        </p:nvPicPr>
+        <p:blipFill>
+          <a:blip r:embed="rId43"/>
+          <a:stretch>
+            <a:fillRect/>
+          </a:stretch>
+        </p:blipFill>
+        <p:spPr>
+          <a:xfrm>
+            <a:off x="3355070" y="5943600"/>
+            <a:ext cx="879197" cy="182880"/>
+          </a:xfrm>
+          <a:prstGeom prst="rect">
+            <a:avLst/>
+          </a:prstGeom>
+        </p:spPr>
+      </p:pic>
+      <p:sp>
+        <p:nvSpPr>
+          <p:cNvPr id="85" name="TextBox 84"/>
+          <p:cNvSpPr txBox="1"/>
+          <p:nvPr/>
+        </p:nvSpPr>
+        <p:spPr>
+          <a:xfrm>
+            <a:off x="2758379" y="6126480"/>
             <a:ext cx="2072579" cy="274320"/>
           </a:xfrm>
           <a:prstGeom prst="rect">

--- a/docs/logos.pptx
+++ b/docs/logos.pptx
@@ -3104,8 +3104,8 @@
         </p:blipFill>
         <p:spPr>
           <a:xfrm>
-            <a:off x="1339462" y="457200"/>
-            <a:ext cx="308055" cy="182880"/>
+            <a:off x="1267262" y="457200"/>
+            <a:ext cx="452455" cy="268605"/>
           </a:xfrm>
           <a:prstGeom prst="rect">
             <a:avLst/>
@@ -3120,7 +3120,7 @@
         </p:nvSpPr>
         <p:spPr>
           <a:xfrm>
-            <a:off x="457200" y="640080"/>
+            <a:off x="457200" y="725805"/>
             <a:ext cx="2072579" cy="274320"/>
           </a:xfrm>
           <a:prstGeom prst="rect">
@@ -3162,8 +3162,8 @@
         </p:blipFill>
         <p:spPr>
           <a:xfrm>
-            <a:off x="3598726" y="457200"/>
-            <a:ext cx="391885" cy="182880"/>
+            <a:off x="3506877" y="457200"/>
+            <a:ext cx="575582" cy="268605"/>
           </a:xfrm>
           <a:prstGeom prst="rect">
             <a:avLst/>
@@ -3178,7 +3178,7 @@
         </p:nvSpPr>
         <p:spPr>
           <a:xfrm>
-            <a:off x="2758379" y="640080"/>
+            <a:off x="2758379" y="725805"/>
             <a:ext cx="2072579" cy="274320"/>
           </a:xfrm>
           <a:prstGeom prst="rect">
@@ -3220,8 +3220,8 @@
         </p:blipFill>
         <p:spPr>
           <a:xfrm>
-            <a:off x="5785799" y="457200"/>
-            <a:ext cx="620096" cy="182880"/>
+            <a:off x="5640464" y="457200"/>
+            <a:ext cx="910766" cy="268605"/>
           </a:xfrm>
           <a:prstGeom prst="rect">
             <a:avLst/>
@@ -3236,7 +3236,7 @@
         </p:nvSpPr>
         <p:spPr>
           <a:xfrm>
-            <a:off x="5059558" y="640080"/>
+            <a:off x="5059558" y="725805"/>
             <a:ext cx="2072579" cy="274320"/>
           </a:xfrm>
           <a:prstGeom prst="rect">
@@ -3278,8 +3278,8 @@
         </p:blipFill>
         <p:spPr>
           <a:xfrm>
-            <a:off x="8011624" y="457200"/>
-            <a:ext cx="770805" cy="182880"/>
+            <a:off x="7830966" y="457200"/>
+            <a:ext cx="1132120" cy="268605"/>
           </a:xfrm>
           <a:prstGeom prst="rect">
             <a:avLst/>
@@ -3294,7 +3294,7 @@
         </p:nvSpPr>
         <p:spPr>
           <a:xfrm>
-            <a:off x="7360737" y="640080"/>
+            <a:off x="7360737" y="725805"/>
             <a:ext cx="2072579" cy="274320"/>
           </a:xfrm>
           <a:prstGeom prst="rect">
@@ -3336,8 +3336,8 @@
         </p:blipFill>
         <p:spPr>
           <a:xfrm>
-            <a:off x="10320077" y="457200"/>
-            <a:ext cx="756257" cy="182880"/>
+            <a:off x="10142829" y="457200"/>
+            <a:ext cx="1110753" cy="268605"/>
           </a:xfrm>
           <a:prstGeom prst="rect">
             <a:avLst/>
@@ -3352,7 +3352,7 @@
         </p:nvSpPr>
         <p:spPr>
           <a:xfrm>
-            <a:off x="9661916" y="640080"/>
+            <a:off x="9661916" y="725805"/>
             <a:ext cx="2072579" cy="274320"/>
           </a:xfrm>
           <a:prstGeom prst="rect">
@@ -3394,8 +3394,8 @@
         </p:blipFill>
         <p:spPr>
           <a:xfrm>
-            <a:off x="1325146" y="1143000"/>
-            <a:ext cx="336686" cy="182880"/>
+            <a:off x="1246235" y="1228725"/>
+            <a:ext cx="494508" cy="268605"/>
           </a:xfrm>
           <a:prstGeom prst="rect">
             <a:avLst/>
@@ -3410,7 +3410,7 @@
         </p:nvSpPr>
         <p:spPr>
           <a:xfrm>
-            <a:off x="457200" y="1325880"/>
+            <a:off x="457200" y="1497330"/>
             <a:ext cx="2072579" cy="274320"/>
           </a:xfrm>
           <a:prstGeom prst="rect">
@@ -3438,7 +3438,7 @@
       </p:sp>
       <p:pic>
         <p:nvPicPr>
-          <p:cNvPr id="14" name="Picture 13" descr="dTV.png"/>
+          <p:cNvPr id="14" name="Picture 13" descr="dポイント.png"/>
           <p:cNvPicPr>
             <a:picLocks noChangeAspect="1"/>
           </p:cNvPicPr>
@@ -3452,8 +3452,8 @@
         </p:blipFill>
         <p:spPr>
           <a:xfrm>
-            <a:off x="3585118" y="1143000"/>
-            <a:ext cx="419100" cy="182880"/>
+            <a:off x="3690356" y="1228725"/>
+            <a:ext cx="208625" cy="268605"/>
           </a:xfrm>
           <a:prstGeom prst="rect">
             <a:avLst/>
@@ -3468,7 +3468,7 @@
         </p:nvSpPr>
         <p:spPr>
           <a:xfrm>
-            <a:off x="2758379" y="1325880"/>
+            <a:off x="2758379" y="1497330"/>
             <a:ext cx="2072579" cy="274320"/>
           </a:xfrm>
           <a:prstGeom prst="rect">
@@ -3489,14 +3489,14 @@
                   <a:srgbClr val="404040"/>
                 </a:solidFill>
               </a:rPr>
-              <a:t>dTV</a:t>
+              <a:t>dポイント</a:t>
             </a:r>
           </a:p>
         </p:txBody>
       </p:sp>
       <p:pic>
         <p:nvPicPr>
-          <p:cNvPr id="16" name="Picture 15" descr="dゲーム.png"/>
+          <p:cNvPr id="16" name="Picture 15" descr="dマガジン.png"/>
           <p:cNvPicPr>
             <a:picLocks noChangeAspect="1"/>
           </p:cNvPicPr>
@@ -3510,8 +3510,8 @@
         </p:blipFill>
         <p:spPr>
           <a:xfrm>
-            <a:off x="5846819" y="1143000"/>
-            <a:ext cx="498056" cy="182880"/>
+            <a:off x="5961108" y="1228725"/>
+            <a:ext cx="269479" cy="268605"/>
           </a:xfrm>
           <a:prstGeom prst="rect">
             <a:avLst/>
@@ -3526,7 +3526,7 @@
         </p:nvSpPr>
         <p:spPr>
           <a:xfrm>
-            <a:off x="5059558" y="1325880"/>
+            <a:off x="5059558" y="1497330"/>
             <a:ext cx="2072579" cy="274320"/>
           </a:xfrm>
           <a:prstGeom prst="rect">
@@ -3547,14 +3547,14 @@
                   <a:srgbClr val="404040"/>
                 </a:solidFill>
               </a:rPr>
-              <a:t>dゲーム</a:t>
+              <a:t>dマガジン</a:t>
             </a:r>
           </a:p>
         </p:txBody>
       </p:sp>
       <p:pic>
         <p:nvPicPr>
-          <p:cNvPr id="18" name="Picture 17" descr="dポイント.png"/>
+          <p:cNvPr id="18" name="Picture 17" descr="d払い.png"/>
           <p:cNvPicPr>
             <a:picLocks noChangeAspect="1"/>
           </p:cNvPicPr>
@@ -3568,8 +3568,8 @@
         </p:blipFill>
         <p:spPr>
           <a:xfrm>
-            <a:off x="8326005" y="1143000"/>
-            <a:ext cx="142042" cy="182880"/>
+            <a:off x="7971250" y="1228725"/>
+            <a:ext cx="851552" cy="268605"/>
           </a:xfrm>
           <a:prstGeom prst="rect">
             <a:avLst/>
@@ -3584,7 +3584,7 @@
         </p:nvSpPr>
         <p:spPr>
           <a:xfrm>
-            <a:off x="7360737" y="1325880"/>
+            <a:off x="7360737" y="1497330"/>
             <a:ext cx="2072579" cy="274320"/>
           </a:xfrm>
           <a:prstGeom prst="rect">
@@ -3605,14 +3605,14 @@
                   <a:srgbClr val="404040"/>
                 </a:solidFill>
               </a:rPr>
-              <a:t>dポイント</a:t>
+              <a:t>d払い</a:t>
             </a:r>
           </a:p>
         </p:txBody>
       </p:sp>
       <p:pic>
         <p:nvPicPr>
-          <p:cNvPr id="20" name="Picture 19" descr="dマガジン.png"/>
+          <p:cNvPr id="20" name="Picture 19" descr="アサヒグループホールディングス.png"/>
           <p:cNvPicPr>
             <a:picLocks noChangeAspect="1"/>
           </p:cNvPicPr>
@@ -3626,8 +3626,8 @@
         </p:blipFill>
         <p:spPr>
           <a:xfrm>
-            <a:off x="10606468" y="1143000"/>
-            <a:ext cx="183475" cy="182880"/>
+            <a:off x="10509245" y="1228725"/>
+            <a:ext cx="377920" cy="268605"/>
           </a:xfrm>
           <a:prstGeom prst="rect">
             <a:avLst/>
@@ -3642,7 +3642,7 @@
         </p:nvSpPr>
         <p:spPr>
           <a:xfrm>
-            <a:off x="9661916" y="1325880"/>
+            <a:off x="9661916" y="1497330"/>
             <a:ext cx="2072579" cy="274320"/>
           </a:xfrm>
           <a:prstGeom prst="rect">
@@ -3663,14 +3663,14 @@
                   <a:srgbClr val="404040"/>
                 </a:solidFill>
               </a:rPr>
-              <a:t>dマガジン</a:t>
+              <a:t>アサヒグループホールディングス</a:t>
             </a:r>
           </a:p>
         </p:txBody>
       </p:sp>
       <p:pic>
         <p:nvPicPr>
-          <p:cNvPr id="22" name="Picture 21" descr="d払い.png"/>
+          <p:cNvPr id="22" name="Picture 21" descr="オリエンタルランド.png"/>
           <p:cNvPicPr>
             <a:picLocks noChangeAspect="1"/>
           </p:cNvPicPr>
@@ -3684,8 +3684,8 @@
         </p:blipFill>
         <p:spPr>
           <a:xfrm>
-            <a:off x="1203599" y="1828800"/>
-            <a:ext cx="579780" cy="182880"/>
+            <a:off x="1237094" y="2000250"/>
+            <a:ext cx="512791" cy="268605"/>
           </a:xfrm>
           <a:prstGeom prst="rect">
             <a:avLst/>
@@ -3700,7 +3700,7 @@
         </p:nvSpPr>
         <p:spPr>
           <a:xfrm>
-            <a:off x="457200" y="2011680"/>
+            <a:off x="457200" y="2268855"/>
             <a:ext cx="2072579" cy="274320"/>
           </a:xfrm>
           <a:prstGeom prst="rect">
@@ -3721,14 +3721,14 @@
                   <a:srgbClr val="404040"/>
                 </a:solidFill>
               </a:rPr>
-              <a:t>d払い</a:t>
+              <a:t>オリエンタルランド</a:t>
             </a:r>
           </a:p>
         </p:txBody>
       </p:sp>
       <p:pic>
         <p:nvPicPr>
-          <p:cNvPr id="24" name="Picture 23" descr="imode.png"/>
+          <p:cNvPr id="24" name="Picture 23" descr="オリンパス.png"/>
           <p:cNvPicPr>
             <a:picLocks noChangeAspect="1"/>
           </p:cNvPicPr>
@@ -3742,8 +3742,8 @@
         </p:blipFill>
         <p:spPr>
           <a:xfrm>
-            <a:off x="3572151" y="1828800"/>
-            <a:ext cx="445034" cy="182880"/>
+            <a:off x="3185694" y="2000250"/>
+            <a:ext cx="1217949" cy="268605"/>
           </a:xfrm>
           <a:prstGeom prst="rect">
             <a:avLst/>
@@ -3758,7 +3758,7 @@
         </p:nvSpPr>
         <p:spPr>
           <a:xfrm>
-            <a:off x="2758379" y="2011680"/>
+            <a:off x="2758379" y="2268855"/>
             <a:ext cx="2072579" cy="274320"/>
           </a:xfrm>
           <a:prstGeom prst="rect">
@@ -3779,14 +3779,14 @@
                   <a:srgbClr val="404040"/>
                 </a:solidFill>
               </a:rPr>
-              <a:t>imode</a:t>
+              <a:t>オリンパス</a:t>
             </a:r>
           </a:p>
         </p:txBody>
       </p:sp>
       <p:pic>
         <p:nvPicPr>
-          <p:cNvPr id="26" name="Picture 25" descr="アサヒグループホールディングス.png"/>
+          <p:cNvPr id="26" name="Picture 25" descr="キーエンス.png"/>
           <p:cNvPicPr>
             <a:picLocks noChangeAspect="1"/>
           </p:cNvPicPr>
@@ -3800,8 +3800,8 @@
         </p:blipFill>
         <p:spPr>
           <a:xfrm>
-            <a:off x="5967194" y="1828800"/>
-            <a:ext cx="257307" cy="182880"/>
+            <a:off x="5470469" y="2000250"/>
+            <a:ext cx="1250756" cy="268605"/>
           </a:xfrm>
           <a:prstGeom prst="rect">
             <a:avLst/>
@@ -3816,7 +3816,7 @@
         </p:nvSpPr>
         <p:spPr>
           <a:xfrm>
-            <a:off x="5059558" y="2011680"/>
+            <a:off x="5059558" y="2268855"/>
             <a:ext cx="2072579" cy="274320"/>
           </a:xfrm>
           <a:prstGeom prst="rect">
@@ -3837,14 +3837,14 @@
                   <a:srgbClr val="404040"/>
                 </a:solidFill>
               </a:rPr>
-              <a:t>アサヒグループホールディングス</a:t>
+              <a:t>キーエンス</a:t>
             </a:r>
           </a:p>
         </p:txBody>
       </p:sp>
       <p:pic>
         <p:nvPicPr>
-          <p:cNvPr id="28" name="Picture 27" descr="オリエンタルランド.png"/>
+          <p:cNvPr id="28" name="Picture 27" descr="コマツ.png"/>
           <p:cNvPicPr>
             <a:picLocks noChangeAspect="1"/>
           </p:cNvPicPr>
@@ -3858,8 +3858,8 @@
         </p:blipFill>
         <p:spPr>
           <a:xfrm>
-            <a:off x="8222459" y="1828800"/>
-            <a:ext cx="349134" cy="182880"/>
+            <a:off x="7783072" y="2000250"/>
+            <a:ext cx="1227908" cy="268605"/>
           </a:xfrm>
           <a:prstGeom prst="rect">
             <a:avLst/>
@@ -3874,7 +3874,7 @@
         </p:nvSpPr>
         <p:spPr>
           <a:xfrm>
-            <a:off x="7360737" y="2011680"/>
+            <a:off x="7360737" y="2268855"/>
             <a:ext cx="2072579" cy="274320"/>
           </a:xfrm>
           <a:prstGeom prst="rect">
@@ -3895,14 +3895,14 @@
                   <a:srgbClr val="404040"/>
                 </a:solidFill>
               </a:rPr>
-              <a:t>オリエンタルランド</a:t>
+              <a:t>コマツ</a:t>
             </a:r>
           </a:p>
         </p:txBody>
       </p:sp>
       <p:pic>
         <p:nvPicPr>
-          <p:cNvPr id="30" name="Picture 29" descr="オリンパス.png"/>
+          <p:cNvPr id="30" name="Picture 29" descr="セコム.png"/>
           <p:cNvPicPr>
             <a:picLocks noChangeAspect="1"/>
           </p:cNvPicPr>
@@ -3916,8 +3916,8 @@
         </p:blipFill>
         <p:spPr>
           <a:xfrm>
-            <a:off x="10283584" y="1828800"/>
-            <a:ext cx="829242" cy="182880"/>
+            <a:off x="10350477" y="2000250"/>
+            <a:ext cx="695457" cy="268605"/>
           </a:xfrm>
           <a:prstGeom prst="rect">
             <a:avLst/>
@@ -3932,7 +3932,7 @@
         </p:nvSpPr>
         <p:spPr>
           <a:xfrm>
-            <a:off x="9661916" y="2011680"/>
+            <a:off x="9661916" y="2268855"/>
             <a:ext cx="2072579" cy="274320"/>
           </a:xfrm>
           <a:prstGeom prst="rect">
@@ -3953,14 +3953,14 @@
                   <a:srgbClr val="404040"/>
                 </a:solidFill>
               </a:rPr>
-              <a:t>オリンパス</a:t>
+              <a:t>セコム</a:t>
             </a:r>
           </a:p>
         </p:txBody>
       </p:sp>
       <p:pic>
         <p:nvPicPr>
-          <p:cNvPr id="32" name="Picture 31" descr="キーエンス.png"/>
+          <p:cNvPr id="32" name="Picture 31" descr="セブン&amp;アイ・ホールディングス.png"/>
           <p:cNvPicPr>
             <a:picLocks noChangeAspect="1"/>
           </p:cNvPicPr>
@@ -3974,8 +3974,8 @@
         </p:blipFill>
         <p:spPr>
           <a:xfrm>
-            <a:off x="1067700" y="2514600"/>
-            <a:ext cx="851578" cy="182880"/>
+            <a:off x="1344925" y="2771775"/>
+            <a:ext cx="297129" cy="268605"/>
           </a:xfrm>
           <a:prstGeom prst="rect">
             <a:avLst/>
@@ -3990,7 +3990,7 @@
         </p:nvSpPr>
         <p:spPr>
           <a:xfrm>
-            <a:off x="457200" y="2697480"/>
+            <a:off x="457200" y="3040380"/>
             <a:ext cx="2072579" cy="274320"/>
           </a:xfrm>
           <a:prstGeom prst="rect">
@@ -4011,14 +4011,14 @@
                   <a:srgbClr val="404040"/>
                 </a:solidFill>
               </a:rPr>
-              <a:t>キーエンス</a:t>
+              <a:t>セブン&amp;アイ・ホールディングス</a:t>
             </a:r>
           </a:p>
         </p:txBody>
       </p:sp>
       <p:pic>
         <p:nvPicPr>
-          <p:cNvPr id="34" name="Picture 33" descr="コマツ.png"/>
+          <p:cNvPr id="34" name="Picture 33" descr="ソニーグループ.png"/>
           <p:cNvPicPr>
             <a:picLocks noChangeAspect="1"/>
           </p:cNvPicPr>
@@ -4032,8 +4032,8 @@
         </p:blipFill>
         <p:spPr>
           <a:xfrm>
-            <a:off x="3376657" y="2514600"/>
-            <a:ext cx="836022" cy="182880"/>
+            <a:off x="3152727" y="2771775"/>
+            <a:ext cx="1283882" cy="268605"/>
           </a:xfrm>
           <a:prstGeom prst="rect">
             <a:avLst/>
@@ -4048,7 +4048,7 @@
         </p:nvSpPr>
         <p:spPr>
           <a:xfrm>
-            <a:off x="2758379" y="2697480"/>
+            <a:off x="2758379" y="3040380"/>
             <a:ext cx="2072579" cy="274320"/>
           </a:xfrm>
           <a:prstGeom prst="rect">
@@ -4069,14 +4069,14 @@
                   <a:srgbClr val="404040"/>
                 </a:solidFill>
               </a:rPr>
-              <a:t>コマツ</a:t>
+              <a:t>ソニーグループ</a:t>
             </a:r>
           </a:p>
         </p:txBody>
       </p:sp>
       <p:pic>
         <p:nvPicPr>
-          <p:cNvPr id="36" name="Picture 35" descr="セコム.png"/>
+          <p:cNvPr id="36" name="Picture 35" descr="ダイキン工業.png"/>
           <p:cNvPicPr>
             <a:picLocks noChangeAspect="1"/>
           </p:cNvPicPr>
@@ -4090,8 +4090,8 @@
         </p:blipFill>
         <p:spPr>
           <a:xfrm>
-            <a:off x="5859096" y="2514600"/>
-            <a:ext cx="473503" cy="182880"/>
+            <a:off x="5538237" y="2771775"/>
+            <a:ext cx="1115220" cy="268605"/>
           </a:xfrm>
           <a:prstGeom prst="rect">
             <a:avLst/>
@@ -4106,7 +4106,7 @@
         </p:nvSpPr>
         <p:spPr>
           <a:xfrm>
-            <a:off x="5059558" y="2697480"/>
+            <a:off x="5059558" y="3040380"/>
             <a:ext cx="2072579" cy="274320"/>
           </a:xfrm>
           <a:prstGeom prst="rect">
@@ -4127,14 +4127,14 @@
                   <a:srgbClr val="404040"/>
                 </a:solidFill>
               </a:rPr>
-              <a:t>セコム</a:t>
+              <a:t>ダイキン工業</a:t>
             </a:r>
           </a:p>
         </p:txBody>
       </p:sp>
       <p:pic>
         <p:nvPicPr>
-          <p:cNvPr id="38" name="Picture 37" descr="セブン&amp;アイ・ホールディングス.png"/>
+          <p:cNvPr id="38" name="Picture 37" descr="トヨタ自動車.png"/>
           <p:cNvPicPr>
             <a:picLocks noChangeAspect="1"/>
           </p:cNvPicPr>
@@ -4148,8 +4148,8 @@
         </p:blipFill>
         <p:spPr>
           <a:xfrm>
-            <a:off x="8295876" y="2514600"/>
-            <a:ext cx="202300" cy="182880"/>
+            <a:off x="8203696" y="2771775"/>
+            <a:ext cx="386661" cy="268605"/>
           </a:xfrm>
           <a:prstGeom prst="rect">
             <a:avLst/>
@@ -4164,7 +4164,7 @@
         </p:nvSpPr>
         <p:spPr>
           <a:xfrm>
-            <a:off x="7360737" y="2697480"/>
+            <a:off x="7360737" y="3040380"/>
             <a:ext cx="2072579" cy="274320"/>
           </a:xfrm>
           <a:prstGeom prst="rect">
@@ -4185,14 +4185,14 @@
                   <a:srgbClr val="404040"/>
                 </a:solidFill>
               </a:rPr>
-              <a:t>セブン&amp;アイ・ホールディングス</a:t>
+              <a:t>トヨタ自動車</a:t>
             </a:r>
           </a:p>
         </p:txBody>
       </p:sp>
       <p:pic>
         <p:nvPicPr>
-          <p:cNvPr id="40" name="Picture 39" descr="ソニーグループ.png"/>
+          <p:cNvPr id="40" name="Picture 39" descr="ドコモの銀行.png"/>
           <p:cNvPicPr>
             <a:picLocks noChangeAspect="1"/>
           </p:cNvPicPr>
@@ -4206,8 +4206,8 @@
         </p:blipFill>
         <p:spPr>
           <a:xfrm>
-            <a:off x="10261139" y="2514600"/>
-            <a:ext cx="874132" cy="182880"/>
+            <a:off x="10258365" y="2771775"/>
+            <a:ext cx="879681" cy="268605"/>
           </a:xfrm>
           <a:prstGeom prst="rect">
             <a:avLst/>
@@ -4222,7 +4222,7 @@
         </p:nvSpPr>
         <p:spPr>
           <a:xfrm>
-            <a:off x="9661916" y="2697480"/>
+            <a:off x="9661916" y="3040380"/>
             <a:ext cx="2072579" cy="274320"/>
           </a:xfrm>
           <a:prstGeom prst="rect">
@@ -4243,14 +4243,14 @@
                   <a:srgbClr val="404040"/>
                 </a:solidFill>
               </a:rPr>
-              <a:t>ソニーグループ</a:t>
+              <a:t>ドコモの銀行</a:t>
             </a:r>
           </a:p>
         </p:txBody>
       </p:sp>
       <p:pic>
         <p:nvPicPr>
-          <p:cNvPr id="42" name="Picture 41" descr="ダイキン工業.png"/>
+          <p:cNvPr id="42" name="Picture 41" descr="ドコモ光.png"/>
           <p:cNvPicPr>
             <a:picLocks noChangeAspect="1"/>
           </p:cNvPicPr>
@@ -4264,8 +4264,8 @@
         </p:blipFill>
         <p:spPr>
           <a:xfrm>
-            <a:off x="1113840" y="3200400"/>
-            <a:ext cx="759299" cy="182880"/>
+            <a:off x="1065788" y="3543300"/>
+            <a:ext cx="855403" cy="268605"/>
           </a:xfrm>
           <a:prstGeom prst="rect">
             <a:avLst/>
@@ -4280,7 +4280,7 @@
         </p:nvSpPr>
         <p:spPr>
           <a:xfrm>
-            <a:off x="457200" y="3383280"/>
+            <a:off x="457200" y="3811905"/>
             <a:ext cx="2072579" cy="274320"/>
           </a:xfrm>
           <a:prstGeom prst="rect">
@@ -4301,14 +4301,14 @@
                   <a:srgbClr val="404040"/>
                 </a:solidFill>
               </a:rPr>
-              <a:t>ダイキン工業</a:t>
+              <a:t>ドコモ光</a:t>
             </a:r>
           </a:p>
         </p:txBody>
       </p:sp>
       <p:pic>
         <p:nvPicPr>
-          <p:cNvPr id="44" name="Picture 43" descr="トヨタ自動車.png"/>
+          <p:cNvPr id="44" name="Picture 43" descr="パナソニック.png"/>
           <p:cNvPicPr>
             <a:picLocks noChangeAspect="1"/>
           </p:cNvPicPr>
@@ -4322,8 +4322,8 @@
         </p:blipFill>
         <p:spPr>
           <a:xfrm>
-            <a:off x="3663039" y="3200400"/>
-            <a:ext cx="263258" cy="182880"/>
+            <a:off x="3056005" y="3543300"/>
+            <a:ext cx="1477327" cy="268605"/>
           </a:xfrm>
           <a:prstGeom prst="rect">
             <a:avLst/>
@@ -4338,7 +4338,7 @@
         </p:nvSpPr>
         <p:spPr>
           <a:xfrm>
-            <a:off x="2758379" y="3383280"/>
+            <a:off x="2758379" y="3811905"/>
             <a:ext cx="2072579" cy="274320"/>
           </a:xfrm>
           <a:prstGeom prst="rect">
@@ -4359,14 +4359,14 @@
                   <a:srgbClr val="404040"/>
                 </a:solidFill>
               </a:rPr>
-              <a:t>トヨタ自動車</a:t>
+              <a:t>パナソニック</a:t>
             </a:r>
           </a:p>
         </p:txBody>
       </p:sp>
       <p:pic>
         <p:nvPicPr>
-          <p:cNvPr id="46" name="Picture 45" descr="ドコモの銀行.png"/>
+          <p:cNvPr id="46" name="Picture 45" descr="ファーストリテイリング.png"/>
           <p:cNvPicPr>
             <a:picLocks noChangeAspect="1"/>
           </p:cNvPicPr>
@@ -4380,8 +4380,8 @@
         </p:blipFill>
         <p:spPr>
           <a:xfrm>
-            <a:off x="5796381" y="3200400"/>
-            <a:ext cx="598932" cy="182880"/>
+            <a:off x="5829108" y="3543300"/>
+            <a:ext cx="533479" cy="268605"/>
           </a:xfrm>
           <a:prstGeom prst="rect">
             <a:avLst/>
@@ -4396,7 +4396,7 @@
         </p:nvSpPr>
         <p:spPr>
           <a:xfrm>
-            <a:off x="5059558" y="3383280"/>
+            <a:off x="5059558" y="3811905"/>
             <a:ext cx="2072579" cy="274320"/>
           </a:xfrm>
           <a:prstGeom prst="rect">
@@ -4417,14 +4417,14 @@
                   <a:srgbClr val="404040"/>
                 </a:solidFill>
               </a:rPr>
-              <a:t>ドコモの銀行</a:t>
+              <a:t>ファーストリテイリング</a:t>
             </a:r>
           </a:p>
         </p:txBody>
       </p:sp>
       <p:pic>
         <p:nvPicPr>
-          <p:cNvPr id="48" name="Picture 47" descr="ドコモ光.png"/>
+          <p:cNvPr id="48" name="Picture 47" descr="ホンダ.png"/>
           <p:cNvPicPr>
             <a:picLocks noChangeAspect="1"/>
           </p:cNvPicPr>
@@ -4438,8 +4438,8 @@
         </p:blipFill>
         <p:spPr>
           <a:xfrm>
-            <a:off x="8105825" y="3200400"/>
-            <a:ext cx="582402" cy="182880"/>
+            <a:off x="7558794" y="3543300"/>
+            <a:ext cx="1676465" cy="268605"/>
           </a:xfrm>
           <a:prstGeom prst="rect">
             <a:avLst/>
@@ -4454,7 +4454,7 @@
         </p:nvSpPr>
         <p:spPr>
           <a:xfrm>
-            <a:off x="7360737" y="3383280"/>
+            <a:off x="7360737" y="3811905"/>
             <a:ext cx="2072579" cy="274320"/>
           </a:xfrm>
           <a:prstGeom prst="rect">
@@ -4475,14 +4475,14 @@
                   <a:srgbClr val="404040"/>
                 </a:solidFill>
               </a:rPr>
-              <a:t>ドコモ光</a:t>
+              <a:t>ホンダ</a:t>
             </a:r>
           </a:p>
         </p:txBody>
       </p:sp>
       <p:pic>
         <p:nvPicPr>
-          <p:cNvPr id="50" name="Picture 49" descr="パナソニック.png"/>
+          <p:cNvPr id="50" name="Picture 49" descr="リクルートホールディングス.png"/>
           <p:cNvPicPr>
             <a:picLocks noChangeAspect="1"/>
           </p:cNvPicPr>
@@ -4496,8 +4496,8 @@
         </p:blipFill>
         <p:spPr>
           <a:xfrm>
-            <a:off x="10195285" y="3200400"/>
-            <a:ext cx="1005840" cy="182880"/>
+            <a:off x="10236502" y="3543300"/>
+            <a:ext cx="923407" cy="268605"/>
           </a:xfrm>
           <a:prstGeom prst="rect">
             <a:avLst/>
@@ -4512,7 +4512,7 @@
         </p:nvSpPr>
         <p:spPr>
           <a:xfrm>
-            <a:off x="9661916" y="3383280"/>
+            <a:off x="9661916" y="3811905"/>
             <a:ext cx="2072579" cy="274320"/>
           </a:xfrm>
           <a:prstGeom prst="rect">
@@ -4533,14 +4533,14 @@
                   <a:srgbClr val="404040"/>
                 </a:solidFill>
               </a:rPr>
-              <a:t>パナソニック</a:t>
+              <a:t>リクルートホールディングス</a:t>
             </a:r>
           </a:p>
         </p:txBody>
       </p:sp>
       <p:pic>
         <p:nvPicPr>
-          <p:cNvPr id="52" name="Picture 51" descr="ファーストリテイリング.png"/>
+          <p:cNvPr id="52" name="Picture 51" descr="三井住友銀行.png"/>
           <p:cNvPicPr>
             <a:picLocks noChangeAspect="1"/>
           </p:cNvPicPr>
@@ -4554,8 +4554,8 @@
         </p:blipFill>
         <p:spPr>
           <a:xfrm>
-            <a:off x="1311879" y="3886200"/>
-            <a:ext cx="363220" cy="182880"/>
+            <a:off x="1046977" y="4314825"/>
+            <a:ext cx="893024" cy="268605"/>
           </a:xfrm>
           <a:prstGeom prst="rect">
             <a:avLst/>
@@ -4570,7 +4570,7 @@
         </p:nvSpPr>
         <p:spPr>
           <a:xfrm>
-            <a:off x="457200" y="4069080"/>
+            <a:off x="457200" y="4583430"/>
             <a:ext cx="2072579" cy="274320"/>
           </a:xfrm>
           <a:prstGeom prst="rect">
@@ -4591,14 +4591,14 @@
                   <a:srgbClr val="404040"/>
                 </a:solidFill>
               </a:rPr>
-              <a:t>ファーストリテイリング</a:t>
+              <a:t>三井住友銀行</a:t>
             </a:r>
           </a:p>
         </p:txBody>
       </p:sp>
       <p:pic>
         <p:nvPicPr>
-          <p:cNvPr id="54" name="Picture 53" descr="ホンダ.png"/>
+          <p:cNvPr id="54" name="Picture 53" descr="三菱電機.png"/>
           <p:cNvPicPr>
             <a:picLocks noChangeAspect="1"/>
           </p:cNvPicPr>
@@ -4612,8 +4612,8 @@
         </p:blipFill>
         <p:spPr>
           <a:xfrm>
-            <a:off x="3223957" y="3886200"/>
-            <a:ext cx="1141423" cy="182880"/>
+            <a:off x="3381430" y="4314825"/>
+            <a:ext cx="826476" cy="268605"/>
           </a:xfrm>
           <a:prstGeom prst="rect">
             <a:avLst/>
@@ -4628,7 +4628,7 @@
         </p:nvSpPr>
         <p:spPr>
           <a:xfrm>
-            <a:off x="2758379" y="4069080"/>
+            <a:off x="2758379" y="4583430"/>
             <a:ext cx="2072579" cy="274320"/>
           </a:xfrm>
           <a:prstGeom prst="rect">
@@ -4649,14 +4649,14 @@
                   <a:srgbClr val="404040"/>
                 </a:solidFill>
               </a:rPr>
-              <a:t>ホンダ</a:t>
+              <a:t>三菱電機</a:t>
             </a:r>
           </a:p>
         </p:txBody>
       </p:sp>
       <p:pic>
         <p:nvPicPr>
-          <p:cNvPr id="56" name="Picture 55" descr="リクルートホールディングス.png"/>
+          <p:cNvPr id="56" name="Picture 55" descr="任天堂.png"/>
           <p:cNvPicPr>
             <a:picLocks noChangeAspect="1"/>
           </p:cNvPicPr>
@@ -4670,8 +4670,8 @@
         </p:blipFill>
         <p:spPr>
           <a:xfrm>
-            <a:off x="5781496" y="3886200"/>
-            <a:ext cx="628702" cy="182880"/>
+            <a:off x="5608167" y="4314825"/>
+            <a:ext cx="975360" cy="268605"/>
           </a:xfrm>
           <a:prstGeom prst="rect">
             <a:avLst/>
@@ -4686,7 +4686,7 @@
         </p:nvSpPr>
         <p:spPr>
           <a:xfrm>
-            <a:off x="5059558" y="4069080"/>
+            <a:off x="5059558" y="4583430"/>
             <a:ext cx="2072579" cy="274320"/>
           </a:xfrm>
           <a:prstGeom prst="rect">
@@ -4707,14 +4707,14 @@
                   <a:srgbClr val="404040"/>
                 </a:solidFill>
               </a:rPr>
-              <a:t>リクルートホールディングス</a:t>
+              <a:t>任天堂</a:t>
             </a:r>
           </a:p>
         </p:txBody>
       </p:sp>
       <p:pic>
         <p:nvPicPr>
-          <p:cNvPr id="58" name="Picture 57" descr="三井住友銀行.png"/>
+          <p:cNvPr id="58" name="Picture 57" descr="味の素.png"/>
           <p:cNvPicPr>
             <a:picLocks noChangeAspect="1"/>
           </p:cNvPicPr>
@@ -4728,8 +4728,8 @@
         </p:blipFill>
         <p:spPr>
           <a:xfrm>
-            <a:off x="8093018" y="3886200"/>
-            <a:ext cx="608016" cy="182880"/>
+            <a:off x="7568828" y="4314825"/>
+            <a:ext cx="1656397" cy="268605"/>
           </a:xfrm>
           <a:prstGeom prst="rect">
             <a:avLst/>
@@ -4744,7 +4744,7 @@
         </p:nvSpPr>
         <p:spPr>
           <a:xfrm>
-            <a:off x="7360737" y="4069080"/>
+            <a:off x="7360737" y="4583430"/>
             <a:ext cx="2072579" cy="274320"/>
           </a:xfrm>
           <a:prstGeom prst="rect">
@@ -4765,14 +4765,14 @@
                   <a:srgbClr val="404040"/>
                 </a:solidFill>
               </a:rPr>
-              <a:t>三井住友銀行</a:t>
+              <a:t>味の素</a:t>
             </a:r>
           </a:p>
         </p:txBody>
       </p:sp>
       <p:pic>
         <p:nvPicPr>
-          <p:cNvPr id="60" name="Picture 59" descr="三菱電機.png"/>
+          <p:cNvPr id="60" name="Picture 59" descr="大和ハウス工業.png"/>
           <p:cNvPicPr>
             <a:picLocks noChangeAspect="1"/>
           </p:cNvPicPr>
@@ -4786,8 +4786,8 @@
         </p:blipFill>
         <p:spPr>
           <a:xfrm>
-            <a:off x="10416852" y="3886200"/>
-            <a:ext cx="562707" cy="182880"/>
+            <a:off x="10529875" y="4314825"/>
+            <a:ext cx="336660" cy="268605"/>
           </a:xfrm>
           <a:prstGeom prst="rect">
             <a:avLst/>
@@ -4802,7 +4802,7 @@
         </p:nvSpPr>
         <p:spPr>
           <a:xfrm>
-            <a:off x="9661916" y="4069080"/>
+            <a:off x="9661916" y="4583430"/>
             <a:ext cx="2072579" cy="274320"/>
           </a:xfrm>
           <a:prstGeom prst="rect">
@@ -4823,14 +4823,14 @@
                   <a:srgbClr val="404040"/>
                 </a:solidFill>
               </a:rPr>
-              <a:t>三菱電機</a:t>
+              <a:t>大和ハウス工業</a:t>
             </a:r>
           </a:p>
         </p:txBody>
       </p:sp>
       <p:pic>
         <p:nvPicPr>
-          <p:cNvPr id="62" name="Picture 61" descr="任天堂.png"/>
+          <p:cNvPr id="62" name="Picture 61" descr="富士通.png"/>
           <p:cNvPicPr>
             <a:picLocks noChangeAspect="1"/>
           </p:cNvPicPr>
@@ -4844,8 +4844,8 @@
         </p:blipFill>
         <p:spPr>
           <a:xfrm>
-            <a:off x="1161452" y="4572000"/>
-            <a:ext cx="664074" cy="182880"/>
+            <a:off x="1228507" y="5086350"/>
+            <a:ext cx="529964" cy="268605"/>
           </a:xfrm>
           <a:prstGeom prst="rect">
             <a:avLst/>
@@ -4860,7 +4860,7 @@
         </p:nvSpPr>
         <p:spPr>
           <a:xfrm>
-            <a:off x="457200" y="4754880"/>
+            <a:off x="457200" y="5354955"/>
             <a:ext cx="2072579" cy="274320"/>
           </a:xfrm>
           <a:prstGeom prst="rect">
@@ -4881,14 +4881,14 @@
                   <a:srgbClr val="404040"/>
                 </a:solidFill>
               </a:rPr>
-              <a:t>任天堂</a:t>
+              <a:t>富士通</a:t>
             </a:r>
           </a:p>
         </p:txBody>
       </p:sp>
       <p:pic>
         <p:nvPicPr>
-          <p:cNvPr id="64" name="Picture 63" descr="味の素.png"/>
+          <p:cNvPr id="64" name="Picture 63" descr="日本郵政.png"/>
           <p:cNvPicPr>
             <a:picLocks noChangeAspect="1"/>
           </p:cNvPicPr>
@@ -4902,8 +4902,8 @@
         </p:blipFill>
         <p:spPr>
           <a:xfrm>
-            <a:off x="3230788" y="4572000"/>
-            <a:ext cx="1127760" cy="182880"/>
+            <a:off x="3668656" y="5086350"/>
+            <a:ext cx="252024" cy="268605"/>
           </a:xfrm>
           <a:prstGeom prst="rect">
             <a:avLst/>
@@ -4918,7 +4918,7 @@
         </p:nvSpPr>
         <p:spPr>
           <a:xfrm>
-            <a:off x="2758379" y="4754880"/>
+            <a:off x="2758379" y="5354955"/>
             <a:ext cx="2072579" cy="274320"/>
           </a:xfrm>
           <a:prstGeom prst="rect">
@@ -4939,14 +4939,14 @@
                   <a:srgbClr val="404040"/>
                 </a:solidFill>
               </a:rPr>
-              <a:t>味の素</a:t>
+              <a:t>日本郵政</a:t>
             </a:r>
           </a:p>
         </p:txBody>
       </p:sp>
       <p:pic>
         <p:nvPicPr>
-          <p:cNvPr id="66" name="Picture 65" descr="大和ハウス工業.png"/>
+          <p:cNvPr id="66" name="Picture 65" descr="日立製作所.png"/>
           <p:cNvPicPr>
             <a:picLocks noChangeAspect="1"/>
           </p:cNvPicPr>
@@ -4960,8 +4960,8 @@
         </p:blipFill>
         <p:spPr>
           <a:xfrm>
-            <a:off x="5981240" y="4572000"/>
-            <a:ext cx="229215" cy="182880"/>
+            <a:off x="5393075" y="5086350"/>
+            <a:ext cx="1405545" cy="268605"/>
           </a:xfrm>
           <a:prstGeom prst="rect">
             <a:avLst/>
@@ -4976,7 +4976,7 @@
         </p:nvSpPr>
         <p:spPr>
           <a:xfrm>
-            <a:off x="5059558" y="4754880"/>
+            <a:off x="5059558" y="5354955"/>
             <a:ext cx="2072579" cy="274320"/>
           </a:xfrm>
           <a:prstGeom prst="rect">
@@ -4997,14 +4997,14 @@
                   <a:srgbClr val="404040"/>
                 </a:solidFill>
               </a:rPr>
-              <a:t>大和ハウス工業</a:t>
+              <a:t>日立製作所</a:t>
             </a:r>
           </a:p>
         </p:txBody>
       </p:sp>
       <p:pic>
         <p:nvPicPr>
-          <p:cNvPr id="68" name="Picture 67" descr="富士通.png"/>
+          <p:cNvPr id="68" name="Picture 67" descr="東京ガス.png"/>
           <p:cNvPicPr>
             <a:picLocks noChangeAspect="1"/>
           </p:cNvPicPr>
@@ -5018,8 +5018,8 @@
         </p:blipFill>
         <p:spPr>
           <a:xfrm>
-            <a:off x="8216613" y="4572000"/>
-            <a:ext cx="360826" cy="182880"/>
+            <a:off x="7753494" y="5086350"/>
+            <a:ext cx="1287065" cy="268605"/>
           </a:xfrm>
           <a:prstGeom prst="rect">
             <a:avLst/>
@@ -5034,7 +5034,7 @@
         </p:nvSpPr>
         <p:spPr>
           <a:xfrm>
-            <a:off x="7360737" y="4754880"/>
+            <a:off x="7360737" y="5354955"/>
             <a:ext cx="2072579" cy="274320"/>
           </a:xfrm>
           <a:prstGeom prst="rect">
@@ -5055,14 +5055,14 @@
                   <a:srgbClr val="404040"/>
                 </a:solidFill>
               </a:rPr>
-              <a:t>富士通</a:t>
+              <a:t>東京ガス</a:t>
             </a:r>
           </a:p>
         </p:txBody>
       </p:sp>
       <p:pic>
         <p:nvPicPr>
-          <p:cNvPr id="70" name="Picture 69" descr="日本郵政.png"/>
+          <p:cNvPr id="70" name="Picture 69" descr="株式会社NTTドコモ.png"/>
           <p:cNvPicPr>
             <a:picLocks noChangeAspect="1"/>
           </p:cNvPicPr>
@@ -5076,8 +5076,8 @@
         </p:blipFill>
         <p:spPr>
           <a:xfrm>
-            <a:off x="10612410" y="4572000"/>
-            <a:ext cx="171591" cy="182880"/>
+            <a:off x="10440431" y="5086350"/>
+            <a:ext cx="515548" cy="268605"/>
           </a:xfrm>
           <a:prstGeom prst="rect">
             <a:avLst/>
@@ -5092,7 +5092,7 @@
         </p:nvSpPr>
         <p:spPr>
           <a:xfrm>
-            <a:off x="9661916" y="4754880"/>
+            <a:off x="9661916" y="5354955"/>
             <a:ext cx="2072579" cy="274320"/>
           </a:xfrm>
           <a:prstGeom prst="rect">
@@ -5113,14 +5113,14 @@
                   <a:srgbClr val="404040"/>
                 </a:solidFill>
               </a:rPr>
-              <a:t>日本郵政</a:t>
+              <a:t>株式会社NTTドコモ</a:t>
             </a:r>
           </a:p>
         </p:txBody>
       </p:sp>
       <p:pic>
         <p:nvPicPr>
-          <p:cNvPr id="72" name="Picture 71" descr="日立製作所.png"/>
+          <p:cNvPr id="72" name="Picture 71" descr="楽天グループ.png"/>
           <p:cNvPicPr>
             <a:picLocks noChangeAspect="1"/>
           </p:cNvPicPr>
@@ -5134,8 +5134,8 @@
         </p:blipFill>
         <p:spPr>
           <a:xfrm>
-            <a:off x="1015006" y="5257800"/>
-            <a:ext cx="956966" cy="182880"/>
+            <a:off x="1084692" y="5857875"/>
+            <a:ext cx="817595" cy="268605"/>
           </a:xfrm>
           <a:prstGeom prst="rect">
             <a:avLst/>
@@ -5150,7 +5150,7 @@
         </p:nvSpPr>
         <p:spPr>
           <a:xfrm>
-            <a:off x="457200" y="5440680"/>
+            <a:off x="457200" y="6126480"/>
             <a:ext cx="2072579" cy="274320"/>
           </a:xfrm>
           <a:prstGeom prst="rect">
@@ -5171,14 +5171,14 @@
                   <a:srgbClr val="404040"/>
                 </a:solidFill>
               </a:rPr>
-              <a:t>日立製作所</a:t>
+              <a:t>楽天グループ</a:t>
             </a:r>
           </a:p>
         </p:txBody>
       </p:sp>
       <p:pic>
         <p:nvPicPr>
-          <p:cNvPr id="74" name="Picture 73" descr="東京ガス.png"/>
+          <p:cNvPr id="74" name="Picture 73" descr="花王.png"/>
           <p:cNvPicPr>
             <a:picLocks noChangeAspect="1"/>
           </p:cNvPicPr>
@@ -5192,8 +5192,8 @@
         </p:blipFill>
         <p:spPr>
           <a:xfrm>
-            <a:off x="3356518" y="5257800"/>
-            <a:ext cx="876300" cy="182880"/>
+            <a:off x="3557872" y="5857875"/>
+            <a:ext cx="473593" cy="268605"/>
           </a:xfrm>
           <a:prstGeom prst="rect">
             <a:avLst/>
@@ -5208,7 +5208,7 @@
         </p:nvSpPr>
         <p:spPr>
           <a:xfrm>
-            <a:off x="2758379" y="5440680"/>
+            <a:off x="2758379" y="6126480"/>
             <a:ext cx="2072579" cy="274320"/>
           </a:xfrm>
           <a:prstGeom prst="rect">
@@ -5229,14 +5229,14 @@
                   <a:srgbClr val="404040"/>
                 </a:solidFill>
               </a:rPr>
-              <a:t>東京ガス</a:t>
+              <a:t>花王</a:t>
             </a:r>
           </a:p>
         </p:txBody>
       </p:sp>
       <p:pic>
         <p:nvPicPr>
-          <p:cNvPr id="76" name="Picture 75" descr="株式会社NTTドコモ.png"/>
+          <p:cNvPr id="76" name="Picture 75" descr="資生堂.png"/>
           <p:cNvPicPr>
             <a:picLocks noChangeAspect="1"/>
           </p:cNvPicPr>
@@ -5250,8 +5250,8 @@
         </p:blipFill>
         <p:spPr>
           <a:xfrm>
-            <a:off x="5920342" y="5257800"/>
-            <a:ext cx="351011" cy="182880"/>
+            <a:off x="5424990" y="5857875"/>
+            <a:ext cx="1341714" cy="268605"/>
           </a:xfrm>
           <a:prstGeom prst="rect">
             <a:avLst/>
@@ -5266,7 +5266,7 @@
         </p:nvSpPr>
         <p:spPr>
           <a:xfrm>
-            <a:off x="5059558" y="5440680"/>
+            <a:off x="5059558" y="6126480"/>
             <a:ext cx="2072579" cy="274320"/>
           </a:xfrm>
           <a:prstGeom prst="rect">
@@ -5287,14 +5287,14 @@
                   <a:srgbClr val="404040"/>
                 </a:solidFill>
               </a:rPr>
-              <a:t>株式会社NTTドコモ</a:t>
+              <a:t>資生堂</a:t>
             </a:r>
           </a:p>
         </p:txBody>
       </p:sp>
       <p:pic>
         <p:nvPicPr>
-          <p:cNvPr id="78" name="Picture 77" descr="楽天グループ.png"/>
+          <p:cNvPr id="78" name="Picture 77" descr="野村ホールディングス.png"/>
           <p:cNvPicPr>
             <a:picLocks noChangeAspect="1"/>
           </p:cNvPicPr>
@@ -5308,8 +5308,8 @@
         </p:blipFill>
         <p:spPr>
           <a:xfrm>
-            <a:off x="8118696" y="5257800"/>
-            <a:ext cx="556661" cy="182880"/>
+            <a:off x="7751366" y="5857875"/>
+            <a:ext cx="1291321" cy="268605"/>
           </a:xfrm>
           <a:prstGeom prst="rect">
             <a:avLst/>
@@ -5324,181 +5324,7 @@
         </p:nvSpPr>
         <p:spPr>
           <a:xfrm>
-            <a:off x="7360737" y="5440680"/>
-            <a:ext cx="2072579" cy="274320"/>
-          </a:xfrm>
-          <a:prstGeom prst="rect">
-            <a:avLst/>
-          </a:prstGeom>
-          <a:noFill/>
-        </p:spPr>
-        <p:txBody>
-          <a:bodyPr wrap="square">
-            <a:spAutoFit/>
-          </a:bodyPr>
-          <a:lstStyle/>
-          <a:p>
-            <a:pPr algn="ctr"/>
-            <a:r>
-              <a:rPr sz="1000">
-                <a:solidFill>
-                  <a:srgbClr val="404040"/>
-                </a:solidFill>
-              </a:rPr>
-              <a:t>楽天グループ</a:t>
-            </a:r>
-          </a:p>
-        </p:txBody>
-      </p:sp>
-      <p:pic>
-        <p:nvPicPr>
-          <p:cNvPr id="80" name="Picture 79" descr="花王.png"/>
-          <p:cNvPicPr>
-            <a:picLocks noChangeAspect="1"/>
-          </p:cNvPicPr>
-          <p:nvPr/>
-        </p:nvPicPr>
-        <p:blipFill>
-          <a:blip r:embed="rId41"/>
-          <a:stretch>
-            <a:fillRect/>
-          </a:stretch>
-        </p:blipFill>
-        <p:spPr>
-          <a:xfrm>
-            <a:off x="10536982" y="5257800"/>
-            <a:ext cx="322446" cy="182880"/>
-          </a:xfrm>
-          <a:prstGeom prst="rect">
-            <a:avLst/>
-          </a:prstGeom>
-        </p:spPr>
-      </p:pic>
-      <p:sp>
-        <p:nvSpPr>
-          <p:cNvPr id="81" name="TextBox 80"/>
-          <p:cNvSpPr txBox="1"/>
-          <p:nvPr/>
-        </p:nvSpPr>
-        <p:spPr>
-          <a:xfrm>
-            <a:off x="9661916" y="5440680"/>
-            <a:ext cx="2072579" cy="274320"/>
-          </a:xfrm>
-          <a:prstGeom prst="rect">
-            <a:avLst/>
-          </a:prstGeom>
-          <a:noFill/>
-        </p:spPr>
-        <p:txBody>
-          <a:bodyPr wrap="square">
-            <a:spAutoFit/>
-          </a:bodyPr>
-          <a:lstStyle/>
-          <a:p>
-            <a:pPr algn="ctr"/>
-            <a:r>
-              <a:rPr sz="1000">
-                <a:solidFill>
-                  <a:srgbClr val="404040"/>
-                </a:solidFill>
-              </a:rPr>
-              <a:t>花王</a:t>
-            </a:r>
-          </a:p>
-        </p:txBody>
-      </p:sp>
-      <p:pic>
-        <p:nvPicPr>
-          <p:cNvPr id="82" name="Picture 81" descr="資生堂.png"/>
-          <p:cNvPicPr>
-            <a:picLocks noChangeAspect="1"/>
-          </p:cNvPicPr>
-          <p:nvPr/>
-        </p:nvPicPr>
-        <p:blipFill>
-          <a:blip r:embed="rId42"/>
-          <a:stretch>
-            <a:fillRect/>
-          </a:stretch>
-        </p:blipFill>
-        <p:spPr>
-          <a:xfrm>
-            <a:off x="1036736" y="5943600"/>
-            <a:ext cx="913507" cy="182880"/>
-          </a:xfrm>
-          <a:prstGeom prst="rect">
-            <a:avLst/>
-          </a:prstGeom>
-        </p:spPr>
-      </p:pic>
-      <p:sp>
-        <p:nvSpPr>
-          <p:cNvPr id="83" name="TextBox 82"/>
-          <p:cNvSpPr txBox="1"/>
-          <p:nvPr/>
-        </p:nvSpPr>
-        <p:spPr>
-          <a:xfrm>
-            <a:off x="457200" y="6126480"/>
-            <a:ext cx="2072579" cy="274320"/>
-          </a:xfrm>
-          <a:prstGeom prst="rect">
-            <a:avLst/>
-          </a:prstGeom>
-          <a:noFill/>
-        </p:spPr>
-        <p:txBody>
-          <a:bodyPr wrap="square">
-            <a:spAutoFit/>
-          </a:bodyPr>
-          <a:lstStyle/>
-          <a:p>
-            <a:pPr algn="ctr"/>
-            <a:r>
-              <a:rPr sz="1000">
-                <a:solidFill>
-                  <a:srgbClr val="404040"/>
-                </a:solidFill>
-              </a:rPr>
-              <a:t>資生堂</a:t>
-            </a:r>
-          </a:p>
-        </p:txBody>
-      </p:sp>
-      <p:pic>
-        <p:nvPicPr>
-          <p:cNvPr id="84" name="Picture 83" descr="野村ホールディングス.png"/>
-          <p:cNvPicPr>
-            <a:picLocks noChangeAspect="1"/>
-          </p:cNvPicPr>
-          <p:nvPr/>
-        </p:nvPicPr>
-        <p:blipFill>
-          <a:blip r:embed="rId43"/>
-          <a:stretch>
-            <a:fillRect/>
-          </a:stretch>
-        </p:blipFill>
-        <p:spPr>
-          <a:xfrm>
-            <a:off x="3355070" y="5943600"/>
-            <a:ext cx="879197" cy="182880"/>
-          </a:xfrm>
-          <a:prstGeom prst="rect">
-            <a:avLst/>
-          </a:prstGeom>
-        </p:spPr>
-      </p:pic>
-      <p:sp>
-        <p:nvSpPr>
-          <p:cNvPr id="85" name="TextBox 84"/>
-          <p:cNvSpPr txBox="1"/>
-          <p:nvPr/>
-        </p:nvSpPr>
-        <p:spPr>
-          <a:xfrm>
-            <a:off x="2758379" y="6126480"/>
+            <a:off x="7360737" y="6126480"/>
             <a:ext cx="2072579" cy="274320"/>
           </a:xfrm>
           <a:prstGeom prst="rect">

--- a/docs/logos.pptx
+++ b/docs/logos.pptx
@@ -5062,7 +5062,7 @@
       </p:sp>
       <p:pic>
         <p:nvPicPr>
-          <p:cNvPr id="70" name="Picture 69" descr="株式会社NTTドコモ.png"/>
+          <p:cNvPr id="70" name="Picture 69" descr="楽天グループ.png"/>
           <p:cNvPicPr>
             <a:picLocks noChangeAspect="1"/>
           </p:cNvPicPr>
@@ -5076,8 +5076,8 @@
         </p:blipFill>
         <p:spPr>
           <a:xfrm>
-            <a:off x="10440431" y="5086350"/>
-            <a:ext cx="515548" cy="268605"/>
+            <a:off x="10289408" y="5086350"/>
+            <a:ext cx="817595" cy="268605"/>
           </a:xfrm>
           <a:prstGeom prst="rect">
             <a:avLst/>
@@ -5113,14 +5113,14 @@
                   <a:srgbClr val="404040"/>
                 </a:solidFill>
               </a:rPr>
-              <a:t>株式会社NTTドコモ</a:t>
+              <a:t>楽天グループ</a:t>
             </a:r>
           </a:p>
         </p:txBody>
       </p:sp>
       <p:pic>
         <p:nvPicPr>
-          <p:cNvPr id="72" name="Picture 71" descr="楽天グループ.png"/>
+          <p:cNvPr id="72" name="Picture 71" descr="花王.png"/>
           <p:cNvPicPr>
             <a:picLocks noChangeAspect="1"/>
           </p:cNvPicPr>
@@ -5134,8 +5134,8 @@
         </p:blipFill>
         <p:spPr>
           <a:xfrm>
-            <a:off x="1084692" y="5857875"/>
-            <a:ext cx="817595" cy="268605"/>
+            <a:off x="1256693" y="5857875"/>
+            <a:ext cx="473593" cy="268605"/>
           </a:xfrm>
           <a:prstGeom prst="rect">
             <a:avLst/>
@@ -5171,14 +5171,14 @@
                   <a:srgbClr val="404040"/>
                 </a:solidFill>
               </a:rPr>
-              <a:t>楽天グループ</a:t>
+              <a:t>花王</a:t>
             </a:r>
           </a:p>
         </p:txBody>
       </p:sp>
       <p:pic>
         <p:nvPicPr>
-          <p:cNvPr id="74" name="Picture 73" descr="花王.png"/>
+          <p:cNvPr id="74" name="Picture 73" descr="資生堂.png"/>
           <p:cNvPicPr>
             <a:picLocks noChangeAspect="1"/>
           </p:cNvPicPr>
@@ -5192,8 +5192,8 @@
         </p:blipFill>
         <p:spPr>
           <a:xfrm>
-            <a:off x="3557872" y="5857875"/>
-            <a:ext cx="473593" cy="268605"/>
+            <a:off x="3123811" y="5857875"/>
+            <a:ext cx="1341714" cy="268605"/>
           </a:xfrm>
           <a:prstGeom prst="rect">
             <a:avLst/>
@@ -5229,14 +5229,14 @@
                   <a:srgbClr val="404040"/>
                 </a:solidFill>
               </a:rPr>
-              <a:t>花王</a:t>
+              <a:t>資生堂</a:t>
             </a:r>
           </a:p>
         </p:txBody>
       </p:sp>
       <p:pic>
         <p:nvPicPr>
-          <p:cNvPr id="76" name="Picture 75" descr="資生堂.png"/>
+          <p:cNvPr id="76" name="Picture 75" descr="野村ホールディングス.png"/>
           <p:cNvPicPr>
             <a:picLocks noChangeAspect="1"/>
           </p:cNvPicPr>
@@ -5250,8 +5250,8 @@
         </p:blipFill>
         <p:spPr>
           <a:xfrm>
-            <a:off x="5424990" y="5857875"/>
-            <a:ext cx="1341714" cy="268605"/>
+            <a:off x="5450187" y="5857875"/>
+            <a:ext cx="1291321" cy="268605"/>
           </a:xfrm>
           <a:prstGeom prst="rect">
             <a:avLst/>
@@ -5267,64 +5267,6 @@
         <p:spPr>
           <a:xfrm>
             <a:off x="5059558" y="6126480"/>
-            <a:ext cx="2072579" cy="274320"/>
-          </a:xfrm>
-          <a:prstGeom prst="rect">
-            <a:avLst/>
-          </a:prstGeom>
-          <a:noFill/>
-        </p:spPr>
-        <p:txBody>
-          <a:bodyPr wrap="square">
-            <a:spAutoFit/>
-          </a:bodyPr>
-          <a:lstStyle/>
-          <a:p>
-            <a:pPr algn="ctr"/>
-            <a:r>
-              <a:rPr sz="1000">
-                <a:solidFill>
-                  <a:srgbClr val="404040"/>
-                </a:solidFill>
-              </a:rPr>
-              <a:t>資生堂</a:t>
-            </a:r>
-          </a:p>
-        </p:txBody>
-      </p:sp>
-      <p:pic>
-        <p:nvPicPr>
-          <p:cNvPr id="78" name="Picture 77" descr="野村ホールディングス.png"/>
-          <p:cNvPicPr>
-            <a:picLocks noChangeAspect="1"/>
-          </p:cNvPicPr>
-          <p:nvPr/>
-        </p:nvPicPr>
-        <p:blipFill>
-          <a:blip r:embed="rId40"/>
-          <a:stretch>
-            <a:fillRect/>
-          </a:stretch>
-        </p:blipFill>
-        <p:spPr>
-          <a:xfrm>
-            <a:off x="7751366" y="5857875"/>
-            <a:ext cx="1291321" cy="268605"/>
-          </a:xfrm>
-          <a:prstGeom prst="rect">
-            <a:avLst/>
-          </a:prstGeom>
-        </p:spPr>
-      </p:pic>
-      <p:sp>
-        <p:nvSpPr>
-          <p:cNvPr id="79" name="TextBox 78"/>
-          <p:cNvSpPr txBox="1"/>
-          <p:nvPr/>
-        </p:nvSpPr>
-        <p:spPr>
-          <a:xfrm>
-            <a:off x="7360737" y="6126480"/>
             <a:ext cx="2072579" cy="274320"/>
           </a:xfrm>
           <a:prstGeom prst="rect">

--- a/docs/logos.pptx
+++ b/docs/logos.pptx
@@ -3090,7 +3090,7 @@
       <p:grpSpPr/>
       <p:pic>
         <p:nvPicPr>
-          <p:cNvPr id="2" name="Picture 1" descr="JR東日本.png"/>
+          <p:cNvPr id="2" name="Picture 1" descr="KDDI.png"/>
           <p:cNvPicPr>
             <a:picLocks noChangeAspect="1"/>
           </p:cNvPicPr>
@@ -3104,8 +3104,8 @@
         </p:blipFill>
         <p:spPr>
           <a:xfrm>
-            <a:off x="1267262" y="457200"/>
-            <a:ext cx="452455" cy="268605"/>
+            <a:off x="1205698" y="457200"/>
+            <a:ext cx="575582" cy="268605"/>
           </a:xfrm>
           <a:prstGeom prst="rect">
             <a:avLst/>
@@ -3141,14 +3141,14 @@
                   <a:srgbClr val="404040"/>
                 </a:solidFill>
               </a:rPr>
-              <a:t>JR東日本</a:t>
+              <a:t>KDDI</a:t>
             </a:r>
           </a:p>
         </p:txBody>
       </p:sp>
       <p:pic>
         <p:nvPicPr>
-          <p:cNvPr id="4" name="Picture 3" descr="KDDI.png"/>
+          <p:cNvPr id="4" name="Picture 3" descr="NEC.png"/>
           <p:cNvPicPr>
             <a:picLocks noChangeAspect="1"/>
           </p:cNvPicPr>
@@ -3162,8 +3162,8 @@
         </p:blipFill>
         <p:spPr>
           <a:xfrm>
-            <a:off x="3506877" y="457200"/>
-            <a:ext cx="575582" cy="268605"/>
+            <a:off x="3339285" y="457200"/>
+            <a:ext cx="910766" cy="268605"/>
           </a:xfrm>
           <a:prstGeom prst="rect">
             <a:avLst/>
@@ -3199,14 +3199,14 @@
                   <a:srgbClr val="404040"/>
                 </a:solidFill>
               </a:rPr>
-              <a:t>KDDI</a:t>
+              <a:t>NEC</a:t>
             </a:r>
           </a:p>
         </p:txBody>
       </p:sp>
       <p:pic>
         <p:nvPicPr>
-          <p:cNvPr id="6" name="Picture 5" descr="NEC.png"/>
+          <p:cNvPr id="6" name="Picture 5" descr="NTTデータ.png"/>
           <p:cNvPicPr>
             <a:picLocks noChangeAspect="1"/>
           </p:cNvPicPr>
@@ -3220,8 +3220,8 @@
         </p:blipFill>
         <p:spPr>
           <a:xfrm>
-            <a:off x="5640464" y="457200"/>
-            <a:ext cx="910766" cy="268605"/>
+            <a:off x="5529787" y="457200"/>
+            <a:ext cx="1132120" cy="268605"/>
           </a:xfrm>
           <a:prstGeom prst="rect">
             <a:avLst/>
@@ -3257,14 +3257,14 @@
                   <a:srgbClr val="404040"/>
                 </a:solidFill>
               </a:rPr>
-              <a:t>NEC</a:t>
+              <a:t>NTTデータ</a:t>
             </a:r>
           </a:p>
         </p:txBody>
       </p:sp>
       <p:pic>
         <p:nvPicPr>
-          <p:cNvPr id="8" name="Picture 7" descr="NTTデータ.png"/>
+          <p:cNvPr id="8" name="Picture 7" descr="SyncMe.png"/>
           <p:cNvPicPr>
             <a:picLocks noChangeAspect="1"/>
           </p:cNvPicPr>
@@ -3278,8 +3278,8 @@
         </p:blipFill>
         <p:spPr>
           <a:xfrm>
-            <a:off x="7830966" y="457200"/>
-            <a:ext cx="1132120" cy="268605"/>
+            <a:off x="7841650" y="457200"/>
+            <a:ext cx="1110753" cy="268605"/>
           </a:xfrm>
           <a:prstGeom prst="rect">
             <a:avLst/>
@@ -3315,14 +3315,14 @@
                   <a:srgbClr val="404040"/>
                 </a:solidFill>
               </a:rPr>
-              <a:t>NTTデータ</a:t>
+              <a:t>SyncMe</a:t>
             </a:r>
           </a:p>
         </p:txBody>
       </p:sp>
       <p:pic>
         <p:nvPicPr>
-          <p:cNvPr id="10" name="Picture 9" descr="SyncMe.png"/>
+          <p:cNvPr id="10" name="Picture 9" descr="ahamo.png"/>
           <p:cNvPicPr>
             <a:picLocks noChangeAspect="1"/>
           </p:cNvPicPr>
@@ -3336,8 +3336,8 @@
         </p:blipFill>
         <p:spPr>
           <a:xfrm>
-            <a:off x="10142829" y="457200"/>
-            <a:ext cx="1110753" cy="268605"/>
+            <a:off x="10450951" y="457200"/>
+            <a:ext cx="494508" cy="268605"/>
           </a:xfrm>
           <a:prstGeom prst="rect">
             <a:avLst/>
@@ -3373,14 +3373,14 @@
                   <a:srgbClr val="404040"/>
                 </a:solidFill>
               </a:rPr>
-              <a:t>SyncMe</a:t>
+              <a:t>ahamo</a:t>
             </a:r>
           </a:p>
         </p:txBody>
       </p:sp>
       <p:pic>
         <p:nvPicPr>
-          <p:cNvPr id="12" name="Picture 11" descr="ahamo.png"/>
+          <p:cNvPr id="12" name="Picture 11" descr="dポイント.png"/>
           <p:cNvPicPr>
             <a:picLocks noChangeAspect="1"/>
           </p:cNvPicPr>
@@ -3394,8 +3394,8 @@
         </p:blipFill>
         <p:spPr>
           <a:xfrm>
-            <a:off x="1246235" y="1228725"/>
-            <a:ext cx="494508" cy="268605"/>
+            <a:off x="1389177" y="1228725"/>
+            <a:ext cx="208625" cy="268605"/>
           </a:xfrm>
           <a:prstGeom prst="rect">
             <a:avLst/>
@@ -3431,14 +3431,14 @@
                   <a:srgbClr val="404040"/>
                 </a:solidFill>
               </a:rPr>
-              <a:t>ahamo</a:t>
+              <a:t>dポイント</a:t>
             </a:r>
           </a:p>
         </p:txBody>
       </p:sp>
       <p:pic>
         <p:nvPicPr>
-          <p:cNvPr id="14" name="Picture 13" descr="dポイント.png"/>
+          <p:cNvPr id="14" name="Picture 13" descr="dマガジン.png"/>
           <p:cNvPicPr>
             <a:picLocks noChangeAspect="1"/>
           </p:cNvPicPr>
@@ -3452,8 +3452,8 @@
         </p:blipFill>
         <p:spPr>
           <a:xfrm>
-            <a:off x="3690356" y="1228725"/>
-            <a:ext cx="208625" cy="268605"/>
+            <a:off x="3659929" y="1228725"/>
+            <a:ext cx="269479" cy="268605"/>
           </a:xfrm>
           <a:prstGeom prst="rect">
             <a:avLst/>
@@ -3489,14 +3489,14 @@
                   <a:srgbClr val="404040"/>
                 </a:solidFill>
               </a:rPr>
-              <a:t>dポイント</a:t>
+              <a:t>dマガジン</a:t>
             </a:r>
           </a:p>
         </p:txBody>
       </p:sp>
       <p:pic>
         <p:nvPicPr>
-          <p:cNvPr id="16" name="Picture 15" descr="dマガジン.png"/>
+          <p:cNvPr id="16" name="Picture 15" descr="d払い.png"/>
           <p:cNvPicPr>
             <a:picLocks noChangeAspect="1"/>
           </p:cNvPicPr>
@@ -3510,8 +3510,8 @@
         </p:blipFill>
         <p:spPr>
           <a:xfrm>
-            <a:off x="5961108" y="1228725"/>
-            <a:ext cx="269479" cy="268605"/>
+            <a:off x="5670071" y="1228725"/>
+            <a:ext cx="851552" cy="268605"/>
           </a:xfrm>
           <a:prstGeom prst="rect">
             <a:avLst/>
@@ -3547,14 +3547,14 @@
                   <a:srgbClr val="404040"/>
                 </a:solidFill>
               </a:rPr>
-              <a:t>dマガジン</a:t>
+              <a:t>d払い</a:t>
             </a:r>
           </a:p>
         </p:txBody>
       </p:sp>
       <p:pic>
         <p:nvPicPr>
-          <p:cNvPr id="18" name="Picture 17" descr="d払い.png"/>
+          <p:cNvPr id="18" name="Picture 17" descr="アサヒグループホールディングス.png"/>
           <p:cNvPicPr>
             <a:picLocks noChangeAspect="1"/>
           </p:cNvPicPr>
@@ -3568,8 +3568,8 @@
         </p:blipFill>
         <p:spPr>
           <a:xfrm>
-            <a:off x="7971250" y="1228725"/>
-            <a:ext cx="851552" cy="268605"/>
+            <a:off x="8208066" y="1228725"/>
+            <a:ext cx="377920" cy="268605"/>
           </a:xfrm>
           <a:prstGeom prst="rect">
             <a:avLst/>
@@ -3605,14 +3605,14 @@
                   <a:srgbClr val="404040"/>
                 </a:solidFill>
               </a:rPr>
-              <a:t>d払い</a:t>
+              <a:t>アサヒグループホールディングス</a:t>
             </a:r>
           </a:p>
         </p:txBody>
       </p:sp>
       <p:pic>
         <p:nvPicPr>
-          <p:cNvPr id="20" name="Picture 19" descr="アサヒグループホールディングス.png"/>
+          <p:cNvPr id="20" name="Picture 19" descr="オリエンタルランド.png"/>
           <p:cNvPicPr>
             <a:picLocks noChangeAspect="1"/>
           </p:cNvPicPr>
@@ -3626,8 +3626,8 @@
         </p:blipFill>
         <p:spPr>
           <a:xfrm>
-            <a:off x="10509245" y="1228725"/>
-            <a:ext cx="377920" cy="268605"/>
+            <a:off x="10441810" y="1228725"/>
+            <a:ext cx="512791" cy="268605"/>
           </a:xfrm>
           <a:prstGeom prst="rect">
             <a:avLst/>
@@ -3663,14 +3663,14 @@
                   <a:srgbClr val="404040"/>
                 </a:solidFill>
               </a:rPr>
-              <a:t>アサヒグループホールディングス</a:t>
+              <a:t>オリエンタルランド</a:t>
             </a:r>
           </a:p>
         </p:txBody>
       </p:sp>
       <p:pic>
         <p:nvPicPr>
-          <p:cNvPr id="22" name="Picture 21" descr="オリエンタルランド.png"/>
+          <p:cNvPr id="22" name="Picture 21" descr="オリンパス.png"/>
           <p:cNvPicPr>
             <a:picLocks noChangeAspect="1"/>
           </p:cNvPicPr>
@@ -3684,8 +3684,8 @@
         </p:blipFill>
         <p:spPr>
           <a:xfrm>
-            <a:off x="1237094" y="2000250"/>
-            <a:ext cx="512791" cy="268605"/>
+            <a:off x="884515" y="2000250"/>
+            <a:ext cx="1217949" cy="268605"/>
           </a:xfrm>
           <a:prstGeom prst="rect">
             <a:avLst/>
@@ -3721,14 +3721,14 @@
                   <a:srgbClr val="404040"/>
                 </a:solidFill>
               </a:rPr>
-              <a:t>オリエンタルランド</a:t>
+              <a:t>オリンパス</a:t>
             </a:r>
           </a:p>
         </p:txBody>
       </p:sp>
       <p:pic>
         <p:nvPicPr>
-          <p:cNvPr id="24" name="Picture 23" descr="オリンパス.png"/>
+          <p:cNvPr id="24" name="Picture 23" descr="キーエンス.png"/>
           <p:cNvPicPr>
             <a:picLocks noChangeAspect="1"/>
           </p:cNvPicPr>
@@ -3742,8 +3742,8 @@
         </p:blipFill>
         <p:spPr>
           <a:xfrm>
-            <a:off x="3185694" y="2000250"/>
-            <a:ext cx="1217949" cy="268605"/>
+            <a:off x="3169290" y="2000250"/>
+            <a:ext cx="1250756" cy="268605"/>
           </a:xfrm>
           <a:prstGeom prst="rect">
             <a:avLst/>
@@ -3779,14 +3779,14 @@
                   <a:srgbClr val="404040"/>
                 </a:solidFill>
               </a:rPr>
-              <a:t>オリンパス</a:t>
+              <a:t>キーエンス</a:t>
             </a:r>
           </a:p>
         </p:txBody>
       </p:sp>
       <p:pic>
         <p:nvPicPr>
-          <p:cNvPr id="26" name="Picture 25" descr="キーエンス.png"/>
+          <p:cNvPr id="26" name="Picture 25" descr="コマツ.png"/>
           <p:cNvPicPr>
             <a:picLocks noChangeAspect="1"/>
           </p:cNvPicPr>
@@ -3800,8 +3800,8 @@
         </p:blipFill>
         <p:spPr>
           <a:xfrm>
-            <a:off x="5470469" y="2000250"/>
-            <a:ext cx="1250756" cy="268605"/>
+            <a:off x="5481893" y="2000250"/>
+            <a:ext cx="1227908" cy="268605"/>
           </a:xfrm>
           <a:prstGeom prst="rect">
             <a:avLst/>
@@ -3837,14 +3837,14 @@
                   <a:srgbClr val="404040"/>
                 </a:solidFill>
               </a:rPr>
-              <a:t>キーエンス</a:t>
+              <a:t>コマツ</a:t>
             </a:r>
           </a:p>
         </p:txBody>
       </p:sp>
       <p:pic>
         <p:nvPicPr>
-          <p:cNvPr id="28" name="Picture 27" descr="コマツ.png"/>
+          <p:cNvPr id="28" name="Picture 27" descr="セコム.png"/>
           <p:cNvPicPr>
             <a:picLocks noChangeAspect="1"/>
           </p:cNvPicPr>
@@ -3858,8 +3858,8 @@
         </p:blipFill>
         <p:spPr>
           <a:xfrm>
-            <a:off x="7783072" y="2000250"/>
-            <a:ext cx="1227908" cy="268605"/>
+            <a:off x="8049298" y="2000250"/>
+            <a:ext cx="695457" cy="268605"/>
           </a:xfrm>
           <a:prstGeom prst="rect">
             <a:avLst/>
@@ -3895,14 +3895,14 @@
                   <a:srgbClr val="404040"/>
                 </a:solidFill>
               </a:rPr>
-              <a:t>コマツ</a:t>
+              <a:t>セコム</a:t>
             </a:r>
           </a:p>
         </p:txBody>
       </p:sp>
       <p:pic>
         <p:nvPicPr>
-          <p:cNvPr id="30" name="Picture 29" descr="セコム.png"/>
+          <p:cNvPr id="30" name="Picture 29" descr="セブン&amp;アイ・ホールディングス.png"/>
           <p:cNvPicPr>
             <a:picLocks noChangeAspect="1"/>
           </p:cNvPicPr>
@@ -3916,8 +3916,8 @@
         </p:blipFill>
         <p:spPr>
           <a:xfrm>
-            <a:off x="10350477" y="2000250"/>
-            <a:ext cx="695457" cy="268605"/>
+            <a:off x="10549641" y="2000250"/>
+            <a:ext cx="297129" cy="268605"/>
           </a:xfrm>
           <a:prstGeom prst="rect">
             <a:avLst/>
@@ -3953,14 +3953,14 @@
                   <a:srgbClr val="404040"/>
                 </a:solidFill>
               </a:rPr>
-              <a:t>セコム</a:t>
+              <a:t>セブン&amp;アイ・ホールディングス</a:t>
             </a:r>
           </a:p>
         </p:txBody>
       </p:sp>
       <p:pic>
         <p:nvPicPr>
-          <p:cNvPr id="32" name="Picture 31" descr="セブン&amp;アイ・ホールディングス.png"/>
+          <p:cNvPr id="32" name="Picture 31" descr="ソニーグループ.png"/>
           <p:cNvPicPr>
             <a:picLocks noChangeAspect="1"/>
           </p:cNvPicPr>
@@ -3974,8 +3974,8 @@
         </p:blipFill>
         <p:spPr>
           <a:xfrm>
-            <a:off x="1344925" y="2771775"/>
-            <a:ext cx="297129" cy="268605"/>
+            <a:off x="851548" y="2771775"/>
+            <a:ext cx="1283882" cy="268605"/>
           </a:xfrm>
           <a:prstGeom prst="rect">
             <a:avLst/>
@@ -4011,14 +4011,14 @@
                   <a:srgbClr val="404040"/>
                 </a:solidFill>
               </a:rPr>
-              <a:t>セブン&amp;アイ・ホールディングス</a:t>
+              <a:t>ソニーグループ</a:t>
             </a:r>
           </a:p>
         </p:txBody>
       </p:sp>
       <p:pic>
         <p:nvPicPr>
-          <p:cNvPr id="34" name="Picture 33" descr="ソニーグループ.png"/>
+          <p:cNvPr id="34" name="Picture 33" descr="ダイキン工業.png"/>
           <p:cNvPicPr>
             <a:picLocks noChangeAspect="1"/>
           </p:cNvPicPr>
@@ -4032,8 +4032,8 @@
         </p:blipFill>
         <p:spPr>
           <a:xfrm>
-            <a:off x="3152727" y="2771775"/>
-            <a:ext cx="1283882" cy="268605"/>
+            <a:off x="3237058" y="2771775"/>
+            <a:ext cx="1115220" cy="268605"/>
           </a:xfrm>
           <a:prstGeom prst="rect">
             <a:avLst/>
@@ -4069,14 +4069,14 @@
                   <a:srgbClr val="404040"/>
                 </a:solidFill>
               </a:rPr>
-              <a:t>ソニーグループ</a:t>
+              <a:t>ダイキン工業</a:t>
             </a:r>
           </a:p>
         </p:txBody>
       </p:sp>
       <p:pic>
         <p:nvPicPr>
-          <p:cNvPr id="36" name="Picture 35" descr="ダイキン工業.png"/>
+          <p:cNvPr id="36" name="Picture 35" descr="トヨタ自動車.png"/>
           <p:cNvPicPr>
             <a:picLocks noChangeAspect="1"/>
           </p:cNvPicPr>
@@ -4090,8 +4090,8 @@
         </p:blipFill>
         <p:spPr>
           <a:xfrm>
-            <a:off x="5538237" y="2771775"/>
-            <a:ext cx="1115220" cy="268605"/>
+            <a:off x="5902517" y="2771775"/>
+            <a:ext cx="386661" cy="268605"/>
           </a:xfrm>
           <a:prstGeom prst="rect">
             <a:avLst/>
@@ -4127,14 +4127,14 @@
                   <a:srgbClr val="404040"/>
                 </a:solidFill>
               </a:rPr>
-              <a:t>ダイキン工業</a:t>
+              <a:t>トヨタ自動車</a:t>
             </a:r>
           </a:p>
         </p:txBody>
       </p:sp>
       <p:pic>
         <p:nvPicPr>
-          <p:cNvPr id="38" name="Picture 37" descr="トヨタ自動車.png"/>
+          <p:cNvPr id="38" name="Picture 37" descr="ドコモの銀行.png"/>
           <p:cNvPicPr>
             <a:picLocks noChangeAspect="1"/>
           </p:cNvPicPr>
@@ -4148,8 +4148,8 @@
         </p:blipFill>
         <p:spPr>
           <a:xfrm>
-            <a:off x="8203696" y="2771775"/>
-            <a:ext cx="386661" cy="268605"/>
+            <a:off x="7957186" y="2771775"/>
+            <a:ext cx="879681" cy="268605"/>
           </a:xfrm>
           <a:prstGeom prst="rect">
             <a:avLst/>
@@ -4185,14 +4185,14 @@
                   <a:srgbClr val="404040"/>
                 </a:solidFill>
               </a:rPr>
-              <a:t>トヨタ自動車</a:t>
+              <a:t>ドコモの銀行</a:t>
             </a:r>
           </a:p>
         </p:txBody>
       </p:sp>
       <p:pic>
         <p:nvPicPr>
-          <p:cNvPr id="40" name="Picture 39" descr="ドコモの銀行.png"/>
+          <p:cNvPr id="40" name="Picture 39" descr="ドコモ光.png"/>
           <p:cNvPicPr>
             <a:picLocks noChangeAspect="1"/>
           </p:cNvPicPr>
@@ -4206,8 +4206,8 @@
         </p:blipFill>
         <p:spPr>
           <a:xfrm>
-            <a:off x="10258365" y="2771775"/>
-            <a:ext cx="879681" cy="268605"/>
+            <a:off x="10270504" y="2771775"/>
+            <a:ext cx="855403" cy="268605"/>
           </a:xfrm>
           <a:prstGeom prst="rect">
             <a:avLst/>
@@ -4243,14 +4243,14 @@
                   <a:srgbClr val="404040"/>
                 </a:solidFill>
               </a:rPr>
-              <a:t>ドコモの銀行</a:t>
+              <a:t>ドコモ光</a:t>
             </a:r>
           </a:p>
         </p:txBody>
       </p:sp>
       <p:pic>
         <p:nvPicPr>
-          <p:cNvPr id="42" name="Picture 41" descr="ドコモ光.png"/>
+          <p:cNvPr id="42" name="Picture 41" descr="パナソニック.png"/>
           <p:cNvPicPr>
             <a:picLocks noChangeAspect="1"/>
           </p:cNvPicPr>
@@ -4264,8 +4264,8 @@
         </p:blipFill>
         <p:spPr>
           <a:xfrm>
-            <a:off x="1065788" y="3543300"/>
-            <a:ext cx="855403" cy="268605"/>
+            <a:off x="754826" y="3543300"/>
+            <a:ext cx="1477327" cy="268605"/>
           </a:xfrm>
           <a:prstGeom prst="rect">
             <a:avLst/>
@@ -4301,14 +4301,14 @@
                   <a:srgbClr val="404040"/>
                 </a:solidFill>
               </a:rPr>
-              <a:t>ドコモ光</a:t>
+              <a:t>パナソニック</a:t>
             </a:r>
           </a:p>
         </p:txBody>
       </p:sp>
       <p:pic>
         <p:nvPicPr>
-          <p:cNvPr id="44" name="Picture 43" descr="パナソニック.png"/>
+          <p:cNvPr id="44" name="Picture 43" descr="ファーストリテイリング.png"/>
           <p:cNvPicPr>
             <a:picLocks noChangeAspect="1"/>
           </p:cNvPicPr>
@@ -4322,8 +4322,8 @@
         </p:blipFill>
         <p:spPr>
           <a:xfrm>
-            <a:off x="3056005" y="3543300"/>
-            <a:ext cx="1477327" cy="268605"/>
+            <a:off x="3527929" y="3543300"/>
+            <a:ext cx="533479" cy="268605"/>
           </a:xfrm>
           <a:prstGeom prst="rect">
             <a:avLst/>
@@ -4359,14 +4359,14 @@
                   <a:srgbClr val="404040"/>
                 </a:solidFill>
               </a:rPr>
-              <a:t>パナソニック</a:t>
+              <a:t>ファーストリテイリング</a:t>
             </a:r>
           </a:p>
         </p:txBody>
       </p:sp>
       <p:pic>
         <p:nvPicPr>
-          <p:cNvPr id="46" name="Picture 45" descr="ファーストリテイリング.png"/>
+          <p:cNvPr id="46" name="Picture 45" descr="ホンダ.png"/>
           <p:cNvPicPr>
             <a:picLocks noChangeAspect="1"/>
           </p:cNvPicPr>
@@ -4380,8 +4380,8 @@
         </p:blipFill>
         <p:spPr>
           <a:xfrm>
-            <a:off x="5829108" y="3543300"/>
-            <a:ext cx="533479" cy="268605"/>
+            <a:off x="5257615" y="3543300"/>
+            <a:ext cx="1676465" cy="268605"/>
           </a:xfrm>
           <a:prstGeom prst="rect">
             <a:avLst/>
@@ -4417,14 +4417,14 @@
                   <a:srgbClr val="404040"/>
                 </a:solidFill>
               </a:rPr>
-              <a:t>ファーストリテイリング</a:t>
+              <a:t>ホンダ</a:t>
             </a:r>
           </a:p>
         </p:txBody>
       </p:sp>
       <p:pic>
         <p:nvPicPr>
-          <p:cNvPr id="48" name="Picture 47" descr="ホンダ.png"/>
+          <p:cNvPr id="48" name="Picture 47" descr="リクルートホールディングス.png"/>
           <p:cNvPicPr>
             <a:picLocks noChangeAspect="1"/>
           </p:cNvPicPr>
@@ -4438,8 +4438,8 @@
         </p:blipFill>
         <p:spPr>
           <a:xfrm>
-            <a:off x="7558794" y="3543300"/>
-            <a:ext cx="1676465" cy="268605"/>
+            <a:off x="7935323" y="3543300"/>
+            <a:ext cx="923407" cy="268605"/>
           </a:xfrm>
           <a:prstGeom prst="rect">
             <a:avLst/>
@@ -4475,14 +4475,14 @@
                   <a:srgbClr val="404040"/>
                 </a:solidFill>
               </a:rPr>
-              <a:t>ホンダ</a:t>
+              <a:t>リクルートホールディングス</a:t>
             </a:r>
           </a:p>
         </p:txBody>
       </p:sp>
       <p:pic>
         <p:nvPicPr>
-          <p:cNvPr id="50" name="Picture 49" descr="リクルートホールディングス.png"/>
+          <p:cNvPr id="50" name="Picture 49" descr="三井住友銀行.png"/>
           <p:cNvPicPr>
             <a:picLocks noChangeAspect="1"/>
           </p:cNvPicPr>
@@ -4496,8 +4496,8 @@
         </p:blipFill>
         <p:spPr>
           <a:xfrm>
-            <a:off x="10236502" y="3543300"/>
-            <a:ext cx="923407" cy="268605"/>
+            <a:off x="10251693" y="3543300"/>
+            <a:ext cx="893024" cy="268605"/>
           </a:xfrm>
           <a:prstGeom prst="rect">
             <a:avLst/>
@@ -4533,14 +4533,14 @@
                   <a:srgbClr val="404040"/>
                 </a:solidFill>
               </a:rPr>
-              <a:t>リクルートホールディングス</a:t>
+              <a:t>三井住友銀行</a:t>
             </a:r>
           </a:p>
         </p:txBody>
       </p:sp>
       <p:pic>
         <p:nvPicPr>
-          <p:cNvPr id="52" name="Picture 51" descr="三井住友銀行.png"/>
+          <p:cNvPr id="52" name="Picture 51" descr="三菱電機.png"/>
           <p:cNvPicPr>
             <a:picLocks noChangeAspect="1"/>
           </p:cNvPicPr>
@@ -4554,8 +4554,8 @@
         </p:blipFill>
         <p:spPr>
           <a:xfrm>
-            <a:off x="1046977" y="4314825"/>
-            <a:ext cx="893024" cy="268605"/>
+            <a:off x="1080251" y="4314825"/>
+            <a:ext cx="826476" cy="268605"/>
           </a:xfrm>
           <a:prstGeom prst="rect">
             <a:avLst/>
@@ -4591,14 +4591,14 @@
                   <a:srgbClr val="404040"/>
                 </a:solidFill>
               </a:rPr>
-              <a:t>三井住友銀行</a:t>
+              <a:t>三菱電機</a:t>
             </a:r>
           </a:p>
         </p:txBody>
       </p:sp>
       <p:pic>
         <p:nvPicPr>
-          <p:cNvPr id="54" name="Picture 53" descr="三菱電機.png"/>
+          <p:cNvPr id="54" name="Picture 53" descr="任天堂.png"/>
           <p:cNvPicPr>
             <a:picLocks noChangeAspect="1"/>
           </p:cNvPicPr>
@@ -4612,8 +4612,8 @@
         </p:blipFill>
         <p:spPr>
           <a:xfrm>
-            <a:off x="3381430" y="4314825"/>
-            <a:ext cx="826476" cy="268605"/>
+            <a:off x="3306988" y="4314825"/>
+            <a:ext cx="975360" cy="268605"/>
           </a:xfrm>
           <a:prstGeom prst="rect">
             <a:avLst/>
@@ -4649,14 +4649,14 @@
                   <a:srgbClr val="404040"/>
                 </a:solidFill>
               </a:rPr>
-              <a:t>三菱電機</a:t>
+              <a:t>任天堂</a:t>
             </a:r>
           </a:p>
         </p:txBody>
       </p:sp>
       <p:pic>
         <p:nvPicPr>
-          <p:cNvPr id="56" name="Picture 55" descr="任天堂.png"/>
+          <p:cNvPr id="56" name="Picture 55" descr="味の素.png"/>
           <p:cNvPicPr>
             <a:picLocks noChangeAspect="1"/>
           </p:cNvPicPr>
@@ -4670,8 +4670,8 @@
         </p:blipFill>
         <p:spPr>
           <a:xfrm>
-            <a:off x="5608167" y="4314825"/>
-            <a:ext cx="975360" cy="268605"/>
+            <a:off x="5267649" y="4314825"/>
+            <a:ext cx="1656397" cy="268605"/>
           </a:xfrm>
           <a:prstGeom prst="rect">
             <a:avLst/>
@@ -4707,14 +4707,14 @@
                   <a:srgbClr val="404040"/>
                 </a:solidFill>
               </a:rPr>
-              <a:t>任天堂</a:t>
+              <a:t>味の素</a:t>
             </a:r>
           </a:p>
         </p:txBody>
       </p:sp>
       <p:pic>
         <p:nvPicPr>
-          <p:cNvPr id="58" name="Picture 57" descr="味の素.png"/>
+          <p:cNvPr id="58" name="Picture 57" descr="大和ハウス工業.png"/>
           <p:cNvPicPr>
             <a:picLocks noChangeAspect="1"/>
           </p:cNvPicPr>
@@ -4728,8 +4728,8 @@
         </p:blipFill>
         <p:spPr>
           <a:xfrm>
-            <a:off x="7568828" y="4314825"/>
-            <a:ext cx="1656397" cy="268605"/>
+            <a:off x="8228696" y="4314825"/>
+            <a:ext cx="336660" cy="268605"/>
           </a:xfrm>
           <a:prstGeom prst="rect">
             <a:avLst/>
@@ -4765,14 +4765,14 @@
                   <a:srgbClr val="404040"/>
                 </a:solidFill>
               </a:rPr>
-              <a:t>味の素</a:t>
+              <a:t>大和ハウス工業</a:t>
             </a:r>
           </a:p>
         </p:txBody>
       </p:sp>
       <p:pic>
         <p:nvPicPr>
-          <p:cNvPr id="60" name="Picture 59" descr="大和ハウス工業.png"/>
+          <p:cNvPr id="60" name="Picture 59" descr="富士通.png"/>
           <p:cNvPicPr>
             <a:picLocks noChangeAspect="1"/>
           </p:cNvPicPr>
@@ -4786,8 +4786,8 @@
         </p:blipFill>
         <p:spPr>
           <a:xfrm>
-            <a:off x="10529875" y="4314825"/>
-            <a:ext cx="336660" cy="268605"/>
+            <a:off x="10433223" y="4314825"/>
+            <a:ext cx="529964" cy="268605"/>
           </a:xfrm>
           <a:prstGeom prst="rect">
             <a:avLst/>
@@ -4823,14 +4823,14 @@
                   <a:srgbClr val="404040"/>
                 </a:solidFill>
               </a:rPr>
-              <a:t>大和ハウス工業</a:t>
+              <a:t>富士通</a:t>
             </a:r>
           </a:p>
         </p:txBody>
       </p:sp>
       <p:pic>
         <p:nvPicPr>
-          <p:cNvPr id="62" name="Picture 61" descr="富士通.png"/>
+          <p:cNvPr id="62" name="Picture 61" descr="日本郵政.png"/>
           <p:cNvPicPr>
             <a:picLocks noChangeAspect="1"/>
           </p:cNvPicPr>
@@ -4844,8 +4844,8 @@
         </p:blipFill>
         <p:spPr>
           <a:xfrm>
-            <a:off x="1228507" y="5086350"/>
-            <a:ext cx="529964" cy="268605"/>
+            <a:off x="1367477" y="5086350"/>
+            <a:ext cx="252024" cy="268605"/>
           </a:xfrm>
           <a:prstGeom prst="rect">
             <a:avLst/>
@@ -4881,14 +4881,14 @@
                   <a:srgbClr val="404040"/>
                 </a:solidFill>
               </a:rPr>
-              <a:t>富士通</a:t>
+              <a:t>日本郵政</a:t>
             </a:r>
           </a:p>
         </p:txBody>
       </p:sp>
       <p:pic>
         <p:nvPicPr>
-          <p:cNvPr id="64" name="Picture 63" descr="日本郵政.png"/>
+          <p:cNvPr id="64" name="Picture 63" descr="日立製作所.png"/>
           <p:cNvPicPr>
             <a:picLocks noChangeAspect="1"/>
           </p:cNvPicPr>
@@ -4902,8 +4902,8 @@
         </p:blipFill>
         <p:spPr>
           <a:xfrm>
-            <a:off x="3668656" y="5086350"/>
-            <a:ext cx="252024" cy="268605"/>
+            <a:off x="3091896" y="5086350"/>
+            <a:ext cx="1405545" cy="268605"/>
           </a:xfrm>
           <a:prstGeom prst="rect">
             <a:avLst/>
@@ -4939,14 +4939,14 @@
                   <a:srgbClr val="404040"/>
                 </a:solidFill>
               </a:rPr>
-              <a:t>日本郵政</a:t>
+              <a:t>日立製作所</a:t>
             </a:r>
           </a:p>
         </p:txBody>
       </p:sp>
       <p:pic>
         <p:nvPicPr>
-          <p:cNvPr id="66" name="Picture 65" descr="日立製作所.png"/>
+          <p:cNvPr id="66" name="Picture 65" descr="東京ガス.png"/>
           <p:cNvPicPr>
             <a:picLocks noChangeAspect="1"/>
           </p:cNvPicPr>
@@ -4960,8 +4960,8 @@
         </p:blipFill>
         <p:spPr>
           <a:xfrm>
-            <a:off x="5393075" y="5086350"/>
-            <a:ext cx="1405545" cy="268605"/>
+            <a:off x="5452315" y="5086350"/>
+            <a:ext cx="1287065" cy="268605"/>
           </a:xfrm>
           <a:prstGeom prst="rect">
             <a:avLst/>
@@ -4997,14 +4997,14 @@
                   <a:srgbClr val="404040"/>
                 </a:solidFill>
               </a:rPr>
-              <a:t>日立製作所</a:t>
+              <a:t>東京ガス</a:t>
             </a:r>
           </a:p>
         </p:txBody>
       </p:sp>
       <p:pic>
         <p:nvPicPr>
-          <p:cNvPr id="68" name="Picture 67" descr="東京ガス.png"/>
+          <p:cNvPr id="68" name="Picture 67" descr="楽天グループ.png"/>
           <p:cNvPicPr>
             <a:picLocks noChangeAspect="1"/>
           </p:cNvPicPr>
@@ -5018,8 +5018,8 @@
         </p:blipFill>
         <p:spPr>
           <a:xfrm>
-            <a:off x="7753494" y="5086350"/>
-            <a:ext cx="1287065" cy="268605"/>
+            <a:off x="7988229" y="5086350"/>
+            <a:ext cx="817595" cy="268605"/>
           </a:xfrm>
           <a:prstGeom prst="rect">
             <a:avLst/>
@@ -5055,14 +5055,14 @@
                   <a:srgbClr val="404040"/>
                 </a:solidFill>
               </a:rPr>
-              <a:t>東京ガス</a:t>
+              <a:t>楽天グループ</a:t>
             </a:r>
           </a:p>
         </p:txBody>
       </p:sp>
       <p:pic>
         <p:nvPicPr>
-          <p:cNvPr id="70" name="Picture 69" descr="楽天グループ.png"/>
+          <p:cNvPr id="70" name="Picture 69" descr="花王.png"/>
           <p:cNvPicPr>
             <a:picLocks noChangeAspect="1"/>
           </p:cNvPicPr>
@@ -5076,8 +5076,8 @@
         </p:blipFill>
         <p:spPr>
           <a:xfrm>
-            <a:off x="10289408" y="5086350"/>
-            <a:ext cx="817595" cy="268605"/>
+            <a:off x="10461409" y="5086350"/>
+            <a:ext cx="473593" cy="268605"/>
           </a:xfrm>
           <a:prstGeom prst="rect">
             <a:avLst/>
@@ -5113,14 +5113,14 @@
                   <a:srgbClr val="404040"/>
                 </a:solidFill>
               </a:rPr>
-              <a:t>楽天グループ</a:t>
+              <a:t>花王</a:t>
             </a:r>
           </a:p>
         </p:txBody>
       </p:sp>
       <p:pic>
         <p:nvPicPr>
-          <p:cNvPr id="72" name="Picture 71" descr="花王.png"/>
+          <p:cNvPr id="72" name="Picture 71" descr="資生堂.png"/>
           <p:cNvPicPr>
             <a:picLocks noChangeAspect="1"/>
           </p:cNvPicPr>
@@ -5134,8 +5134,8 @@
         </p:blipFill>
         <p:spPr>
           <a:xfrm>
-            <a:off x="1256693" y="5857875"/>
-            <a:ext cx="473593" cy="268605"/>
+            <a:off x="822632" y="5857875"/>
+            <a:ext cx="1341714" cy="268605"/>
           </a:xfrm>
           <a:prstGeom prst="rect">
             <a:avLst/>
@@ -5171,14 +5171,14 @@
                   <a:srgbClr val="404040"/>
                 </a:solidFill>
               </a:rPr>
-              <a:t>花王</a:t>
+              <a:t>資生堂</a:t>
             </a:r>
           </a:p>
         </p:txBody>
       </p:sp>
       <p:pic>
         <p:nvPicPr>
-          <p:cNvPr id="74" name="Picture 73" descr="資生堂.png"/>
+          <p:cNvPr id="74" name="Picture 73" descr="野村ホールディングス.png"/>
           <p:cNvPicPr>
             <a:picLocks noChangeAspect="1"/>
           </p:cNvPicPr>
@@ -5192,8 +5192,8 @@
         </p:blipFill>
         <p:spPr>
           <a:xfrm>
-            <a:off x="3123811" y="5857875"/>
-            <a:ext cx="1341714" cy="268605"/>
+            <a:off x="3149008" y="5857875"/>
+            <a:ext cx="1291321" cy="268605"/>
           </a:xfrm>
           <a:prstGeom prst="rect">
             <a:avLst/>
@@ -5209,64 +5209,6 @@
         <p:spPr>
           <a:xfrm>
             <a:off x="2758379" y="6126480"/>
-            <a:ext cx="2072579" cy="274320"/>
-          </a:xfrm>
-          <a:prstGeom prst="rect">
-            <a:avLst/>
-          </a:prstGeom>
-          <a:noFill/>
-        </p:spPr>
-        <p:txBody>
-          <a:bodyPr wrap="square">
-            <a:spAutoFit/>
-          </a:bodyPr>
-          <a:lstStyle/>
-          <a:p>
-            <a:pPr algn="ctr"/>
-            <a:r>
-              <a:rPr sz="1000">
-                <a:solidFill>
-                  <a:srgbClr val="404040"/>
-                </a:solidFill>
-              </a:rPr>
-              <a:t>資生堂</a:t>
-            </a:r>
-          </a:p>
-        </p:txBody>
-      </p:sp>
-      <p:pic>
-        <p:nvPicPr>
-          <p:cNvPr id="76" name="Picture 75" descr="野村ホールディングス.png"/>
-          <p:cNvPicPr>
-            <a:picLocks noChangeAspect="1"/>
-          </p:cNvPicPr>
-          <p:nvPr/>
-        </p:nvPicPr>
-        <p:blipFill>
-          <a:blip r:embed="rId39"/>
-          <a:stretch>
-            <a:fillRect/>
-          </a:stretch>
-        </p:blipFill>
-        <p:spPr>
-          <a:xfrm>
-            <a:off x="5450187" y="5857875"/>
-            <a:ext cx="1291321" cy="268605"/>
-          </a:xfrm>
-          <a:prstGeom prst="rect">
-            <a:avLst/>
-          </a:prstGeom>
-        </p:spPr>
-      </p:pic>
-      <p:sp>
-        <p:nvSpPr>
-          <p:cNvPr id="77" name="TextBox 76"/>
-          <p:cNvSpPr txBox="1"/>
-          <p:nvPr/>
-        </p:nvSpPr>
-        <p:spPr>
-          <a:xfrm>
-            <a:off x="5059558" y="6126480"/>
             <a:ext cx="2072579" cy="274320"/>
           </a:xfrm>
           <a:prstGeom prst="rect">

--- a/docs/logos.pptx
+++ b/docs/logos.pptx
@@ -3090,7 +3090,7 @@
       <p:grpSpPr/>
       <p:pic>
         <p:nvPicPr>
-          <p:cNvPr id="2" name="Picture 1" descr="KDDI.png"/>
+          <p:cNvPr id="2" name="Picture 1" descr="Chrome.png"/>
           <p:cNvPicPr>
             <a:picLocks noChangeAspect="1"/>
           </p:cNvPicPr>
@@ -3104,8 +3104,8 @@
         </p:blipFill>
         <p:spPr>
           <a:xfrm>
-            <a:off x="1205698" y="457200"/>
-            <a:ext cx="575582" cy="268605"/>
+            <a:off x="1050952" y="457200"/>
+            <a:ext cx="885075" cy="268605"/>
           </a:xfrm>
           <a:prstGeom prst="rect">
             <a:avLst/>
@@ -3141,14 +3141,14 @@
                   <a:srgbClr val="404040"/>
                 </a:solidFill>
               </a:rPr>
-              <a:t>KDDI</a:t>
+              <a:t>Chrome</a:t>
             </a:r>
           </a:p>
         </p:txBody>
       </p:sp>
       <p:pic>
         <p:nvPicPr>
-          <p:cNvPr id="4" name="Picture 3" descr="NEC.png"/>
+          <p:cNvPr id="4" name="Picture 3" descr="Gemini.png"/>
           <p:cNvPicPr>
             <a:picLocks noChangeAspect="1"/>
           </p:cNvPicPr>
@@ -3162,8 +3162,8 @@
         </p:blipFill>
         <p:spPr>
           <a:xfrm>
-            <a:off x="3339285" y="457200"/>
-            <a:ext cx="910766" cy="268605"/>
+            <a:off x="3452329" y="457200"/>
+            <a:ext cx="684679" cy="268605"/>
           </a:xfrm>
           <a:prstGeom prst="rect">
             <a:avLst/>
@@ -3199,14 +3199,14 @@
                   <a:srgbClr val="404040"/>
                 </a:solidFill>
               </a:rPr>
-              <a:t>NEC</a:t>
+              <a:t>Gemini</a:t>
             </a:r>
           </a:p>
         </p:txBody>
       </p:sp>
       <p:pic>
         <p:nvPicPr>
-          <p:cNvPr id="6" name="Picture 5" descr="NTTデータ.png"/>
+          <p:cNvPr id="6" name="Picture 5" descr="Google.png"/>
           <p:cNvPicPr>
             <a:picLocks noChangeAspect="1"/>
           </p:cNvPicPr>
@@ -3220,8 +3220,8 @@
         </p:blipFill>
         <p:spPr>
           <a:xfrm>
-            <a:off x="5529787" y="457200"/>
-            <a:ext cx="1132120" cy="268605"/>
+            <a:off x="5828475" y="457200"/>
+            <a:ext cx="534745" cy="268605"/>
           </a:xfrm>
           <a:prstGeom prst="rect">
             <a:avLst/>
@@ -3257,14 +3257,14 @@
                   <a:srgbClr val="404040"/>
                 </a:solidFill>
               </a:rPr>
-              <a:t>NTTデータ</a:t>
+              <a:t>Google</a:t>
             </a:r>
           </a:p>
         </p:txBody>
       </p:sp>
       <p:pic>
         <p:nvPicPr>
-          <p:cNvPr id="8" name="Picture 7" descr="SyncMe.png"/>
+          <p:cNvPr id="8" name="Picture 7" descr="KDDI.png"/>
           <p:cNvPicPr>
             <a:picLocks noChangeAspect="1"/>
           </p:cNvPicPr>
@@ -3278,8 +3278,8 @@
         </p:blipFill>
         <p:spPr>
           <a:xfrm>
-            <a:off x="7841650" y="457200"/>
-            <a:ext cx="1110753" cy="268605"/>
+            <a:off x="8109235" y="457200"/>
+            <a:ext cx="575582" cy="268605"/>
           </a:xfrm>
           <a:prstGeom prst="rect">
             <a:avLst/>
@@ -3315,14 +3315,14 @@
                   <a:srgbClr val="404040"/>
                 </a:solidFill>
               </a:rPr>
-              <a:t>SyncMe</a:t>
+              <a:t>KDDI</a:t>
             </a:r>
           </a:p>
         </p:txBody>
       </p:sp>
       <p:pic>
         <p:nvPicPr>
-          <p:cNvPr id="10" name="Picture 9" descr="ahamo.png"/>
+          <p:cNvPr id="10" name="Picture 9" descr="NEC.png"/>
           <p:cNvPicPr>
             <a:picLocks noChangeAspect="1"/>
           </p:cNvPicPr>
@@ -3336,8 +3336,8 @@
         </p:blipFill>
         <p:spPr>
           <a:xfrm>
-            <a:off x="10450951" y="457200"/>
-            <a:ext cx="494508" cy="268605"/>
+            <a:off x="10242822" y="457200"/>
+            <a:ext cx="910766" cy="268605"/>
           </a:xfrm>
           <a:prstGeom prst="rect">
             <a:avLst/>
@@ -3373,14 +3373,14 @@
                   <a:srgbClr val="404040"/>
                 </a:solidFill>
               </a:rPr>
-              <a:t>ahamo</a:t>
+              <a:t>NEC</a:t>
             </a:r>
           </a:p>
         </p:txBody>
       </p:sp>
       <p:pic>
         <p:nvPicPr>
-          <p:cNvPr id="12" name="Picture 11" descr="dポイント.png"/>
+          <p:cNvPr id="12" name="Picture 11" descr="NTTデータ.png"/>
           <p:cNvPicPr>
             <a:picLocks noChangeAspect="1"/>
           </p:cNvPicPr>
@@ -3394,8 +3394,8 @@
         </p:blipFill>
         <p:spPr>
           <a:xfrm>
-            <a:off x="1389177" y="1228725"/>
-            <a:ext cx="208625" cy="268605"/>
+            <a:off x="927429" y="1228725"/>
+            <a:ext cx="1132120" cy="268605"/>
           </a:xfrm>
           <a:prstGeom prst="rect">
             <a:avLst/>
@@ -3431,14 +3431,14 @@
                   <a:srgbClr val="404040"/>
                 </a:solidFill>
               </a:rPr>
-              <a:t>dポイント</a:t>
+              <a:t>NTTデータ</a:t>
             </a:r>
           </a:p>
         </p:txBody>
       </p:sp>
       <p:pic>
         <p:nvPicPr>
-          <p:cNvPr id="14" name="Picture 13" descr="dマガジン.png"/>
+          <p:cNvPr id="14" name="Picture 13" descr="SyncMe.png"/>
           <p:cNvPicPr>
             <a:picLocks noChangeAspect="1"/>
           </p:cNvPicPr>
@@ -3452,8 +3452,8 @@
         </p:blipFill>
         <p:spPr>
           <a:xfrm>
-            <a:off x="3659929" y="1228725"/>
-            <a:ext cx="269479" cy="268605"/>
+            <a:off x="3239292" y="1228725"/>
+            <a:ext cx="1110753" cy="268605"/>
           </a:xfrm>
           <a:prstGeom prst="rect">
             <a:avLst/>
@@ -3489,14 +3489,14 @@
                   <a:srgbClr val="404040"/>
                 </a:solidFill>
               </a:rPr>
-              <a:t>dマガジン</a:t>
+              <a:t>SyncMe</a:t>
             </a:r>
           </a:p>
         </p:txBody>
       </p:sp>
       <p:pic>
         <p:nvPicPr>
-          <p:cNvPr id="16" name="Picture 15" descr="d払い.png"/>
+          <p:cNvPr id="16" name="Picture 15" descr="ahamo.png"/>
           <p:cNvPicPr>
             <a:picLocks noChangeAspect="1"/>
           </p:cNvPicPr>
@@ -3510,8 +3510,8 @@
         </p:blipFill>
         <p:spPr>
           <a:xfrm>
-            <a:off x="5670071" y="1228725"/>
-            <a:ext cx="851552" cy="268605"/>
+            <a:off x="5848593" y="1228725"/>
+            <a:ext cx="494508" cy="268605"/>
           </a:xfrm>
           <a:prstGeom prst="rect">
             <a:avLst/>
@@ -3547,14 +3547,14 @@
                   <a:srgbClr val="404040"/>
                 </a:solidFill>
               </a:rPr>
-              <a:t>d払い</a:t>
+              <a:t>ahamo</a:t>
             </a:r>
           </a:p>
         </p:txBody>
       </p:sp>
       <p:pic>
         <p:nvPicPr>
-          <p:cNvPr id="18" name="Picture 17" descr="アサヒグループホールディングス.png"/>
+          <p:cNvPr id="18" name="Picture 17" descr="dポイント.png"/>
           <p:cNvPicPr>
             <a:picLocks noChangeAspect="1"/>
           </p:cNvPicPr>
@@ -3568,8 +3568,8 @@
         </p:blipFill>
         <p:spPr>
           <a:xfrm>
-            <a:off x="8208066" y="1228725"/>
-            <a:ext cx="377920" cy="268605"/>
+            <a:off x="8292714" y="1228725"/>
+            <a:ext cx="208625" cy="268605"/>
           </a:xfrm>
           <a:prstGeom prst="rect">
             <a:avLst/>
@@ -3605,14 +3605,14 @@
                   <a:srgbClr val="404040"/>
                 </a:solidFill>
               </a:rPr>
-              <a:t>アサヒグループホールディングス</a:t>
+              <a:t>dポイント</a:t>
             </a:r>
           </a:p>
         </p:txBody>
       </p:sp>
       <p:pic>
         <p:nvPicPr>
-          <p:cNvPr id="20" name="Picture 19" descr="オリエンタルランド.png"/>
+          <p:cNvPr id="20" name="Picture 19" descr="dマガジン.png"/>
           <p:cNvPicPr>
             <a:picLocks noChangeAspect="1"/>
           </p:cNvPicPr>
@@ -3626,8 +3626,8 @@
         </p:blipFill>
         <p:spPr>
           <a:xfrm>
-            <a:off x="10441810" y="1228725"/>
-            <a:ext cx="512791" cy="268605"/>
+            <a:off x="10563466" y="1228725"/>
+            <a:ext cx="269479" cy="268605"/>
           </a:xfrm>
           <a:prstGeom prst="rect">
             <a:avLst/>
@@ -3663,14 +3663,14 @@
                   <a:srgbClr val="404040"/>
                 </a:solidFill>
               </a:rPr>
-              <a:t>オリエンタルランド</a:t>
+              <a:t>dマガジン</a:t>
             </a:r>
           </a:p>
         </p:txBody>
       </p:sp>
       <p:pic>
         <p:nvPicPr>
-          <p:cNvPr id="22" name="Picture 21" descr="オリンパス.png"/>
+          <p:cNvPr id="22" name="Picture 21" descr="d払い.png"/>
           <p:cNvPicPr>
             <a:picLocks noChangeAspect="1"/>
           </p:cNvPicPr>
@@ -3684,8 +3684,8 @@
         </p:blipFill>
         <p:spPr>
           <a:xfrm>
-            <a:off x="884515" y="2000250"/>
-            <a:ext cx="1217949" cy="268605"/>
+            <a:off x="1067713" y="2000250"/>
+            <a:ext cx="851552" cy="268605"/>
           </a:xfrm>
           <a:prstGeom prst="rect">
             <a:avLst/>
@@ -3721,14 +3721,14 @@
                   <a:srgbClr val="404040"/>
                 </a:solidFill>
               </a:rPr>
-              <a:t>オリンパス</a:t>
+              <a:t>d払い</a:t>
             </a:r>
           </a:p>
         </p:txBody>
       </p:sp>
       <p:pic>
         <p:nvPicPr>
-          <p:cNvPr id="24" name="Picture 23" descr="キーエンス.png"/>
+          <p:cNvPr id="24" name="Picture 23" descr="アサヒグループホールディングス.png"/>
           <p:cNvPicPr>
             <a:picLocks noChangeAspect="1"/>
           </p:cNvPicPr>
@@ -3742,8 +3742,8 @@
         </p:blipFill>
         <p:spPr>
           <a:xfrm>
-            <a:off x="3169290" y="2000250"/>
-            <a:ext cx="1250756" cy="268605"/>
+            <a:off x="3605708" y="2000250"/>
+            <a:ext cx="377920" cy="268605"/>
           </a:xfrm>
           <a:prstGeom prst="rect">
             <a:avLst/>
@@ -3779,14 +3779,14 @@
                   <a:srgbClr val="404040"/>
                 </a:solidFill>
               </a:rPr>
-              <a:t>キーエンス</a:t>
+              <a:t>アサヒグループホールディングス</a:t>
             </a:r>
           </a:p>
         </p:txBody>
       </p:sp>
       <p:pic>
         <p:nvPicPr>
-          <p:cNvPr id="26" name="Picture 25" descr="コマツ.png"/>
+          <p:cNvPr id="26" name="Picture 25" descr="オリエンタルランド.png"/>
           <p:cNvPicPr>
             <a:picLocks noChangeAspect="1"/>
           </p:cNvPicPr>
@@ -3800,8 +3800,8 @@
         </p:blipFill>
         <p:spPr>
           <a:xfrm>
-            <a:off x="5481893" y="2000250"/>
-            <a:ext cx="1227908" cy="268605"/>
+            <a:off x="5839452" y="2000250"/>
+            <a:ext cx="512791" cy="268605"/>
           </a:xfrm>
           <a:prstGeom prst="rect">
             <a:avLst/>
@@ -3837,14 +3837,14 @@
                   <a:srgbClr val="404040"/>
                 </a:solidFill>
               </a:rPr>
-              <a:t>コマツ</a:t>
+              <a:t>オリエンタルランド</a:t>
             </a:r>
           </a:p>
         </p:txBody>
       </p:sp>
       <p:pic>
         <p:nvPicPr>
-          <p:cNvPr id="28" name="Picture 27" descr="セコム.png"/>
+          <p:cNvPr id="28" name="Picture 27" descr="オリンパス.png"/>
           <p:cNvPicPr>
             <a:picLocks noChangeAspect="1"/>
           </p:cNvPicPr>
@@ -3858,8 +3858,8 @@
         </p:blipFill>
         <p:spPr>
           <a:xfrm>
-            <a:off x="8049298" y="2000250"/>
-            <a:ext cx="695457" cy="268605"/>
+            <a:off x="7788052" y="2000250"/>
+            <a:ext cx="1217949" cy="268605"/>
           </a:xfrm>
           <a:prstGeom prst="rect">
             <a:avLst/>
@@ -3895,14 +3895,14 @@
                   <a:srgbClr val="404040"/>
                 </a:solidFill>
               </a:rPr>
-              <a:t>セコム</a:t>
+              <a:t>オリンパス</a:t>
             </a:r>
           </a:p>
         </p:txBody>
       </p:sp>
       <p:pic>
         <p:nvPicPr>
-          <p:cNvPr id="30" name="Picture 29" descr="セブン&amp;アイ・ホールディングス.png"/>
+          <p:cNvPr id="30" name="Picture 29" descr="キーエンス.png"/>
           <p:cNvPicPr>
             <a:picLocks noChangeAspect="1"/>
           </p:cNvPicPr>
@@ -3916,8 +3916,8 @@
         </p:blipFill>
         <p:spPr>
           <a:xfrm>
-            <a:off x="10549641" y="2000250"/>
-            <a:ext cx="297129" cy="268605"/>
+            <a:off x="10072827" y="2000250"/>
+            <a:ext cx="1250756" cy="268605"/>
           </a:xfrm>
           <a:prstGeom prst="rect">
             <a:avLst/>
@@ -3953,14 +3953,14 @@
                   <a:srgbClr val="404040"/>
                 </a:solidFill>
               </a:rPr>
-              <a:t>セブン&amp;アイ・ホールディングス</a:t>
+              <a:t>キーエンス</a:t>
             </a:r>
           </a:p>
         </p:txBody>
       </p:sp>
       <p:pic>
         <p:nvPicPr>
-          <p:cNvPr id="32" name="Picture 31" descr="ソニーグループ.png"/>
+          <p:cNvPr id="32" name="Picture 31" descr="コマツ.png"/>
           <p:cNvPicPr>
             <a:picLocks noChangeAspect="1"/>
           </p:cNvPicPr>
@@ -3974,8 +3974,8 @@
         </p:blipFill>
         <p:spPr>
           <a:xfrm>
-            <a:off x="851548" y="2771775"/>
-            <a:ext cx="1283882" cy="268605"/>
+            <a:off x="879535" y="2771775"/>
+            <a:ext cx="1227908" cy="268605"/>
           </a:xfrm>
           <a:prstGeom prst="rect">
             <a:avLst/>
@@ -4011,14 +4011,14 @@
                   <a:srgbClr val="404040"/>
                 </a:solidFill>
               </a:rPr>
-              <a:t>ソニーグループ</a:t>
+              <a:t>コマツ</a:t>
             </a:r>
           </a:p>
         </p:txBody>
       </p:sp>
       <p:pic>
         <p:nvPicPr>
-          <p:cNvPr id="34" name="Picture 33" descr="ダイキン工業.png"/>
+          <p:cNvPr id="34" name="Picture 33" descr="セコム.png"/>
           <p:cNvPicPr>
             <a:picLocks noChangeAspect="1"/>
           </p:cNvPicPr>
@@ -4032,8 +4032,8 @@
         </p:blipFill>
         <p:spPr>
           <a:xfrm>
-            <a:off x="3237058" y="2771775"/>
-            <a:ext cx="1115220" cy="268605"/>
+            <a:off x="3446940" y="2771775"/>
+            <a:ext cx="695457" cy="268605"/>
           </a:xfrm>
           <a:prstGeom prst="rect">
             <a:avLst/>
@@ -4069,14 +4069,14 @@
                   <a:srgbClr val="404040"/>
                 </a:solidFill>
               </a:rPr>
-              <a:t>ダイキン工業</a:t>
+              <a:t>セコム</a:t>
             </a:r>
           </a:p>
         </p:txBody>
       </p:sp>
       <p:pic>
         <p:nvPicPr>
-          <p:cNvPr id="36" name="Picture 35" descr="トヨタ自動車.png"/>
+          <p:cNvPr id="36" name="Picture 35" descr="セブン&amp;アイ・ホールディングス.png"/>
           <p:cNvPicPr>
             <a:picLocks noChangeAspect="1"/>
           </p:cNvPicPr>
@@ -4090,8 +4090,8 @@
         </p:blipFill>
         <p:spPr>
           <a:xfrm>
-            <a:off x="5902517" y="2771775"/>
-            <a:ext cx="386661" cy="268605"/>
+            <a:off x="5947283" y="2771775"/>
+            <a:ext cx="297129" cy="268605"/>
           </a:xfrm>
           <a:prstGeom prst="rect">
             <a:avLst/>
@@ -4127,14 +4127,14 @@
                   <a:srgbClr val="404040"/>
                 </a:solidFill>
               </a:rPr>
-              <a:t>トヨタ自動車</a:t>
+              <a:t>セブン&amp;アイ・ホールディングス</a:t>
             </a:r>
           </a:p>
         </p:txBody>
       </p:sp>
       <p:pic>
         <p:nvPicPr>
-          <p:cNvPr id="38" name="Picture 37" descr="ドコモの銀行.png"/>
+          <p:cNvPr id="38" name="Picture 37" descr="ソニーグループ.png"/>
           <p:cNvPicPr>
             <a:picLocks noChangeAspect="1"/>
           </p:cNvPicPr>
@@ -4148,8 +4148,8 @@
         </p:blipFill>
         <p:spPr>
           <a:xfrm>
-            <a:off x="7957186" y="2771775"/>
-            <a:ext cx="879681" cy="268605"/>
+            <a:off x="7755085" y="2771775"/>
+            <a:ext cx="1283882" cy="268605"/>
           </a:xfrm>
           <a:prstGeom prst="rect">
             <a:avLst/>
@@ -4185,14 +4185,14 @@
                   <a:srgbClr val="404040"/>
                 </a:solidFill>
               </a:rPr>
-              <a:t>ドコモの銀行</a:t>
+              <a:t>ソニーグループ</a:t>
             </a:r>
           </a:p>
         </p:txBody>
       </p:sp>
       <p:pic>
         <p:nvPicPr>
-          <p:cNvPr id="40" name="Picture 39" descr="ドコモ光.png"/>
+          <p:cNvPr id="40" name="Picture 39" descr="ダイキン工業.png"/>
           <p:cNvPicPr>
             <a:picLocks noChangeAspect="1"/>
           </p:cNvPicPr>
@@ -4206,8 +4206,8 @@
         </p:blipFill>
         <p:spPr>
           <a:xfrm>
-            <a:off x="10270504" y="2771775"/>
-            <a:ext cx="855403" cy="268605"/>
+            <a:off x="10140595" y="2771775"/>
+            <a:ext cx="1115220" cy="268605"/>
           </a:xfrm>
           <a:prstGeom prst="rect">
             <a:avLst/>
@@ -4243,14 +4243,14 @@
                   <a:srgbClr val="404040"/>
                 </a:solidFill>
               </a:rPr>
-              <a:t>ドコモ光</a:t>
+              <a:t>ダイキン工業</a:t>
             </a:r>
           </a:p>
         </p:txBody>
       </p:sp>
       <p:pic>
         <p:nvPicPr>
-          <p:cNvPr id="42" name="Picture 41" descr="パナソニック.png"/>
+          <p:cNvPr id="42" name="Picture 41" descr="トヨタ自動車.png"/>
           <p:cNvPicPr>
             <a:picLocks noChangeAspect="1"/>
           </p:cNvPicPr>
@@ -4264,8 +4264,8 @@
         </p:blipFill>
         <p:spPr>
           <a:xfrm>
-            <a:off x="754826" y="3543300"/>
-            <a:ext cx="1477327" cy="268605"/>
+            <a:off x="1300159" y="3543300"/>
+            <a:ext cx="386661" cy="268605"/>
           </a:xfrm>
           <a:prstGeom prst="rect">
             <a:avLst/>
@@ -4301,14 +4301,14 @@
                   <a:srgbClr val="404040"/>
                 </a:solidFill>
               </a:rPr>
-              <a:t>パナソニック</a:t>
+              <a:t>トヨタ自動車</a:t>
             </a:r>
           </a:p>
         </p:txBody>
       </p:sp>
       <p:pic>
         <p:nvPicPr>
-          <p:cNvPr id="44" name="Picture 43" descr="ファーストリテイリング.png"/>
+          <p:cNvPr id="44" name="Picture 43" descr="ドコモの銀行.png"/>
           <p:cNvPicPr>
             <a:picLocks noChangeAspect="1"/>
           </p:cNvPicPr>
@@ -4322,8 +4322,8 @@
         </p:blipFill>
         <p:spPr>
           <a:xfrm>
-            <a:off x="3527929" y="3543300"/>
-            <a:ext cx="533479" cy="268605"/>
+            <a:off x="3354828" y="3543300"/>
+            <a:ext cx="879681" cy="268605"/>
           </a:xfrm>
           <a:prstGeom prst="rect">
             <a:avLst/>
@@ -4359,14 +4359,14 @@
                   <a:srgbClr val="404040"/>
                 </a:solidFill>
               </a:rPr>
-              <a:t>ファーストリテイリング</a:t>
+              <a:t>ドコモの銀行</a:t>
             </a:r>
           </a:p>
         </p:txBody>
       </p:sp>
       <p:pic>
         <p:nvPicPr>
-          <p:cNvPr id="46" name="Picture 45" descr="ホンダ.png"/>
+          <p:cNvPr id="46" name="Picture 45" descr="ドコモ光.png"/>
           <p:cNvPicPr>
             <a:picLocks noChangeAspect="1"/>
           </p:cNvPicPr>
@@ -4380,8 +4380,8 @@
         </p:blipFill>
         <p:spPr>
           <a:xfrm>
-            <a:off x="5257615" y="3543300"/>
-            <a:ext cx="1676465" cy="268605"/>
+            <a:off x="5668146" y="3543300"/>
+            <a:ext cx="855403" cy="268605"/>
           </a:xfrm>
           <a:prstGeom prst="rect">
             <a:avLst/>
@@ -4417,14 +4417,14 @@
                   <a:srgbClr val="404040"/>
                 </a:solidFill>
               </a:rPr>
-              <a:t>ホンダ</a:t>
+              <a:t>ドコモ光</a:t>
             </a:r>
           </a:p>
         </p:txBody>
       </p:sp>
       <p:pic>
         <p:nvPicPr>
-          <p:cNvPr id="48" name="Picture 47" descr="リクルートホールディングス.png"/>
+          <p:cNvPr id="48" name="Picture 47" descr="パナソニック.png"/>
           <p:cNvPicPr>
             <a:picLocks noChangeAspect="1"/>
           </p:cNvPicPr>
@@ -4438,8 +4438,8 @@
         </p:blipFill>
         <p:spPr>
           <a:xfrm>
-            <a:off x="7935323" y="3543300"/>
-            <a:ext cx="923407" cy="268605"/>
+            <a:off x="7658363" y="3543300"/>
+            <a:ext cx="1477327" cy="268605"/>
           </a:xfrm>
           <a:prstGeom prst="rect">
             <a:avLst/>
@@ -4475,14 +4475,14 @@
                   <a:srgbClr val="404040"/>
                 </a:solidFill>
               </a:rPr>
-              <a:t>リクルートホールディングス</a:t>
+              <a:t>パナソニック</a:t>
             </a:r>
           </a:p>
         </p:txBody>
       </p:sp>
       <p:pic>
         <p:nvPicPr>
-          <p:cNvPr id="50" name="Picture 49" descr="三井住友銀行.png"/>
+          <p:cNvPr id="50" name="Picture 49" descr="ファーストリテイリング.png"/>
           <p:cNvPicPr>
             <a:picLocks noChangeAspect="1"/>
           </p:cNvPicPr>
@@ -4496,8 +4496,8 @@
         </p:blipFill>
         <p:spPr>
           <a:xfrm>
-            <a:off x="10251693" y="3543300"/>
-            <a:ext cx="893024" cy="268605"/>
+            <a:off x="10431466" y="3543300"/>
+            <a:ext cx="533479" cy="268605"/>
           </a:xfrm>
           <a:prstGeom prst="rect">
             <a:avLst/>
@@ -4533,14 +4533,14 @@
                   <a:srgbClr val="404040"/>
                 </a:solidFill>
               </a:rPr>
-              <a:t>三井住友銀行</a:t>
+              <a:t>ファーストリテイリング</a:t>
             </a:r>
           </a:p>
         </p:txBody>
       </p:sp>
       <p:pic>
         <p:nvPicPr>
-          <p:cNvPr id="52" name="Picture 51" descr="三菱電機.png"/>
+          <p:cNvPr id="52" name="Picture 51" descr="ホンダ.png"/>
           <p:cNvPicPr>
             <a:picLocks noChangeAspect="1"/>
           </p:cNvPicPr>
@@ -4554,8 +4554,8 @@
         </p:blipFill>
         <p:spPr>
           <a:xfrm>
-            <a:off x="1080251" y="4314825"/>
-            <a:ext cx="826476" cy="268605"/>
+            <a:off x="655257" y="4314825"/>
+            <a:ext cx="1676465" cy="268605"/>
           </a:xfrm>
           <a:prstGeom prst="rect">
             <a:avLst/>
@@ -4591,14 +4591,14 @@
                   <a:srgbClr val="404040"/>
                 </a:solidFill>
               </a:rPr>
-              <a:t>三菱電機</a:t>
+              <a:t>ホンダ</a:t>
             </a:r>
           </a:p>
         </p:txBody>
       </p:sp>
       <p:pic>
         <p:nvPicPr>
-          <p:cNvPr id="54" name="Picture 53" descr="任天堂.png"/>
+          <p:cNvPr id="54" name="Picture 53" descr="リクルートホールディングス.png"/>
           <p:cNvPicPr>
             <a:picLocks noChangeAspect="1"/>
           </p:cNvPicPr>
@@ -4612,8 +4612,8 @@
         </p:blipFill>
         <p:spPr>
           <a:xfrm>
-            <a:off x="3306988" y="4314825"/>
-            <a:ext cx="975360" cy="268605"/>
+            <a:off x="3332965" y="4314825"/>
+            <a:ext cx="923407" cy="268605"/>
           </a:xfrm>
           <a:prstGeom prst="rect">
             <a:avLst/>
@@ -4649,14 +4649,14 @@
                   <a:srgbClr val="404040"/>
                 </a:solidFill>
               </a:rPr>
-              <a:t>任天堂</a:t>
+              <a:t>リクルートホールディングス</a:t>
             </a:r>
           </a:p>
         </p:txBody>
       </p:sp>
       <p:pic>
         <p:nvPicPr>
-          <p:cNvPr id="56" name="Picture 55" descr="味の素.png"/>
+          <p:cNvPr id="56" name="Picture 55" descr="三井住友銀行.png"/>
           <p:cNvPicPr>
             <a:picLocks noChangeAspect="1"/>
           </p:cNvPicPr>
@@ -4670,8 +4670,8 @@
         </p:blipFill>
         <p:spPr>
           <a:xfrm>
-            <a:off x="5267649" y="4314825"/>
-            <a:ext cx="1656397" cy="268605"/>
+            <a:off x="5649335" y="4314825"/>
+            <a:ext cx="893024" cy="268605"/>
           </a:xfrm>
           <a:prstGeom prst="rect">
             <a:avLst/>
@@ -4707,14 +4707,14 @@
                   <a:srgbClr val="404040"/>
                 </a:solidFill>
               </a:rPr>
-              <a:t>味の素</a:t>
+              <a:t>三井住友銀行</a:t>
             </a:r>
           </a:p>
         </p:txBody>
       </p:sp>
       <p:pic>
         <p:nvPicPr>
-          <p:cNvPr id="58" name="Picture 57" descr="大和ハウス工業.png"/>
+          <p:cNvPr id="58" name="Picture 57" descr="三菱電機.png"/>
           <p:cNvPicPr>
             <a:picLocks noChangeAspect="1"/>
           </p:cNvPicPr>
@@ -4728,8 +4728,8 @@
         </p:blipFill>
         <p:spPr>
           <a:xfrm>
-            <a:off x="8228696" y="4314825"/>
-            <a:ext cx="336660" cy="268605"/>
+            <a:off x="7983788" y="4314825"/>
+            <a:ext cx="826476" cy="268605"/>
           </a:xfrm>
           <a:prstGeom prst="rect">
             <a:avLst/>
@@ -4765,14 +4765,14 @@
                   <a:srgbClr val="404040"/>
                 </a:solidFill>
               </a:rPr>
-              <a:t>大和ハウス工業</a:t>
+              <a:t>三菱電機</a:t>
             </a:r>
           </a:p>
         </p:txBody>
       </p:sp>
       <p:pic>
         <p:nvPicPr>
-          <p:cNvPr id="60" name="Picture 59" descr="富士通.png"/>
+          <p:cNvPr id="60" name="Picture 59" descr="任天堂.png"/>
           <p:cNvPicPr>
             <a:picLocks noChangeAspect="1"/>
           </p:cNvPicPr>
@@ -4786,8 +4786,8 @@
         </p:blipFill>
         <p:spPr>
           <a:xfrm>
-            <a:off x="10433223" y="4314825"/>
-            <a:ext cx="529964" cy="268605"/>
+            <a:off x="10210525" y="4314825"/>
+            <a:ext cx="975360" cy="268605"/>
           </a:xfrm>
           <a:prstGeom prst="rect">
             <a:avLst/>
@@ -4823,14 +4823,14 @@
                   <a:srgbClr val="404040"/>
                 </a:solidFill>
               </a:rPr>
-              <a:t>富士通</a:t>
+              <a:t>任天堂</a:t>
             </a:r>
           </a:p>
         </p:txBody>
       </p:sp>
       <p:pic>
         <p:nvPicPr>
-          <p:cNvPr id="62" name="Picture 61" descr="日本郵政.png"/>
+          <p:cNvPr id="62" name="Picture 61" descr="味の素.png"/>
           <p:cNvPicPr>
             <a:picLocks noChangeAspect="1"/>
           </p:cNvPicPr>
@@ -4844,8 +4844,8 @@
         </p:blipFill>
         <p:spPr>
           <a:xfrm>
-            <a:off x="1367477" y="5086350"/>
-            <a:ext cx="252024" cy="268605"/>
+            <a:off x="665291" y="5086350"/>
+            <a:ext cx="1656397" cy="268605"/>
           </a:xfrm>
           <a:prstGeom prst="rect">
             <a:avLst/>
@@ -4881,14 +4881,14 @@
                   <a:srgbClr val="404040"/>
                 </a:solidFill>
               </a:rPr>
-              <a:t>日本郵政</a:t>
+              <a:t>味の素</a:t>
             </a:r>
           </a:p>
         </p:txBody>
       </p:sp>
       <p:pic>
         <p:nvPicPr>
-          <p:cNvPr id="64" name="Picture 63" descr="日立製作所.png"/>
+          <p:cNvPr id="64" name="Picture 63" descr="大和ハウス工業.png"/>
           <p:cNvPicPr>
             <a:picLocks noChangeAspect="1"/>
           </p:cNvPicPr>
@@ -4902,8 +4902,8 @@
         </p:blipFill>
         <p:spPr>
           <a:xfrm>
-            <a:off x="3091896" y="5086350"/>
-            <a:ext cx="1405545" cy="268605"/>
+            <a:off x="3626338" y="5086350"/>
+            <a:ext cx="336660" cy="268605"/>
           </a:xfrm>
           <a:prstGeom prst="rect">
             <a:avLst/>
@@ -4939,14 +4939,14 @@
                   <a:srgbClr val="404040"/>
                 </a:solidFill>
               </a:rPr>
-              <a:t>日立製作所</a:t>
+              <a:t>大和ハウス工業</a:t>
             </a:r>
           </a:p>
         </p:txBody>
       </p:sp>
       <p:pic>
         <p:nvPicPr>
-          <p:cNvPr id="66" name="Picture 65" descr="東京ガス.png"/>
+          <p:cNvPr id="66" name="Picture 65" descr="富士通.png"/>
           <p:cNvPicPr>
             <a:picLocks noChangeAspect="1"/>
           </p:cNvPicPr>
@@ -4960,8 +4960,8 @@
         </p:blipFill>
         <p:spPr>
           <a:xfrm>
-            <a:off x="5452315" y="5086350"/>
-            <a:ext cx="1287065" cy="268605"/>
+            <a:off x="5830865" y="5086350"/>
+            <a:ext cx="529964" cy="268605"/>
           </a:xfrm>
           <a:prstGeom prst="rect">
             <a:avLst/>
@@ -4997,14 +4997,14 @@
                   <a:srgbClr val="404040"/>
                 </a:solidFill>
               </a:rPr>
-              <a:t>東京ガス</a:t>
+              <a:t>富士通</a:t>
             </a:r>
           </a:p>
         </p:txBody>
       </p:sp>
       <p:pic>
         <p:nvPicPr>
-          <p:cNvPr id="68" name="Picture 67" descr="楽天グループ.png"/>
+          <p:cNvPr id="68" name="Picture 67" descr="日本郵政.png"/>
           <p:cNvPicPr>
             <a:picLocks noChangeAspect="1"/>
           </p:cNvPicPr>
@@ -5018,8 +5018,8 @@
         </p:blipFill>
         <p:spPr>
           <a:xfrm>
-            <a:off x="7988229" y="5086350"/>
-            <a:ext cx="817595" cy="268605"/>
+            <a:off x="8271014" y="5086350"/>
+            <a:ext cx="252024" cy="268605"/>
           </a:xfrm>
           <a:prstGeom prst="rect">
             <a:avLst/>
@@ -5055,14 +5055,14 @@
                   <a:srgbClr val="404040"/>
                 </a:solidFill>
               </a:rPr>
-              <a:t>楽天グループ</a:t>
+              <a:t>日本郵政</a:t>
             </a:r>
           </a:p>
         </p:txBody>
       </p:sp>
       <p:pic>
         <p:nvPicPr>
-          <p:cNvPr id="70" name="Picture 69" descr="花王.png"/>
+          <p:cNvPr id="70" name="Picture 69" descr="日立製作所.png"/>
           <p:cNvPicPr>
             <a:picLocks noChangeAspect="1"/>
           </p:cNvPicPr>
@@ -5076,8 +5076,8 @@
         </p:blipFill>
         <p:spPr>
           <a:xfrm>
-            <a:off x="10461409" y="5086350"/>
-            <a:ext cx="473593" cy="268605"/>
+            <a:off x="9995433" y="5086350"/>
+            <a:ext cx="1405545" cy="268605"/>
           </a:xfrm>
           <a:prstGeom prst="rect">
             <a:avLst/>
@@ -5113,14 +5113,14 @@
                   <a:srgbClr val="404040"/>
                 </a:solidFill>
               </a:rPr>
-              <a:t>花王</a:t>
+              <a:t>日立製作所</a:t>
             </a:r>
           </a:p>
         </p:txBody>
       </p:sp>
       <p:pic>
         <p:nvPicPr>
-          <p:cNvPr id="72" name="Picture 71" descr="資生堂.png"/>
+          <p:cNvPr id="72" name="Picture 71" descr="東京ガス.png"/>
           <p:cNvPicPr>
             <a:picLocks noChangeAspect="1"/>
           </p:cNvPicPr>
@@ -5134,8 +5134,8 @@
         </p:blipFill>
         <p:spPr>
           <a:xfrm>
-            <a:off x="822632" y="5857875"/>
-            <a:ext cx="1341714" cy="268605"/>
+            <a:off x="849957" y="5857875"/>
+            <a:ext cx="1287065" cy="268605"/>
           </a:xfrm>
           <a:prstGeom prst="rect">
             <a:avLst/>
@@ -5171,14 +5171,14 @@
                   <a:srgbClr val="404040"/>
                 </a:solidFill>
               </a:rPr>
-              <a:t>資生堂</a:t>
+              <a:t>東京ガス</a:t>
             </a:r>
           </a:p>
         </p:txBody>
       </p:sp>
       <p:pic>
         <p:nvPicPr>
-          <p:cNvPr id="74" name="Picture 73" descr="野村ホールディングス.png"/>
+          <p:cNvPr id="74" name="Picture 73" descr="楽天グループ.png"/>
           <p:cNvPicPr>
             <a:picLocks noChangeAspect="1"/>
           </p:cNvPicPr>
@@ -5192,8 +5192,8 @@
         </p:blipFill>
         <p:spPr>
           <a:xfrm>
-            <a:off x="3149008" y="5857875"/>
-            <a:ext cx="1291321" cy="268605"/>
+            <a:off x="3385871" y="5857875"/>
+            <a:ext cx="817595" cy="268605"/>
           </a:xfrm>
           <a:prstGeom prst="rect">
             <a:avLst/>
@@ -5209,6 +5209,180 @@
         <p:spPr>
           <a:xfrm>
             <a:off x="2758379" y="6126480"/>
+            <a:ext cx="2072579" cy="274320"/>
+          </a:xfrm>
+          <a:prstGeom prst="rect">
+            <a:avLst/>
+          </a:prstGeom>
+          <a:noFill/>
+        </p:spPr>
+        <p:txBody>
+          <a:bodyPr wrap="square">
+            <a:spAutoFit/>
+          </a:bodyPr>
+          <a:lstStyle/>
+          <a:p>
+            <a:pPr algn="ctr"/>
+            <a:r>
+              <a:rPr sz="1000">
+                <a:solidFill>
+                  <a:srgbClr val="404040"/>
+                </a:solidFill>
+              </a:rPr>
+              <a:t>楽天グループ</a:t>
+            </a:r>
+          </a:p>
+        </p:txBody>
+      </p:sp>
+      <p:pic>
+        <p:nvPicPr>
+          <p:cNvPr id="76" name="Picture 75" descr="花王.png"/>
+          <p:cNvPicPr>
+            <a:picLocks noChangeAspect="1"/>
+          </p:cNvPicPr>
+          <p:nvPr/>
+        </p:nvPicPr>
+        <p:blipFill>
+          <a:blip r:embed="rId39"/>
+          <a:stretch>
+            <a:fillRect/>
+          </a:stretch>
+        </p:blipFill>
+        <p:spPr>
+          <a:xfrm>
+            <a:off x="5859051" y="5857875"/>
+            <a:ext cx="473593" cy="268605"/>
+          </a:xfrm>
+          <a:prstGeom prst="rect">
+            <a:avLst/>
+          </a:prstGeom>
+        </p:spPr>
+      </p:pic>
+      <p:sp>
+        <p:nvSpPr>
+          <p:cNvPr id="77" name="TextBox 76"/>
+          <p:cNvSpPr txBox="1"/>
+          <p:nvPr/>
+        </p:nvSpPr>
+        <p:spPr>
+          <a:xfrm>
+            <a:off x="5059558" y="6126480"/>
+            <a:ext cx="2072579" cy="274320"/>
+          </a:xfrm>
+          <a:prstGeom prst="rect">
+            <a:avLst/>
+          </a:prstGeom>
+          <a:noFill/>
+        </p:spPr>
+        <p:txBody>
+          <a:bodyPr wrap="square">
+            <a:spAutoFit/>
+          </a:bodyPr>
+          <a:lstStyle/>
+          <a:p>
+            <a:pPr algn="ctr"/>
+            <a:r>
+              <a:rPr sz="1000">
+                <a:solidFill>
+                  <a:srgbClr val="404040"/>
+                </a:solidFill>
+              </a:rPr>
+              <a:t>花王</a:t>
+            </a:r>
+          </a:p>
+        </p:txBody>
+      </p:sp>
+      <p:pic>
+        <p:nvPicPr>
+          <p:cNvPr id="78" name="Picture 77" descr="資生堂.png"/>
+          <p:cNvPicPr>
+            <a:picLocks noChangeAspect="1"/>
+          </p:cNvPicPr>
+          <p:nvPr/>
+        </p:nvPicPr>
+        <p:blipFill>
+          <a:blip r:embed="rId40"/>
+          <a:stretch>
+            <a:fillRect/>
+          </a:stretch>
+        </p:blipFill>
+        <p:spPr>
+          <a:xfrm>
+            <a:off x="7726169" y="5857875"/>
+            <a:ext cx="1341714" cy="268605"/>
+          </a:xfrm>
+          <a:prstGeom prst="rect">
+            <a:avLst/>
+          </a:prstGeom>
+        </p:spPr>
+      </p:pic>
+      <p:sp>
+        <p:nvSpPr>
+          <p:cNvPr id="79" name="TextBox 78"/>
+          <p:cNvSpPr txBox="1"/>
+          <p:nvPr/>
+        </p:nvSpPr>
+        <p:spPr>
+          <a:xfrm>
+            <a:off x="7360737" y="6126480"/>
+            <a:ext cx="2072579" cy="274320"/>
+          </a:xfrm>
+          <a:prstGeom prst="rect">
+            <a:avLst/>
+          </a:prstGeom>
+          <a:noFill/>
+        </p:spPr>
+        <p:txBody>
+          <a:bodyPr wrap="square">
+            <a:spAutoFit/>
+          </a:bodyPr>
+          <a:lstStyle/>
+          <a:p>
+            <a:pPr algn="ctr"/>
+            <a:r>
+              <a:rPr sz="1000">
+                <a:solidFill>
+                  <a:srgbClr val="404040"/>
+                </a:solidFill>
+              </a:rPr>
+              <a:t>資生堂</a:t>
+            </a:r>
+          </a:p>
+        </p:txBody>
+      </p:sp>
+      <p:pic>
+        <p:nvPicPr>
+          <p:cNvPr id="80" name="Picture 79" descr="野村ホールディングス.png"/>
+          <p:cNvPicPr>
+            <a:picLocks noChangeAspect="1"/>
+          </p:cNvPicPr>
+          <p:nvPr/>
+        </p:nvPicPr>
+        <p:blipFill>
+          <a:blip r:embed="rId41"/>
+          <a:stretch>
+            <a:fillRect/>
+          </a:stretch>
+        </p:blipFill>
+        <p:spPr>
+          <a:xfrm>
+            <a:off x="10052545" y="5857875"/>
+            <a:ext cx="1291321" cy="268605"/>
+          </a:xfrm>
+          <a:prstGeom prst="rect">
+            <a:avLst/>
+          </a:prstGeom>
+        </p:spPr>
+      </p:pic>
+      <p:sp>
+        <p:nvSpPr>
+          <p:cNvPr id="81" name="TextBox 80"/>
+          <p:cNvSpPr txBox="1"/>
+          <p:nvPr/>
+        </p:nvSpPr>
+        <p:spPr>
+          <a:xfrm>
+            <a:off x="9661916" y="6126480"/>
             <a:ext cx="2072579" cy="274320"/>
           </a:xfrm>
           <a:prstGeom prst="rect">

--- a/docs/logos.pptx
+++ b/docs/logos.pptx
@@ -3220,8 +3220,8 @@
         </p:blipFill>
         <p:spPr>
           <a:xfrm>
-            <a:off x="5828475" y="457200"/>
-            <a:ext cx="534745" cy="268605"/>
+            <a:off x="5964390" y="457200"/>
+            <a:ext cx="262914" cy="268605"/>
           </a:xfrm>
           <a:prstGeom prst="rect">
             <a:avLst/>

--- a/docs/logos.pptx
+++ b/docs/logos.pptx
@@ -3090,7 +3090,7 @@
       <p:grpSpPr/>
       <p:pic>
         <p:nvPicPr>
-          <p:cNvPr id="2" name="Picture 1" descr="Chrome.png"/>
+          <p:cNvPr id="2" name="Picture 1" descr="AWS.png"/>
           <p:cNvPicPr>
             <a:picLocks noChangeAspect="1"/>
           </p:cNvPicPr>
@@ -3104,8 +3104,8 @@
         </p:blipFill>
         <p:spPr>
           <a:xfrm>
-            <a:off x="1050952" y="457200"/>
-            <a:ext cx="885075" cy="268605"/>
+            <a:off x="1400450" y="457200"/>
+            <a:ext cx="186078" cy="114300"/>
           </a:xfrm>
           <a:prstGeom prst="rect">
             <a:avLst/>
@@ -3120,7 +3120,7 @@
         </p:nvSpPr>
         <p:spPr>
           <a:xfrm>
-            <a:off x="457200" y="725805"/>
+            <a:off x="457200" y="571500"/>
             <a:ext cx="2072579" cy="274320"/>
           </a:xfrm>
           <a:prstGeom prst="rect">
@@ -3141,14 +3141,14 @@
                   <a:srgbClr val="404040"/>
                 </a:solidFill>
               </a:rPr>
-              <a:t>Chrome</a:t>
+              <a:t>AWS</a:t>
             </a:r>
           </a:p>
         </p:txBody>
       </p:sp>
       <p:pic>
         <p:nvPicPr>
-          <p:cNvPr id="4" name="Picture 3" descr="Gemini.png"/>
+          <p:cNvPr id="4" name="Picture 3" descr="Chrome.png"/>
           <p:cNvPicPr>
             <a:picLocks noChangeAspect="1"/>
           </p:cNvPicPr>
@@ -3162,8 +3162,8 @@
         </p:blipFill>
         <p:spPr>
           <a:xfrm>
-            <a:off x="3452329" y="457200"/>
-            <a:ext cx="684679" cy="268605"/>
+            <a:off x="3606355" y="457200"/>
+            <a:ext cx="376627" cy="114300"/>
           </a:xfrm>
           <a:prstGeom prst="rect">
             <a:avLst/>
@@ -3178,7 +3178,7 @@
         </p:nvSpPr>
         <p:spPr>
           <a:xfrm>
-            <a:off x="2758379" y="725805"/>
+            <a:off x="2758379" y="571500"/>
             <a:ext cx="2072579" cy="274320"/>
           </a:xfrm>
           <a:prstGeom prst="rect">
@@ -3199,14 +3199,14 @@
                   <a:srgbClr val="404040"/>
                 </a:solidFill>
               </a:rPr>
-              <a:t>Gemini</a:t>
+              <a:t>Chrome</a:t>
             </a:r>
           </a:p>
         </p:txBody>
       </p:sp>
       <p:pic>
         <p:nvPicPr>
-          <p:cNvPr id="6" name="Picture 5" descr="Google.png"/>
+          <p:cNvPr id="6" name="Picture 5" descr="Dprime.png"/>
           <p:cNvPicPr>
             <a:picLocks noChangeAspect="1"/>
           </p:cNvPicPr>
@@ -3220,8 +3220,8 @@
         </p:blipFill>
         <p:spPr>
           <a:xfrm>
-            <a:off x="5964390" y="457200"/>
-            <a:ext cx="262914" cy="268605"/>
+            <a:off x="6049401" y="457200"/>
+            <a:ext cx="92893" cy="114300"/>
           </a:xfrm>
           <a:prstGeom prst="rect">
             <a:avLst/>
@@ -3236,7 +3236,7 @@
         </p:nvSpPr>
         <p:spPr>
           <a:xfrm>
-            <a:off x="5059558" y="725805"/>
+            <a:off x="5059558" y="571500"/>
             <a:ext cx="2072579" cy="274320"/>
           </a:xfrm>
           <a:prstGeom prst="rect">
@@ -3257,14 +3257,14 @@
                   <a:srgbClr val="404040"/>
                 </a:solidFill>
               </a:rPr>
-              <a:t>Google</a:t>
+              <a:t>Dprime</a:t>
             </a:r>
           </a:p>
         </p:txBody>
       </p:sp>
       <p:pic>
         <p:nvPicPr>
-          <p:cNvPr id="8" name="Picture 7" descr="KDDI.png"/>
+          <p:cNvPr id="8" name="Picture 7" descr="Gemini.png"/>
           <p:cNvPicPr>
             <a:picLocks noChangeAspect="1"/>
           </p:cNvPicPr>
@@ -3278,8 +3278,8 @@
         </p:blipFill>
         <p:spPr>
           <a:xfrm>
-            <a:off x="8109235" y="457200"/>
-            <a:ext cx="575582" cy="268605"/>
+            <a:off x="8251350" y="457200"/>
+            <a:ext cx="291352" cy="114299"/>
           </a:xfrm>
           <a:prstGeom prst="rect">
             <a:avLst/>
@@ -3294,7 +3294,7 @@
         </p:nvSpPr>
         <p:spPr>
           <a:xfrm>
-            <a:off x="7360737" y="725805"/>
+            <a:off x="7360737" y="571500"/>
             <a:ext cx="2072579" cy="274320"/>
           </a:xfrm>
           <a:prstGeom prst="rect">
@@ -3315,14 +3315,14 @@
                   <a:srgbClr val="404040"/>
                 </a:solidFill>
               </a:rPr>
-              <a:t>KDDI</a:t>
+              <a:t>Gemini</a:t>
             </a:r>
           </a:p>
         </p:txBody>
       </p:sp>
       <p:pic>
         <p:nvPicPr>
-          <p:cNvPr id="10" name="Picture 9" descr="NEC.png"/>
+          <p:cNvPr id="10" name="Picture 9" descr="Google.png"/>
           <p:cNvPicPr>
             <a:picLocks noChangeAspect="1"/>
           </p:cNvPicPr>
@@ -3336,8 +3336,8 @@
         </p:blipFill>
         <p:spPr>
           <a:xfrm>
-            <a:off x="10242822" y="457200"/>
-            <a:ext cx="910766" cy="268605"/>
+            <a:off x="10642266" y="457200"/>
+            <a:ext cx="111878" cy="114300"/>
           </a:xfrm>
           <a:prstGeom prst="rect">
             <a:avLst/>
@@ -3352,7 +3352,7 @@
         </p:nvSpPr>
         <p:spPr>
           <a:xfrm>
-            <a:off x="9661916" y="725805"/>
+            <a:off x="9661916" y="571500"/>
             <a:ext cx="2072579" cy="274320"/>
           </a:xfrm>
           <a:prstGeom prst="rect">
@@ -3373,14 +3373,14 @@
                   <a:srgbClr val="404040"/>
                 </a:solidFill>
               </a:rPr>
-              <a:t>NEC</a:t>
+              <a:t>Google</a:t>
             </a:r>
           </a:p>
         </p:txBody>
       </p:sp>
       <p:pic>
         <p:nvPicPr>
-          <p:cNvPr id="12" name="Picture 11" descr="NTTデータ.png"/>
+          <p:cNvPr id="12" name="Picture 11" descr="Instacart.png"/>
           <p:cNvPicPr>
             <a:picLocks noChangeAspect="1"/>
           </p:cNvPicPr>
@@ -3394,8 +3394,8 @@
         </p:blipFill>
         <p:spPr>
           <a:xfrm>
-            <a:off x="927429" y="1228725"/>
-            <a:ext cx="1132120" cy="268605"/>
+            <a:off x="1197349" y="1074420"/>
+            <a:ext cx="592281" cy="114300"/>
           </a:xfrm>
           <a:prstGeom prst="rect">
             <a:avLst/>
@@ -3410,7 +3410,7 @@
         </p:nvSpPr>
         <p:spPr>
           <a:xfrm>
-            <a:off x="457200" y="1497330"/>
+            <a:off x="457200" y="1188720"/>
             <a:ext cx="2072579" cy="274320"/>
           </a:xfrm>
           <a:prstGeom prst="rect">
@@ -3431,14 +3431,14 @@
                   <a:srgbClr val="404040"/>
                 </a:solidFill>
               </a:rPr>
-              <a:t>NTTデータ</a:t>
+              <a:t>Instacart</a:t>
             </a:r>
           </a:p>
         </p:txBody>
       </p:sp>
       <p:pic>
         <p:nvPicPr>
-          <p:cNvPr id="14" name="Picture 13" descr="SyncMe.png"/>
+          <p:cNvPr id="14" name="Picture 13" descr="KDDI.png"/>
           <p:cNvPicPr>
             <a:picLocks noChangeAspect="1"/>
           </p:cNvPicPr>
@@ -3452,8 +3452,8 @@
         </p:blipFill>
         <p:spPr>
           <a:xfrm>
-            <a:off x="3239292" y="1228725"/>
-            <a:ext cx="1110753" cy="268605"/>
+            <a:off x="3672204" y="1074420"/>
+            <a:ext cx="244928" cy="114300"/>
           </a:xfrm>
           <a:prstGeom prst="rect">
             <a:avLst/>
@@ -3468,7 +3468,7 @@
         </p:nvSpPr>
         <p:spPr>
           <a:xfrm>
-            <a:off x="2758379" y="1497330"/>
+            <a:off x="2758379" y="1188720"/>
             <a:ext cx="2072579" cy="274320"/>
           </a:xfrm>
           <a:prstGeom prst="rect">
@@ -3489,14 +3489,14 @@
                   <a:srgbClr val="404040"/>
                 </a:solidFill>
               </a:rPr>
-              <a:t>SyncMe</a:t>
+              <a:t>KDDI</a:t>
             </a:r>
           </a:p>
         </p:txBody>
       </p:sp>
       <p:pic>
         <p:nvPicPr>
-          <p:cNvPr id="16" name="Picture 15" descr="ahamo.png"/>
+          <p:cNvPr id="16" name="Picture 15" descr="KFC.png"/>
           <p:cNvPicPr>
             <a:picLocks noChangeAspect="1"/>
           </p:cNvPicPr>
@@ -3510,8 +3510,8 @@
         </p:blipFill>
         <p:spPr>
           <a:xfrm>
-            <a:off x="5848593" y="1228725"/>
-            <a:ext cx="494508" cy="268605"/>
+            <a:off x="5921036" y="1074420"/>
+            <a:ext cx="349623" cy="114300"/>
           </a:xfrm>
           <a:prstGeom prst="rect">
             <a:avLst/>
@@ -3526,7 +3526,7 @@
         </p:nvSpPr>
         <p:spPr>
           <a:xfrm>
-            <a:off x="5059558" y="1497330"/>
+            <a:off x="5059558" y="1188720"/>
             <a:ext cx="2072579" cy="274320"/>
           </a:xfrm>
           <a:prstGeom prst="rect">
@@ -3547,14 +3547,14 @@
                   <a:srgbClr val="404040"/>
                 </a:solidFill>
               </a:rPr>
-              <a:t>ahamo</a:t>
+              <a:t>KFC</a:t>
             </a:r>
           </a:p>
         </p:txBody>
       </p:sp>
       <p:pic>
         <p:nvPicPr>
-          <p:cNvPr id="18" name="Picture 17" descr="dポイント.png"/>
+          <p:cNvPr id="18" name="Picture 17" descr="LINE.png"/>
           <p:cNvPicPr>
             <a:picLocks noChangeAspect="1"/>
           </p:cNvPicPr>
@@ -3568,8 +3568,8 @@
         </p:blipFill>
         <p:spPr>
           <a:xfrm>
-            <a:off x="8292714" y="1228725"/>
-            <a:ext cx="208625" cy="268605"/>
+            <a:off x="8339821" y="1074420"/>
+            <a:ext cx="114411" cy="114300"/>
           </a:xfrm>
           <a:prstGeom prst="rect">
             <a:avLst/>
@@ -3584,7 +3584,7 @@
         </p:nvSpPr>
         <p:spPr>
           <a:xfrm>
-            <a:off x="7360737" y="1497330"/>
+            <a:off x="7360737" y="1188720"/>
             <a:ext cx="2072579" cy="274320"/>
           </a:xfrm>
           <a:prstGeom prst="rect">
@@ -3605,14 +3605,14 @@
                   <a:srgbClr val="404040"/>
                 </a:solidFill>
               </a:rPr>
-              <a:t>dポイント</a:t>
+              <a:t>LINE</a:t>
             </a:r>
           </a:p>
         </p:txBody>
       </p:sp>
       <p:pic>
         <p:nvPicPr>
-          <p:cNvPr id="20" name="Picture 19" descr="dマガジン.png"/>
+          <p:cNvPr id="20" name="Picture 19" descr="Meta.png"/>
           <p:cNvPicPr>
             <a:picLocks noChangeAspect="1"/>
           </p:cNvPicPr>
@@ -3626,8 +3626,8 @@
         </p:blipFill>
         <p:spPr>
           <a:xfrm>
-            <a:off x="10563466" y="1228725"/>
-            <a:ext cx="269479" cy="268605"/>
+            <a:off x="10455929" y="1074420"/>
+            <a:ext cx="484553" cy="114300"/>
           </a:xfrm>
           <a:prstGeom prst="rect">
             <a:avLst/>
@@ -3642,7 +3642,7 @@
         </p:nvSpPr>
         <p:spPr>
           <a:xfrm>
-            <a:off x="9661916" y="1497330"/>
+            <a:off x="9661916" y="1188720"/>
             <a:ext cx="2072579" cy="274320"/>
           </a:xfrm>
           <a:prstGeom prst="rect">
@@ -3663,14 +3663,14 @@
                   <a:srgbClr val="404040"/>
                 </a:solidFill>
               </a:rPr>
-              <a:t>dマガジン</a:t>
+              <a:t>Meta</a:t>
             </a:r>
           </a:p>
         </p:txBody>
       </p:sp>
       <p:pic>
         <p:nvPicPr>
-          <p:cNvPr id="22" name="Picture 21" descr="d払い.png"/>
+          <p:cNvPr id="22" name="Picture 21" descr="NEC.png"/>
           <p:cNvPicPr>
             <a:picLocks noChangeAspect="1"/>
           </p:cNvPicPr>
@@ -3684,8 +3684,8 @@
         </p:blipFill>
         <p:spPr>
           <a:xfrm>
-            <a:off x="1067713" y="2000250"/>
-            <a:ext cx="851552" cy="268605"/>
+            <a:off x="1299709" y="1691640"/>
+            <a:ext cx="387560" cy="114300"/>
           </a:xfrm>
           <a:prstGeom prst="rect">
             <a:avLst/>
@@ -3700,7 +3700,7 @@
         </p:nvSpPr>
         <p:spPr>
           <a:xfrm>
-            <a:off x="457200" y="2268855"/>
+            <a:off x="457200" y="1805940"/>
             <a:ext cx="2072579" cy="274320"/>
           </a:xfrm>
           <a:prstGeom prst="rect">
@@ -3721,14 +3721,14 @@
                   <a:srgbClr val="404040"/>
                 </a:solidFill>
               </a:rPr>
-              <a:t>d払い</a:t>
+              <a:t>NEC</a:t>
             </a:r>
           </a:p>
         </p:txBody>
       </p:sp>
       <p:pic>
         <p:nvPicPr>
-          <p:cNvPr id="24" name="Picture 23" descr="アサヒグループホールディングス.png"/>
+          <p:cNvPr id="24" name="Picture 23" descr="NTTデータ.png"/>
           <p:cNvPicPr>
             <a:picLocks noChangeAspect="1"/>
           </p:cNvPicPr>
@@ -3742,8 +3742,8 @@
         </p:blipFill>
         <p:spPr>
           <a:xfrm>
-            <a:off x="3605708" y="2000250"/>
-            <a:ext cx="377920" cy="268605"/>
+            <a:off x="3553792" y="1691640"/>
+            <a:ext cx="481753" cy="114300"/>
           </a:xfrm>
           <a:prstGeom prst="rect">
             <a:avLst/>
@@ -3758,7 +3758,7 @@
         </p:nvSpPr>
         <p:spPr>
           <a:xfrm>
-            <a:off x="2758379" y="2268855"/>
+            <a:off x="2758379" y="1805940"/>
             <a:ext cx="2072579" cy="274320"/>
           </a:xfrm>
           <a:prstGeom prst="rect">
@@ -3779,14 +3779,14 @@
                   <a:srgbClr val="404040"/>
                 </a:solidFill>
               </a:rPr>
-              <a:t>アサヒグループホールディングス</a:t>
+              <a:t>NTTデータ</a:t>
             </a:r>
           </a:p>
         </p:txBody>
       </p:sp>
       <p:pic>
         <p:nvPicPr>
-          <p:cNvPr id="26" name="Picture 25" descr="オリエンタルランド.png"/>
+          <p:cNvPr id="26" name="Picture 25" descr="OpenAI.png"/>
           <p:cNvPicPr>
             <a:picLocks noChangeAspect="1"/>
           </p:cNvPicPr>
@@ -3800,8 +3800,8 @@
         </p:blipFill>
         <p:spPr>
           <a:xfrm>
-            <a:off x="5839452" y="2000250"/>
-            <a:ext cx="512791" cy="268605"/>
+            <a:off x="6037929" y="1691640"/>
+            <a:ext cx="115837" cy="114300"/>
           </a:xfrm>
           <a:prstGeom prst="rect">
             <a:avLst/>
@@ -3816,7 +3816,7 @@
         </p:nvSpPr>
         <p:spPr>
           <a:xfrm>
-            <a:off x="5059558" y="2268855"/>
+            <a:off x="5059558" y="1805940"/>
             <a:ext cx="2072579" cy="274320"/>
           </a:xfrm>
           <a:prstGeom prst="rect">
@@ -3837,14 +3837,14 @@
                   <a:srgbClr val="404040"/>
                 </a:solidFill>
               </a:rPr>
-              <a:t>オリエンタルランド</a:t>
+              <a:t>OpenAI</a:t>
             </a:r>
           </a:p>
         </p:txBody>
       </p:sp>
       <p:pic>
         <p:nvPicPr>
-          <p:cNvPr id="28" name="Picture 27" descr="オリンパス.png"/>
+          <p:cNvPr id="28" name="Picture 27" descr="Qwen.png"/>
           <p:cNvPicPr>
             <a:picLocks noChangeAspect="1"/>
           </p:cNvPicPr>
@@ -3858,8 +3858,8 @@
         </p:blipFill>
         <p:spPr>
           <a:xfrm>
-            <a:off x="7788052" y="2000250"/>
-            <a:ext cx="1217949" cy="268605"/>
+            <a:off x="8227889" y="1691640"/>
+            <a:ext cx="338275" cy="114299"/>
           </a:xfrm>
           <a:prstGeom prst="rect">
             <a:avLst/>
@@ -3874,7 +3874,7 @@
         </p:nvSpPr>
         <p:spPr>
           <a:xfrm>
-            <a:off x="7360737" y="2268855"/>
+            <a:off x="7360737" y="1805940"/>
             <a:ext cx="2072579" cy="274320"/>
           </a:xfrm>
           <a:prstGeom prst="rect">
@@ -3895,14 +3895,14 @@
                   <a:srgbClr val="404040"/>
                 </a:solidFill>
               </a:rPr>
-              <a:t>オリンパス</a:t>
+              <a:t>Qwen</a:t>
             </a:r>
           </a:p>
         </p:txBody>
       </p:sp>
       <p:pic>
         <p:nvPicPr>
-          <p:cNvPr id="30" name="Picture 29" descr="キーエンス.png"/>
+          <p:cNvPr id="30" name="Picture 29" descr="Salesforce.png"/>
           <p:cNvPicPr>
             <a:picLocks noChangeAspect="1"/>
           </p:cNvPicPr>
@@ -3916,8 +3916,8 @@
         </p:blipFill>
         <p:spPr>
           <a:xfrm>
-            <a:off x="10072827" y="2000250"/>
-            <a:ext cx="1250756" cy="268605"/>
+            <a:off x="10617819" y="1691640"/>
+            <a:ext cx="160773" cy="114300"/>
           </a:xfrm>
           <a:prstGeom prst="rect">
             <a:avLst/>
@@ -3932,7 +3932,7 @@
         </p:nvSpPr>
         <p:spPr>
           <a:xfrm>
-            <a:off x="9661916" y="2268855"/>
+            <a:off x="9661916" y="1805940"/>
             <a:ext cx="2072579" cy="274320"/>
           </a:xfrm>
           <a:prstGeom prst="rect">
@@ -3953,14 +3953,14 @@
                   <a:srgbClr val="404040"/>
                 </a:solidFill>
               </a:rPr>
-              <a:t>キーエンス</a:t>
+              <a:t>Salesforce</a:t>
             </a:r>
           </a:p>
         </p:txBody>
       </p:sp>
       <p:pic>
         <p:nvPicPr>
-          <p:cNvPr id="32" name="Picture 31" descr="コマツ.png"/>
+          <p:cNvPr id="32" name="Picture 31" descr="SyncMe.png"/>
           <p:cNvPicPr>
             <a:picLocks noChangeAspect="1"/>
           </p:cNvPicPr>
@@ -3974,8 +3974,8 @@
         </p:blipFill>
         <p:spPr>
           <a:xfrm>
-            <a:off x="879535" y="2771775"/>
-            <a:ext cx="1227908" cy="268605"/>
+            <a:off x="1257159" y="2308860"/>
+            <a:ext cx="472660" cy="114300"/>
           </a:xfrm>
           <a:prstGeom prst="rect">
             <a:avLst/>
@@ -3990,7 +3990,7 @@
         </p:nvSpPr>
         <p:spPr>
           <a:xfrm>
-            <a:off x="457200" y="3040380"/>
+            <a:off x="457200" y="2423160"/>
             <a:ext cx="2072579" cy="274320"/>
           </a:xfrm>
           <a:prstGeom prst="rect">
@@ -4011,14 +4011,14 @@
                   <a:srgbClr val="404040"/>
                 </a:solidFill>
               </a:rPr>
-              <a:t>コマツ</a:t>
+              <a:t>SyncMe</a:t>
             </a:r>
           </a:p>
         </p:txBody>
       </p:sp>
       <p:pic>
         <p:nvPicPr>
-          <p:cNvPr id="34" name="Picture 33" descr="セコム.png"/>
+          <p:cNvPr id="34" name="Picture 33" descr="ahamo.png"/>
           <p:cNvPicPr>
             <a:picLocks noChangeAspect="1"/>
           </p:cNvPicPr>
@@ -4032,8 +4032,8 @@
         </p:blipFill>
         <p:spPr>
           <a:xfrm>
-            <a:off x="3446940" y="2771775"/>
-            <a:ext cx="695457" cy="268605"/>
+            <a:off x="3689454" y="2308860"/>
+            <a:ext cx="210429" cy="114300"/>
           </a:xfrm>
           <a:prstGeom prst="rect">
             <a:avLst/>
@@ -4048,7 +4048,7 @@
         </p:nvSpPr>
         <p:spPr>
           <a:xfrm>
-            <a:off x="2758379" y="3040380"/>
+            <a:off x="2758379" y="2423160"/>
             <a:ext cx="2072579" cy="274320"/>
           </a:xfrm>
           <a:prstGeom prst="rect">
@@ -4069,14 +4069,14 @@
                   <a:srgbClr val="404040"/>
                 </a:solidFill>
               </a:rPr>
-              <a:t>セコム</a:t>
+              <a:t>ahamo</a:t>
             </a:r>
           </a:p>
         </p:txBody>
       </p:sp>
       <p:pic>
         <p:nvPicPr>
-          <p:cNvPr id="36" name="Picture 35" descr="セブン&amp;アイ・ホールディングス.png"/>
+          <p:cNvPr id="36" name="Picture 35" descr="dポイント.png"/>
           <p:cNvPicPr>
             <a:picLocks noChangeAspect="1"/>
           </p:cNvPicPr>
@@ -4090,8 +4090,8 @@
         </p:blipFill>
         <p:spPr>
           <a:xfrm>
-            <a:off x="5947283" y="2771775"/>
-            <a:ext cx="297129" cy="268605"/>
+            <a:off x="6051459" y="2308860"/>
+            <a:ext cx="88776" cy="114300"/>
           </a:xfrm>
           <a:prstGeom prst="rect">
             <a:avLst/>
@@ -4106,7 +4106,7 @@
         </p:nvSpPr>
         <p:spPr>
           <a:xfrm>
-            <a:off x="5059558" y="3040380"/>
+            <a:off x="5059558" y="2423160"/>
             <a:ext cx="2072579" cy="274320"/>
           </a:xfrm>
           <a:prstGeom prst="rect">
@@ -4127,14 +4127,14 @@
                   <a:srgbClr val="404040"/>
                 </a:solidFill>
               </a:rPr>
-              <a:t>セブン&amp;アイ・ホールディングス</a:t>
+              <a:t>dポイント</a:t>
             </a:r>
           </a:p>
         </p:txBody>
       </p:sp>
       <p:pic>
         <p:nvPicPr>
-          <p:cNvPr id="38" name="Picture 37" descr="ソニーグループ.png"/>
+          <p:cNvPr id="38" name="Picture 37" descr="dマガジン.png"/>
           <p:cNvPicPr>
             <a:picLocks noChangeAspect="1"/>
           </p:cNvPicPr>
@@ -4148,8 +4148,8 @@
         </p:blipFill>
         <p:spPr>
           <a:xfrm>
-            <a:off x="7755085" y="2771775"/>
-            <a:ext cx="1283882" cy="268605"/>
+            <a:off x="8339690" y="2308860"/>
+            <a:ext cx="114672" cy="114300"/>
           </a:xfrm>
           <a:prstGeom prst="rect">
             <a:avLst/>
@@ -4164,7 +4164,7 @@
         </p:nvSpPr>
         <p:spPr>
           <a:xfrm>
-            <a:off x="7360737" y="3040380"/>
+            <a:off x="7360737" y="2423160"/>
             <a:ext cx="2072579" cy="274320"/>
           </a:xfrm>
           <a:prstGeom prst="rect">
@@ -4185,14 +4185,14 @@
                   <a:srgbClr val="404040"/>
                 </a:solidFill>
               </a:rPr>
-              <a:t>ソニーグループ</a:t>
+              <a:t>dマガジン</a:t>
             </a:r>
           </a:p>
         </p:txBody>
       </p:sp>
       <p:pic>
         <p:nvPicPr>
-          <p:cNvPr id="40" name="Picture 39" descr="ダイキン工業.png"/>
+          <p:cNvPr id="40" name="Picture 39" descr="d払い.png"/>
           <p:cNvPicPr>
             <a:picLocks noChangeAspect="1"/>
           </p:cNvPicPr>
@@ -4206,8 +4206,8 @@
         </p:blipFill>
         <p:spPr>
           <a:xfrm>
-            <a:off x="10140595" y="2771775"/>
-            <a:ext cx="1115220" cy="268605"/>
+            <a:off x="10517024" y="2308860"/>
+            <a:ext cx="362362" cy="114300"/>
           </a:xfrm>
           <a:prstGeom prst="rect">
             <a:avLst/>
@@ -4222,7 +4222,7 @@
         </p:nvSpPr>
         <p:spPr>
           <a:xfrm>
-            <a:off x="9661916" y="3040380"/>
+            <a:off x="9661916" y="2423160"/>
             <a:ext cx="2072579" cy="274320"/>
           </a:xfrm>
           <a:prstGeom prst="rect">
@@ -4243,14 +4243,14 @@
                   <a:srgbClr val="404040"/>
                 </a:solidFill>
               </a:rPr>
-              <a:t>ダイキン工業</a:t>
+              <a:t>d払い</a:t>
             </a:r>
           </a:p>
         </p:txBody>
       </p:sp>
       <p:pic>
         <p:nvPicPr>
-          <p:cNvPr id="42" name="Picture 41" descr="トヨタ自動車.png"/>
+          <p:cNvPr id="42" name="Picture 41" descr="アサヒグループホールディングス.png"/>
           <p:cNvPicPr>
             <a:picLocks noChangeAspect="1"/>
           </p:cNvPicPr>
@@ -4264,8 +4264,8 @@
         </p:blipFill>
         <p:spPr>
           <a:xfrm>
-            <a:off x="1300159" y="3543300"/>
-            <a:ext cx="386661" cy="268605"/>
+            <a:off x="1413081" y="2926080"/>
+            <a:ext cx="160817" cy="114300"/>
           </a:xfrm>
           <a:prstGeom prst="rect">
             <a:avLst/>
@@ -4280,7 +4280,7 @@
         </p:nvSpPr>
         <p:spPr>
           <a:xfrm>
-            <a:off x="457200" y="3811905"/>
+            <a:off x="457200" y="3040380"/>
             <a:ext cx="2072579" cy="274320"/>
           </a:xfrm>
           <a:prstGeom prst="rect">
@@ -4301,14 +4301,14 @@
                   <a:srgbClr val="404040"/>
                 </a:solidFill>
               </a:rPr>
-              <a:t>トヨタ自動車</a:t>
+              <a:t>アサヒグループホールディングス</a:t>
             </a:r>
           </a:p>
         </p:txBody>
       </p:sp>
       <p:pic>
         <p:nvPicPr>
-          <p:cNvPr id="44" name="Picture 43" descr="ドコモの銀行.png"/>
+          <p:cNvPr id="44" name="Picture 43" descr="オリエンタルランド.png"/>
           <p:cNvPicPr>
             <a:picLocks noChangeAspect="1"/>
           </p:cNvPicPr>
@@ -4322,8 +4322,8 @@
         </p:blipFill>
         <p:spPr>
           <a:xfrm>
-            <a:off x="3354828" y="3543300"/>
-            <a:ext cx="879681" cy="268605"/>
+            <a:off x="3685564" y="2926080"/>
+            <a:ext cx="218209" cy="114300"/>
           </a:xfrm>
           <a:prstGeom prst="rect">
             <a:avLst/>
@@ -4338,7 +4338,7 @@
         </p:nvSpPr>
         <p:spPr>
           <a:xfrm>
-            <a:off x="2758379" y="3811905"/>
+            <a:off x="2758379" y="3040380"/>
             <a:ext cx="2072579" cy="274320"/>
           </a:xfrm>
           <a:prstGeom prst="rect">
@@ -4359,14 +4359,14 @@
                   <a:srgbClr val="404040"/>
                 </a:solidFill>
               </a:rPr>
-              <a:t>ドコモの銀行</a:t>
+              <a:t>オリエンタルランド</a:t>
             </a:r>
           </a:p>
         </p:txBody>
       </p:sp>
       <p:pic>
         <p:nvPicPr>
-          <p:cNvPr id="46" name="Picture 45" descr="ドコモ光.png"/>
+          <p:cNvPr id="46" name="Picture 45" descr="オリンパス.png"/>
           <p:cNvPicPr>
             <a:picLocks noChangeAspect="1"/>
           </p:cNvPicPr>
@@ -4380,8 +4380,8 @@
         </p:blipFill>
         <p:spPr>
           <a:xfrm>
-            <a:off x="5668146" y="3543300"/>
-            <a:ext cx="855403" cy="268605"/>
+            <a:off x="5836709" y="2926080"/>
+            <a:ext cx="518276" cy="114300"/>
           </a:xfrm>
           <a:prstGeom prst="rect">
             <a:avLst/>
@@ -4396,7 +4396,7 @@
         </p:nvSpPr>
         <p:spPr>
           <a:xfrm>
-            <a:off x="5059558" y="3811905"/>
+            <a:off x="5059558" y="3040380"/>
             <a:ext cx="2072579" cy="274320"/>
           </a:xfrm>
           <a:prstGeom prst="rect">
@@ -4417,14 +4417,14 @@
                   <a:srgbClr val="404040"/>
                 </a:solidFill>
               </a:rPr>
-              <a:t>ドコモ光</a:t>
+              <a:t>オリンパス</a:t>
             </a:r>
           </a:p>
         </p:txBody>
       </p:sp>
       <p:pic>
         <p:nvPicPr>
-          <p:cNvPr id="48" name="Picture 47" descr="パナソニック.png"/>
+          <p:cNvPr id="48" name="Picture 47" descr="キーエンス.png"/>
           <p:cNvPicPr>
             <a:picLocks noChangeAspect="1"/>
           </p:cNvPicPr>
@@ -4438,8 +4438,8 @@
         </p:blipFill>
         <p:spPr>
           <a:xfrm>
-            <a:off x="7658363" y="3543300"/>
-            <a:ext cx="1477327" cy="268605"/>
+            <a:off x="8130908" y="2926080"/>
+            <a:ext cx="532236" cy="114300"/>
           </a:xfrm>
           <a:prstGeom prst="rect">
             <a:avLst/>
@@ -4454,7 +4454,7 @@
         </p:nvSpPr>
         <p:spPr>
           <a:xfrm>
-            <a:off x="7360737" y="3811905"/>
+            <a:off x="7360737" y="3040380"/>
             <a:ext cx="2072579" cy="274320"/>
           </a:xfrm>
           <a:prstGeom prst="rect">
@@ -4475,14 +4475,14 @@
                   <a:srgbClr val="404040"/>
                 </a:solidFill>
               </a:rPr>
-              <a:t>パナソニック</a:t>
+              <a:t>キーエンス</a:t>
             </a:r>
           </a:p>
         </p:txBody>
       </p:sp>
       <p:pic>
         <p:nvPicPr>
-          <p:cNvPr id="50" name="Picture 49" descr="ファーストリテイリング.png"/>
+          <p:cNvPr id="50" name="Picture 49" descr="コマツ.png"/>
           <p:cNvPicPr>
             <a:picLocks noChangeAspect="1"/>
           </p:cNvPicPr>
@@ -4496,8 +4496,8 @@
         </p:blipFill>
         <p:spPr>
           <a:xfrm>
-            <a:off x="10431466" y="3543300"/>
-            <a:ext cx="533479" cy="268605"/>
+            <a:off x="10436948" y="2926080"/>
+            <a:ext cx="522514" cy="114300"/>
           </a:xfrm>
           <a:prstGeom prst="rect">
             <a:avLst/>
@@ -4512,7 +4512,7 @@
         </p:nvSpPr>
         <p:spPr>
           <a:xfrm>
-            <a:off x="9661916" y="3811905"/>
+            <a:off x="9661916" y="3040380"/>
             <a:ext cx="2072579" cy="274320"/>
           </a:xfrm>
           <a:prstGeom prst="rect">
@@ -4533,14 +4533,14 @@
                   <a:srgbClr val="404040"/>
                 </a:solidFill>
               </a:rPr>
-              <a:t>ファーストリテイリング</a:t>
+              <a:t>コマツ</a:t>
             </a:r>
           </a:p>
         </p:txBody>
       </p:sp>
       <p:pic>
         <p:nvPicPr>
-          <p:cNvPr id="52" name="Picture 51" descr="ホンダ.png"/>
+          <p:cNvPr id="52" name="Picture 51" descr="セコム.png"/>
           <p:cNvPicPr>
             <a:picLocks noChangeAspect="1"/>
           </p:cNvPicPr>
@@ -4554,8 +4554,8 @@
         </p:blipFill>
         <p:spPr>
           <a:xfrm>
-            <a:off x="655257" y="4314825"/>
-            <a:ext cx="1676465" cy="268605"/>
+            <a:off x="1345520" y="3543300"/>
+            <a:ext cx="295939" cy="114300"/>
           </a:xfrm>
           <a:prstGeom prst="rect">
             <a:avLst/>
@@ -4570,7 +4570,7 @@
         </p:nvSpPr>
         <p:spPr>
           <a:xfrm>
-            <a:off x="457200" y="4583430"/>
+            <a:off x="457200" y="3657600"/>
             <a:ext cx="2072579" cy="274320"/>
           </a:xfrm>
           <a:prstGeom prst="rect">
@@ -4591,14 +4591,14 @@
                   <a:srgbClr val="404040"/>
                 </a:solidFill>
               </a:rPr>
-              <a:t>ホンダ</a:t>
+              <a:t>セコム</a:t>
             </a:r>
           </a:p>
         </p:txBody>
       </p:sp>
       <p:pic>
         <p:nvPicPr>
-          <p:cNvPr id="54" name="Picture 53" descr="リクルートホールディングス.png"/>
+          <p:cNvPr id="54" name="Picture 53" descr="セブン&amp;アイ・ホールディングス.png"/>
           <p:cNvPicPr>
             <a:picLocks noChangeAspect="1"/>
           </p:cNvPicPr>
@@ -4612,8 +4612,8 @@
         </p:blipFill>
         <p:spPr>
           <a:xfrm>
-            <a:off x="3332965" y="4314825"/>
-            <a:ext cx="923407" cy="268605"/>
+            <a:off x="3731449" y="3543300"/>
+            <a:ext cx="126438" cy="114300"/>
           </a:xfrm>
           <a:prstGeom prst="rect">
             <a:avLst/>
@@ -4628,7 +4628,7 @@
         </p:nvSpPr>
         <p:spPr>
           <a:xfrm>
-            <a:off x="2758379" y="4583430"/>
+            <a:off x="2758379" y="3657600"/>
             <a:ext cx="2072579" cy="274320"/>
           </a:xfrm>
           <a:prstGeom prst="rect">
@@ -4649,14 +4649,14 @@
                   <a:srgbClr val="404040"/>
                 </a:solidFill>
               </a:rPr>
-              <a:t>リクルートホールディングス</a:t>
+              <a:t>セブン&amp;アイ・ホールディングス</a:t>
             </a:r>
           </a:p>
         </p:txBody>
       </p:sp>
       <p:pic>
         <p:nvPicPr>
-          <p:cNvPr id="56" name="Picture 55" descr="三井住友銀行.png"/>
+          <p:cNvPr id="56" name="Picture 55" descr="ソニーグループ.png"/>
           <p:cNvPicPr>
             <a:picLocks noChangeAspect="1"/>
           </p:cNvPicPr>
@@ -4670,8 +4670,8 @@
         </p:blipFill>
         <p:spPr>
           <a:xfrm>
-            <a:off x="5649335" y="4314825"/>
-            <a:ext cx="893024" cy="268605"/>
+            <a:off x="5822681" y="3543300"/>
+            <a:ext cx="546333" cy="114300"/>
           </a:xfrm>
           <a:prstGeom prst="rect">
             <a:avLst/>
@@ -4686,7 +4686,7 @@
         </p:nvSpPr>
         <p:spPr>
           <a:xfrm>
-            <a:off x="5059558" y="4583430"/>
+            <a:off x="5059558" y="3657600"/>
             <a:ext cx="2072579" cy="274320"/>
           </a:xfrm>
           <a:prstGeom prst="rect">
@@ -4707,14 +4707,14 @@
                   <a:srgbClr val="404040"/>
                 </a:solidFill>
               </a:rPr>
-              <a:t>三井住友銀行</a:t>
+              <a:t>ソニーグループ</a:t>
             </a:r>
           </a:p>
         </p:txBody>
       </p:sp>
       <p:pic>
         <p:nvPicPr>
-          <p:cNvPr id="58" name="Picture 57" descr="三菱電機.png"/>
+          <p:cNvPr id="58" name="Picture 57" descr="ダイキン工業.png"/>
           <p:cNvPicPr>
             <a:picLocks noChangeAspect="1"/>
           </p:cNvPicPr>
@@ -4728,8 +4728,8 @@
         </p:blipFill>
         <p:spPr>
           <a:xfrm>
-            <a:off x="7983788" y="4314825"/>
-            <a:ext cx="826476" cy="268605"/>
+            <a:off x="8159745" y="3543300"/>
+            <a:ext cx="474562" cy="114300"/>
           </a:xfrm>
           <a:prstGeom prst="rect">
             <a:avLst/>
@@ -4744,7 +4744,7 @@
         </p:nvSpPr>
         <p:spPr>
           <a:xfrm>
-            <a:off x="7360737" y="4583430"/>
+            <a:off x="7360737" y="3657600"/>
             <a:ext cx="2072579" cy="274320"/>
           </a:xfrm>
           <a:prstGeom prst="rect">
@@ -4765,14 +4765,14 @@
                   <a:srgbClr val="404040"/>
                 </a:solidFill>
               </a:rPr>
-              <a:t>三菱電機</a:t>
+              <a:t>ダイキン工業</a:t>
             </a:r>
           </a:p>
         </p:txBody>
       </p:sp>
       <p:pic>
         <p:nvPicPr>
-          <p:cNvPr id="60" name="Picture 59" descr="任天堂.png"/>
+          <p:cNvPr id="60" name="Picture 59" descr="トヨタ自動車.png"/>
           <p:cNvPicPr>
             <a:picLocks noChangeAspect="1"/>
           </p:cNvPicPr>
@@ -4786,8 +4786,8 @@
         </p:blipFill>
         <p:spPr>
           <a:xfrm>
-            <a:off x="10210525" y="4314825"/>
-            <a:ext cx="975360" cy="268605"/>
+            <a:off x="10615937" y="3543300"/>
+            <a:ext cx="164536" cy="114300"/>
           </a:xfrm>
           <a:prstGeom prst="rect">
             <a:avLst/>
@@ -4802,7 +4802,7 @@
         </p:nvSpPr>
         <p:spPr>
           <a:xfrm>
-            <a:off x="9661916" y="4583430"/>
+            <a:off x="9661916" y="3657600"/>
             <a:ext cx="2072579" cy="274320"/>
           </a:xfrm>
           <a:prstGeom prst="rect">
@@ -4823,14 +4823,14 @@
                   <a:srgbClr val="404040"/>
                 </a:solidFill>
               </a:rPr>
-              <a:t>任天堂</a:t>
+              <a:t>トヨタ自動車</a:t>
             </a:r>
           </a:p>
         </p:txBody>
       </p:sp>
       <p:pic>
         <p:nvPicPr>
-          <p:cNvPr id="62" name="Picture 61" descr="味の素.png"/>
+          <p:cNvPr id="62" name="Picture 61" descr="ドコモの銀行.png"/>
           <p:cNvPicPr>
             <a:picLocks noChangeAspect="1"/>
           </p:cNvPicPr>
@@ -4844,8 +4844,8 @@
         </p:blipFill>
         <p:spPr>
           <a:xfrm>
-            <a:off x="665291" y="5086350"/>
-            <a:ext cx="1656397" cy="268605"/>
+            <a:off x="1306323" y="4160520"/>
+            <a:ext cx="374332" cy="114300"/>
           </a:xfrm>
           <a:prstGeom prst="rect">
             <a:avLst/>
@@ -4860,7 +4860,7 @@
         </p:nvSpPr>
         <p:spPr>
           <a:xfrm>
-            <a:off x="457200" y="5354955"/>
+            <a:off x="457200" y="4274820"/>
             <a:ext cx="2072579" cy="274320"/>
           </a:xfrm>
           <a:prstGeom prst="rect">
@@ -4881,14 +4881,14 @@
                   <a:srgbClr val="404040"/>
                 </a:solidFill>
               </a:rPr>
-              <a:t>味の素</a:t>
+              <a:t>ドコモの銀行</a:t>
             </a:r>
           </a:p>
         </p:txBody>
       </p:sp>
       <p:pic>
         <p:nvPicPr>
-          <p:cNvPr id="64" name="Picture 63" descr="大和ハウス工業.png"/>
+          <p:cNvPr id="64" name="Picture 63" descr="ドコモ光.png"/>
           <p:cNvPicPr>
             <a:picLocks noChangeAspect="1"/>
           </p:cNvPicPr>
@@ -4902,8 +4902,8 @@
         </p:blipFill>
         <p:spPr>
           <a:xfrm>
-            <a:off x="3626338" y="5086350"/>
-            <a:ext cx="336660" cy="268605"/>
+            <a:off x="3612668" y="4160520"/>
+            <a:ext cx="364001" cy="114300"/>
           </a:xfrm>
           <a:prstGeom prst="rect">
             <a:avLst/>
@@ -4918,7 +4918,7 @@
         </p:nvSpPr>
         <p:spPr>
           <a:xfrm>
-            <a:off x="2758379" y="5354955"/>
+            <a:off x="2758379" y="4274820"/>
             <a:ext cx="2072579" cy="274320"/>
           </a:xfrm>
           <a:prstGeom prst="rect">
@@ -4939,14 +4939,14 @@
                   <a:srgbClr val="404040"/>
                 </a:solidFill>
               </a:rPr>
-              <a:t>大和ハウス工業</a:t>
+              <a:t>ドコモ光</a:t>
             </a:r>
           </a:p>
         </p:txBody>
       </p:sp>
       <p:pic>
         <p:nvPicPr>
-          <p:cNvPr id="66" name="Picture 65" descr="富士通.png"/>
+          <p:cNvPr id="66" name="Picture 65" descr="パナソニック.png"/>
           <p:cNvPicPr>
             <a:picLocks noChangeAspect="1"/>
           </p:cNvPicPr>
@@ -4960,8 +4960,8 @@
         </p:blipFill>
         <p:spPr>
           <a:xfrm>
-            <a:off x="5830865" y="5086350"/>
-            <a:ext cx="529964" cy="268605"/>
+            <a:off x="5781522" y="4160520"/>
+            <a:ext cx="628650" cy="114300"/>
           </a:xfrm>
           <a:prstGeom prst="rect">
             <a:avLst/>
@@ -4976,7 +4976,7 @@
         </p:nvSpPr>
         <p:spPr>
           <a:xfrm>
-            <a:off x="5059558" y="5354955"/>
+            <a:off x="5059558" y="4274820"/>
             <a:ext cx="2072579" cy="274320"/>
           </a:xfrm>
           <a:prstGeom prst="rect">
@@ -4997,14 +4997,14 @@
                   <a:srgbClr val="404040"/>
                 </a:solidFill>
               </a:rPr>
-              <a:t>富士通</a:t>
+              <a:t>パナソニック</a:t>
             </a:r>
           </a:p>
         </p:txBody>
       </p:sp>
       <p:pic>
         <p:nvPicPr>
-          <p:cNvPr id="68" name="Picture 67" descr="日本郵政.png"/>
+          <p:cNvPr id="68" name="Picture 67" descr="ファーストリテイリング.png"/>
           <p:cNvPicPr>
             <a:picLocks noChangeAspect="1"/>
           </p:cNvPicPr>
@@ -5018,8 +5018,8 @@
         </p:blipFill>
         <p:spPr>
           <a:xfrm>
-            <a:off x="8271014" y="5086350"/>
-            <a:ext cx="252024" cy="268605"/>
+            <a:off x="8283520" y="4160520"/>
+            <a:ext cx="227012" cy="114300"/>
           </a:xfrm>
           <a:prstGeom prst="rect">
             <a:avLst/>
@@ -5034,7 +5034,7 @@
         </p:nvSpPr>
         <p:spPr>
           <a:xfrm>
-            <a:off x="7360737" y="5354955"/>
+            <a:off x="7360737" y="4274820"/>
             <a:ext cx="2072579" cy="274320"/>
           </a:xfrm>
           <a:prstGeom prst="rect">
@@ -5055,14 +5055,14 @@
                   <a:srgbClr val="404040"/>
                 </a:solidFill>
               </a:rPr>
-              <a:t>日本郵政</a:t>
+              <a:t>ファーストリテイリング</a:t>
             </a:r>
           </a:p>
         </p:txBody>
       </p:sp>
       <p:pic>
         <p:nvPicPr>
-          <p:cNvPr id="70" name="Picture 69" descr="日立製作所.png"/>
+          <p:cNvPr id="70" name="Picture 69" descr="ホンダ.png"/>
           <p:cNvPicPr>
             <a:picLocks noChangeAspect="1"/>
           </p:cNvPicPr>
@@ -5076,8 +5076,8 @@
         </p:blipFill>
         <p:spPr>
           <a:xfrm>
-            <a:off x="9995433" y="5086350"/>
-            <a:ext cx="1405545" cy="268605"/>
+            <a:off x="10341511" y="4160520"/>
+            <a:ext cx="713389" cy="114300"/>
           </a:xfrm>
           <a:prstGeom prst="rect">
             <a:avLst/>
@@ -5092,7 +5092,7 @@
         </p:nvSpPr>
         <p:spPr>
           <a:xfrm>
-            <a:off x="9661916" y="5354955"/>
+            <a:off x="9661916" y="4274820"/>
             <a:ext cx="2072579" cy="274320"/>
           </a:xfrm>
           <a:prstGeom prst="rect">
@@ -5113,14 +5113,14 @@
                   <a:srgbClr val="404040"/>
                 </a:solidFill>
               </a:rPr>
-              <a:t>日立製作所</a:t>
+              <a:t>ホンダ</a:t>
             </a:r>
           </a:p>
         </p:txBody>
       </p:sp>
       <p:pic>
         <p:nvPicPr>
-          <p:cNvPr id="72" name="Picture 71" descr="東京ガス.png"/>
+          <p:cNvPr id="72" name="Picture 71" descr="リクルートホールディングス.png"/>
           <p:cNvPicPr>
             <a:picLocks noChangeAspect="1"/>
           </p:cNvPicPr>
@@ -5134,8 +5134,8 @@
         </p:blipFill>
         <p:spPr>
           <a:xfrm>
-            <a:off x="849957" y="5857875"/>
-            <a:ext cx="1287065" cy="268605"/>
+            <a:off x="1297020" y="4777740"/>
+            <a:ext cx="392939" cy="114300"/>
           </a:xfrm>
           <a:prstGeom prst="rect">
             <a:avLst/>
@@ -5150,7 +5150,7 @@
         </p:nvSpPr>
         <p:spPr>
           <a:xfrm>
-            <a:off x="457200" y="6126480"/>
+            <a:off x="457200" y="4892040"/>
             <a:ext cx="2072579" cy="274320"/>
           </a:xfrm>
           <a:prstGeom prst="rect">
@@ -5171,14 +5171,14 @@
                   <a:srgbClr val="404040"/>
                 </a:solidFill>
               </a:rPr>
-              <a:t>東京ガス</a:t>
+              <a:t>リクルートホールディングス</a:t>
             </a:r>
           </a:p>
         </p:txBody>
       </p:sp>
       <p:pic>
         <p:nvPicPr>
-          <p:cNvPr id="74" name="Picture 73" descr="楽天グループ.png"/>
+          <p:cNvPr id="74" name="Picture 73" descr="三井住友銀行.png"/>
           <p:cNvPicPr>
             <a:picLocks noChangeAspect="1"/>
           </p:cNvPicPr>
@@ -5192,8 +5192,8 @@
         </p:blipFill>
         <p:spPr>
           <a:xfrm>
-            <a:off x="3385871" y="5857875"/>
-            <a:ext cx="817595" cy="268605"/>
+            <a:off x="3604663" y="4777740"/>
+            <a:ext cx="380010" cy="114300"/>
           </a:xfrm>
           <a:prstGeom prst="rect">
             <a:avLst/>
@@ -5208,7 +5208,7 @@
         </p:nvSpPr>
         <p:spPr>
           <a:xfrm>
-            <a:off x="2758379" y="6126480"/>
+            <a:off x="2758379" y="4892040"/>
             <a:ext cx="2072579" cy="274320"/>
           </a:xfrm>
           <a:prstGeom prst="rect">
@@ -5229,14 +5229,14 @@
                   <a:srgbClr val="404040"/>
                 </a:solidFill>
               </a:rPr>
-              <a:t>楽天グループ</a:t>
+              <a:t>三井住友銀行</a:t>
             </a:r>
           </a:p>
         </p:txBody>
       </p:sp>
       <p:pic>
         <p:nvPicPr>
-          <p:cNvPr id="76" name="Picture 75" descr="花王.png"/>
+          <p:cNvPr id="76" name="Picture 75" descr="三菱電機.png"/>
           <p:cNvPicPr>
             <a:picLocks noChangeAspect="1"/>
           </p:cNvPicPr>
@@ -5250,8 +5250,8 @@
         </p:blipFill>
         <p:spPr>
           <a:xfrm>
-            <a:off x="5859051" y="5857875"/>
-            <a:ext cx="473593" cy="268605"/>
+            <a:off x="5920001" y="4777740"/>
+            <a:ext cx="351692" cy="114300"/>
           </a:xfrm>
           <a:prstGeom prst="rect">
             <a:avLst/>
@@ -5266,7 +5266,7 @@
         </p:nvSpPr>
         <p:spPr>
           <a:xfrm>
-            <a:off x="5059558" y="6126480"/>
+            <a:off x="5059558" y="4892040"/>
             <a:ext cx="2072579" cy="274320"/>
           </a:xfrm>
           <a:prstGeom prst="rect">
@@ -5287,14 +5287,14 @@
                   <a:srgbClr val="404040"/>
                 </a:solidFill>
               </a:rPr>
-              <a:t>花王</a:t>
+              <a:t>三菱電機</a:t>
             </a:r>
           </a:p>
         </p:txBody>
       </p:sp>
       <p:pic>
         <p:nvPicPr>
-          <p:cNvPr id="78" name="Picture 77" descr="資生堂.png"/>
+          <p:cNvPr id="78" name="Picture 77" descr="任天堂.png"/>
           <p:cNvPicPr>
             <a:picLocks noChangeAspect="1"/>
           </p:cNvPicPr>
@@ -5308,8 +5308,8 @@
         </p:blipFill>
         <p:spPr>
           <a:xfrm>
-            <a:off x="7726169" y="5857875"/>
-            <a:ext cx="1341714" cy="268605"/>
+            <a:off x="8189503" y="4777740"/>
+            <a:ext cx="415046" cy="114300"/>
           </a:xfrm>
           <a:prstGeom prst="rect">
             <a:avLst/>
@@ -5324,7 +5324,7 @@
         </p:nvSpPr>
         <p:spPr>
           <a:xfrm>
-            <a:off x="7360737" y="6126480"/>
+            <a:off x="7360737" y="4892040"/>
             <a:ext cx="2072579" cy="274320"/>
           </a:xfrm>
           <a:prstGeom prst="rect">
@@ -5345,14 +5345,14 @@
                   <a:srgbClr val="404040"/>
                 </a:solidFill>
               </a:rPr>
-              <a:t>資生堂</a:t>
+              <a:t>任天堂</a:t>
             </a:r>
           </a:p>
         </p:txBody>
       </p:sp>
       <p:pic>
         <p:nvPicPr>
-          <p:cNvPr id="80" name="Picture 79" descr="野村ホールディングス.png"/>
+          <p:cNvPr id="80" name="Picture 79" descr="味の素.png"/>
           <p:cNvPicPr>
             <a:picLocks noChangeAspect="1"/>
           </p:cNvPicPr>
@@ -5366,8 +5366,8 @@
         </p:blipFill>
         <p:spPr>
           <a:xfrm>
-            <a:off x="10052545" y="5857875"/>
-            <a:ext cx="1291321" cy="268605"/>
+            <a:off x="10345780" y="4777740"/>
+            <a:ext cx="704850" cy="114300"/>
           </a:xfrm>
           <a:prstGeom prst="rect">
             <a:avLst/>
@@ -5377,6 +5377,586 @@
       <p:sp>
         <p:nvSpPr>
           <p:cNvPr id="81" name="TextBox 80"/>
+          <p:cNvSpPr txBox="1"/>
+          <p:nvPr/>
+        </p:nvSpPr>
+        <p:spPr>
+          <a:xfrm>
+            <a:off x="9661916" y="4892040"/>
+            <a:ext cx="2072579" cy="274320"/>
+          </a:xfrm>
+          <a:prstGeom prst="rect">
+            <a:avLst/>
+          </a:prstGeom>
+          <a:noFill/>
+        </p:spPr>
+        <p:txBody>
+          <a:bodyPr wrap="square">
+            <a:spAutoFit/>
+          </a:bodyPr>
+          <a:lstStyle/>
+          <a:p>
+            <a:pPr algn="ctr"/>
+            <a:r>
+              <a:rPr sz="1000">
+                <a:solidFill>
+                  <a:srgbClr val="404040"/>
+                </a:solidFill>
+              </a:rPr>
+              <a:t>味の素</a:t>
+            </a:r>
+          </a:p>
+        </p:txBody>
+      </p:sp>
+      <p:pic>
+        <p:nvPicPr>
+          <p:cNvPr id="82" name="Picture 81" descr="大和ハウス工業.png"/>
+          <p:cNvPicPr>
+            <a:picLocks noChangeAspect="1"/>
+          </p:cNvPicPr>
+          <p:nvPr/>
+        </p:nvPicPr>
+        <p:blipFill>
+          <a:blip r:embed="rId42"/>
+          <a:stretch>
+            <a:fillRect/>
+          </a:stretch>
+        </p:blipFill>
+        <p:spPr>
+          <a:xfrm>
+            <a:off x="1421860" y="5394960"/>
+            <a:ext cx="143259" cy="114300"/>
+          </a:xfrm>
+          <a:prstGeom prst="rect">
+            <a:avLst/>
+          </a:prstGeom>
+        </p:spPr>
+      </p:pic>
+      <p:sp>
+        <p:nvSpPr>
+          <p:cNvPr id="83" name="TextBox 82"/>
+          <p:cNvSpPr txBox="1"/>
+          <p:nvPr/>
+        </p:nvSpPr>
+        <p:spPr>
+          <a:xfrm>
+            <a:off x="457200" y="5509260"/>
+            <a:ext cx="2072579" cy="274320"/>
+          </a:xfrm>
+          <a:prstGeom prst="rect">
+            <a:avLst/>
+          </a:prstGeom>
+          <a:noFill/>
+        </p:spPr>
+        <p:txBody>
+          <a:bodyPr wrap="square">
+            <a:spAutoFit/>
+          </a:bodyPr>
+          <a:lstStyle/>
+          <a:p>
+            <a:pPr algn="ctr"/>
+            <a:r>
+              <a:rPr sz="1000">
+                <a:solidFill>
+                  <a:srgbClr val="404040"/>
+                </a:solidFill>
+              </a:rPr>
+              <a:t>大和ハウス工業</a:t>
+            </a:r>
+          </a:p>
+        </p:txBody>
+      </p:sp>
+      <p:pic>
+        <p:nvPicPr>
+          <p:cNvPr id="84" name="Picture 83" descr="富士通.png"/>
+          <p:cNvPicPr>
+            <a:picLocks noChangeAspect="1"/>
+          </p:cNvPicPr>
+          <p:nvPr/>
+        </p:nvPicPr>
+        <p:blipFill>
+          <a:blip r:embed="rId43"/>
+          <a:stretch>
+            <a:fillRect/>
+          </a:stretch>
+        </p:blipFill>
+        <p:spPr>
+          <a:xfrm>
+            <a:off x="3681910" y="5394960"/>
+            <a:ext cx="225516" cy="114300"/>
+          </a:xfrm>
+          <a:prstGeom prst="rect">
+            <a:avLst/>
+          </a:prstGeom>
+        </p:spPr>
+      </p:pic>
+      <p:sp>
+        <p:nvSpPr>
+          <p:cNvPr id="85" name="TextBox 84"/>
+          <p:cNvSpPr txBox="1"/>
+          <p:nvPr/>
+        </p:nvSpPr>
+        <p:spPr>
+          <a:xfrm>
+            <a:off x="2758379" y="5509260"/>
+            <a:ext cx="2072579" cy="274320"/>
+          </a:xfrm>
+          <a:prstGeom prst="rect">
+            <a:avLst/>
+          </a:prstGeom>
+          <a:noFill/>
+        </p:spPr>
+        <p:txBody>
+          <a:bodyPr wrap="square">
+            <a:spAutoFit/>
+          </a:bodyPr>
+          <a:lstStyle/>
+          <a:p>
+            <a:pPr algn="ctr"/>
+            <a:r>
+              <a:rPr sz="1000">
+                <a:solidFill>
+                  <a:srgbClr val="404040"/>
+                </a:solidFill>
+              </a:rPr>
+              <a:t>富士通</a:t>
+            </a:r>
+          </a:p>
+        </p:txBody>
+      </p:sp>
+      <p:pic>
+        <p:nvPicPr>
+          <p:cNvPr id="86" name="Picture 85" descr="日本郵政.png"/>
+          <p:cNvPicPr>
+            <a:picLocks noChangeAspect="1"/>
+          </p:cNvPicPr>
+          <p:nvPr/>
+        </p:nvPicPr>
+        <p:blipFill>
+          <a:blip r:embed="rId44"/>
+          <a:stretch>
+            <a:fillRect/>
+          </a:stretch>
+        </p:blipFill>
+        <p:spPr>
+          <a:xfrm>
+            <a:off x="6042225" y="5394960"/>
+            <a:ext cx="107244" cy="114300"/>
+          </a:xfrm>
+          <a:prstGeom prst="rect">
+            <a:avLst/>
+          </a:prstGeom>
+        </p:spPr>
+      </p:pic>
+      <p:sp>
+        <p:nvSpPr>
+          <p:cNvPr id="87" name="TextBox 86"/>
+          <p:cNvSpPr txBox="1"/>
+          <p:nvPr/>
+        </p:nvSpPr>
+        <p:spPr>
+          <a:xfrm>
+            <a:off x="5059558" y="5509260"/>
+            <a:ext cx="2072579" cy="274320"/>
+          </a:xfrm>
+          <a:prstGeom prst="rect">
+            <a:avLst/>
+          </a:prstGeom>
+          <a:noFill/>
+        </p:spPr>
+        <p:txBody>
+          <a:bodyPr wrap="square">
+            <a:spAutoFit/>
+          </a:bodyPr>
+          <a:lstStyle/>
+          <a:p>
+            <a:pPr algn="ctr"/>
+            <a:r>
+              <a:rPr sz="1000">
+                <a:solidFill>
+                  <a:srgbClr val="404040"/>
+                </a:solidFill>
+              </a:rPr>
+              <a:t>日本郵政</a:t>
+            </a:r>
+          </a:p>
+        </p:txBody>
+      </p:sp>
+      <p:pic>
+        <p:nvPicPr>
+          <p:cNvPr id="88" name="Picture 87" descr="日立製作所.png"/>
+          <p:cNvPicPr>
+            <a:picLocks noChangeAspect="1"/>
+          </p:cNvPicPr>
+          <p:nvPr/>
+        </p:nvPicPr>
+        <p:blipFill>
+          <a:blip r:embed="rId45"/>
+          <a:stretch>
+            <a:fillRect/>
+          </a:stretch>
+        </p:blipFill>
+        <p:spPr>
+          <a:xfrm>
+            <a:off x="8097974" y="5394960"/>
+            <a:ext cx="598104" cy="114300"/>
+          </a:xfrm>
+          <a:prstGeom prst="rect">
+            <a:avLst/>
+          </a:prstGeom>
+        </p:spPr>
+      </p:pic>
+      <p:sp>
+        <p:nvSpPr>
+          <p:cNvPr id="89" name="TextBox 88"/>
+          <p:cNvSpPr txBox="1"/>
+          <p:nvPr/>
+        </p:nvSpPr>
+        <p:spPr>
+          <a:xfrm>
+            <a:off x="7360737" y="5509260"/>
+            <a:ext cx="2072579" cy="274320"/>
+          </a:xfrm>
+          <a:prstGeom prst="rect">
+            <a:avLst/>
+          </a:prstGeom>
+          <a:noFill/>
+        </p:spPr>
+        <p:txBody>
+          <a:bodyPr wrap="square">
+            <a:spAutoFit/>
+          </a:bodyPr>
+          <a:lstStyle/>
+          <a:p>
+            <a:pPr algn="ctr"/>
+            <a:r>
+              <a:rPr sz="1000">
+                <a:solidFill>
+                  <a:srgbClr val="404040"/>
+                </a:solidFill>
+              </a:rPr>
+              <a:t>日立製作所</a:t>
+            </a:r>
+          </a:p>
+        </p:txBody>
+      </p:sp>
+      <p:pic>
+        <p:nvPicPr>
+          <p:cNvPr id="90" name="Picture 89" descr="東京ガス.png"/>
+          <p:cNvPicPr>
+            <a:picLocks noChangeAspect="1"/>
+          </p:cNvPicPr>
+          <p:nvPr/>
+        </p:nvPicPr>
+        <p:blipFill>
+          <a:blip r:embed="rId46"/>
+          <a:stretch>
+            <a:fillRect/>
+          </a:stretch>
+        </p:blipFill>
+        <p:spPr>
+          <a:xfrm>
+            <a:off x="10424362" y="5394960"/>
+            <a:ext cx="547687" cy="114300"/>
+          </a:xfrm>
+          <a:prstGeom prst="rect">
+            <a:avLst/>
+          </a:prstGeom>
+        </p:spPr>
+      </p:pic>
+      <p:sp>
+        <p:nvSpPr>
+          <p:cNvPr id="91" name="TextBox 90"/>
+          <p:cNvSpPr txBox="1"/>
+          <p:nvPr/>
+        </p:nvSpPr>
+        <p:spPr>
+          <a:xfrm>
+            <a:off x="9661916" y="5509260"/>
+            <a:ext cx="2072579" cy="274320"/>
+          </a:xfrm>
+          <a:prstGeom prst="rect">
+            <a:avLst/>
+          </a:prstGeom>
+          <a:noFill/>
+        </p:spPr>
+        <p:txBody>
+          <a:bodyPr wrap="square">
+            <a:spAutoFit/>
+          </a:bodyPr>
+          <a:lstStyle/>
+          <a:p>
+            <a:pPr algn="ctr"/>
+            <a:r>
+              <a:rPr sz="1000">
+                <a:solidFill>
+                  <a:srgbClr val="404040"/>
+                </a:solidFill>
+              </a:rPr>
+              <a:t>東京ガス</a:t>
+            </a:r>
+          </a:p>
+        </p:txBody>
+      </p:sp>
+      <p:pic>
+        <p:nvPicPr>
+          <p:cNvPr id="92" name="Picture 91" descr="楽天.png"/>
+          <p:cNvPicPr>
+            <a:picLocks noChangeAspect="1"/>
+          </p:cNvPicPr>
+          <p:nvPr/>
+        </p:nvPicPr>
+        <p:blipFill>
+          <a:blip r:embed="rId47"/>
+          <a:stretch>
+            <a:fillRect/>
+          </a:stretch>
+        </p:blipFill>
+        <p:spPr>
+          <a:xfrm>
+            <a:off x="1317691" y="6012180"/>
+            <a:ext cx="351596" cy="114300"/>
+          </a:xfrm>
+          <a:prstGeom prst="rect">
+            <a:avLst/>
+          </a:prstGeom>
+        </p:spPr>
+      </p:pic>
+      <p:sp>
+        <p:nvSpPr>
+          <p:cNvPr id="93" name="TextBox 92"/>
+          <p:cNvSpPr txBox="1"/>
+          <p:nvPr/>
+        </p:nvSpPr>
+        <p:spPr>
+          <a:xfrm>
+            <a:off x="457200" y="6126480"/>
+            <a:ext cx="2072579" cy="274320"/>
+          </a:xfrm>
+          <a:prstGeom prst="rect">
+            <a:avLst/>
+          </a:prstGeom>
+          <a:noFill/>
+        </p:spPr>
+        <p:txBody>
+          <a:bodyPr wrap="square">
+            <a:spAutoFit/>
+          </a:bodyPr>
+          <a:lstStyle/>
+          <a:p>
+            <a:pPr algn="ctr"/>
+            <a:r>
+              <a:rPr sz="1000">
+                <a:solidFill>
+                  <a:srgbClr val="404040"/>
+                </a:solidFill>
+              </a:rPr>
+              <a:t>楽天</a:t>
+            </a:r>
+          </a:p>
+        </p:txBody>
+      </p:sp>
+      <p:pic>
+        <p:nvPicPr>
+          <p:cNvPr id="94" name="Picture 93" descr="楽天グループ.png"/>
+          <p:cNvPicPr>
+            <a:picLocks noChangeAspect="1"/>
+          </p:cNvPicPr>
+          <p:nvPr/>
+        </p:nvPicPr>
+        <p:blipFill>
+          <a:blip r:embed="rId48"/>
+          <a:stretch>
+            <a:fillRect/>
+          </a:stretch>
+        </p:blipFill>
+        <p:spPr>
+          <a:xfrm>
+            <a:off x="3620712" y="6012180"/>
+            <a:ext cx="347913" cy="114300"/>
+          </a:xfrm>
+          <a:prstGeom prst="rect">
+            <a:avLst/>
+          </a:prstGeom>
+        </p:spPr>
+      </p:pic>
+      <p:sp>
+        <p:nvSpPr>
+          <p:cNvPr id="95" name="TextBox 94"/>
+          <p:cNvSpPr txBox="1"/>
+          <p:nvPr/>
+        </p:nvSpPr>
+        <p:spPr>
+          <a:xfrm>
+            <a:off x="2758379" y="6126480"/>
+            <a:ext cx="2072579" cy="274320"/>
+          </a:xfrm>
+          <a:prstGeom prst="rect">
+            <a:avLst/>
+          </a:prstGeom>
+          <a:noFill/>
+        </p:spPr>
+        <p:txBody>
+          <a:bodyPr wrap="square">
+            <a:spAutoFit/>
+          </a:bodyPr>
+          <a:lstStyle/>
+          <a:p>
+            <a:pPr algn="ctr"/>
+            <a:r>
+              <a:rPr sz="1000">
+                <a:solidFill>
+                  <a:srgbClr val="404040"/>
+                </a:solidFill>
+              </a:rPr>
+              <a:t>楽天グループ</a:t>
+            </a:r>
+          </a:p>
+        </p:txBody>
+      </p:sp>
+      <p:pic>
+        <p:nvPicPr>
+          <p:cNvPr id="96" name="Picture 95" descr="花王.png"/>
+          <p:cNvPicPr>
+            <a:picLocks noChangeAspect="1"/>
+          </p:cNvPicPr>
+          <p:nvPr/>
+        </p:nvPicPr>
+        <p:blipFill>
+          <a:blip r:embed="rId49"/>
+          <a:stretch>
+            <a:fillRect/>
+          </a:stretch>
+        </p:blipFill>
+        <p:spPr>
+          <a:xfrm>
+            <a:off x="5995083" y="6012180"/>
+            <a:ext cx="201528" cy="114300"/>
+          </a:xfrm>
+          <a:prstGeom prst="rect">
+            <a:avLst/>
+          </a:prstGeom>
+        </p:spPr>
+      </p:pic>
+      <p:sp>
+        <p:nvSpPr>
+          <p:cNvPr id="97" name="TextBox 96"/>
+          <p:cNvSpPr txBox="1"/>
+          <p:nvPr/>
+        </p:nvSpPr>
+        <p:spPr>
+          <a:xfrm>
+            <a:off x="5059558" y="6126480"/>
+            <a:ext cx="2072579" cy="274320"/>
+          </a:xfrm>
+          <a:prstGeom prst="rect">
+            <a:avLst/>
+          </a:prstGeom>
+          <a:noFill/>
+        </p:spPr>
+        <p:txBody>
+          <a:bodyPr wrap="square">
+            <a:spAutoFit/>
+          </a:bodyPr>
+          <a:lstStyle/>
+          <a:p>
+            <a:pPr algn="ctr"/>
+            <a:r>
+              <a:rPr sz="1000">
+                <a:solidFill>
+                  <a:srgbClr val="404040"/>
+                </a:solidFill>
+              </a:rPr>
+              <a:t>花王</a:t>
+            </a:r>
+          </a:p>
+        </p:txBody>
+      </p:sp>
+      <p:pic>
+        <p:nvPicPr>
+          <p:cNvPr id="98" name="Picture 97" descr="資生堂.png"/>
+          <p:cNvPicPr>
+            <a:picLocks noChangeAspect="1"/>
+          </p:cNvPicPr>
+          <p:nvPr/>
+        </p:nvPicPr>
+        <p:blipFill>
+          <a:blip r:embed="rId50"/>
+          <a:stretch>
+            <a:fillRect/>
+          </a:stretch>
+        </p:blipFill>
+        <p:spPr>
+          <a:xfrm>
+            <a:off x="8111555" y="6012180"/>
+            <a:ext cx="570942" cy="114299"/>
+          </a:xfrm>
+          <a:prstGeom prst="rect">
+            <a:avLst/>
+          </a:prstGeom>
+        </p:spPr>
+      </p:pic>
+      <p:sp>
+        <p:nvSpPr>
+          <p:cNvPr id="99" name="TextBox 98"/>
+          <p:cNvSpPr txBox="1"/>
+          <p:nvPr/>
+        </p:nvSpPr>
+        <p:spPr>
+          <a:xfrm>
+            <a:off x="7360737" y="6126480"/>
+            <a:ext cx="2072579" cy="274320"/>
+          </a:xfrm>
+          <a:prstGeom prst="rect">
+            <a:avLst/>
+          </a:prstGeom>
+          <a:noFill/>
+        </p:spPr>
+        <p:txBody>
+          <a:bodyPr wrap="square">
+            <a:spAutoFit/>
+          </a:bodyPr>
+          <a:lstStyle/>
+          <a:p>
+            <a:pPr algn="ctr"/>
+            <a:r>
+              <a:rPr sz="1000">
+                <a:solidFill>
+                  <a:srgbClr val="404040"/>
+                </a:solidFill>
+              </a:rPr>
+              <a:t>資生堂</a:t>
+            </a:r>
+          </a:p>
+        </p:txBody>
+      </p:sp>
+      <p:pic>
+        <p:nvPicPr>
+          <p:cNvPr id="100" name="Picture 99" descr="野村ホールディングス.png"/>
+          <p:cNvPicPr>
+            <a:picLocks noChangeAspect="1"/>
+          </p:cNvPicPr>
+          <p:nvPr/>
+        </p:nvPicPr>
+        <p:blipFill>
+          <a:blip r:embed="rId51"/>
+          <a:stretch>
+            <a:fillRect/>
+          </a:stretch>
+        </p:blipFill>
+        <p:spPr>
+          <a:xfrm>
+            <a:off x="10423456" y="6012180"/>
+            <a:ext cx="549498" cy="114300"/>
+          </a:xfrm>
+          <a:prstGeom prst="rect">
+            <a:avLst/>
+          </a:prstGeom>
+        </p:spPr>
+      </p:pic>
+      <p:sp>
+        <p:nvSpPr>
+          <p:cNvPr id="101" name="TextBox 100"/>
           <p:cNvSpPr txBox="1"/>
           <p:nvPr/>
         </p:nvSpPr>

--- a/docs/logos.pptx
+++ b/docs/logos.pptx
@@ -3394,8 +3394,8 @@
         </p:blipFill>
         <p:spPr>
           <a:xfrm>
-            <a:off x="1197349" y="1074420"/>
-            <a:ext cx="592281" cy="114300"/>
+            <a:off x="1193885" y="1074420"/>
+            <a:ext cx="599209" cy="114300"/>
           </a:xfrm>
           <a:prstGeom prst="rect">
             <a:avLst/>
@@ -3858,8 +3858,8 @@
         </p:blipFill>
         <p:spPr>
           <a:xfrm>
-            <a:off x="8227889" y="1691640"/>
-            <a:ext cx="338275" cy="114299"/>
+            <a:off x="8339877" y="1691640"/>
+            <a:ext cx="114299" cy="114299"/>
           </a:xfrm>
           <a:prstGeom prst="rect">
             <a:avLst/>

--- a/docs/logos.pptx
+++ b/docs/logos.pptx
@@ -3104,8 +3104,8 @@
         </p:blipFill>
         <p:spPr>
           <a:xfrm>
-            <a:off x="1400450" y="457200"/>
-            <a:ext cx="186078" cy="114300"/>
+            <a:off x="1446124" y="457200"/>
+            <a:ext cx="94730" cy="58189"/>
           </a:xfrm>
           <a:prstGeom prst="rect">
             <a:avLst/>
@@ -3120,7 +3120,7 @@
         </p:nvSpPr>
         <p:spPr>
           <a:xfrm>
-            <a:off x="457200" y="571500"/>
+            <a:off x="457200" y="515389"/>
             <a:ext cx="2072579" cy="274320"/>
           </a:xfrm>
           <a:prstGeom prst="rect">
@@ -3162,8 +3162,8 @@
         </p:blipFill>
         <p:spPr>
           <a:xfrm>
-            <a:off x="3606355" y="457200"/>
-            <a:ext cx="376627" cy="114300"/>
+            <a:off x="3698800" y="457200"/>
+            <a:ext cx="191737" cy="58189"/>
           </a:xfrm>
           <a:prstGeom prst="rect">
             <a:avLst/>
@@ -3178,7 +3178,7 @@
         </p:nvSpPr>
         <p:spPr>
           <a:xfrm>
-            <a:off x="2758379" y="571500"/>
+            <a:off x="2758379" y="515389"/>
             <a:ext cx="2072579" cy="274320"/>
           </a:xfrm>
           <a:prstGeom prst="rect">
@@ -3206,7 +3206,7 @@
       </p:sp>
       <p:pic>
         <p:nvPicPr>
-          <p:cNvPr id="6" name="Picture 5" descr="Dprime.png"/>
+          <p:cNvPr id="6" name="Picture 5" descr="Databric.png"/>
           <p:cNvPicPr>
             <a:picLocks noChangeAspect="1"/>
           </p:cNvPicPr>
@@ -3220,8 +3220,8 @@
         </p:blipFill>
         <p:spPr>
           <a:xfrm>
-            <a:off x="6049401" y="457200"/>
-            <a:ext cx="92893" cy="114300"/>
+            <a:off x="6045271" y="457200"/>
+            <a:ext cx="101153" cy="58189"/>
           </a:xfrm>
           <a:prstGeom prst="rect">
             <a:avLst/>
@@ -3236,7 +3236,7 @@
         </p:nvSpPr>
         <p:spPr>
           <a:xfrm>
-            <a:off x="5059558" y="571500"/>
+            <a:off x="5059558" y="515389"/>
             <a:ext cx="2072579" cy="274320"/>
           </a:xfrm>
           <a:prstGeom prst="rect">
@@ -3257,14 +3257,14 @@
                   <a:srgbClr val="404040"/>
                 </a:solidFill>
               </a:rPr>
-              <a:t>Dprime</a:t>
+              <a:t>Databric</a:t>
             </a:r>
           </a:p>
         </p:txBody>
       </p:sp>
       <p:pic>
         <p:nvPicPr>
-          <p:cNvPr id="8" name="Picture 7" descr="Gemini.png"/>
+          <p:cNvPr id="8" name="Picture 7" descr="Dprime.png"/>
           <p:cNvPicPr>
             <a:picLocks noChangeAspect="1"/>
           </p:cNvPicPr>
@@ -3278,8 +3278,8 @@
         </p:blipFill>
         <p:spPr>
           <a:xfrm>
-            <a:off x="8251350" y="457200"/>
-            <a:ext cx="291352" cy="114299"/>
+            <a:off x="8373381" y="457200"/>
+            <a:ext cx="47291" cy="58189"/>
           </a:xfrm>
           <a:prstGeom prst="rect">
             <a:avLst/>
@@ -3294,7 +3294,7 @@
         </p:nvSpPr>
         <p:spPr>
           <a:xfrm>
-            <a:off x="7360737" y="571500"/>
+            <a:off x="7360737" y="515389"/>
             <a:ext cx="2072579" cy="274320"/>
           </a:xfrm>
           <a:prstGeom prst="rect">
@@ -3315,14 +3315,14 @@
                   <a:srgbClr val="404040"/>
                 </a:solidFill>
               </a:rPr>
-              <a:t>Gemini</a:t>
+              <a:t>Dprime</a:t>
             </a:r>
           </a:p>
         </p:txBody>
       </p:sp>
       <p:pic>
         <p:nvPicPr>
-          <p:cNvPr id="10" name="Picture 9" descr="Google.png"/>
+          <p:cNvPr id="10" name="Picture 9" descr="Gemini.png"/>
           <p:cNvPicPr>
             <a:picLocks noChangeAspect="1"/>
           </p:cNvPicPr>
@@ -3336,8 +3336,8 @@
         </p:blipFill>
         <p:spPr>
           <a:xfrm>
-            <a:off x="10642266" y="457200"/>
-            <a:ext cx="111878" cy="114300"/>
+            <a:off x="10624043" y="457200"/>
+            <a:ext cx="148325" cy="58189"/>
           </a:xfrm>
           <a:prstGeom prst="rect">
             <a:avLst/>
@@ -3352,7 +3352,7 @@
         </p:nvSpPr>
         <p:spPr>
           <a:xfrm>
-            <a:off x="9661916" y="571500"/>
+            <a:off x="9661916" y="515389"/>
             <a:ext cx="2072579" cy="274320"/>
           </a:xfrm>
           <a:prstGeom prst="rect">
@@ -3373,14 +3373,14 @@
                   <a:srgbClr val="404040"/>
                 </a:solidFill>
               </a:rPr>
-              <a:t>Google</a:t>
+              <a:t>Gemini</a:t>
             </a:r>
           </a:p>
         </p:txBody>
       </p:sp>
       <p:pic>
         <p:nvPicPr>
-          <p:cNvPr id="12" name="Picture 11" descr="Instacart.png"/>
+          <p:cNvPr id="12" name="Picture 11" descr="Google.png"/>
           <p:cNvPicPr>
             <a:picLocks noChangeAspect="1"/>
           </p:cNvPicPr>
@@ -3394,8 +3394,8 @@
         </p:blipFill>
         <p:spPr>
           <a:xfrm>
-            <a:off x="1193885" y="1074420"/>
-            <a:ext cx="599209" cy="114300"/>
+            <a:off x="1465011" y="1018309"/>
+            <a:ext cx="56956" cy="58189"/>
           </a:xfrm>
           <a:prstGeom prst="rect">
             <a:avLst/>
@@ -3410,7 +3410,7 @@
         </p:nvSpPr>
         <p:spPr>
           <a:xfrm>
-            <a:off x="457200" y="1188720"/>
+            <a:off x="457200" y="1076498"/>
             <a:ext cx="2072579" cy="274320"/>
           </a:xfrm>
           <a:prstGeom prst="rect">
@@ -3431,14 +3431,14 @@
                   <a:srgbClr val="404040"/>
                 </a:solidFill>
               </a:rPr>
-              <a:t>Instacart</a:t>
+              <a:t>Google</a:t>
             </a:r>
           </a:p>
         </p:txBody>
       </p:sp>
       <p:pic>
         <p:nvPicPr>
-          <p:cNvPr id="14" name="Picture 13" descr="KDDI.png"/>
+          <p:cNvPr id="14" name="Picture 13" descr="Instacart.png"/>
           <p:cNvPicPr>
             <a:picLocks noChangeAspect="1"/>
           </p:cNvPicPr>
@@ -3452,8 +3452,8 @@
         </p:blipFill>
         <p:spPr>
           <a:xfrm>
-            <a:off x="3672204" y="1074420"/>
-            <a:ext cx="244928" cy="114300"/>
+            <a:off x="3642143" y="1018309"/>
+            <a:ext cx="305051" cy="58189"/>
           </a:xfrm>
           <a:prstGeom prst="rect">
             <a:avLst/>
@@ -3468,7 +3468,7 @@
         </p:nvSpPr>
         <p:spPr>
           <a:xfrm>
-            <a:off x="2758379" y="1188720"/>
+            <a:off x="2758379" y="1076498"/>
             <a:ext cx="2072579" cy="274320"/>
           </a:xfrm>
           <a:prstGeom prst="rect">
@@ -3489,14 +3489,14 @@
                   <a:srgbClr val="404040"/>
                 </a:solidFill>
               </a:rPr>
-              <a:t>KDDI</a:t>
+              <a:t>Instacart</a:t>
             </a:r>
           </a:p>
         </p:txBody>
       </p:sp>
       <p:pic>
         <p:nvPicPr>
-          <p:cNvPr id="16" name="Picture 15" descr="KFC.png"/>
+          <p:cNvPr id="16" name="Picture 15" descr="KDDI.png"/>
           <p:cNvPicPr>
             <a:picLocks noChangeAspect="1"/>
           </p:cNvPicPr>
@@ -3510,8 +3510,8 @@
         </p:blipFill>
         <p:spPr>
           <a:xfrm>
-            <a:off x="5921036" y="1074420"/>
-            <a:ext cx="349623" cy="114300"/>
+            <a:off x="6033502" y="1018309"/>
+            <a:ext cx="124690" cy="58189"/>
           </a:xfrm>
           <a:prstGeom prst="rect">
             <a:avLst/>
@@ -3526,7 +3526,7 @@
         </p:nvSpPr>
         <p:spPr>
           <a:xfrm>
-            <a:off x="5059558" y="1188720"/>
+            <a:off x="5059558" y="1076498"/>
             <a:ext cx="2072579" cy="274320"/>
           </a:xfrm>
           <a:prstGeom prst="rect">
@@ -3547,14 +3547,14 @@
                   <a:srgbClr val="404040"/>
                 </a:solidFill>
               </a:rPr>
-              <a:t>KFC</a:t>
+              <a:t>KDDI</a:t>
             </a:r>
           </a:p>
         </p:txBody>
       </p:sp>
       <p:pic>
         <p:nvPicPr>
-          <p:cNvPr id="18" name="Picture 17" descr="LINE.png"/>
+          <p:cNvPr id="18" name="Picture 17" descr="KFC.png"/>
           <p:cNvPicPr>
             <a:picLocks noChangeAspect="1"/>
           </p:cNvPicPr>
@@ -3568,8 +3568,8 @@
         </p:blipFill>
         <p:spPr>
           <a:xfrm>
-            <a:off x="8339821" y="1074420"/>
-            <a:ext cx="114411" cy="114300"/>
+            <a:off x="8308031" y="1018309"/>
+            <a:ext cx="177990" cy="58189"/>
           </a:xfrm>
           <a:prstGeom prst="rect">
             <a:avLst/>
@@ -3584,7 +3584,7 @@
         </p:nvSpPr>
         <p:spPr>
           <a:xfrm>
-            <a:off x="7360737" y="1188720"/>
+            <a:off x="7360737" y="1076498"/>
             <a:ext cx="2072579" cy="274320"/>
           </a:xfrm>
           <a:prstGeom prst="rect">
@@ -3605,14 +3605,14 @@
                   <a:srgbClr val="404040"/>
                 </a:solidFill>
               </a:rPr>
-              <a:t>LINE</a:t>
+              <a:t>KFC</a:t>
             </a:r>
           </a:p>
         </p:txBody>
       </p:sp>
       <p:pic>
         <p:nvPicPr>
-          <p:cNvPr id="20" name="Picture 19" descr="Meta.png"/>
+          <p:cNvPr id="20" name="Picture 19" descr="LINE.png"/>
           <p:cNvPicPr>
             <a:picLocks noChangeAspect="1"/>
           </p:cNvPicPr>
@@ -3626,8 +3626,8 @@
         </p:blipFill>
         <p:spPr>
           <a:xfrm>
-            <a:off x="10455929" y="1074420"/>
-            <a:ext cx="484553" cy="114300"/>
+            <a:off x="10669083" y="1018309"/>
+            <a:ext cx="58245" cy="58189"/>
           </a:xfrm>
           <a:prstGeom prst="rect">
             <a:avLst/>
@@ -3642,7 +3642,7 @@
         </p:nvSpPr>
         <p:spPr>
           <a:xfrm>
-            <a:off x="9661916" y="1188720"/>
+            <a:off x="9661916" y="1076498"/>
             <a:ext cx="2072579" cy="274320"/>
           </a:xfrm>
           <a:prstGeom prst="rect">
@@ -3663,14 +3663,14 @@
                   <a:srgbClr val="404040"/>
                 </a:solidFill>
               </a:rPr>
-              <a:t>Meta</a:t>
+              <a:t>LINE</a:t>
             </a:r>
           </a:p>
         </p:txBody>
       </p:sp>
       <p:pic>
         <p:nvPicPr>
-          <p:cNvPr id="22" name="Picture 21" descr="NEC.png"/>
+          <p:cNvPr id="22" name="Picture 21" descr="Meta.png"/>
           <p:cNvPicPr>
             <a:picLocks noChangeAspect="1"/>
           </p:cNvPicPr>
@@ -3684,8 +3684,8 @@
         </p:blipFill>
         <p:spPr>
           <a:xfrm>
-            <a:off x="1299709" y="1691640"/>
-            <a:ext cx="387560" cy="114300"/>
+            <a:off x="1370149" y="1579418"/>
+            <a:ext cx="246681" cy="58189"/>
           </a:xfrm>
           <a:prstGeom prst="rect">
             <a:avLst/>
@@ -3700,7 +3700,7 @@
         </p:nvSpPr>
         <p:spPr>
           <a:xfrm>
-            <a:off x="457200" y="1805940"/>
+            <a:off x="457200" y="1637607"/>
             <a:ext cx="2072579" cy="274320"/>
           </a:xfrm>
           <a:prstGeom prst="rect">
@@ -3721,14 +3721,14 @@
                   <a:srgbClr val="404040"/>
                 </a:solidFill>
               </a:rPr>
-              <a:t>NEC</a:t>
+              <a:t>Meta</a:t>
             </a:r>
           </a:p>
         </p:txBody>
       </p:sp>
       <p:pic>
         <p:nvPicPr>
-          <p:cNvPr id="24" name="Picture 23" descr="NTTデータ.png"/>
+          <p:cNvPr id="24" name="Picture 23" descr="NEC.png"/>
           <p:cNvPicPr>
             <a:picLocks noChangeAspect="1"/>
           </p:cNvPicPr>
@@ -3742,8 +3742,8 @@
         </p:blipFill>
         <p:spPr>
           <a:xfrm>
-            <a:off x="3553792" y="1691640"/>
-            <a:ext cx="481753" cy="114300"/>
+            <a:off x="3696017" y="1579418"/>
+            <a:ext cx="197303" cy="58189"/>
           </a:xfrm>
           <a:prstGeom prst="rect">
             <a:avLst/>
@@ -3758,7 +3758,7 @@
         </p:nvSpPr>
         <p:spPr>
           <a:xfrm>
-            <a:off x="2758379" y="1805940"/>
+            <a:off x="2758379" y="1637607"/>
             <a:ext cx="2072579" cy="274320"/>
           </a:xfrm>
           <a:prstGeom prst="rect">
@@ -3779,14 +3779,14 @@
                   <a:srgbClr val="404040"/>
                 </a:solidFill>
               </a:rPr>
-              <a:t>NTTデータ</a:t>
+              <a:t>NEC</a:t>
             </a:r>
           </a:p>
         </p:txBody>
       </p:sp>
       <p:pic>
         <p:nvPicPr>
-          <p:cNvPr id="26" name="Picture 25" descr="OpenAI.png"/>
+          <p:cNvPr id="26" name="Picture 25" descr="NTTデータ.png"/>
           <p:cNvPicPr>
             <a:picLocks noChangeAspect="1"/>
           </p:cNvPicPr>
@@ -3800,8 +3800,8 @@
         </p:blipFill>
         <p:spPr>
           <a:xfrm>
-            <a:off x="6037929" y="1691640"/>
-            <a:ext cx="115837" cy="114300"/>
+            <a:off x="5973219" y="1579418"/>
+            <a:ext cx="245256" cy="58189"/>
           </a:xfrm>
           <a:prstGeom prst="rect">
             <a:avLst/>
@@ -3816,7 +3816,7 @@
         </p:nvSpPr>
         <p:spPr>
           <a:xfrm>
-            <a:off x="5059558" y="1805940"/>
+            <a:off x="5059558" y="1637607"/>
             <a:ext cx="2072579" cy="274320"/>
           </a:xfrm>
           <a:prstGeom prst="rect">
@@ -3837,14 +3837,14 @@
                   <a:srgbClr val="404040"/>
                 </a:solidFill>
               </a:rPr>
-              <a:t>OpenAI</a:t>
+              <a:t>NTTデータ</a:t>
             </a:r>
           </a:p>
         </p:txBody>
       </p:sp>
       <p:pic>
         <p:nvPicPr>
-          <p:cNvPr id="28" name="Picture 27" descr="Qwen.png"/>
+          <p:cNvPr id="28" name="Picture 27" descr="OpenAI.png"/>
           <p:cNvPicPr>
             <a:picLocks noChangeAspect="1"/>
           </p:cNvPicPr>
@@ -3858,8 +3858,8 @@
         </p:blipFill>
         <p:spPr>
           <a:xfrm>
-            <a:off x="8339877" y="1691640"/>
-            <a:ext cx="114299" cy="114299"/>
+            <a:off x="8367541" y="1579418"/>
+            <a:ext cx="58971" cy="58189"/>
           </a:xfrm>
           <a:prstGeom prst="rect">
             <a:avLst/>
@@ -3874,7 +3874,7 @@
         </p:nvSpPr>
         <p:spPr>
           <a:xfrm>
-            <a:off x="7360737" y="1805940"/>
+            <a:off x="7360737" y="1637607"/>
             <a:ext cx="2072579" cy="274320"/>
           </a:xfrm>
           <a:prstGeom prst="rect">
@@ -3895,14 +3895,14 @@
                   <a:srgbClr val="404040"/>
                 </a:solidFill>
               </a:rPr>
-              <a:t>Qwen</a:t>
+              <a:t>OpenAI</a:t>
             </a:r>
           </a:p>
         </p:txBody>
       </p:sp>
       <p:pic>
         <p:nvPicPr>
-          <p:cNvPr id="30" name="Picture 29" descr="Salesforce.png"/>
+          <p:cNvPr id="30" name="Picture 29" descr="Qwen.png"/>
           <p:cNvPicPr>
             <a:picLocks noChangeAspect="1"/>
           </p:cNvPicPr>
@@ -3916,8 +3916,8 @@
         </p:blipFill>
         <p:spPr>
           <a:xfrm>
-            <a:off x="10617819" y="1691640"/>
-            <a:ext cx="160773" cy="114300"/>
+            <a:off x="10669111" y="1579418"/>
+            <a:ext cx="58189" cy="58189"/>
           </a:xfrm>
           <a:prstGeom prst="rect">
             <a:avLst/>
@@ -3932,7 +3932,7 @@
         </p:nvSpPr>
         <p:spPr>
           <a:xfrm>
-            <a:off x="9661916" y="1805940"/>
+            <a:off x="9661916" y="1637607"/>
             <a:ext cx="2072579" cy="274320"/>
           </a:xfrm>
           <a:prstGeom prst="rect">
@@ -3953,14 +3953,14 @@
                   <a:srgbClr val="404040"/>
                 </a:solidFill>
               </a:rPr>
-              <a:t>Salesforce</a:t>
+              <a:t>Qwen</a:t>
             </a:r>
           </a:p>
         </p:txBody>
       </p:sp>
       <p:pic>
         <p:nvPicPr>
-          <p:cNvPr id="32" name="Picture 31" descr="SyncMe.png"/>
+          <p:cNvPr id="32" name="Picture 31" descr="Salesforce.png"/>
           <p:cNvPicPr>
             <a:picLocks noChangeAspect="1"/>
           </p:cNvPicPr>
@@ -3974,8 +3974,8 @@
         </p:blipFill>
         <p:spPr>
           <a:xfrm>
-            <a:off x="1257159" y="2308860"/>
-            <a:ext cx="472660" cy="114300"/>
+            <a:off x="1452565" y="2140527"/>
+            <a:ext cx="81848" cy="58189"/>
           </a:xfrm>
           <a:prstGeom prst="rect">
             <a:avLst/>
@@ -3990,7 +3990,7 @@
         </p:nvSpPr>
         <p:spPr>
           <a:xfrm>
-            <a:off x="457200" y="2423160"/>
+            <a:off x="457200" y="2198716"/>
             <a:ext cx="2072579" cy="274320"/>
           </a:xfrm>
           <a:prstGeom prst="rect">
@@ -4011,14 +4011,14 @@
                   <a:srgbClr val="404040"/>
                 </a:solidFill>
               </a:rPr>
-              <a:t>SyncMe</a:t>
+              <a:t>Salesforce</a:t>
             </a:r>
           </a:p>
         </p:txBody>
       </p:sp>
       <p:pic>
         <p:nvPicPr>
-          <p:cNvPr id="34" name="Picture 33" descr="ahamo.png"/>
+          <p:cNvPr id="34" name="Picture 33" descr="Snowflake.png"/>
           <p:cNvPicPr>
             <a:picLocks noChangeAspect="1"/>
           </p:cNvPicPr>
@@ -4032,8 +4032,8 @@
         </p:blipFill>
         <p:spPr>
           <a:xfrm>
-            <a:off x="3689454" y="2308860"/>
-            <a:ext cx="210429" cy="114300"/>
+            <a:off x="3685936" y="2140527"/>
+            <a:ext cx="217465" cy="58189"/>
           </a:xfrm>
           <a:prstGeom prst="rect">
             <a:avLst/>
@@ -4048,7 +4048,7 @@
         </p:nvSpPr>
         <p:spPr>
           <a:xfrm>
-            <a:off x="2758379" y="2423160"/>
+            <a:off x="2758379" y="2198716"/>
             <a:ext cx="2072579" cy="274320"/>
           </a:xfrm>
           <a:prstGeom prst="rect">
@@ -4069,14 +4069,14 @@
                   <a:srgbClr val="404040"/>
                 </a:solidFill>
               </a:rPr>
-              <a:t>ahamo</a:t>
+              <a:t>Snowflake</a:t>
             </a:r>
           </a:p>
         </p:txBody>
       </p:sp>
       <p:pic>
         <p:nvPicPr>
-          <p:cNvPr id="36" name="Picture 35" descr="dポイント.png"/>
+          <p:cNvPr id="36" name="Picture 35" descr="SyncMe.png"/>
           <p:cNvPicPr>
             <a:picLocks noChangeAspect="1"/>
           </p:cNvPicPr>
@@ -4090,8 +4090,8 @@
         </p:blipFill>
         <p:spPr>
           <a:xfrm>
-            <a:off x="6051459" y="2308860"/>
-            <a:ext cx="88776" cy="114300"/>
+            <a:off x="5975534" y="2140527"/>
+            <a:ext cx="240627" cy="58189"/>
           </a:xfrm>
           <a:prstGeom prst="rect">
             <a:avLst/>
@@ -4106,7 +4106,7 @@
         </p:nvSpPr>
         <p:spPr>
           <a:xfrm>
-            <a:off x="5059558" y="2423160"/>
+            <a:off x="5059558" y="2198716"/>
             <a:ext cx="2072579" cy="274320"/>
           </a:xfrm>
           <a:prstGeom prst="rect">
@@ -4127,14 +4127,14 @@
                   <a:srgbClr val="404040"/>
                 </a:solidFill>
               </a:rPr>
-              <a:t>dポイント</a:t>
+              <a:t>SyncMe</a:t>
             </a:r>
           </a:p>
         </p:txBody>
       </p:sp>
       <p:pic>
         <p:nvPicPr>
-          <p:cNvPr id="38" name="Picture 37" descr="dマガジン.png"/>
+          <p:cNvPr id="38" name="Picture 37" descr="ahamo.png"/>
           <p:cNvPicPr>
             <a:picLocks noChangeAspect="1"/>
           </p:cNvPicPr>
@@ -4148,8 +4148,8 @@
         </p:blipFill>
         <p:spPr>
           <a:xfrm>
-            <a:off x="8339690" y="2308860"/>
-            <a:ext cx="114672" cy="114300"/>
+            <a:off x="8343463" y="2140527"/>
+            <a:ext cx="107127" cy="58189"/>
           </a:xfrm>
           <a:prstGeom prst="rect">
             <a:avLst/>
@@ -4164,7 +4164,7 @@
         </p:nvSpPr>
         <p:spPr>
           <a:xfrm>
-            <a:off x="7360737" y="2423160"/>
+            <a:off x="7360737" y="2198716"/>
             <a:ext cx="2072579" cy="274320"/>
           </a:xfrm>
           <a:prstGeom prst="rect">
@@ -4185,14 +4185,14 @@
                   <a:srgbClr val="404040"/>
                 </a:solidFill>
               </a:rPr>
-              <a:t>dマガジン</a:t>
+              <a:t>ahamo</a:t>
             </a:r>
           </a:p>
         </p:txBody>
       </p:sp>
       <p:pic>
         <p:nvPicPr>
-          <p:cNvPr id="40" name="Picture 39" descr="d払い.png"/>
+          <p:cNvPr id="40" name="Picture 39" descr="dポイント.png"/>
           <p:cNvPicPr>
             <a:picLocks noChangeAspect="1"/>
           </p:cNvPicPr>
@@ -4206,8 +4206,8 @@
         </p:blipFill>
         <p:spPr>
           <a:xfrm>
-            <a:off x="10517024" y="2308860"/>
-            <a:ext cx="362362" cy="114300"/>
+            <a:off x="10675608" y="2140527"/>
+            <a:ext cx="45195" cy="58189"/>
           </a:xfrm>
           <a:prstGeom prst="rect">
             <a:avLst/>
@@ -4222,7 +4222,7 @@
         </p:nvSpPr>
         <p:spPr>
           <a:xfrm>
-            <a:off x="9661916" y="2423160"/>
+            <a:off x="9661916" y="2198716"/>
             <a:ext cx="2072579" cy="274320"/>
           </a:xfrm>
           <a:prstGeom prst="rect">
@@ -4243,14 +4243,14 @@
                   <a:srgbClr val="404040"/>
                 </a:solidFill>
               </a:rPr>
-              <a:t>d払い</a:t>
+              <a:t>dポイント</a:t>
             </a:r>
           </a:p>
         </p:txBody>
       </p:sp>
       <p:pic>
         <p:nvPicPr>
-          <p:cNvPr id="42" name="Picture 41" descr="アサヒグループホールディングス.png"/>
+          <p:cNvPr id="42" name="Picture 41" descr="dマガジン.png"/>
           <p:cNvPicPr>
             <a:picLocks noChangeAspect="1"/>
           </p:cNvPicPr>
@@ -4264,8 +4264,8 @@
         </p:blipFill>
         <p:spPr>
           <a:xfrm>
-            <a:off x="1413081" y="2926080"/>
-            <a:ext cx="160817" cy="114300"/>
+            <a:off x="1464300" y="2701636"/>
+            <a:ext cx="58378" cy="58189"/>
           </a:xfrm>
           <a:prstGeom prst="rect">
             <a:avLst/>
@@ -4280,7 +4280,7 @@
         </p:nvSpPr>
         <p:spPr>
           <a:xfrm>
-            <a:off x="457200" y="3040380"/>
+            <a:off x="457200" y="2759825"/>
             <a:ext cx="2072579" cy="274320"/>
           </a:xfrm>
           <a:prstGeom prst="rect">
@@ -4301,14 +4301,14 @@
                   <a:srgbClr val="404040"/>
                 </a:solidFill>
               </a:rPr>
-              <a:t>アサヒグループホールディングス</a:t>
+              <a:t>dマガジン</a:t>
             </a:r>
           </a:p>
         </p:txBody>
       </p:sp>
       <p:pic>
         <p:nvPicPr>
-          <p:cNvPr id="44" name="Picture 43" descr="オリエンタルランド.png"/>
+          <p:cNvPr id="44" name="Picture 43" descr="d払い.png"/>
           <p:cNvPicPr>
             <a:picLocks noChangeAspect="1"/>
           </p:cNvPicPr>
@@ -4322,8 +4322,8 @@
         </p:blipFill>
         <p:spPr>
           <a:xfrm>
-            <a:off x="3685564" y="2926080"/>
-            <a:ext cx="218209" cy="114300"/>
+            <a:off x="3702431" y="2701636"/>
+            <a:ext cx="184475" cy="58189"/>
           </a:xfrm>
           <a:prstGeom prst="rect">
             <a:avLst/>
@@ -4338,7 +4338,7 @@
         </p:nvSpPr>
         <p:spPr>
           <a:xfrm>
-            <a:off x="2758379" y="3040380"/>
+            <a:off x="2758379" y="2759825"/>
             <a:ext cx="2072579" cy="274320"/>
           </a:xfrm>
           <a:prstGeom prst="rect">
@@ -4359,14 +4359,14 @@
                   <a:srgbClr val="404040"/>
                 </a:solidFill>
               </a:rPr>
-              <a:t>オリエンタルランド</a:t>
+              <a:t>d払い</a:t>
             </a:r>
           </a:p>
         </p:txBody>
       </p:sp>
       <p:pic>
         <p:nvPicPr>
-          <p:cNvPr id="46" name="Picture 45" descr="オリンパス.png"/>
+          <p:cNvPr id="46" name="Picture 45" descr="アサヒグループホールディングス.png"/>
           <p:cNvPicPr>
             <a:picLocks noChangeAspect="1"/>
           </p:cNvPicPr>
@@ -4380,8 +4380,8 @@
         </p:blipFill>
         <p:spPr>
           <a:xfrm>
-            <a:off x="5836709" y="2926080"/>
-            <a:ext cx="518276" cy="114300"/>
+            <a:off x="6054912" y="2701636"/>
+            <a:ext cx="81870" cy="58189"/>
           </a:xfrm>
           <a:prstGeom prst="rect">
             <a:avLst/>
@@ -4396,7 +4396,7 @@
         </p:nvSpPr>
         <p:spPr>
           <a:xfrm>
-            <a:off x="5059558" y="3040380"/>
+            <a:off x="5059558" y="2759825"/>
             <a:ext cx="2072579" cy="274320"/>
           </a:xfrm>
           <a:prstGeom prst="rect">
@@ -4417,14 +4417,14 @@
                   <a:srgbClr val="404040"/>
                 </a:solidFill>
               </a:rPr>
-              <a:t>オリンパス</a:t>
+              <a:t>アサヒグループホールディングス</a:t>
             </a:r>
           </a:p>
         </p:txBody>
       </p:sp>
       <p:pic>
         <p:nvPicPr>
-          <p:cNvPr id="48" name="Picture 47" descr="キーエンス.png"/>
+          <p:cNvPr id="48" name="Picture 47" descr="オリエンタルランド.png"/>
           <p:cNvPicPr>
             <a:picLocks noChangeAspect="1"/>
           </p:cNvPicPr>
@@ -4438,8 +4438,8 @@
         </p:blipFill>
         <p:spPr>
           <a:xfrm>
-            <a:off x="8130908" y="2926080"/>
-            <a:ext cx="532236" cy="114300"/>
+            <a:off x="8341482" y="2701636"/>
+            <a:ext cx="111088" cy="58189"/>
           </a:xfrm>
           <a:prstGeom prst="rect">
             <a:avLst/>
@@ -4454,7 +4454,7 @@
         </p:nvSpPr>
         <p:spPr>
           <a:xfrm>
-            <a:off x="7360737" y="3040380"/>
+            <a:off x="7360737" y="2759825"/>
             <a:ext cx="2072579" cy="274320"/>
           </a:xfrm>
           <a:prstGeom prst="rect">
@@ -4475,14 +4475,14 @@
                   <a:srgbClr val="404040"/>
                 </a:solidFill>
               </a:rPr>
-              <a:t>キーエンス</a:t>
+              <a:t>オリエンタルランド</a:t>
             </a:r>
           </a:p>
         </p:txBody>
       </p:sp>
       <p:pic>
         <p:nvPicPr>
-          <p:cNvPr id="50" name="Picture 49" descr="コマツ.png"/>
+          <p:cNvPr id="50" name="Picture 49" descr="オリンパス.png"/>
           <p:cNvPicPr>
             <a:picLocks noChangeAspect="1"/>
           </p:cNvPicPr>
@@ -4496,8 +4496,8 @@
         </p:blipFill>
         <p:spPr>
           <a:xfrm>
-            <a:off x="10436948" y="2926080"/>
-            <a:ext cx="522514" cy="114300"/>
+            <a:off x="10566281" y="2701636"/>
+            <a:ext cx="263849" cy="58189"/>
           </a:xfrm>
           <a:prstGeom prst="rect">
             <a:avLst/>
@@ -4512,7 +4512,7 @@
         </p:nvSpPr>
         <p:spPr>
           <a:xfrm>
-            <a:off x="9661916" y="3040380"/>
+            <a:off x="9661916" y="2759825"/>
             <a:ext cx="2072579" cy="274320"/>
           </a:xfrm>
           <a:prstGeom prst="rect">
@@ -4533,14 +4533,14 @@
                   <a:srgbClr val="404040"/>
                 </a:solidFill>
               </a:rPr>
-              <a:t>コマツ</a:t>
+              <a:t>オリンパス</a:t>
             </a:r>
           </a:p>
         </p:txBody>
       </p:sp>
       <p:pic>
         <p:nvPicPr>
-          <p:cNvPr id="52" name="Picture 51" descr="セコム.png"/>
+          <p:cNvPr id="52" name="Picture 51" descr="キーエンス.png"/>
           <p:cNvPicPr>
             <a:picLocks noChangeAspect="1"/>
           </p:cNvPicPr>
@@ -4554,8 +4554,8 @@
         </p:blipFill>
         <p:spPr>
           <a:xfrm>
-            <a:off x="1345520" y="3543300"/>
-            <a:ext cx="295939" cy="114300"/>
+            <a:off x="1358011" y="3262745"/>
+            <a:ext cx="270956" cy="58189"/>
           </a:xfrm>
           <a:prstGeom prst="rect">
             <a:avLst/>
@@ -4570,7 +4570,7 @@
         </p:nvSpPr>
         <p:spPr>
           <a:xfrm>
-            <a:off x="457200" y="3657600"/>
+            <a:off x="457200" y="3320934"/>
             <a:ext cx="2072579" cy="274320"/>
           </a:xfrm>
           <a:prstGeom prst="rect">
@@ -4591,14 +4591,14 @@
                   <a:srgbClr val="404040"/>
                 </a:solidFill>
               </a:rPr>
-              <a:t>セコム</a:t>
+              <a:t>キーエンス</a:t>
             </a:r>
           </a:p>
         </p:txBody>
       </p:sp>
       <p:pic>
         <p:nvPicPr>
-          <p:cNvPr id="54" name="Picture 53" descr="セブン&amp;アイ・ホールディングス.png"/>
+          <p:cNvPr id="54" name="Picture 53" descr="コマツ.png"/>
           <p:cNvPicPr>
             <a:picLocks noChangeAspect="1"/>
           </p:cNvPicPr>
@@ -4612,8 +4612,8 @@
         </p:blipFill>
         <p:spPr>
           <a:xfrm>
-            <a:off x="3731449" y="3543300"/>
-            <a:ext cx="126438" cy="114300"/>
+            <a:off x="3661665" y="3262745"/>
+            <a:ext cx="266007" cy="58189"/>
           </a:xfrm>
           <a:prstGeom prst="rect">
             <a:avLst/>
@@ -4628,7 +4628,7 @@
         </p:nvSpPr>
         <p:spPr>
           <a:xfrm>
-            <a:off x="2758379" y="3657600"/>
+            <a:off x="2758379" y="3320934"/>
             <a:ext cx="2072579" cy="274320"/>
           </a:xfrm>
           <a:prstGeom prst="rect">
@@ -4649,14 +4649,14 @@
                   <a:srgbClr val="404040"/>
                 </a:solidFill>
               </a:rPr>
-              <a:t>セブン&amp;アイ・ホールディングス</a:t>
+              <a:t>コマツ</a:t>
             </a:r>
           </a:p>
         </p:txBody>
       </p:sp>
       <p:pic>
         <p:nvPicPr>
-          <p:cNvPr id="56" name="Picture 55" descr="ソニーグループ.png"/>
+          <p:cNvPr id="56" name="Picture 55" descr="セコム.png"/>
           <p:cNvPicPr>
             <a:picLocks noChangeAspect="1"/>
           </p:cNvPicPr>
@@ -4670,8 +4670,8 @@
         </p:blipFill>
         <p:spPr>
           <a:xfrm>
-            <a:off x="5822681" y="3543300"/>
-            <a:ext cx="546333" cy="114300"/>
+            <a:off x="6020517" y="3262745"/>
+            <a:ext cx="150660" cy="58189"/>
           </a:xfrm>
           <a:prstGeom prst="rect">
             <a:avLst/>
@@ -4686,7 +4686,7 @@
         </p:nvSpPr>
         <p:spPr>
           <a:xfrm>
-            <a:off x="5059558" y="3657600"/>
+            <a:off x="5059558" y="3320934"/>
             <a:ext cx="2072579" cy="274320"/>
           </a:xfrm>
           <a:prstGeom prst="rect">
@@ -4707,14 +4707,14 @@
                   <a:srgbClr val="404040"/>
                 </a:solidFill>
               </a:rPr>
-              <a:t>ソニーグループ</a:t>
+              <a:t>セコム</a:t>
             </a:r>
           </a:p>
         </p:txBody>
       </p:sp>
       <p:pic>
         <p:nvPicPr>
-          <p:cNvPr id="58" name="Picture 57" descr="ダイキン工業.png"/>
+          <p:cNvPr id="58" name="Picture 57" descr="セブン&amp;アイ・ホールディングス.png"/>
           <p:cNvPicPr>
             <a:picLocks noChangeAspect="1"/>
           </p:cNvPicPr>
@@ -4728,8 +4728,8 @@
         </p:blipFill>
         <p:spPr>
           <a:xfrm>
-            <a:off x="8159745" y="3543300"/>
-            <a:ext cx="474562" cy="114300"/>
+            <a:off x="8364842" y="3262745"/>
+            <a:ext cx="64368" cy="58189"/>
           </a:xfrm>
           <a:prstGeom prst="rect">
             <a:avLst/>
@@ -4744,7 +4744,7 @@
         </p:nvSpPr>
         <p:spPr>
           <a:xfrm>
-            <a:off x="7360737" y="3657600"/>
+            <a:off x="7360737" y="3320934"/>
             <a:ext cx="2072579" cy="274320"/>
           </a:xfrm>
           <a:prstGeom prst="rect">
@@ -4765,14 +4765,14 @@
                   <a:srgbClr val="404040"/>
                 </a:solidFill>
               </a:rPr>
-              <a:t>ダイキン工業</a:t>
+              <a:t>セブン&amp;アイ・ホールディングス</a:t>
             </a:r>
           </a:p>
         </p:txBody>
       </p:sp>
       <p:pic>
         <p:nvPicPr>
-          <p:cNvPr id="60" name="Picture 59" descr="トヨタ自動車.png"/>
+          <p:cNvPr id="60" name="Picture 59" descr="ソニーグループ.png"/>
           <p:cNvPicPr>
             <a:picLocks noChangeAspect="1"/>
           </p:cNvPicPr>
@@ -4786,8 +4786,8 @@
         </p:blipFill>
         <p:spPr>
           <a:xfrm>
-            <a:off x="10615937" y="3543300"/>
-            <a:ext cx="164536" cy="114300"/>
+            <a:off x="10559139" y="3262745"/>
+            <a:ext cx="278133" cy="58189"/>
           </a:xfrm>
           <a:prstGeom prst="rect">
             <a:avLst/>
@@ -4802,7 +4802,7 @@
         </p:nvSpPr>
         <p:spPr>
           <a:xfrm>
-            <a:off x="9661916" y="3657600"/>
+            <a:off x="9661916" y="3320934"/>
             <a:ext cx="2072579" cy="274320"/>
           </a:xfrm>
           <a:prstGeom prst="rect">
@@ -4823,14 +4823,14 @@
                   <a:srgbClr val="404040"/>
                 </a:solidFill>
               </a:rPr>
-              <a:t>トヨタ自動車</a:t>
+              <a:t>ソニーグループ</a:t>
             </a:r>
           </a:p>
         </p:txBody>
       </p:sp>
       <p:pic>
         <p:nvPicPr>
-          <p:cNvPr id="62" name="Picture 61" descr="ドコモの銀行.png"/>
+          <p:cNvPr id="62" name="Picture 61" descr="ダイキン工業.png"/>
           <p:cNvPicPr>
             <a:picLocks noChangeAspect="1"/>
           </p:cNvPicPr>
@@ -4844,8 +4844,8 @@
         </p:blipFill>
         <p:spPr>
           <a:xfrm>
-            <a:off x="1306323" y="4160520"/>
-            <a:ext cx="374332" cy="114300"/>
+            <a:off x="1372692" y="3823854"/>
+            <a:ext cx="241595" cy="58189"/>
           </a:xfrm>
           <a:prstGeom prst="rect">
             <a:avLst/>
@@ -4860,7 +4860,7 @@
         </p:nvSpPr>
         <p:spPr>
           <a:xfrm>
-            <a:off x="457200" y="4274820"/>
+            <a:off x="457200" y="3882043"/>
             <a:ext cx="2072579" cy="274320"/>
           </a:xfrm>
           <a:prstGeom prst="rect">
@@ -4881,14 +4881,14 @@
                   <a:srgbClr val="404040"/>
                 </a:solidFill>
               </a:rPr>
-              <a:t>ドコモの銀行</a:t>
+              <a:t>ダイキン工業</a:t>
             </a:r>
           </a:p>
         </p:txBody>
       </p:sp>
       <p:pic>
         <p:nvPicPr>
-          <p:cNvPr id="64" name="Picture 63" descr="ドコモ光.png"/>
+          <p:cNvPr id="64" name="Picture 63" descr="トヨタ自動車.png"/>
           <p:cNvPicPr>
             <a:picLocks noChangeAspect="1"/>
           </p:cNvPicPr>
@@ -4902,8 +4902,8 @@
         </p:blipFill>
         <p:spPr>
           <a:xfrm>
-            <a:off x="3612668" y="4160520"/>
-            <a:ext cx="364001" cy="114300"/>
+            <a:off x="3752786" y="3823854"/>
+            <a:ext cx="83764" cy="58189"/>
           </a:xfrm>
           <a:prstGeom prst="rect">
             <a:avLst/>
@@ -4918,7 +4918,7 @@
         </p:nvSpPr>
         <p:spPr>
           <a:xfrm>
-            <a:off x="2758379" y="4274820"/>
+            <a:off x="2758379" y="3882043"/>
             <a:ext cx="2072579" cy="274320"/>
           </a:xfrm>
           <a:prstGeom prst="rect">
@@ -4939,14 +4939,14 @@
                   <a:srgbClr val="404040"/>
                 </a:solidFill>
               </a:rPr>
-              <a:t>ドコモ光</a:t>
+              <a:t>トヨタ自動車</a:t>
             </a:r>
           </a:p>
         </p:txBody>
       </p:sp>
       <p:pic>
         <p:nvPicPr>
-          <p:cNvPr id="66" name="Picture 65" descr="パナソニック.png"/>
+          <p:cNvPr id="66" name="Picture 65" descr="ドコモの銀行.png"/>
           <p:cNvPicPr>
             <a:picLocks noChangeAspect="1"/>
           </p:cNvPicPr>
@@ -4960,8 +4960,8 @@
         </p:blipFill>
         <p:spPr>
           <a:xfrm>
-            <a:off x="5781522" y="4160520"/>
-            <a:ext cx="628650" cy="114300"/>
+            <a:off x="6000563" y="3823854"/>
+            <a:ext cx="190569" cy="58189"/>
           </a:xfrm>
           <a:prstGeom prst="rect">
             <a:avLst/>
@@ -4976,7 +4976,7 @@
         </p:nvSpPr>
         <p:spPr>
           <a:xfrm>
-            <a:off x="5059558" y="4274820"/>
+            <a:off x="5059558" y="3882043"/>
             <a:ext cx="2072579" cy="274320"/>
           </a:xfrm>
           <a:prstGeom prst="rect">
@@ -4997,14 +4997,14 @@
                   <a:srgbClr val="404040"/>
                 </a:solidFill>
               </a:rPr>
-              <a:t>パナソニック</a:t>
+              <a:t>ドコモの銀行</a:t>
             </a:r>
           </a:p>
         </p:txBody>
       </p:sp>
       <p:pic>
         <p:nvPicPr>
-          <p:cNvPr id="68" name="Picture 67" descr="ファーストリテイリング.png"/>
+          <p:cNvPr id="68" name="Picture 67" descr="ドコモ光.png"/>
           <p:cNvPicPr>
             <a:picLocks noChangeAspect="1"/>
           </p:cNvPicPr>
@@ -5018,8 +5018,8 @@
         </p:blipFill>
         <p:spPr>
           <a:xfrm>
-            <a:off x="8283520" y="4160520"/>
-            <a:ext cx="227012" cy="114300"/>
+            <a:off x="8304372" y="3823854"/>
+            <a:ext cx="185309" cy="58189"/>
           </a:xfrm>
           <a:prstGeom prst="rect">
             <a:avLst/>
@@ -5034,7 +5034,7 @@
         </p:nvSpPr>
         <p:spPr>
           <a:xfrm>
-            <a:off x="7360737" y="4274820"/>
+            <a:off x="7360737" y="3882043"/>
             <a:ext cx="2072579" cy="274320"/>
           </a:xfrm>
           <a:prstGeom prst="rect">
@@ -5055,14 +5055,14 @@
                   <a:srgbClr val="404040"/>
                 </a:solidFill>
               </a:rPr>
-              <a:t>ファーストリテイリング</a:t>
+              <a:t>ドコモ光</a:t>
             </a:r>
           </a:p>
         </p:txBody>
       </p:sp>
       <p:pic>
         <p:nvPicPr>
-          <p:cNvPr id="70" name="Picture 69" descr="ホンダ.png"/>
+          <p:cNvPr id="70" name="Picture 69" descr="パナソニック.png"/>
           <p:cNvPicPr>
             <a:picLocks noChangeAspect="1"/>
           </p:cNvPicPr>
@@ -5076,8 +5076,8 @@
         </p:blipFill>
         <p:spPr>
           <a:xfrm>
-            <a:off x="10341511" y="4160520"/>
-            <a:ext cx="713389" cy="114300"/>
+            <a:off x="10538186" y="3823854"/>
+            <a:ext cx="320039" cy="58189"/>
           </a:xfrm>
           <a:prstGeom prst="rect">
             <a:avLst/>
@@ -5092,7 +5092,7 @@
         </p:nvSpPr>
         <p:spPr>
           <a:xfrm>
-            <a:off x="9661916" y="4274820"/>
+            <a:off x="9661916" y="3882043"/>
             <a:ext cx="2072579" cy="274320"/>
           </a:xfrm>
           <a:prstGeom prst="rect">
@@ -5113,14 +5113,14 @@
                   <a:srgbClr val="404040"/>
                 </a:solidFill>
               </a:rPr>
-              <a:t>ホンダ</a:t>
+              <a:t>パナソニック</a:t>
             </a:r>
           </a:p>
         </p:txBody>
       </p:sp>
       <p:pic>
         <p:nvPicPr>
-          <p:cNvPr id="72" name="Picture 71" descr="リクルートホールディングス.png"/>
+          <p:cNvPr id="72" name="Picture 71" descr="ファーストリテイリング.png"/>
           <p:cNvPicPr>
             <a:picLocks noChangeAspect="1"/>
           </p:cNvPicPr>
@@ -5134,8 +5134,8 @@
         </p:blipFill>
         <p:spPr>
           <a:xfrm>
-            <a:off x="1297020" y="4777740"/>
-            <a:ext cx="392939" cy="114300"/>
+            <a:off x="1435705" y="4384963"/>
+            <a:ext cx="115569" cy="58189"/>
           </a:xfrm>
           <a:prstGeom prst="rect">
             <a:avLst/>
@@ -5150,7 +5150,7 @@
         </p:nvSpPr>
         <p:spPr>
           <a:xfrm>
-            <a:off x="457200" y="4892040"/>
+            <a:off x="457200" y="4443152"/>
             <a:ext cx="2072579" cy="274320"/>
           </a:xfrm>
           <a:prstGeom prst="rect">
@@ -5171,14 +5171,14 @@
                   <a:srgbClr val="404040"/>
                 </a:solidFill>
               </a:rPr>
-              <a:t>リクルートホールディングス</a:t>
+              <a:t>ファーストリテイリング</a:t>
             </a:r>
           </a:p>
         </p:txBody>
       </p:sp>
       <p:pic>
         <p:nvPicPr>
-          <p:cNvPr id="74" name="Picture 73" descr="三井住友銀行.png"/>
+          <p:cNvPr id="74" name="Picture 73" descr="ホンダ.png"/>
           <p:cNvPicPr>
             <a:picLocks noChangeAspect="1"/>
           </p:cNvPicPr>
@@ -5192,8 +5192,8 @@
         </p:blipFill>
         <p:spPr>
           <a:xfrm>
-            <a:off x="3604663" y="4777740"/>
-            <a:ext cx="380010" cy="114300"/>
+            <a:off x="3613078" y="4384963"/>
+            <a:ext cx="363180" cy="58189"/>
           </a:xfrm>
           <a:prstGeom prst="rect">
             <a:avLst/>
@@ -5208,7 +5208,7 @@
         </p:nvSpPr>
         <p:spPr>
           <a:xfrm>
-            <a:off x="2758379" y="4892040"/>
+            <a:off x="2758379" y="4443152"/>
             <a:ext cx="2072579" cy="274320"/>
           </a:xfrm>
           <a:prstGeom prst="rect">
@@ -5229,14 +5229,14 @@
                   <a:srgbClr val="404040"/>
                 </a:solidFill>
               </a:rPr>
-              <a:t>三井住友銀行</a:t>
+              <a:t>ホンダ</a:t>
             </a:r>
           </a:p>
         </p:txBody>
       </p:sp>
       <p:pic>
         <p:nvPicPr>
-          <p:cNvPr id="76" name="Picture 75" descr="三菱電機.png"/>
+          <p:cNvPr id="76" name="Picture 75" descr="リクルートホールディングス.png"/>
           <p:cNvPicPr>
             <a:picLocks noChangeAspect="1"/>
           </p:cNvPicPr>
@@ -5250,8 +5250,8 @@
         </p:blipFill>
         <p:spPr>
           <a:xfrm>
-            <a:off x="5920001" y="4777740"/>
-            <a:ext cx="351692" cy="114300"/>
+            <a:off x="5995827" y="4384963"/>
+            <a:ext cx="200041" cy="58189"/>
           </a:xfrm>
           <a:prstGeom prst="rect">
             <a:avLst/>
@@ -5266,7 +5266,7 @@
         </p:nvSpPr>
         <p:spPr>
           <a:xfrm>
-            <a:off x="5059558" y="4892040"/>
+            <a:off x="5059558" y="4443152"/>
             <a:ext cx="2072579" cy="274320"/>
           </a:xfrm>
           <a:prstGeom prst="rect">
@@ -5287,14 +5287,14 @@
                   <a:srgbClr val="404040"/>
                 </a:solidFill>
               </a:rPr>
-              <a:t>三菱電機</a:t>
+              <a:t>リクルートホールディングス</a:t>
             </a:r>
           </a:p>
         </p:txBody>
       </p:sp>
       <p:pic>
         <p:nvPicPr>
-          <p:cNvPr id="78" name="Picture 77" descr="任天堂.png"/>
+          <p:cNvPr id="78" name="Picture 77" descr="三井住友銀行.png"/>
           <p:cNvPicPr>
             <a:picLocks noChangeAspect="1"/>
           </p:cNvPicPr>
@@ -5308,8 +5308,8 @@
         </p:blipFill>
         <p:spPr>
           <a:xfrm>
-            <a:off x="8189503" y="4777740"/>
-            <a:ext cx="415046" cy="114300"/>
+            <a:off x="8300297" y="4384963"/>
+            <a:ext cx="193459" cy="58189"/>
           </a:xfrm>
           <a:prstGeom prst="rect">
             <a:avLst/>
@@ -5324,7 +5324,7 @@
         </p:nvSpPr>
         <p:spPr>
           <a:xfrm>
-            <a:off x="7360737" y="4892040"/>
+            <a:off x="7360737" y="4443152"/>
             <a:ext cx="2072579" cy="274320"/>
           </a:xfrm>
           <a:prstGeom prst="rect">
@@ -5345,14 +5345,14 @@
                   <a:srgbClr val="404040"/>
                 </a:solidFill>
               </a:rPr>
-              <a:t>任天堂</a:t>
+              <a:t>三井住友銀行</a:t>
             </a:r>
           </a:p>
         </p:txBody>
       </p:sp>
       <p:pic>
         <p:nvPicPr>
-          <p:cNvPr id="80" name="Picture 79" descr="味の素.png"/>
+          <p:cNvPr id="80" name="Picture 79" descr="三菱電機.png"/>
           <p:cNvPicPr>
             <a:picLocks noChangeAspect="1"/>
           </p:cNvPicPr>
@@ -5366,8 +5366,8 @@
         </p:blipFill>
         <p:spPr>
           <a:xfrm>
-            <a:off x="10345780" y="4777740"/>
-            <a:ext cx="704850" cy="114300"/>
+            <a:off x="10608684" y="4384963"/>
+            <a:ext cx="179043" cy="58189"/>
           </a:xfrm>
           <a:prstGeom prst="rect">
             <a:avLst/>
@@ -5382,7 +5382,7 @@
         </p:nvSpPr>
         <p:spPr>
           <a:xfrm>
-            <a:off x="9661916" y="4892040"/>
+            <a:off x="9661916" y="4443152"/>
             <a:ext cx="2072579" cy="274320"/>
           </a:xfrm>
           <a:prstGeom prst="rect">
@@ -5403,14 +5403,14 @@
                   <a:srgbClr val="404040"/>
                 </a:solidFill>
               </a:rPr>
-              <a:t>味の素</a:t>
+              <a:t>三菱電機</a:t>
             </a:r>
           </a:p>
         </p:txBody>
       </p:sp>
       <p:pic>
         <p:nvPicPr>
-          <p:cNvPr id="82" name="Picture 81" descr="大和ハウス工業.png"/>
+          <p:cNvPr id="82" name="Picture 81" descr="任天堂.png"/>
           <p:cNvPicPr>
             <a:picLocks noChangeAspect="1"/>
           </p:cNvPicPr>
@@ -5424,8 +5424,8 @@
         </p:blipFill>
         <p:spPr>
           <a:xfrm>
-            <a:off x="1421860" y="5394960"/>
-            <a:ext cx="143259" cy="114300"/>
+            <a:off x="1387841" y="4946072"/>
+            <a:ext cx="211296" cy="58189"/>
           </a:xfrm>
           <a:prstGeom prst="rect">
             <a:avLst/>
@@ -5440,7 +5440,7 @@
         </p:nvSpPr>
         <p:spPr>
           <a:xfrm>
-            <a:off x="457200" y="5509260"/>
+            <a:off x="457200" y="5004261"/>
             <a:ext cx="2072579" cy="274320"/>
           </a:xfrm>
           <a:prstGeom prst="rect">
@@ -5461,14 +5461,14 @@
                   <a:srgbClr val="404040"/>
                 </a:solidFill>
               </a:rPr>
-              <a:t>大和ハウス工業</a:t>
+              <a:t>任天堂</a:t>
             </a:r>
           </a:p>
         </p:txBody>
       </p:sp>
       <p:pic>
         <p:nvPicPr>
-          <p:cNvPr id="84" name="Picture 83" descr="富士通.png"/>
+          <p:cNvPr id="84" name="Picture 83" descr="味の素.png"/>
           <p:cNvPicPr>
             <a:picLocks noChangeAspect="1"/>
           </p:cNvPicPr>
@@ -5482,8 +5482,8 @@
         </p:blipFill>
         <p:spPr>
           <a:xfrm>
-            <a:off x="3681910" y="5394960"/>
-            <a:ext cx="225516" cy="114300"/>
+            <a:off x="3615252" y="4946072"/>
+            <a:ext cx="358832" cy="58189"/>
           </a:xfrm>
           <a:prstGeom prst="rect">
             <a:avLst/>
@@ -5498,7 +5498,7 @@
         </p:nvSpPr>
         <p:spPr>
           <a:xfrm>
-            <a:off x="2758379" y="5509260"/>
+            <a:off x="2758379" y="5004261"/>
             <a:ext cx="2072579" cy="274320"/>
           </a:xfrm>
           <a:prstGeom prst="rect">
@@ -5519,14 +5519,14 @@
                   <a:srgbClr val="404040"/>
                 </a:solidFill>
               </a:rPr>
-              <a:t>富士通</a:t>
+              <a:t>味の素</a:t>
             </a:r>
           </a:p>
         </p:txBody>
       </p:sp>
       <p:pic>
         <p:nvPicPr>
-          <p:cNvPr id="86" name="Picture 85" descr="日本郵政.png"/>
+          <p:cNvPr id="86" name="Picture 85" descr="大和ハウス工業.png"/>
           <p:cNvPicPr>
             <a:picLocks noChangeAspect="1"/>
           </p:cNvPicPr>
@@ -5540,8 +5540,8 @@
         </p:blipFill>
         <p:spPr>
           <a:xfrm>
-            <a:off x="6042225" y="5394960"/>
-            <a:ext cx="107244" cy="114300"/>
+            <a:off x="6059381" y="4946072"/>
+            <a:ext cx="72932" cy="58189"/>
           </a:xfrm>
           <a:prstGeom prst="rect">
             <a:avLst/>
@@ -5556,7 +5556,7 @@
         </p:nvSpPr>
         <p:spPr>
           <a:xfrm>
-            <a:off x="5059558" y="5509260"/>
+            <a:off x="5059558" y="5004261"/>
             <a:ext cx="2072579" cy="274320"/>
           </a:xfrm>
           <a:prstGeom prst="rect">
@@ -5577,14 +5577,14 @@
                   <a:srgbClr val="404040"/>
                 </a:solidFill>
               </a:rPr>
-              <a:t>日本郵政</a:t>
+              <a:t>大和ハウス工業</a:t>
             </a:r>
           </a:p>
         </p:txBody>
       </p:sp>
       <p:pic>
         <p:nvPicPr>
-          <p:cNvPr id="88" name="Picture 87" descr="日立製作所.png"/>
+          <p:cNvPr id="88" name="Picture 87" descr="富士通.png"/>
           <p:cNvPicPr>
             <a:picLocks noChangeAspect="1"/>
           </p:cNvPicPr>
@@ -5598,8 +5598,8 @@
         </p:blipFill>
         <p:spPr>
           <a:xfrm>
-            <a:off x="8097974" y="5394960"/>
-            <a:ext cx="598104" cy="114300"/>
+            <a:off x="8339622" y="4946072"/>
+            <a:ext cx="114808" cy="58189"/>
           </a:xfrm>
           <a:prstGeom prst="rect">
             <a:avLst/>
@@ -5614,7 +5614,7 @@
         </p:nvSpPr>
         <p:spPr>
           <a:xfrm>
-            <a:off x="7360737" y="5509260"/>
+            <a:off x="7360737" y="5004261"/>
             <a:ext cx="2072579" cy="274320"/>
           </a:xfrm>
           <a:prstGeom prst="rect">
@@ -5635,14 +5635,14 @@
                   <a:srgbClr val="404040"/>
                 </a:solidFill>
               </a:rPr>
-              <a:t>日立製作所</a:t>
+              <a:t>富士通</a:t>
             </a:r>
           </a:p>
         </p:txBody>
       </p:sp>
       <p:pic>
         <p:nvPicPr>
-          <p:cNvPr id="90" name="Picture 89" descr="東京ガス.png"/>
+          <p:cNvPr id="90" name="Picture 89" descr="日本郵政.png"/>
           <p:cNvPicPr>
             <a:picLocks noChangeAspect="1"/>
           </p:cNvPicPr>
@@ -5656,8 +5656,8 @@
         </p:blipFill>
         <p:spPr>
           <a:xfrm>
-            <a:off x="10424362" y="5394960"/>
-            <a:ext cx="547687" cy="114300"/>
+            <a:off x="10670907" y="4946072"/>
+            <a:ext cx="54597" cy="58189"/>
           </a:xfrm>
           <a:prstGeom prst="rect">
             <a:avLst/>
@@ -5672,7 +5672,7 @@
         </p:nvSpPr>
         <p:spPr>
           <a:xfrm>
-            <a:off x="9661916" y="5509260"/>
+            <a:off x="9661916" y="5004261"/>
             <a:ext cx="2072579" cy="274320"/>
           </a:xfrm>
           <a:prstGeom prst="rect">
@@ -5693,14 +5693,14 @@
                   <a:srgbClr val="404040"/>
                 </a:solidFill>
               </a:rPr>
-              <a:t>東京ガス</a:t>
+              <a:t>日本郵政</a:t>
             </a:r>
           </a:p>
         </p:txBody>
       </p:sp>
       <p:pic>
         <p:nvPicPr>
-          <p:cNvPr id="92" name="Picture 91" descr="楽天.png"/>
+          <p:cNvPr id="92" name="Picture 91" descr="日立製作所.png"/>
           <p:cNvPicPr>
             <a:picLocks noChangeAspect="1"/>
           </p:cNvPicPr>
@@ -5714,8 +5714,8 @@
         </p:blipFill>
         <p:spPr>
           <a:xfrm>
-            <a:off x="1317691" y="6012180"/>
-            <a:ext cx="351596" cy="114300"/>
+            <a:off x="1341245" y="5507181"/>
+            <a:ext cx="304489" cy="58189"/>
           </a:xfrm>
           <a:prstGeom prst="rect">
             <a:avLst/>
@@ -5730,7 +5730,7 @@
         </p:nvSpPr>
         <p:spPr>
           <a:xfrm>
-            <a:off x="457200" y="6126480"/>
+            <a:off x="457200" y="5565370"/>
             <a:ext cx="2072579" cy="274320"/>
           </a:xfrm>
           <a:prstGeom prst="rect">
@@ -5751,14 +5751,14 @@
                   <a:srgbClr val="404040"/>
                 </a:solidFill>
               </a:rPr>
-              <a:t>楽天</a:t>
+              <a:t>日立製作所</a:t>
             </a:r>
           </a:p>
         </p:txBody>
       </p:sp>
       <p:pic>
         <p:nvPicPr>
-          <p:cNvPr id="94" name="Picture 93" descr="楽天グループ.png"/>
+          <p:cNvPr id="94" name="Picture 93" descr="東京ガス.png"/>
           <p:cNvPicPr>
             <a:picLocks noChangeAspect="1"/>
           </p:cNvPicPr>
@@ -5772,8 +5772,8 @@
         </p:blipFill>
         <p:spPr>
           <a:xfrm>
-            <a:off x="3620712" y="6012180"/>
-            <a:ext cx="347913" cy="114300"/>
+            <a:off x="3655257" y="5507181"/>
+            <a:ext cx="278822" cy="58189"/>
           </a:xfrm>
           <a:prstGeom prst="rect">
             <a:avLst/>
@@ -5788,7 +5788,7 @@
         </p:nvSpPr>
         <p:spPr>
           <a:xfrm>
-            <a:off x="2758379" y="6126480"/>
+            <a:off x="2758379" y="5565370"/>
             <a:ext cx="2072579" cy="274320"/>
           </a:xfrm>
           <a:prstGeom prst="rect">
@@ -5809,14 +5809,14 @@
                   <a:srgbClr val="404040"/>
                 </a:solidFill>
               </a:rPr>
-              <a:t>楽天グループ</a:t>
+              <a:t>東京ガス</a:t>
             </a:r>
           </a:p>
         </p:txBody>
       </p:sp>
       <p:pic>
         <p:nvPicPr>
-          <p:cNvPr id="96" name="Picture 95" descr="花王.png"/>
+          <p:cNvPr id="96" name="Picture 95" descr="楽天.png"/>
           <p:cNvPicPr>
             <a:picLocks noChangeAspect="1"/>
           </p:cNvPicPr>
@@ -5830,8 +5830,8 @@
         </p:blipFill>
         <p:spPr>
           <a:xfrm>
-            <a:off x="5995083" y="6012180"/>
-            <a:ext cx="201528" cy="114300"/>
+            <a:off x="6006350" y="5507181"/>
+            <a:ext cx="178994" cy="58189"/>
           </a:xfrm>
           <a:prstGeom prst="rect">
             <a:avLst/>
@@ -5846,7 +5846,7 @@
         </p:nvSpPr>
         <p:spPr>
           <a:xfrm>
-            <a:off x="5059558" y="6126480"/>
+            <a:off x="5059558" y="5565370"/>
             <a:ext cx="2072579" cy="274320"/>
           </a:xfrm>
           <a:prstGeom prst="rect">
@@ -5867,14 +5867,14 @@
                   <a:srgbClr val="404040"/>
                 </a:solidFill>
               </a:rPr>
-              <a:t>花王</a:t>
+              <a:t>楽天</a:t>
             </a:r>
           </a:p>
         </p:txBody>
       </p:sp>
       <p:pic>
         <p:nvPicPr>
-          <p:cNvPr id="98" name="Picture 97" descr="資生堂.png"/>
+          <p:cNvPr id="98" name="Picture 97" descr="楽天グループ.png"/>
           <p:cNvPicPr>
             <a:picLocks noChangeAspect="1"/>
           </p:cNvPicPr>
@@ -5888,8 +5888,8 @@
         </p:blipFill>
         <p:spPr>
           <a:xfrm>
-            <a:off x="8111555" y="6012180"/>
-            <a:ext cx="570942" cy="114299"/>
+            <a:off x="8308467" y="5507181"/>
+            <a:ext cx="177119" cy="58189"/>
           </a:xfrm>
           <a:prstGeom prst="rect">
             <a:avLst/>
@@ -5904,7 +5904,7 @@
         </p:nvSpPr>
         <p:spPr>
           <a:xfrm>
-            <a:off x="7360737" y="6126480"/>
+            <a:off x="7360737" y="5565370"/>
             <a:ext cx="2072579" cy="274320"/>
           </a:xfrm>
           <a:prstGeom prst="rect">
@@ -5925,14 +5925,14 @@
                   <a:srgbClr val="404040"/>
                 </a:solidFill>
               </a:rPr>
-              <a:t>資生堂</a:t>
+              <a:t>楽天グループ</a:t>
             </a:r>
           </a:p>
         </p:txBody>
       </p:sp>
       <p:pic>
         <p:nvPicPr>
-          <p:cNvPr id="100" name="Picture 99" descr="野村ホールディングス.png"/>
+          <p:cNvPr id="100" name="Picture 99" descr="花王.png"/>
           <p:cNvPicPr>
             <a:picLocks noChangeAspect="1"/>
           </p:cNvPicPr>
@@ -5946,8 +5946,8 @@
         </p:blipFill>
         <p:spPr>
           <a:xfrm>
-            <a:off x="10423456" y="6012180"/>
-            <a:ext cx="549498" cy="114300"/>
+            <a:off x="10646907" y="5507181"/>
+            <a:ext cx="102596" cy="58189"/>
           </a:xfrm>
           <a:prstGeom prst="rect">
             <a:avLst/>
@@ -5962,7 +5962,123 @@
         </p:nvSpPr>
         <p:spPr>
           <a:xfrm>
-            <a:off x="9661916" y="6126480"/>
+            <a:off x="9661916" y="5565370"/>
+            <a:ext cx="2072579" cy="274320"/>
+          </a:xfrm>
+          <a:prstGeom prst="rect">
+            <a:avLst/>
+          </a:prstGeom>
+          <a:noFill/>
+        </p:spPr>
+        <p:txBody>
+          <a:bodyPr wrap="square">
+            <a:spAutoFit/>
+          </a:bodyPr>
+          <a:lstStyle/>
+          <a:p>
+            <a:pPr algn="ctr"/>
+            <a:r>
+              <a:rPr sz="1000">
+                <a:solidFill>
+                  <a:srgbClr val="404040"/>
+                </a:solidFill>
+              </a:rPr>
+              <a:t>花王</a:t>
+            </a:r>
+          </a:p>
+        </p:txBody>
+      </p:sp>
+      <p:pic>
+        <p:nvPicPr>
+          <p:cNvPr id="102" name="Picture 101" descr="資生堂.png"/>
+          <p:cNvPicPr>
+            <a:picLocks noChangeAspect="1"/>
+          </p:cNvPicPr>
+          <p:nvPr/>
+        </p:nvPicPr>
+        <p:blipFill>
+          <a:blip r:embed="rId52"/>
+          <a:stretch>
+            <a:fillRect/>
+          </a:stretch>
+        </p:blipFill>
+        <p:spPr>
+          <a:xfrm>
+            <a:off x="1348159" y="6068290"/>
+            <a:ext cx="290661" cy="58189"/>
+          </a:xfrm>
+          <a:prstGeom prst="rect">
+            <a:avLst/>
+          </a:prstGeom>
+        </p:spPr>
+      </p:pic>
+      <p:sp>
+        <p:nvSpPr>
+          <p:cNvPr id="103" name="TextBox 102"/>
+          <p:cNvSpPr txBox="1"/>
+          <p:nvPr/>
+        </p:nvSpPr>
+        <p:spPr>
+          <a:xfrm>
+            <a:off x="457200" y="6126479"/>
+            <a:ext cx="2072579" cy="274320"/>
+          </a:xfrm>
+          <a:prstGeom prst="rect">
+            <a:avLst/>
+          </a:prstGeom>
+          <a:noFill/>
+        </p:spPr>
+        <p:txBody>
+          <a:bodyPr wrap="square">
+            <a:spAutoFit/>
+          </a:bodyPr>
+          <a:lstStyle/>
+          <a:p>
+            <a:pPr algn="ctr"/>
+            <a:r>
+              <a:rPr sz="1000">
+                <a:solidFill>
+                  <a:srgbClr val="404040"/>
+                </a:solidFill>
+              </a:rPr>
+              <a:t>資生堂</a:t>
+            </a:r>
+          </a:p>
+        </p:txBody>
+      </p:sp>
+      <p:pic>
+        <p:nvPicPr>
+          <p:cNvPr id="104" name="Picture 103" descr="野村ホールディングス.png"/>
+          <p:cNvPicPr>
+            <a:picLocks noChangeAspect="1"/>
+          </p:cNvPicPr>
+          <p:nvPr/>
+        </p:nvPicPr>
+        <p:blipFill>
+          <a:blip r:embed="rId53"/>
+          <a:stretch>
+            <a:fillRect/>
+          </a:stretch>
+        </p:blipFill>
+        <p:spPr>
+          <a:xfrm>
+            <a:off x="3654796" y="6068290"/>
+            <a:ext cx="279744" cy="58189"/>
+          </a:xfrm>
+          <a:prstGeom prst="rect">
+            <a:avLst/>
+          </a:prstGeom>
+        </p:spPr>
+      </p:pic>
+      <p:sp>
+        <p:nvSpPr>
+          <p:cNvPr id="105" name="TextBox 104"/>
+          <p:cNvSpPr txBox="1"/>
+          <p:nvPr/>
+        </p:nvSpPr>
+        <p:spPr>
+          <a:xfrm>
+            <a:off x="2758379" y="6126479"/>
             <a:ext cx="2072579" cy="274320"/>
           </a:xfrm>
           <a:prstGeom prst="rect">

--- a/docs/logos.pptx
+++ b/docs/logos.pptx
@@ -3670,7 +3670,7 @@
       </p:sp>
       <p:pic>
         <p:nvPicPr>
-          <p:cNvPr id="22" name="Picture 21" descr="Meta.png"/>
+          <p:cNvPr id="22" name="Picture 21" descr="LayerX.png"/>
           <p:cNvPicPr>
             <a:picLocks noChangeAspect="1"/>
           </p:cNvPicPr>
@@ -3684,8 +3684,8 @@
         </p:blipFill>
         <p:spPr>
           <a:xfrm>
-            <a:off x="1370149" y="1579418"/>
-            <a:ext cx="246681" cy="58189"/>
+            <a:off x="1386628" y="1579418"/>
+            <a:ext cx="213722" cy="58189"/>
           </a:xfrm>
           <a:prstGeom prst="rect">
             <a:avLst/>
@@ -3721,14 +3721,14 @@
                   <a:srgbClr val="404040"/>
                 </a:solidFill>
               </a:rPr>
-              <a:t>Meta</a:t>
+              <a:t>LayerX</a:t>
             </a:r>
           </a:p>
         </p:txBody>
       </p:sp>
       <p:pic>
         <p:nvPicPr>
-          <p:cNvPr id="24" name="Picture 23" descr="NEC.png"/>
+          <p:cNvPr id="24" name="Picture 23" descr="Meta.png"/>
           <p:cNvPicPr>
             <a:picLocks noChangeAspect="1"/>
           </p:cNvPicPr>
@@ -3742,8 +3742,8 @@
         </p:blipFill>
         <p:spPr>
           <a:xfrm>
-            <a:off x="3696017" y="1579418"/>
-            <a:ext cx="197303" cy="58189"/>
+            <a:off x="3671328" y="1579418"/>
+            <a:ext cx="246681" cy="58189"/>
           </a:xfrm>
           <a:prstGeom prst="rect">
             <a:avLst/>
@@ -3779,14 +3779,14 @@
                   <a:srgbClr val="404040"/>
                 </a:solidFill>
               </a:rPr>
-              <a:t>NEC</a:t>
+              <a:t>Meta</a:t>
             </a:r>
           </a:p>
         </p:txBody>
       </p:sp>
       <p:pic>
         <p:nvPicPr>
-          <p:cNvPr id="26" name="Picture 25" descr="NTTデータ.png"/>
+          <p:cNvPr id="26" name="Picture 25" descr="NEC.png"/>
           <p:cNvPicPr>
             <a:picLocks noChangeAspect="1"/>
           </p:cNvPicPr>
@@ -3800,8 +3800,8 @@
         </p:blipFill>
         <p:spPr>
           <a:xfrm>
-            <a:off x="5973219" y="1579418"/>
-            <a:ext cx="245256" cy="58189"/>
+            <a:off x="5997196" y="1579418"/>
+            <a:ext cx="197303" cy="58189"/>
           </a:xfrm>
           <a:prstGeom prst="rect">
             <a:avLst/>
@@ -3837,14 +3837,14 @@
                   <a:srgbClr val="404040"/>
                 </a:solidFill>
               </a:rPr>
-              <a:t>NTTデータ</a:t>
+              <a:t>NEC</a:t>
             </a:r>
           </a:p>
         </p:txBody>
       </p:sp>
       <p:pic>
         <p:nvPicPr>
-          <p:cNvPr id="28" name="Picture 27" descr="OpenAI.png"/>
+          <p:cNvPr id="28" name="Picture 27" descr="NTTデータ.png"/>
           <p:cNvPicPr>
             <a:picLocks noChangeAspect="1"/>
           </p:cNvPicPr>
@@ -3858,8 +3858,8 @@
         </p:blipFill>
         <p:spPr>
           <a:xfrm>
-            <a:off x="8367541" y="1579418"/>
-            <a:ext cx="58971" cy="58189"/>
+            <a:off x="8274398" y="1579418"/>
+            <a:ext cx="245256" cy="58189"/>
           </a:xfrm>
           <a:prstGeom prst="rect">
             <a:avLst/>
@@ -3895,14 +3895,14 @@
                   <a:srgbClr val="404040"/>
                 </a:solidFill>
               </a:rPr>
-              <a:t>OpenAI</a:t>
+              <a:t>NTTデータ</a:t>
             </a:r>
           </a:p>
         </p:txBody>
       </p:sp>
       <p:pic>
         <p:nvPicPr>
-          <p:cNvPr id="30" name="Picture 29" descr="Qwen.png"/>
+          <p:cNvPr id="30" name="Picture 29" descr="OpenAI.png"/>
           <p:cNvPicPr>
             <a:picLocks noChangeAspect="1"/>
           </p:cNvPicPr>
@@ -3916,8 +3916,8 @@
         </p:blipFill>
         <p:spPr>
           <a:xfrm>
-            <a:off x="10669111" y="1579418"/>
-            <a:ext cx="58189" cy="58189"/>
+            <a:off x="10668720" y="1579418"/>
+            <a:ext cx="58971" cy="58189"/>
           </a:xfrm>
           <a:prstGeom prst="rect">
             <a:avLst/>
@@ -3953,14 +3953,14 @@
                   <a:srgbClr val="404040"/>
                 </a:solidFill>
               </a:rPr>
-              <a:t>Qwen</a:t>
+              <a:t>OpenAI</a:t>
             </a:r>
           </a:p>
         </p:txBody>
       </p:sp>
       <p:pic>
         <p:nvPicPr>
-          <p:cNvPr id="32" name="Picture 31" descr="Salesforce.png"/>
+          <p:cNvPr id="32" name="Picture 31" descr="Qwen.png"/>
           <p:cNvPicPr>
             <a:picLocks noChangeAspect="1"/>
           </p:cNvPicPr>
@@ -3974,8 +3974,8 @@
         </p:blipFill>
         <p:spPr>
           <a:xfrm>
-            <a:off x="1452565" y="2140527"/>
-            <a:ext cx="81848" cy="58189"/>
+            <a:off x="1464395" y="2140527"/>
+            <a:ext cx="58189" cy="58189"/>
           </a:xfrm>
           <a:prstGeom prst="rect">
             <a:avLst/>
@@ -4011,14 +4011,14 @@
                   <a:srgbClr val="404040"/>
                 </a:solidFill>
               </a:rPr>
-              <a:t>Salesforce</a:t>
+              <a:t>Qwen</a:t>
             </a:r>
           </a:p>
         </p:txBody>
       </p:sp>
       <p:pic>
         <p:nvPicPr>
-          <p:cNvPr id="34" name="Picture 33" descr="Snowflake.png"/>
+          <p:cNvPr id="34" name="Picture 33" descr="Salesforce.png"/>
           <p:cNvPicPr>
             <a:picLocks noChangeAspect="1"/>
           </p:cNvPicPr>
@@ -4032,8 +4032,8 @@
         </p:blipFill>
         <p:spPr>
           <a:xfrm>
-            <a:off x="3685936" y="2140527"/>
-            <a:ext cx="217465" cy="58189"/>
+            <a:off x="3753744" y="2140527"/>
+            <a:ext cx="81848" cy="58189"/>
           </a:xfrm>
           <a:prstGeom prst="rect">
             <a:avLst/>
@@ -4069,14 +4069,14 @@
                   <a:srgbClr val="404040"/>
                 </a:solidFill>
               </a:rPr>
-              <a:t>Snowflake</a:t>
+              <a:t>Salesforce</a:t>
             </a:r>
           </a:p>
         </p:txBody>
       </p:sp>
       <p:pic>
         <p:nvPicPr>
-          <p:cNvPr id="36" name="Picture 35" descr="SyncMe.png"/>
+          <p:cNvPr id="36" name="Picture 35" descr="Snowflake.png"/>
           <p:cNvPicPr>
             <a:picLocks noChangeAspect="1"/>
           </p:cNvPicPr>
@@ -4090,8 +4090,8 @@
         </p:blipFill>
         <p:spPr>
           <a:xfrm>
-            <a:off x="5975534" y="2140527"/>
-            <a:ext cx="240627" cy="58189"/>
+            <a:off x="5987115" y="2140527"/>
+            <a:ext cx="217465" cy="58189"/>
           </a:xfrm>
           <a:prstGeom prst="rect">
             <a:avLst/>
@@ -4127,14 +4127,14 @@
                   <a:srgbClr val="404040"/>
                 </a:solidFill>
               </a:rPr>
-              <a:t>SyncMe</a:t>
+              <a:t>Snowflake</a:t>
             </a:r>
           </a:p>
         </p:txBody>
       </p:sp>
       <p:pic>
         <p:nvPicPr>
-          <p:cNvPr id="38" name="Picture 37" descr="ahamo.png"/>
+          <p:cNvPr id="38" name="Picture 37" descr="Softbank.png"/>
           <p:cNvPicPr>
             <a:picLocks noChangeAspect="1"/>
           </p:cNvPicPr>
@@ -4148,8 +4148,8 @@
         </p:blipFill>
         <p:spPr>
           <a:xfrm>
-            <a:off x="8343463" y="2140527"/>
-            <a:ext cx="107127" cy="58189"/>
+            <a:off x="8270950" y="2140527"/>
+            <a:ext cx="252152" cy="58189"/>
           </a:xfrm>
           <a:prstGeom prst="rect">
             <a:avLst/>
@@ -4185,14 +4185,14 @@
                   <a:srgbClr val="404040"/>
                 </a:solidFill>
               </a:rPr>
-              <a:t>ahamo</a:t>
+              <a:t>Softbank</a:t>
             </a:r>
           </a:p>
         </p:txBody>
       </p:sp>
       <p:pic>
         <p:nvPicPr>
-          <p:cNvPr id="40" name="Picture 39" descr="dポイント.png"/>
+          <p:cNvPr id="40" name="Picture 39" descr="SyncMe.png"/>
           <p:cNvPicPr>
             <a:picLocks noChangeAspect="1"/>
           </p:cNvPicPr>
@@ -4206,8 +4206,8 @@
         </p:blipFill>
         <p:spPr>
           <a:xfrm>
-            <a:off x="10675608" y="2140527"/>
-            <a:ext cx="45195" cy="58189"/>
+            <a:off x="10577892" y="2140527"/>
+            <a:ext cx="240627" cy="58189"/>
           </a:xfrm>
           <a:prstGeom prst="rect">
             <a:avLst/>
@@ -4243,14 +4243,14 @@
                   <a:srgbClr val="404040"/>
                 </a:solidFill>
               </a:rPr>
-              <a:t>dポイント</a:t>
+              <a:t>SyncMe</a:t>
             </a:r>
           </a:p>
         </p:txBody>
       </p:sp>
       <p:pic>
         <p:nvPicPr>
-          <p:cNvPr id="42" name="Picture 41" descr="dマガジン.png"/>
+          <p:cNvPr id="42" name="Picture 41" descr="ahamo.png"/>
           <p:cNvPicPr>
             <a:picLocks noChangeAspect="1"/>
           </p:cNvPicPr>
@@ -4264,8 +4264,8 @@
         </p:blipFill>
         <p:spPr>
           <a:xfrm>
-            <a:off x="1464300" y="2701636"/>
-            <a:ext cx="58378" cy="58189"/>
+            <a:off x="1439926" y="2701636"/>
+            <a:ext cx="107127" cy="58189"/>
           </a:xfrm>
           <a:prstGeom prst="rect">
             <a:avLst/>
@@ -4301,14 +4301,14 @@
                   <a:srgbClr val="404040"/>
                 </a:solidFill>
               </a:rPr>
-              <a:t>dマガジン</a:t>
+              <a:t>ahamo</a:t>
             </a:r>
           </a:p>
         </p:txBody>
       </p:sp>
       <p:pic>
         <p:nvPicPr>
-          <p:cNvPr id="44" name="Picture 43" descr="d払い.png"/>
+          <p:cNvPr id="44" name="Picture 43" descr="dポイント.png"/>
           <p:cNvPicPr>
             <a:picLocks noChangeAspect="1"/>
           </p:cNvPicPr>
@@ -4322,8 +4322,8 @@
         </p:blipFill>
         <p:spPr>
           <a:xfrm>
-            <a:off x="3702431" y="2701636"/>
-            <a:ext cx="184475" cy="58189"/>
+            <a:off x="3772071" y="2701636"/>
+            <a:ext cx="45195" cy="58189"/>
           </a:xfrm>
           <a:prstGeom prst="rect">
             <a:avLst/>
@@ -4359,14 +4359,14 @@
                   <a:srgbClr val="404040"/>
                 </a:solidFill>
               </a:rPr>
-              <a:t>d払い</a:t>
+              <a:t>dポイント</a:t>
             </a:r>
           </a:p>
         </p:txBody>
       </p:sp>
       <p:pic>
         <p:nvPicPr>
-          <p:cNvPr id="46" name="Picture 45" descr="アサヒグループホールディングス.png"/>
+          <p:cNvPr id="46" name="Picture 45" descr="dマガジン.png"/>
           <p:cNvPicPr>
             <a:picLocks noChangeAspect="1"/>
           </p:cNvPicPr>
@@ -4380,8 +4380,8 @@
         </p:blipFill>
         <p:spPr>
           <a:xfrm>
-            <a:off x="6054912" y="2701636"/>
-            <a:ext cx="81870" cy="58189"/>
+            <a:off x="6066658" y="2701636"/>
+            <a:ext cx="58378" cy="58189"/>
           </a:xfrm>
           <a:prstGeom prst="rect">
             <a:avLst/>
@@ -4417,14 +4417,14 @@
                   <a:srgbClr val="404040"/>
                 </a:solidFill>
               </a:rPr>
-              <a:t>アサヒグループホールディングス</a:t>
+              <a:t>dマガジン</a:t>
             </a:r>
           </a:p>
         </p:txBody>
       </p:sp>
       <p:pic>
         <p:nvPicPr>
-          <p:cNvPr id="48" name="Picture 47" descr="オリエンタルランド.png"/>
+          <p:cNvPr id="48" name="Picture 47" descr="d払い.png"/>
           <p:cNvPicPr>
             <a:picLocks noChangeAspect="1"/>
           </p:cNvPicPr>
@@ -4438,8 +4438,8 @@
         </p:blipFill>
         <p:spPr>
           <a:xfrm>
-            <a:off x="8341482" y="2701636"/>
-            <a:ext cx="111088" cy="58189"/>
+            <a:off x="8304789" y="2701636"/>
+            <a:ext cx="184475" cy="58189"/>
           </a:xfrm>
           <a:prstGeom prst="rect">
             <a:avLst/>
@@ -4475,14 +4475,14 @@
                   <a:srgbClr val="404040"/>
                 </a:solidFill>
               </a:rPr>
-              <a:t>オリエンタルランド</a:t>
+              <a:t>d払い</a:t>
             </a:r>
           </a:p>
         </p:txBody>
       </p:sp>
       <p:pic>
         <p:nvPicPr>
-          <p:cNvPr id="50" name="Picture 49" descr="オリンパス.png"/>
+          <p:cNvPr id="50" name="Picture 49" descr="アサヒグループホールディングス.png"/>
           <p:cNvPicPr>
             <a:picLocks noChangeAspect="1"/>
           </p:cNvPicPr>
@@ -4496,8 +4496,8 @@
         </p:blipFill>
         <p:spPr>
           <a:xfrm>
-            <a:off x="10566281" y="2701636"/>
-            <a:ext cx="263849" cy="58189"/>
+            <a:off x="10657270" y="2701636"/>
+            <a:ext cx="81870" cy="58189"/>
           </a:xfrm>
           <a:prstGeom prst="rect">
             <a:avLst/>
@@ -4533,14 +4533,14 @@
                   <a:srgbClr val="404040"/>
                 </a:solidFill>
               </a:rPr>
-              <a:t>オリンパス</a:t>
+              <a:t>アサヒグループホールディングス</a:t>
             </a:r>
           </a:p>
         </p:txBody>
       </p:sp>
       <p:pic>
         <p:nvPicPr>
-          <p:cNvPr id="52" name="Picture 51" descr="キーエンス.png"/>
+          <p:cNvPr id="52" name="Picture 51" descr="オリエンタルランド.png"/>
           <p:cNvPicPr>
             <a:picLocks noChangeAspect="1"/>
           </p:cNvPicPr>
@@ -4554,8 +4554,8 @@
         </p:blipFill>
         <p:spPr>
           <a:xfrm>
-            <a:off x="1358011" y="3262745"/>
-            <a:ext cx="270956" cy="58189"/>
+            <a:off x="1437945" y="3262745"/>
+            <a:ext cx="111088" cy="58189"/>
           </a:xfrm>
           <a:prstGeom prst="rect">
             <a:avLst/>
@@ -4591,14 +4591,14 @@
                   <a:srgbClr val="404040"/>
                 </a:solidFill>
               </a:rPr>
-              <a:t>キーエンス</a:t>
+              <a:t>オリエンタルランド</a:t>
             </a:r>
           </a:p>
         </p:txBody>
       </p:sp>
       <p:pic>
         <p:nvPicPr>
-          <p:cNvPr id="54" name="Picture 53" descr="コマツ.png"/>
+          <p:cNvPr id="54" name="Picture 53" descr="オリンパス.png"/>
           <p:cNvPicPr>
             <a:picLocks noChangeAspect="1"/>
           </p:cNvPicPr>
@@ -4612,8 +4612,8 @@
         </p:blipFill>
         <p:spPr>
           <a:xfrm>
-            <a:off x="3661665" y="3262745"/>
-            <a:ext cx="266007" cy="58189"/>
+            <a:off x="3662744" y="3262745"/>
+            <a:ext cx="263849" cy="58189"/>
           </a:xfrm>
           <a:prstGeom prst="rect">
             <a:avLst/>
@@ -4649,14 +4649,14 @@
                   <a:srgbClr val="404040"/>
                 </a:solidFill>
               </a:rPr>
-              <a:t>コマツ</a:t>
+              <a:t>オリンパス</a:t>
             </a:r>
           </a:p>
         </p:txBody>
       </p:sp>
       <p:pic>
         <p:nvPicPr>
-          <p:cNvPr id="56" name="Picture 55" descr="セコム.png"/>
+          <p:cNvPr id="56" name="Picture 55" descr="キーエンス.png"/>
           <p:cNvPicPr>
             <a:picLocks noChangeAspect="1"/>
           </p:cNvPicPr>
@@ -4670,8 +4670,8 @@
         </p:blipFill>
         <p:spPr>
           <a:xfrm>
-            <a:off x="6020517" y="3262745"/>
-            <a:ext cx="150660" cy="58189"/>
+            <a:off x="5960369" y="3262745"/>
+            <a:ext cx="270956" cy="58189"/>
           </a:xfrm>
           <a:prstGeom prst="rect">
             <a:avLst/>
@@ -4707,14 +4707,14 @@
                   <a:srgbClr val="404040"/>
                 </a:solidFill>
               </a:rPr>
-              <a:t>セコム</a:t>
+              <a:t>キーエンス</a:t>
             </a:r>
           </a:p>
         </p:txBody>
       </p:sp>
       <p:pic>
         <p:nvPicPr>
-          <p:cNvPr id="58" name="Picture 57" descr="セブン&amp;アイ・ホールディングス.png"/>
+          <p:cNvPr id="58" name="Picture 57" descr="コマツ.png"/>
           <p:cNvPicPr>
             <a:picLocks noChangeAspect="1"/>
           </p:cNvPicPr>
@@ -4728,8 +4728,8 @@
         </p:blipFill>
         <p:spPr>
           <a:xfrm>
-            <a:off x="8364842" y="3262745"/>
-            <a:ext cx="64368" cy="58189"/>
+            <a:off x="8264023" y="3262745"/>
+            <a:ext cx="266007" cy="58189"/>
           </a:xfrm>
           <a:prstGeom prst="rect">
             <a:avLst/>
@@ -4765,14 +4765,14 @@
                   <a:srgbClr val="404040"/>
                 </a:solidFill>
               </a:rPr>
-              <a:t>セブン&amp;アイ・ホールディングス</a:t>
+              <a:t>コマツ</a:t>
             </a:r>
           </a:p>
         </p:txBody>
       </p:sp>
       <p:pic>
         <p:nvPicPr>
-          <p:cNvPr id="60" name="Picture 59" descr="ソニーグループ.png"/>
+          <p:cNvPr id="60" name="Picture 59" descr="セコム.png"/>
           <p:cNvPicPr>
             <a:picLocks noChangeAspect="1"/>
           </p:cNvPicPr>
@@ -4786,8 +4786,8 @@
         </p:blipFill>
         <p:spPr>
           <a:xfrm>
-            <a:off x="10559139" y="3262745"/>
-            <a:ext cx="278133" cy="58189"/>
+            <a:off x="10622875" y="3262745"/>
+            <a:ext cx="150660" cy="58189"/>
           </a:xfrm>
           <a:prstGeom prst="rect">
             <a:avLst/>
@@ -4823,14 +4823,14 @@
                   <a:srgbClr val="404040"/>
                 </a:solidFill>
               </a:rPr>
-              <a:t>ソニーグループ</a:t>
+              <a:t>セコム</a:t>
             </a:r>
           </a:p>
         </p:txBody>
       </p:sp>
       <p:pic>
         <p:nvPicPr>
-          <p:cNvPr id="62" name="Picture 61" descr="ダイキン工業.png"/>
+          <p:cNvPr id="62" name="Picture 61" descr="セブン&amp;アイ・ホールディングス.png"/>
           <p:cNvPicPr>
             <a:picLocks noChangeAspect="1"/>
           </p:cNvPicPr>
@@ -4844,8 +4844,8 @@
         </p:blipFill>
         <p:spPr>
           <a:xfrm>
-            <a:off x="1372692" y="3823854"/>
-            <a:ext cx="241595" cy="58189"/>
+            <a:off x="1461305" y="3823854"/>
+            <a:ext cx="64368" cy="58189"/>
           </a:xfrm>
           <a:prstGeom prst="rect">
             <a:avLst/>
@@ -4881,14 +4881,14 @@
                   <a:srgbClr val="404040"/>
                 </a:solidFill>
               </a:rPr>
-              <a:t>ダイキン工業</a:t>
+              <a:t>セブン&amp;アイ・ホールディングス</a:t>
             </a:r>
           </a:p>
         </p:txBody>
       </p:sp>
       <p:pic>
         <p:nvPicPr>
-          <p:cNvPr id="64" name="Picture 63" descr="トヨタ自動車.png"/>
+          <p:cNvPr id="64" name="Picture 63" descr="ソニーグループ.png"/>
           <p:cNvPicPr>
             <a:picLocks noChangeAspect="1"/>
           </p:cNvPicPr>
@@ -4902,8 +4902,8 @@
         </p:blipFill>
         <p:spPr>
           <a:xfrm>
-            <a:off x="3752786" y="3823854"/>
-            <a:ext cx="83764" cy="58189"/>
+            <a:off x="3655602" y="3823854"/>
+            <a:ext cx="278133" cy="58189"/>
           </a:xfrm>
           <a:prstGeom prst="rect">
             <a:avLst/>
@@ -4939,14 +4939,14 @@
                   <a:srgbClr val="404040"/>
                 </a:solidFill>
               </a:rPr>
-              <a:t>トヨタ自動車</a:t>
+              <a:t>ソニーグループ</a:t>
             </a:r>
           </a:p>
         </p:txBody>
       </p:sp>
       <p:pic>
         <p:nvPicPr>
-          <p:cNvPr id="66" name="Picture 65" descr="ドコモの銀行.png"/>
+          <p:cNvPr id="66" name="Picture 65" descr="ダイキン工業.png"/>
           <p:cNvPicPr>
             <a:picLocks noChangeAspect="1"/>
           </p:cNvPicPr>
@@ -4960,8 +4960,8 @@
         </p:blipFill>
         <p:spPr>
           <a:xfrm>
-            <a:off x="6000563" y="3823854"/>
-            <a:ext cx="190569" cy="58189"/>
+            <a:off x="5975050" y="3823854"/>
+            <a:ext cx="241595" cy="58189"/>
           </a:xfrm>
           <a:prstGeom prst="rect">
             <a:avLst/>
@@ -4997,14 +4997,14 @@
                   <a:srgbClr val="404040"/>
                 </a:solidFill>
               </a:rPr>
-              <a:t>ドコモの銀行</a:t>
+              <a:t>ダイキン工業</a:t>
             </a:r>
           </a:p>
         </p:txBody>
       </p:sp>
       <p:pic>
         <p:nvPicPr>
-          <p:cNvPr id="68" name="Picture 67" descr="ドコモ光.png"/>
+          <p:cNvPr id="68" name="Picture 67" descr="トヨタ自動車.png"/>
           <p:cNvPicPr>
             <a:picLocks noChangeAspect="1"/>
           </p:cNvPicPr>
@@ -5018,8 +5018,8 @@
         </p:blipFill>
         <p:spPr>
           <a:xfrm>
-            <a:off x="8304372" y="3823854"/>
-            <a:ext cx="185309" cy="58189"/>
+            <a:off x="8355144" y="3823854"/>
+            <a:ext cx="83764" cy="58189"/>
           </a:xfrm>
           <a:prstGeom prst="rect">
             <a:avLst/>
@@ -5055,14 +5055,14 @@
                   <a:srgbClr val="404040"/>
                 </a:solidFill>
               </a:rPr>
-              <a:t>ドコモ光</a:t>
+              <a:t>トヨタ自動車</a:t>
             </a:r>
           </a:p>
         </p:txBody>
       </p:sp>
       <p:pic>
         <p:nvPicPr>
-          <p:cNvPr id="70" name="Picture 69" descr="パナソニック.png"/>
+          <p:cNvPr id="70" name="Picture 69" descr="ドコモの銀行.png"/>
           <p:cNvPicPr>
             <a:picLocks noChangeAspect="1"/>
           </p:cNvPicPr>
@@ -5076,8 +5076,8 @@
         </p:blipFill>
         <p:spPr>
           <a:xfrm>
-            <a:off x="10538186" y="3823854"/>
-            <a:ext cx="320039" cy="58189"/>
+            <a:off x="10602921" y="3823854"/>
+            <a:ext cx="190569" cy="58189"/>
           </a:xfrm>
           <a:prstGeom prst="rect">
             <a:avLst/>
@@ -5113,14 +5113,14 @@
                   <a:srgbClr val="404040"/>
                 </a:solidFill>
               </a:rPr>
-              <a:t>パナソニック</a:t>
+              <a:t>ドコモの銀行</a:t>
             </a:r>
           </a:p>
         </p:txBody>
       </p:sp>
       <p:pic>
         <p:nvPicPr>
-          <p:cNvPr id="72" name="Picture 71" descr="ファーストリテイリング.png"/>
+          <p:cNvPr id="72" name="Picture 71" descr="ドコモ光.png"/>
           <p:cNvPicPr>
             <a:picLocks noChangeAspect="1"/>
           </p:cNvPicPr>
@@ -5134,8 +5134,8 @@
         </p:blipFill>
         <p:spPr>
           <a:xfrm>
-            <a:off x="1435705" y="4384963"/>
-            <a:ext cx="115569" cy="58189"/>
+            <a:off x="1400835" y="4384963"/>
+            <a:ext cx="185309" cy="58189"/>
           </a:xfrm>
           <a:prstGeom prst="rect">
             <a:avLst/>
@@ -5171,14 +5171,14 @@
                   <a:srgbClr val="404040"/>
                 </a:solidFill>
               </a:rPr>
-              <a:t>ファーストリテイリング</a:t>
+              <a:t>ドコモ光</a:t>
             </a:r>
           </a:p>
         </p:txBody>
       </p:sp>
       <p:pic>
         <p:nvPicPr>
-          <p:cNvPr id="74" name="Picture 73" descr="ホンダ.png"/>
+          <p:cNvPr id="74" name="Picture 73" descr="パナソニック.png"/>
           <p:cNvPicPr>
             <a:picLocks noChangeAspect="1"/>
           </p:cNvPicPr>
@@ -5192,8 +5192,8 @@
         </p:blipFill>
         <p:spPr>
           <a:xfrm>
-            <a:off x="3613078" y="4384963"/>
-            <a:ext cx="363180" cy="58189"/>
+            <a:off x="3634649" y="4384963"/>
+            <a:ext cx="320039" cy="58189"/>
           </a:xfrm>
           <a:prstGeom prst="rect">
             <a:avLst/>
@@ -5229,14 +5229,14 @@
                   <a:srgbClr val="404040"/>
                 </a:solidFill>
               </a:rPr>
-              <a:t>ホンダ</a:t>
+              <a:t>パナソニック</a:t>
             </a:r>
           </a:p>
         </p:txBody>
       </p:sp>
       <p:pic>
         <p:nvPicPr>
-          <p:cNvPr id="76" name="Picture 75" descr="リクルートホールディングス.png"/>
+          <p:cNvPr id="76" name="Picture 75" descr="ファーストリテイリング.png"/>
           <p:cNvPicPr>
             <a:picLocks noChangeAspect="1"/>
           </p:cNvPicPr>
@@ -5250,8 +5250,8 @@
         </p:blipFill>
         <p:spPr>
           <a:xfrm>
-            <a:off x="5995827" y="4384963"/>
-            <a:ext cx="200041" cy="58189"/>
+            <a:off x="6038063" y="4384963"/>
+            <a:ext cx="115569" cy="58189"/>
           </a:xfrm>
           <a:prstGeom prst="rect">
             <a:avLst/>
@@ -5287,14 +5287,14 @@
                   <a:srgbClr val="404040"/>
                 </a:solidFill>
               </a:rPr>
-              <a:t>リクルートホールディングス</a:t>
+              <a:t>ファーストリテイリング</a:t>
             </a:r>
           </a:p>
         </p:txBody>
       </p:sp>
       <p:pic>
         <p:nvPicPr>
-          <p:cNvPr id="78" name="Picture 77" descr="三井住友銀行.png"/>
+          <p:cNvPr id="78" name="Picture 77" descr="ホンダ.png"/>
           <p:cNvPicPr>
             <a:picLocks noChangeAspect="1"/>
           </p:cNvPicPr>
@@ -5308,8 +5308,8 @@
         </p:blipFill>
         <p:spPr>
           <a:xfrm>
-            <a:off x="8300297" y="4384963"/>
-            <a:ext cx="193459" cy="58189"/>
+            <a:off x="8215436" y="4384963"/>
+            <a:ext cx="363180" cy="58189"/>
           </a:xfrm>
           <a:prstGeom prst="rect">
             <a:avLst/>
@@ -5345,14 +5345,14 @@
                   <a:srgbClr val="404040"/>
                 </a:solidFill>
               </a:rPr>
-              <a:t>三井住友銀行</a:t>
+              <a:t>ホンダ</a:t>
             </a:r>
           </a:p>
         </p:txBody>
       </p:sp>
       <p:pic>
         <p:nvPicPr>
-          <p:cNvPr id="80" name="Picture 79" descr="三菱電機.png"/>
+          <p:cNvPr id="80" name="Picture 79" descr="リクルートホールディングス.png"/>
           <p:cNvPicPr>
             <a:picLocks noChangeAspect="1"/>
           </p:cNvPicPr>
@@ -5366,8 +5366,8 @@
         </p:blipFill>
         <p:spPr>
           <a:xfrm>
-            <a:off x="10608684" y="4384963"/>
-            <a:ext cx="179043" cy="58189"/>
+            <a:off x="10598185" y="4384963"/>
+            <a:ext cx="200041" cy="58189"/>
           </a:xfrm>
           <a:prstGeom prst="rect">
             <a:avLst/>
@@ -5403,14 +5403,14 @@
                   <a:srgbClr val="404040"/>
                 </a:solidFill>
               </a:rPr>
-              <a:t>三菱電機</a:t>
+              <a:t>リクルートホールディングス</a:t>
             </a:r>
           </a:p>
         </p:txBody>
       </p:sp>
       <p:pic>
         <p:nvPicPr>
-          <p:cNvPr id="82" name="Picture 81" descr="任天堂.png"/>
+          <p:cNvPr id="82" name="Picture 81" descr="三井住友銀行.png"/>
           <p:cNvPicPr>
             <a:picLocks noChangeAspect="1"/>
           </p:cNvPicPr>
@@ -5424,8 +5424,8 @@
         </p:blipFill>
         <p:spPr>
           <a:xfrm>
-            <a:off x="1387841" y="4946072"/>
-            <a:ext cx="211296" cy="58189"/>
+            <a:off x="1396760" y="4946072"/>
+            <a:ext cx="193459" cy="58189"/>
           </a:xfrm>
           <a:prstGeom prst="rect">
             <a:avLst/>
@@ -5461,14 +5461,14 @@
                   <a:srgbClr val="404040"/>
                 </a:solidFill>
               </a:rPr>
-              <a:t>任天堂</a:t>
+              <a:t>三井住友銀行</a:t>
             </a:r>
           </a:p>
         </p:txBody>
       </p:sp>
       <p:pic>
         <p:nvPicPr>
-          <p:cNvPr id="84" name="Picture 83" descr="味の素.png"/>
+          <p:cNvPr id="84" name="Picture 83" descr="三菱電機.png"/>
           <p:cNvPicPr>
             <a:picLocks noChangeAspect="1"/>
           </p:cNvPicPr>
@@ -5482,8 +5482,8 @@
         </p:blipFill>
         <p:spPr>
           <a:xfrm>
-            <a:off x="3615252" y="4946072"/>
-            <a:ext cx="358832" cy="58189"/>
+            <a:off x="3705147" y="4946072"/>
+            <a:ext cx="179043" cy="58189"/>
           </a:xfrm>
           <a:prstGeom prst="rect">
             <a:avLst/>
@@ -5519,14 +5519,14 @@
                   <a:srgbClr val="404040"/>
                 </a:solidFill>
               </a:rPr>
-              <a:t>味の素</a:t>
+              <a:t>三菱電機</a:t>
             </a:r>
           </a:p>
         </p:txBody>
       </p:sp>
       <p:pic>
         <p:nvPicPr>
-          <p:cNvPr id="86" name="Picture 85" descr="大和ハウス工業.png"/>
+          <p:cNvPr id="86" name="Picture 85" descr="任天堂.png"/>
           <p:cNvPicPr>
             <a:picLocks noChangeAspect="1"/>
           </p:cNvPicPr>
@@ -5540,8 +5540,8 @@
         </p:blipFill>
         <p:spPr>
           <a:xfrm>
-            <a:off x="6059381" y="4946072"/>
-            <a:ext cx="72932" cy="58189"/>
+            <a:off x="5990199" y="4946072"/>
+            <a:ext cx="211296" cy="58189"/>
           </a:xfrm>
           <a:prstGeom prst="rect">
             <a:avLst/>
@@ -5577,14 +5577,14 @@
                   <a:srgbClr val="404040"/>
                 </a:solidFill>
               </a:rPr>
-              <a:t>大和ハウス工業</a:t>
+              <a:t>任天堂</a:t>
             </a:r>
           </a:p>
         </p:txBody>
       </p:sp>
       <p:pic>
         <p:nvPicPr>
-          <p:cNvPr id="88" name="Picture 87" descr="富士通.png"/>
+          <p:cNvPr id="88" name="Picture 87" descr="味の素.png"/>
           <p:cNvPicPr>
             <a:picLocks noChangeAspect="1"/>
           </p:cNvPicPr>
@@ -5598,8 +5598,8 @@
         </p:blipFill>
         <p:spPr>
           <a:xfrm>
-            <a:off x="8339622" y="4946072"/>
-            <a:ext cx="114808" cy="58189"/>
+            <a:off x="8217610" y="4946072"/>
+            <a:ext cx="358832" cy="58189"/>
           </a:xfrm>
           <a:prstGeom prst="rect">
             <a:avLst/>
@@ -5635,14 +5635,14 @@
                   <a:srgbClr val="404040"/>
                 </a:solidFill>
               </a:rPr>
-              <a:t>富士通</a:t>
+              <a:t>味の素</a:t>
             </a:r>
           </a:p>
         </p:txBody>
       </p:sp>
       <p:pic>
         <p:nvPicPr>
-          <p:cNvPr id="90" name="Picture 89" descr="日本郵政.png"/>
+          <p:cNvPr id="90" name="Picture 89" descr="大和ハウス工業.png"/>
           <p:cNvPicPr>
             <a:picLocks noChangeAspect="1"/>
           </p:cNvPicPr>
@@ -5656,8 +5656,8 @@
         </p:blipFill>
         <p:spPr>
           <a:xfrm>
-            <a:off x="10670907" y="4946072"/>
-            <a:ext cx="54597" cy="58189"/>
+            <a:off x="10661739" y="4946072"/>
+            <a:ext cx="72932" cy="58189"/>
           </a:xfrm>
           <a:prstGeom prst="rect">
             <a:avLst/>
@@ -5693,14 +5693,14 @@
                   <a:srgbClr val="404040"/>
                 </a:solidFill>
               </a:rPr>
-              <a:t>日本郵政</a:t>
+              <a:t>大和ハウス工業</a:t>
             </a:r>
           </a:p>
         </p:txBody>
       </p:sp>
       <p:pic>
         <p:nvPicPr>
-          <p:cNvPr id="92" name="Picture 91" descr="日立製作所.png"/>
+          <p:cNvPr id="92" name="Picture 91" descr="富士通.png"/>
           <p:cNvPicPr>
             <a:picLocks noChangeAspect="1"/>
           </p:cNvPicPr>
@@ -5714,8 +5714,8 @@
         </p:blipFill>
         <p:spPr>
           <a:xfrm>
-            <a:off x="1341245" y="5507181"/>
-            <a:ext cx="304489" cy="58189"/>
+            <a:off x="1436085" y="5507181"/>
+            <a:ext cx="114808" cy="58189"/>
           </a:xfrm>
           <a:prstGeom prst="rect">
             <a:avLst/>
@@ -5751,14 +5751,14 @@
                   <a:srgbClr val="404040"/>
                 </a:solidFill>
               </a:rPr>
-              <a:t>日立製作所</a:t>
+              <a:t>富士通</a:t>
             </a:r>
           </a:p>
         </p:txBody>
       </p:sp>
       <p:pic>
         <p:nvPicPr>
-          <p:cNvPr id="94" name="Picture 93" descr="東京ガス.png"/>
+          <p:cNvPr id="94" name="Picture 93" descr="日本郵政.png"/>
           <p:cNvPicPr>
             <a:picLocks noChangeAspect="1"/>
           </p:cNvPicPr>
@@ -5772,8 +5772,8 @@
         </p:blipFill>
         <p:spPr>
           <a:xfrm>
-            <a:off x="3655257" y="5507181"/>
-            <a:ext cx="278822" cy="58189"/>
+            <a:off x="3767370" y="5507181"/>
+            <a:ext cx="54597" cy="58189"/>
           </a:xfrm>
           <a:prstGeom prst="rect">
             <a:avLst/>
@@ -5809,14 +5809,14 @@
                   <a:srgbClr val="404040"/>
                 </a:solidFill>
               </a:rPr>
-              <a:t>東京ガス</a:t>
+              <a:t>日本郵政</a:t>
             </a:r>
           </a:p>
         </p:txBody>
       </p:sp>
       <p:pic>
         <p:nvPicPr>
-          <p:cNvPr id="96" name="Picture 95" descr="楽天.png"/>
+          <p:cNvPr id="96" name="Picture 95" descr="日立製作所.png"/>
           <p:cNvPicPr>
             <a:picLocks noChangeAspect="1"/>
           </p:cNvPicPr>
@@ -5830,8 +5830,8 @@
         </p:blipFill>
         <p:spPr>
           <a:xfrm>
-            <a:off x="6006350" y="5507181"/>
-            <a:ext cx="178994" cy="58189"/>
+            <a:off x="5943603" y="5507181"/>
+            <a:ext cx="304489" cy="58189"/>
           </a:xfrm>
           <a:prstGeom prst="rect">
             <a:avLst/>
@@ -5867,14 +5867,14 @@
                   <a:srgbClr val="404040"/>
                 </a:solidFill>
               </a:rPr>
-              <a:t>楽天</a:t>
+              <a:t>日立製作所</a:t>
             </a:r>
           </a:p>
         </p:txBody>
       </p:sp>
       <p:pic>
         <p:nvPicPr>
-          <p:cNvPr id="98" name="Picture 97" descr="楽天グループ.png"/>
+          <p:cNvPr id="98" name="Picture 97" descr="東京ガス.png"/>
           <p:cNvPicPr>
             <a:picLocks noChangeAspect="1"/>
           </p:cNvPicPr>
@@ -5888,8 +5888,8 @@
         </p:blipFill>
         <p:spPr>
           <a:xfrm>
-            <a:off x="8308467" y="5507181"/>
-            <a:ext cx="177119" cy="58189"/>
+            <a:off x="8257615" y="5507181"/>
+            <a:ext cx="278822" cy="58189"/>
           </a:xfrm>
           <a:prstGeom prst="rect">
             <a:avLst/>
@@ -5925,14 +5925,14 @@
                   <a:srgbClr val="404040"/>
                 </a:solidFill>
               </a:rPr>
-              <a:t>楽天グループ</a:t>
+              <a:t>東京ガス</a:t>
             </a:r>
           </a:p>
         </p:txBody>
       </p:sp>
       <p:pic>
         <p:nvPicPr>
-          <p:cNvPr id="100" name="Picture 99" descr="花王.png"/>
+          <p:cNvPr id="100" name="Picture 99" descr="楽天.png"/>
           <p:cNvPicPr>
             <a:picLocks noChangeAspect="1"/>
           </p:cNvPicPr>
@@ -5946,8 +5946,8 @@
         </p:blipFill>
         <p:spPr>
           <a:xfrm>
-            <a:off x="10646907" y="5507181"/>
-            <a:ext cx="102596" cy="58189"/>
+            <a:off x="10608708" y="5507181"/>
+            <a:ext cx="178994" cy="58189"/>
           </a:xfrm>
           <a:prstGeom prst="rect">
             <a:avLst/>
@@ -5983,14 +5983,14 @@
                   <a:srgbClr val="404040"/>
                 </a:solidFill>
               </a:rPr>
-              <a:t>花王</a:t>
+              <a:t>楽天</a:t>
             </a:r>
           </a:p>
         </p:txBody>
       </p:sp>
       <p:pic>
         <p:nvPicPr>
-          <p:cNvPr id="102" name="Picture 101" descr="資生堂.png"/>
+          <p:cNvPr id="102" name="Picture 101" descr="楽天グループ.png"/>
           <p:cNvPicPr>
             <a:picLocks noChangeAspect="1"/>
           </p:cNvPicPr>
@@ -6004,8 +6004,8 @@
         </p:blipFill>
         <p:spPr>
           <a:xfrm>
-            <a:off x="1348159" y="6068290"/>
-            <a:ext cx="290661" cy="58189"/>
+            <a:off x="1404930" y="6068290"/>
+            <a:ext cx="177119" cy="58189"/>
           </a:xfrm>
           <a:prstGeom prst="rect">
             <a:avLst/>
@@ -6041,14 +6041,14 @@
                   <a:srgbClr val="404040"/>
                 </a:solidFill>
               </a:rPr>
-              <a:t>資生堂</a:t>
+              <a:t>楽天グループ</a:t>
             </a:r>
           </a:p>
         </p:txBody>
       </p:sp>
       <p:pic>
         <p:nvPicPr>
-          <p:cNvPr id="104" name="Picture 103" descr="野村ホールディングス.png"/>
+          <p:cNvPr id="104" name="Picture 103" descr="花王.png"/>
           <p:cNvPicPr>
             <a:picLocks noChangeAspect="1"/>
           </p:cNvPicPr>
@@ -6062,8 +6062,8 @@
         </p:blipFill>
         <p:spPr>
           <a:xfrm>
-            <a:off x="3654796" y="6068290"/>
-            <a:ext cx="279744" cy="58189"/>
+            <a:off x="3743370" y="6068290"/>
+            <a:ext cx="102596" cy="58189"/>
           </a:xfrm>
           <a:prstGeom prst="rect">
             <a:avLst/>
@@ -6079,6 +6079,122 @@
         <p:spPr>
           <a:xfrm>
             <a:off x="2758379" y="6126479"/>
+            <a:ext cx="2072579" cy="274320"/>
+          </a:xfrm>
+          <a:prstGeom prst="rect">
+            <a:avLst/>
+          </a:prstGeom>
+          <a:noFill/>
+        </p:spPr>
+        <p:txBody>
+          <a:bodyPr wrap="square">
+            <a:spAutoFit/>
+          </a:bodyPr>
+          <a:lstStyle/>
+          <a:p>
+            <a:pPr algn="ctr"/>
+            <a:r>
+              <a:rPr sz="1000">
+                <a:solidFill>
+                  <a:srgbClr val="404040"/>
+                </a:solidFill>
+              </a:rPr>
+              <a:t>花王</a:t>
+            </a:r>
+          </a:p>
+        </p:txBody>
+      </p:sp>
+      <p:pic>
+        <p:nvPicPr>
+          <p:cNvPr id="106" name="Picture 105" descr="資生堂.png"/>
+          <p:cNvPicPr>
+            <a:picLocks noChangeAspect="1"/>
+          </p:cNvPicPr>
+          <p:nvPr/>
+        </p:nvPicPr>
+        <p:blipFill>
+          <a:blip r:embed="rId54"/>
+          <a:stretch>
+            <a:fillRect/>
+          </a:stretch>
+        </p:blipFill>
+        <p:spPr>
+          <a:xfrm>
+            <a:off x="5950517" y="6068290"/>
+            <a:ext cx="290661" cy="58189"/>
+          </a:xfrm>
+          <a:prstGeom prst="rect">
+            <a:avLst/>
+          </a:prstGeom>
+        </p:spPr>
+      </p:pic>
+      <p:sp>
+        <p:nvSpPr>
+          <p:cNvPr id="107" name="TextBox 106"/>
+          <p:cNvSpPr txBox="1"/>
+          <p:nvPr/>
+        </p:nvSpPr>
+        <p:spPr>
+          <a:xfrm>
+            <a:off x="5059558" y="6126479"/>
+            <a:ext cx="2072579" cy="274320"/>
+          </a:xfrm>
+          <a:prstGeom prst="rect">
+            <a:avLst/>
+          </a:prstGeom>
+          <a:noFill/>
+        </p:spPr>
+        <p:txBody>
+          <a:bodyPr wrap="square">
+            <a:spAutoFit/>
+          </a:bodyPr>
+          <a:lstStyle/>
+          <a:p>
+            <a:pPr algn="ctr"/>
+            <a:r>
+              <a:rPr sz="1000">
+                <a:solidFill>
+                  <a:srgbClr val="404040"/>
+                </a:solidFill>
+              </a:rPr>
+              <a:t>資生堂</a:t>
+            </a:r>
+          </a:p>
+        </p:txBody>
+      </p:sp>
+      <p:pic>
+        <p:nvPicPr>
+          <p:cNvPr id="108" name="Picture 107" descr="野村ホールディングス.png"/>
+          <p:cNvPicPr>
+            <a:picLocks noChangeAspect="1"/>
+          </p:cNvPicPr>
+          <p:nvPr/>
+        </p:nvPicPr>
+        <p:blipFill>
+          <a:blip r:embed="rId55"/>
+          <a:stretch>
+            <a:fillRect/>
+          </a:stretch>
+        </p:blipFill>
+        <p:spPr>
+          <a:xfrm>
+            <a:off x="8257154" y="6068290"/>
+            <a:ext cx="279744" cy="58189"/>
+          </a:xfrm>
+          <a:prstGeom prst="rect">
+            <a:avLst/>
+          </a:prstGeom>
+        </p:spPr>
+      </p:pic>
+      <p:sp>
+        <p:nvSpPr>
+          <p:cNvPr id="109" name="TextBox 108"/>
+          <p:cNvSpPr txBox="1"/>
+          <p:nvPr/>
+        </p:nvSpPr>
+        <p:spPr>
+          <a:xfrm>
+            <a:off x="7360737" y="6126479"/>
             <a:ext cx="2072579" cy="274320"/>
           </a:xfrm>
           <a:prstGeom prst="rect">

--- a/docs/logos.pptx
+++ b/docs/logos.pptx
@@ -3104,8 +3104,8 @@
         </p:blipFill>
         <p:spPr>
           <a:xfrm>
-            <a:off x="1446124" y="457200"/>
-            <a:ext cx="94730" cy="58189"/>
+            <a:off x="1516391" y="457199"/>
+            <a:ext cx="-45803" cy="-28135"/>
           </a:xfrm>
           <a:prstGeom prst="rect">
             <a:avLst/>
@@ -3120,7 +3120,7 @@
         </p:nvSpPr>
         <p:spPr>
           <a:xfrm>
-            <a:off x="457200" y="515389"/>
+            <a:off x="457200" y="429064"/>
             <a:ext cx="2072579" cy="274320"/>
           </a:xfrm>
           <a:prstGeom prst="rect">
@@ -3162,8 +3162,8 @@
         </p:blipFill>
         <p:spPr>
           <a:xfrm>
-            <a:off x="3698800" y="457200"/>
-            <a:ext cx="191737" cy="58189"/>
+            <a:off x="3841022" y="457199"/>
+            <a:ext cx="-92708" cy="-28135"/>
           </a:xfrm>
           <a:prstGeom prst="rect">
             <a:avLst/>
@@ -3178,7 +3178,7 @@
         </p:nvSpPr>
         <p:spPr>
           <a:xfrm>
-            <a:off x="2758379" y="515389"/>
+            <a:off x="2758379" y="429064"/>
             <a:ext cx="2072579" cy="274320"/>
           </a:xfrm>
           <a:prstGeom prst="rect">
@@ -3220,8 +3220,8 @@
         </p:blipFill>
         <p:spPr>
           <a:xfrm>
-            <a:off x="6045271" y="457200"/>
-            <a:ext cx="101153" cy="58189"/>
+            <a:off x="6120302" y="457199"/>
+            <a:ext cx="-48909" cy="-28135"/>
           </a:xfrm>
           <a:prstGeom prst="rect">
             <a:avLst/>
@@ -3236,7 +3236,7 @@
         </p:nvSpPr>
         <p:spPr>
           <a:xfrm>
-            <a:off x="5059558" y="515389"/>
+            <a:off x="5059558" y="429064"/>
             <a:ext cx="2072579" cy="274320"/>
           </a:xfrm>
           <a:prstGeom prst="rect">
@@ -3278,8 +3278,8 @@
         </p:blipFill>
         <p:spPr>
           <a:xfrm>
-            <a:off x="8373381" y="457200"/>
-            <a:ext cx="47291" cy="58189"/>
+            <a:off x="8408459" y="457199"/>
+            <a:ext cx="-22866" cy="-28135"/>
           </a:xfrm>
           <a:prstGeom prst="rect">
             <a:avLst/>
@@ -3294,7 +3294,7 @@
         </p:nvSpPr>
         <p:spPr>
           <a:xfrm>
-            <a:off x="7360737" y="515389"/>
+            <a:off x="7360737" y="429064"/>
             <a:ext cx="2072579" cy="274320"/>
           </a:xfrm>
           <a:prstGeom prst="rect">
@@ -3336,8 +3336,8 @@
         </p:blipFill>
         <p:spPr>
           <a:xfrm>
-            <a:off x="10624043" y="457200"/>
-            <a:ext cx="148325" cy="58189"/>
+            <a:off x="10734064" y="457199"/>
+            <a:ext cx="-71717" cy="-28135"/>
           </a:xfrm>
           <a:prstGeom prst="rect">
             <a:avLst/>
@@ -3352,7 +3352,7 @@
         </p:nvSpPr>
         <p:spPr>
           <a:xfrm>
-            <a:off x="9661916" y="515389"/>
+            <a:off x="9661916" y="429064"/>
             <a:ext cx="2072579" cy="274320"/>
           </a:xfrm>
           <a:prstGeom prst="rect">
@@ -3394,8 +3394,8 @@
         </p:blipFill>
         <p:spPr>
           <a:xfrm>
-            <a:off x="1465011" y="1018309"/>
-            <a:ext cx="56956" cy="58189"/>
+            <a:off x="1507259" y="931984"/>
+            <a:ext cx="-27539" cy="-28135"/>
           </a:xfrm>
           <a:prstGeom prst="rect">
             <a:avLst/>
@@ -3410,7 +3410,7 @@
         </p:nvSpPr>
         <p:spPr>
           <a:xfrm>
-            <a:off x="457200" y="1076498"/>
+            <a:off x="457200" y="903849"/>
             <a:ext cx="2072579" cy="274320"/>
           </a:xfrm>
           <a:prstGeom prst="rect">
@@ -3452,8 +3452,8 @@
         </p:blipFill>
         <p:spPr>
           <a:xfrm>
-            <a:off x="3642143" y="1018309"/>
-            <a:ext cx="305051" cy="58189"/>
+            <a:off x="3868417" y="931984"/>
+            <a:ext cx="-147497" cy="-28135"/>
           </a:xfrm>
           <a:prstGeom prst="rect">
             <a:avLst/>
@@ -3468,7 +3468,7 @@
         </p:nvSpPr>
         <p:spPr>
           <a:xfrm>
-            <a:off x="2758379" y="1076498"/>
+            <a:off x="2758379" y="903849"/>
             <a:ext cx="2072579" cy="274320"/>
           </a:xfrm>
           <a:prstGeom prst="rect">
@@ -3496,7 +3496,7 @@
       </p:sp>
       <p:pic>
         <p:nvPicPr>
-          <p:cNvPr id="16" name="Picture 15" descr="KDDI.png"/>
+          <p:cNvPr id="16" name="Picture 15" descr="JAL.png"/>
           <p:cNvPicPr>
             <a:picLocks noChangeAspect="1"/>
           </p:cNvPicPr>
@@ -3510,8 +3510,8 @@
         </p:blipFill>
         <p:spPr>
           <a:xfrm>
-            <a:off x="6033502" y="1018309"/>
-            <a:ext cx="124690" cy="58189"/>
+            <a:off x="6110495" y="931984"/>
+            <a:ext cx="-29295" cy="-28135"/>
           </a:xfrm>
           <a:prstGeom prst="rect">
             <a:avLst/>
@@ -3526,7 +3526,7 @@
         </p:nvSpPr>
         <p:spPr>
           <a:xfrm>
-            <a:off x="5059558" y="1076498"/>
+            <a:off x="5059558" y="903849"/>
             <a:ext cx="2072579" cy="274320"/>
           </a:xfrm>
           <a:prstGeom prst="rect">
@@ -3547,14 +3547,14 @@
                   <a:srgbClr val="404040"/>
                 </a:solidFill>
               </a:rPr>
-              <a:t>KDDI</a:t>
+              <a:t>JAL</a:t>
             </a:r>
           </a:p>
         </p:txBody>
       </p:sp>
       <p:pic>
         <p:nvPicPr>
-          <p:cNvPr id="18" name="Picture 17" descr="KFC.png"/>
+          <p:cNvPr id="18" name="Picture 17" descr="JR東海.png"/>
           <p:cNvPicPr>
             <a:picLocks noChangeAspect="1"/>
           </p:cNvPicPr>
@@ -3568,8 +3568,8 @@
         </p:blipFill>
         <p:spPr>
           <a:xfrm>
-            <a:off x="8308031" y="1018309"/>
-            <a:ext cx="177990" cy="58189"/>
+            <a:off x="8415955" y="931984"/>
+            <a:ext cx="-37858" cy="-28135"/>
           </a:xfrm>
           <a:prstGeom prst="rect">
             <a:avLst/>
@@ -3584,7 +3584,7 @@
         </p:nvSpPr>
         <p:spPr>
           <a:xfrm>
-            <a:off x="7360737" y="1076498"/>
+            <a:off x="7360737" y="903849"/>
             <a:ext cx="2072579" cy="274320"/>
           </a:xfrm>
           <a:prstGeom prst="rect">
@@ -3605,14 +3605,14 @@
                   <a:srgbClr val="404040"/>
                 </a:solidFill>
               </a:rPr>
-              <a:t>KFC</a:t>
+              <a:t>JR東海</a:t>
             </a:r>
           </a:p>
         </p:txBody>
       </p:sp>
       <p:pic>
         <p:nvPicPr>
-          <p:cNvPr id="20" name="Picture 19" descr="LINE.png"/>
+          <p:cNvPr id="20" name="Picture 19" descr="KDDI.png"/>
           <p:cNvPicPr>
             <a:picLocks noChangeAspect="1"/>
           </p:cNvPicPr>
@@ -3626,8 +3626,8 @@
         </p:blipFill>
         <p:spPr>
           <a:xfrm>
-            <a:off x="10669083" y="1018309"/>
-            <a:ext cx="58245" cy="58189"/>
+            <a:off x="10728350" y="931984"/>
+            <a:ext cx="-60290" cy="-28135"/>
           </a:xfrm>
           <a:prstGeom prst="rect">
             <a:avLst/>
@@ -3642,7 +3642,7 @@
         </p:nvSpPr>
         <p:spPr>
           <a:xfrm>
-            <a:off x="9661916" y="1076498"/>
+            <a:off x="9661916" y="903849"/>
             <a:ext cx="2072579" cy="274320"/>
           </a:xfrm>
           <a:prstGeom prst="rect">
@@ -3663,14 +3663,14 @@
                   <a:srgbClr val="404040"/>
                 </a:solidFill>
               </a:rPr>
-              <a:t>LINE</a:t>
+              <a:t>KDDI</a:t>
             </a:r>
           </a:p>
         </p:txBody>
       </p:sp>
       <p:pic>
         <p:nvPicPr>
-          <p:cNvPr id="22" name="Picture 21" descr="LayerX.png"/>
+          <p:cNvPr id="22" name="Picture 21" descr="KFC.png"/>
           <p:cNvPicPr>
             <a:picLocks noChangeAspect="1"/>
           </p:cNvPicPr>
@@ -3684,8 +3684,8 @@
         </p:blipFill>
         <p:spPr>
           <a:xfrm>
-            <a:off x="1386628" y="1579418"/>
-            <a:ext cx="213722" cy="58189"/>
+            <a:off x="1536520" y="1406769"/>
+            <a:ext cx="-86061" cy="-28135"/>
           </a:xfrm>
           <a:prstGeom prst="rect">
             <a:avLst/>
@@ -3700,7 +3700,7 @@
         </p:nvSpPr>
         <p:spPr>
           <a:xfrm>
-            <a:off x="457200" y="1637607"/>
+            <a:off x="457200" y="1378633"/>
             <a:ext cx="2072579" cy="274320"/>
           </a:xfrm>
           <a:prstGeom prst="rect">
@@ -3721,14 +3721,14 @@
                   <a:srgbClr val="404040"/>
                 </a:solidFill>
               </a:rPr>
-              <a:t>LayerX</a:t>
+              <a:t>KFC</a:t>
             </a:r>
           </a:p>
         </p:txBody>
       </p:sp>
       <p:pic>
         <p:nvPicPr>
-          <p:cNvPr id="24" name="Picture 23" descr="Meta.png"/>
+          <p:cNvPr id="24" name="Picture 23" descr="KIRIN.png"/>
           <p:cNvPicPr>
             <a:picLocks noChangeAspect="1"/>
           </p:cNvPicPr>
@@ -3742,8 +3742,8 @@
         </p:blipFill>
         <p:spPr>
           <a:xfrm>
-            <a:off x="3671328" y="1579418"/>
-            <a:ext cx="246681" cy="58189"/>
+            <a:off x="3821362" y="1406769"/>
+            <a:ext cx="-53388" cy="-28135"/>
           </a:xfrm>
           <a:prstGeom prst="rect">
             <a:avLst/>
@@ -3758,7 +3758,7 @@
         </p:nvSpPr>
         <p:spPr>
           <a:xfrm>
-            <a:off x="2758379" y="1637607"/>
+            <a:off x="2758379" y="1378633"/>
             <a:ext cx="2072579" cy="274320"/>
           </a:xfrm>
           <a:prstGeom prst="rect">
@@ -3779,14 +3779,14 @@
                   <a:srgbClr val="404040"/>
                 </a:solidFill>
               </a:rPr>
-              <a:t>Meta</a:t>
+              <a:t>KIRIN</a:t>
             </a:r>
           </a:p>
         </p:txBody>
       </p:sp>
       <p:pic>
         <p:nvPicPr>
-          <p:cNvPr id="26" name="Picture 25" descr="NEC.png"/>
+          <p:cNvPr id="26" name="Picture 25" descr="LINE.png"/>
           <p:cNvPicPr>
             <a:picLocks noChangeAspect="1"/>
           </p:cNvPicPr>
@@ -3800,8 +3800,8 @@
         </p:blipFill>
         <p:spPr>
           <a:xfrm>
-            <a:off x="5997196" y="1579418"/>
-            <a:ext cx="197303" cy="58189"/>
+            <a:off x="6109928" y="1406769"/>
+            <a:ext cx="-28162" cy="-28135"/>
           </a:xfrm>
           <a:prstGeom prst="rect">
             <a:avLst/>
@@ -3816,7 +3816,7 @@
         </p:nvSpPr>
         <p:spPr>
           <a:xfrm>
-            <a:off x="5059558" y="1637607"/>
+            <a:off x="5059558" y="1378633"/>
             <a:ext cx="2072579" cy="274320"/>
           </a:xfrm>
           <a:prstGeom prst="rect">
@@ -3837,14 +3837,14 @@
                   <a:srgbClr val="404040"/>
                 </a:solidFill>
               </a:rPr>
-              <a:t>NEC</a:t>
+              <a:t>LINE</a:t>
             </a:r>
           </a:p>
         </p:txBody>
       </p:sp>
       <p:pic>
         <p:nvPicPr>
-          <p:cNvPr id="28" name="Picture 27" descr="NTTデータ.png"/>
+          <p:cNvPr id="28" name="Picture 27" descr="LayerX.png"/>
           <p:cNvPicPr>
             <a:picLocks noChangeAspect="1"/>
           </p:cNvPicPr>
@@ -3858,8 +3858,8 @@
         </p:blipFill>
         <p:spPr>
           <a:xfrm>
-            <a:off x="8274398" y="1579418"/>
-            <a:ext cx="245256" cy="58189"/>
+            <a:off x="8448695" y="1406769"/>
+            <a:ext cx="-103338" cy="-28135"/>
           </a:xfrm>
           <a:prstGeom prst="rect">
             <a:avLst/>
@@ -3874,7 +3874,7 @@
         </p:nvSpPr>
         <p:spPr>
           <a:xfrm>
-            <a:off x="7360737" y="1637607"/>
+            <a:off x="7360737" y="1378633"/>
             <a:ext cx="2072579" cy="274320"/>
           </a:xfrm>
           <a:prstGeom prst="rect">
@@ -3895,14 +3895,14 @@
                   <a:srgbClr val="404040"/>
                 </a:solidFill>
               </a:rPr>
-              <a:t>NTTデータ</a:t>
+              <a:t>LayerX</a:t>
             </a:r>
           </a:p>
         </p:txBody>
       </p:sp>
       <p:pic>
         <p:nvPicPr>
-          <p:cNvPr id="30" name="Picture 29" descr="OpenAI.png"/>
+          <p:cNvPr id="30" name="Picture 29" descr="Meta.png"/>
           <p:cNvPicPr>
             <a:picLocks noChangeAspect="1"/>
           </p:cNvPicPr>
@@ -3916,8 +3916,8 @@
         </p:blipFill>
         <p:spPr>
           <a:xfrm>
-            <a:off x="10668720" y="1579418"/>
-            <a:ext cx="58971" cy="58189"/>
+            <a:off x="10757842" y="1406769"/>
+            <a:ext cx="-119274" cy="-28135"/>
           </a:xfrm>
           <a:prstGeom prst="rect">
             <a:avLst/>
@@ -3932,7 +3932,7 @@
         </p:nvSpPr>
         <p:spPr>
           <a:xfrm>
-            <a:off x="9661916" y="1637607"/>
+            <a:off x="9661916" y="1378633"/>
             <a:ext cx="2072579" cy="274320"/>
           </a:xfrm>
           <a:prstGeom prst="rect">
@@ -3953,14 +3953,14 @@
                   <a:srgbClr val="404040"/>
                 </a:solidFill>
               </a:rPr>
-              <a:t>OpenAI</a:t>
+              <a:t>Meta</a:t>
             </a:r>
           </a:p>
         </p:txBody>
       </p:sp>
       <p:pic>
         <p:nvPicPr>
-          <p:cNvPr id="32" name="Picture 31" descr="Qwen.png"/>
+          <p:cNvPr id="32" name="Picture 31" descr="NEC.png"/>
           <p:cNvPicPr>
             <a:picLocks noChangeAspect="1"/>
           </p:cNvPicPr>
@@ -3974,8 +3974,8 @@
         </p:blipFill>
         <p:spPr>
           <a:xfrm>
-            <a:off x="1464395" y="2140527"/>
-            <a:ext cx="58189" cy="58189"/>
+            <a:off x="1541189" y="1881553"/>
+            <a:ext cx="-95399" cy="-28135"/>
           </a:xfrm>
           <a:prstGeom prst="rect">
             <a:avLst/>
@@ -3990,7 +3990,7 @@
         </p:nvSpPr>
         <p:spPr>
           <a:xfrm>
-            <a:off x="457200" y="2198716"/>
+            <a:off x="457200" y="1853418"/>
             <a:ext cx="2072579" cy="274320"/>
           </a:xfrm>
           <a:prstGeom prst="rect">
@@ -4011,14 +4011,14 @@
                   <a:srgbClr val="404040"/>
                 </a:solidFill>
               </a:rPr>
-              <a:t>Qwen</a:t>
+              <a:t>NEC</a:t>
             </a:r>
           </a:p>
         </p:txBody>
       </p:sp>
       <p:pic>
         <p:nvPicPr>
-          <p:cNvPr id="34" name="Picture 33" descr="Salesforce.png"/>
+          <p:cNvPr id="34" name="Picture 33" descr="NTTデータ.png"/>
           <p:cNvPicPr>
             <a:picLocks noChangeAspect="1"/>
           </p:cNvPicPr>
@@ -4032,8 +4032,8 @@
         </p:blipFill>
         <p:spPr>
           <a:xfrm>
-            <a:off x="3753744" y="2140527"/>
-            <a:ext cx="81848" cy="58189"/>
+            <a:off x="3853961" y="1881553"/>
+            <a:ext cx="-118585" cy="-28135"/>
           </a:xfrm>
           <a:prstGeom prst="rect">
             <a:avLst/>
@@ -4048,7 +4048,7 @@
         </p:nvSpPr>
         <p:spPr>
           <a:xfrm>
-            <a:off x="2758379" y="2198716"/>
+            <a:off x="2758379" y="1853418"/>
             <a:ext cx="2072579" cy="274320"/>
           </a:xfrm>
           <a:prstGeom prst="rect">
@@ -4069,14 +4069,14 @@
                   <a:srgbClr val="404040"/>
                 </a:solidFill>
               </a:rPr>
-              <a:t>Salesforce</a:t>
+              <a:t>NTTデータ</a:t>
             </a:r>
           </a:p>
         </p:txBody>
       </p:sp>
       <p:pic>
         <p:nvPicPr>
-          <p:cNvPr id="36" name="Picture 35" descr="Snowflake.png"/>
+          <p:cNvPr id="36" name="Picture 35" descr="OpenAI.png"/>
           <p:cNvPicPr>
             <a:picLocks noChangeAspect="1"/>
           </p:cNvPicPr>
@@ -4090,8 +4090,8 @@
         </p:blipFill>
         <p:spPr>
           <a:xfrm>
-            <a:off x="5987115" y="2140527"/>
-            <a:ext cx="217465" cy="58189"/>
+            <a:off x="6110104" y="1881553"/>
+            <a:ext cx="-28513" cy="-28135"/>
           </a:xfrm>
           <a:prstGeom prst="rect">
             <a:avLst/>
@@ -4106,7 +4106,7 @@
         </p:nvSpPr>
         <p:spPr>
           <a:xfrm>
-            <a:off x="5059558" y="2198716"/>
+            <a:off x="5059558" y="1853418"/>
             <a:ext cx="2072579" cy="274320"/>
           </a:xfrm>
           <a:prstGeom prst="rect">
@@ -4127,14 +4127,14 @@
                   <a:srgbClr val="404040"/>
                 </a:solidFill>
               </a:rPr>
-              <a:t>Snowflake</a:t>
+              <a:t>OpenAI</a:t>
             </a:r>
           </a:p>
         </p:txBody>
       </p:sp>
       <p:pic>
         <p:nvPicPr>
-          <p:cNvPr id="38" name="Picture 37" descr="Softbank.png"/>
+          <p:cNvPr id="38" name="Picture 37" descr="PPIH.png"/>
           <p:cNvPicPr>
             <a:picLocks noChangeAspect="1"/>
           </p:cNvPicPr>
@@ -4148,8 +4148,8 @@
         </p:blipFill>
         <p:spPr>
           <a:xfrm>
-            <a:off x="8270950" y="2140527"/>
-            <a:ext cx="252152" cy="58189"/>
+            <a:off x="8440761" y="1881553"/>
+            <a:ext cx="-87470" cy="-28135"/>
           </a:xfrm>
           <a:prstGeom prst="rect">
             <a:avLst/>
@@ -4164,7 +4164,7 @@
         </p:nvSpPr>
         <p:spPr>
           <a:xfrm>
-            <a:off x="7360737" y="2198716"/>
+            <a:off x="7360737" y="1853418"/>
             <a:ext cx="2072579" cy="274320"/>
           </a:xfrm>
           <a:prstGeom prst="rect">
@@ -4185,14 +4185,14 @@
                   <a:srgbClr val="404040"/>
                 </a:solidFill>
               </a:rPr>
-              <a:t>Softbank</a:t>
+              <a:t>PPIH</a:t>
             </a:r>
           </a:p>
         </p:txBody>
       </p:sp>
       <p:pic>
         <p:nvPicPr>
-          <p:cNvPr id="40" name="Picture 39" descr="SyncMe.png"/>
+          <p:cNvPr id="40" name="Picture 39" descr="Qwen.png"/>
           <p:cNvPicPr>
             <a:picLocks noChangeAspect="1"/>
           </p:cNvPicPr>
@@ -4206,8 +4206,8 @@
         </p:blipFill>
         <p:spPr>
           <a:xfrm>
-            <a:off x="10577892" y="2140527"/>
-            <a:ext cx="240627" cy="58189"/>
+            <a:off x="10712273" y="1881553"/>
+            <a:ext cx="-28135" cy="-28135"/>
           </a:xfrm>
           <a:prstGeom prst="rect">
             <a:avLst/>
@@ -4222,7 +4222,7 @@
         </p:nvSpPr>
         <p:spPr>
           <a:xfrm>
-            <a:off x="9661916" y="2198716"/>
+            <a:off x="9661916" y="1853418"/>
             <a:ext cx="2072579" cy="274320"/>
           </a:xfrm>
           <a:prstGeom prst="rect">
@@ -4243,14 +4243,14 @@
                   <a:srgbClr val="404040"/>
                 </a:solidFill>
               </a:rPr>
-              <a:t>SyncMe</a:t>
+              <a:t>Qwen</a:t>
             </a:r>
           </a:p>
         </p:txBody>
       </p:sp>
       <p:pic>
         <p:nvPicPr>
-          <p:cNvPr id="42" name="Picture 41" descr="ahamo.png"/>
+          <p:cNvPr id="42" name="Picture 41" descr="Salesforce.png"/>
           <p:cNvPicPr>
             <a:picLocks noChangeAspect="1"/>
           </p:cNvPicPr>
@@ -4264,8 +4264,8 @@
         </p:blipFill>
         <p:spPr>
           <a:xfrm>
-            <a:off x="1439926" y="2701636"/>
-            <a:ext cx="107127" cy="58189"/>
+            <a:off x="1513277" y="2356338"/>
+            <a:ext cx="-39575" cy="-28135"/>
           </a:xfrm>
           <a:prstGeom prst="rect">
             <a:avLst/>
@@ -4280,7 +4280,7 @@
         </p:nvSpPr>
         <p:spPr>
           <a:xfrm>
-            <a:off x="457200" y="2759825"/>
+            <a:off x="457200" y="2328203"/>
             <a:ext cx="2072579" cy="274320"/>
           </a:xfrm>
           <a:prstGeom prst="rect">
@@ -4301,14 +4301,14 @@
                   <a:srgbClr val="404040"/>
                 </a:solidFill>
               </a:rPr>
-              <a:t>ahamo</a:t>
+              <a:t>Salesforce</a:t>
             </a:r>
           </a:p>
         </p:txBody>
       </p:sp>
       <p:pic>
         <p:nvPicPr>
-          <p:cNvPr id="44" name="Picture 43" descr="dポイント.png"/>
+          <p:cNvPr id="44" name="Picture 43" descr="Snowflake.png"/>
           <p:cNvPicPr>
             <a:picLocks noChangeAspect="1"/>
           </p:cNvPicPr>
@@ -4322,8 +4322,8 @@
         </p:blipFill>
         <p:spPr>
           <a:xfrm>
-            <a:off x="3772071" y="2701636"/>
-            <a:ext cx="45195" cy="58189"/>
+            <a:off x="3847242" y="2356338"/>
+            <a:ext cx="-105148" cy="-28135"/>
           </a:xfrm>
           <a:prstGeom prst="rect">
             <a:avLst/>
@@ -4338,7 +4338,7 @@
         </p:nvSpPr>
         <p:spPr>
           <a:xfrm>
-            <a:off x="2758379" y="2759825"/>
+            <a:off x="2758379" y="2328203"/>
             <a:ext cx="2072579" cy="274320"/>
           </a:xfrm>
           <a:prstGeom prst="rect">
@@ -4359,14 +4359,14 @@
                   <a:srgbClr val="404040"/>
                 </a:solidFill>
               </a:rPr>
-              <a:t>dポイント</a:t>
+              <a:t>Snowflake</a:t>
             </a:r>
           </a:p>
         </p:txBody>
       </p:sp>
       <p:pic>
         <p:nvPicPr>
-          <p:cNvPr id="46" name="Picture 45" descr="dマガジン.png"/>
+          <p:cNvPr id="46" name="Picture 45" descr="Softbank.png"/>
           <p:cNvPicPr>
             <a:picLocks noChangeAspect="1"/>
           </p:cNvPicPr>
@@ -4380,8 +4380,8 @@
         </p:blipFill>
         <p:spPr>
           <a:xfrm>
-            <a:off x="6066658" y="2701636"/>
-            <a:ext cx="58378" cy="58189"/>
+            <a:off x="6156807" y="2356338"/>
+            <a:ext cx="-121920" cy="-28135"/>
           </a:xfrm>
           <a:prstGeom prst="rect">
             <a:avLst/>
@@ -4396,7 +4396,7 @@
         </p:nvSpPr>
         <p:spPr>
           <a:xfrm>
-            <a:off x="5059558" y="2759825"/>
+            <a:off x="5059558" y="2328203"/>
             <a:ext cx="2072579" cy="274320"/>
           </a:xfrm>
           <a:prstGeom prst="rect">
@@ -4417,14 +4417,14 @@
                   <a:srgbClr val="404040"/>
                 </a:solidFill>
               </a:rPr>
-              <a:t>dマガジン</a:t>
+              <a:t>Softbank</a:t>
             </a:r>
           </a:p>
         </p:txBody>
       </p:sp>
       <p:pic>
         <p:nvPicPr>
-          <p:cNvPr id="48" name="Picture 47" descr="d払い.png"/>
+          <p:cNvPr id="48" name="Picture 47" descr="SyncMe.png"/>
           <p:cNvPicPr>
             <a:picLocks noChangeAspect="1"/>
           </p:cNvPicPr>
@@ -4438,8 +4438,8 @@
         </p:blipFill>
         <p:spPr>
           <a:xfrm>
-            <a:off x="8304789" y="2701636"/>
-            <a:ext cx="184475" cy="58189"/>
+            <a:off x="8455200" y="2356338"/>
+            <a:ext cx="-116347" cy="-28135"/>
           </a:xfrm>
           <a:prstGeom prst="rect">
             <a:avLst/>
@@ -4454,7 +4454,7 @@
         </p:nvSpPr>
         <p:spPr>
           <a:xfrm>
-            <a:off x="7360737" y="2759825"/>
+            <a:off x="7360737" y="2328203"/>
             <a:ext cx="2072579" cy="274320"/>
           </a:xfrm>
           <a:prstGeom prst="rect">
@@ -4475,14 +4475,14 @@
                   <a:srgbClr val="404040"/>
                 </a:solidFill>
               </a:rPr>
-              <a:t>d払い</a:t>
+              <a:t>SyncMe</a:t>
             </a:r>
           </a:p>
         </p:txBody>
       </p:sp>
       <p:pic>
         <p:nvPicPr>
-          <p:cNvPr id="50" name="Picture 49" descr="アサヒグループホールディングス.png"/>
+          <p:cNvPr id="50" name="Picture 49" descr="ahamo.png"/>
           <p:cNvPicPr>
             <a:picLocks noChangeAspect="1"/>
           </p:cNvPicPr>
@@ -4496,8 +4496,8 @@
         </p:blipFill>
         <p:spPr>
           <a:xfrm>
-            <a:off x="10657270" y="2701636"/>
-            <a:ext cx="81870" cy="58189"/>
+            <a:off x="10724104" y="2356338"/>
+            <a:ext cx="-51797" cy="-28135"/>
           </a:xfrm>
           <a:prstGeom prst="rect">
             <a:avLst/>
@@ -4512,7 +4512,7 @@
         </p:nvSpPr>
         <p:spPr>
           <a:xfrm>
-            <a:off x="9661916" y="2759825"/>
+            <a:off x="9661916" y="2328203"/>
             <a:ext cx="2072579" cy="274320"/>
           </a:xfrm>
           <a:prstGeom prst="rect">
@@ -4533,14 +4533,14 @@
                   <a:srgbClr val="404040"/>
                 </a:solidFill>
               </a:rPr>
-              <a:t>アサヒグループホールディングス</a:t>
+              <a:t>ahamo</a:t>
             </a:r>
           </a:p>
         </p:txBody>
       </p:sp>
       <p:pic>
         <p:nvPicPr>
-          <p:cNvPr id="52" name="Picture 51" descr="オリエンタルランド.png"/>
+          <p:cNvPr id="52" name="Picture 51" descr="dポイント.png"/>
           <p:cNvPicPr>
             <a:picLocks noChangeAspect="1"/>
           </p:cNvPicPr>
@@ -4554,8 +4554,8 @@
         </p:blipFill>
         <p:spPr>
           <a:xfrm>
-            <a:off x="1437945" y="3262745"/>
-            <a:ext cx="111088" cy="58189"/>
+            <a:off x="1504415" y="2831122"/>
+            <a:ext cx="-21852" cy="-28135"/>
           </a:xfrm>
           <a:prstGeom prst="rect">
             <a:avLst/>
@@ -4570,7 +4570,7 @@
         </p:nvSpPr>
         <p:spPr>
           <a:xfrm>
-            <a:off x="457200" y="3320934"/>
+            <a:off x="457200" y="2802987"/>
             <a:ext cx="2072579" cy="274320"/>
           </a:xfrm>
           <a:prstGeom prst="rect">
@@ -4591,14 +4591,14 @@
                   <a:srgbClr val="404040"/>
                 </a:solidFill>
               </a:rPr>
-              <a:t>オリエンタルランド</a:t>
+              <a:t>dポイント</a:t>
             </a:r>
           </a:p>
         </p:txBody>
       </p:sp>
       <p:pic>
         <p:nvPicPr>
-          <p:cNvPr id="54" name="Picture 53" descr="オリンパス.png"/>
+          <p:cNvPr id="54" name="Picture 53" descr="dマガジン.png"/>
           <p:cNvPicPr>
             <a:picLocks noChangeAspect="1"/>
           </p:cNvPicPr>
@@ -4612,8 +4612,8 @@
         </p:blipFill>
         <p:spPr>
           <a:xfrm>
-            <a:off x="3662744" y="3262745"/>
-            <a:ext cx="263849" cy="58189"/>
+            <a:off x="3808782" y="2831122"/>
+            <a:ext cx="-28227" cy="-28135"/>
           </a:xfrm>
           <a:prstGeom prst="rect">
             <a:avLst/>
@@ -4628,7 +4628,7 @@
         </p:nvSpPr>
         <p:spPr>
           <a:xfrm>
-            <a:off x="2758379" y="3320934"/>
+            <a:off x="2758379" y="2802987"/>
             <a:ext cx="2072579" cy="274320"/>
           </a:xfrm>
           <a:prstGeom prst="rect">
@@ -4649,14 +4649,14 @@
                   <a:srgbClr val="404040"/>
                 </a:solidFill>
               </a:rPr>
-              <a:t>オリンパス</a:t>
+              <a:t>dマガジン</a:t>
             </a:r>
           </a:p>
         </p:txBody>
       </p:sp>
       <p:pic>
         <p:nvPicPr>
-          <p:cNvPr id="56" name="Picture 55" descr="キーエンス.png"/>
+          <p:cNvPr id="56" name="Picture 55" descr="d払い.png"/>
           <p:cNvPicPr>
             <a:picLocks noChangeAspect="1"/>
           </p:cNvPicPr>
@@ -4670,8 +4670,8 @@
         </p:blipFill>
         <p:spPr>
           <a:xfrm>
-            <a:off x="5960369" y="3262745"/>
-            <a:ext cx="270956" cy="58189"/>
+            <a:off x="6140446" y="2831122"/>
+            <a:ext cx="-89197" cy="-28135"/>
           </a:xfrm>
           <a:prstGeom prst="rect">
             <a:avLst/>
@@ -4686,7 +4686,7 @@
         </p:nvSpPr>
         <p:spPr>
           <a:xfrm>
-            <a:off x="5059558" y="3320934"/>
+            <a:off x="5059558" y="2802987"/>
             <a:ext cx="2072579" cy="274320"/>
           </a:xfrm>
           <a:prstGeom prst="rect">
@@ -4707,14 +4707,14 @@
                   <a:srgbClr val="404040"/>
                 </a:solidFill>
               </a:rPr>
-              <a:t>キーエンス</a:t>
+              <a:t>d払い</a:t>
             </a:r>
           </a:p>
         </p:txBody>
       </p:sp>
       <p:pic>
         <p:nvPicPr>
-          <p:cNvPr id="58" name="Picture 57" descr="コマツ.png"/>
+          <p:cNvPr id="58" name="Picture 57" descr="ゆうちょ銀行.png"/>
           <p:cNvPicPr>
             <a:picLocks noChangeAspect="1"/>
           </p:cNvPicPr>
@@ -4728,8 +4728,8 @@
         </p:blipFill>
         <p:spPr>
           <a:xfrm>
-            <a:off x="8264023" y="3262745"/>
-            <a:ext cx="266007" cy="58189"/>
+            <a:off x="8470442" y="2831122"/>
+            <a:ext cx="-146831" cy="-28135"/>
           </a:xfrm>
           <a:prstGeom prst="rect">
             <a:avLst/>
@@ -4744,7 +4744,7 @@
         </p:nvSpPr>
         <p:spPr>
           <a:xfrm>
-            <a:off x="7360737" y="3320934"/>
+            <a:off x="7360737" y="2802987"/>
             <a:ext cx="2072579" cy="274320"/>
           </a:xfrm>
           <a:prstGeom prst="rect">
@@ -4765,14 +4765,14 @@
                   <a:srgbClr val="404040"/>
                 </a:solidFill>
               </a:rPr>
-              <a:t>コマツ</a:t>
+              <a:t>ゆうちょ銀行</a:t>
             </a:r>
           </a:p>
         </p:txBody>
       </p:sp>
       <p:pic>
         <p:nvPicPr>
-          <p:cNvPr id="60" name="Picture 59" descr="セコム.png"/>
+          <p:cNvPr id="60" name="Picture 59" descr="アサヒグループホールディングス.png"/>
           <p:cNvPicPr>
             <a:picLocks noChangeAspect="1"/>
           </p:cNvPicPr>
@@ -4786,8 +4786,8 @@
         </p:blipFill>
         <p:spPr>
           <a:xfrm>
-            <a:off x="10622875" y="3262745"/>
-            <a:ext cx="150660" cy="58189"/>
+            <a:off x="10717998" y="2831122"/>
+            <a:ext cx="-39585" cy="-28135"/>
           </a:xfrm>
           <a:prstGeom prst="rect">
             <a:avLst/>
@@ -4802,7 +4802,7 @@
         </p:nvSpPr>
         <p:spPr>
           <a:xfrm>
-            <a:off x="9661916" y="3320934"/>
+            <a:off x="9661916" y="2802987"/>
             <a:ext cx="2072579" cy="274320"/>
           </a:xfrm>
           <a:prstGeom prst="rect">
@@ -4823,14 +4823,14 @@
                   <a:srgbClr val="404040"/>
                 </a:solidFill>
               </a:rPr>
-              <a:t>セコム</a:t>
+              <a:t>アサヒグループホールディングス</a:t>
             </a:r>
           </a:p>
         </p:txBody>
       </p:sp>
       <p:pic>
         <p:nvPicPr>
-          <p:cNvPr id="62" name="Picture 61" descr="セブン&amp;アイ・ホールディングス.png"/>
+          <p:cNvPr id="62" name="Picture 61" descr="オリエンタルランド.png"/>
           <p:cNvPicPr>
             <a:picLocks noChangeAspect="1"/>
           </p:cNvPicPr>
@@ -4844,8 +4844,8 @@
         </p:blipFill>
         <p:spPr>
           <a:xfrm>
-            <a:off x="1461305" y="3823854"/>
-            <a:ext cx="64368" cy="58189"/>
+            <a:off x="1520346" y="3305907"/>
+            <a:ext cx="-53713" cy="-28135"/>
           </a:xfrm>
           <a:prstGeom prst="rect">
             <a:avLst/>
@@ -4860,7 +4860,7 @@
         </p:nvSpPr>
         <p:spPr>
           <a:xfrm>
-            <a:off x="457200" y="3882043"/>
+            <a:off x="457200" y="3277772"/>
             <a:ext cx="2072579" cy="274320"/>
           </a:xfrm>
           <a:prstGeom prst="rect">
@@ -4881,14 +4881,14 @@
                   <a:srgbClr val="404040"/>
                 </a:solidFill>
               </a:rPr>
-              <a:t>セブン&amp;アイ・ホールディングス</a:t>
+              <a:t>オリエンタルランド</a:t>
             </a:r>
           </a:p>
         </p:txBody>
       </p:sp>
       <p:pic>
         <p:nvPicPr>
-          <p:cNvPr id="64" name="Picture 63" descr="ソニーグループ.png"/>
+          <p:cNvPr id="64" name="Picture 63" descr="オリンパス.png"/>
           <p:cNvPicPr>
             <a:picLocks noChangeAspect="1"/>
           </p:cNvPicPr>
@@ -4902,8 +4902,8 @@
         </p:blipFill>
         <p:spPr>
           <a:xfrm>
-            <a:off x="3655602" y="3823854"/>
-            <a:ext cx="278133" cy="58189"/>
+            <a:off x="3858456" y="3305907"/>
+            <a:ext cx="-127575" cy="-28135"/>
           </a:xfrm>
           <a:prstGeom prst="rect">
             <a:avLst/>
@@ -4918,7 +4918,7 @@
         </p:nvSpPr>
         <p:spPr>
           <a:xfrm>
-            <a:off x="2758379" y="3882043"/>
+            <a:off x="2758379" y="3277772"/>
             <a:ext cx="2072579" cy="274320"/>
           </a:xfrm>
           <a:prstGeom prst="rect">
@@ -4939,14 +4939,14 @@
                   <a:srgbClr val="404040"/>
                 </a:solidFill>
               </a:rPr>
-              <a:t>ソニーグループ</a:t>
+              <a:t>オリンパス</a:t>
             </a:r>
           </a:p>
         </p:txBody>
       </p:sp>
       <p:pic>
         <p:nvPicPr>
-          <p:cNvPr id="66" name="Picture 65" descr="ダイキン工業.png"/>
+          <p:cNvPr id="66" name="Picture 65" descr="キーエンス.png"/>
           <p:cNvPicPr>
             <a:picLocks noChangeAspect="1"/>
           </p:cNvPicPr>
@@ -4960,8 +4960,8 @@
         </p:blipFill>
         <p:spPr>
           <a:xfrm>
-            <a:off x="5975050" y="3823854"/>
-            <a:ext cx="241595" cy="58189"/>
+            <a:off x="6161353" y="3305907"/>
+            <a:ext cx="-131012" cy="-28135"/>
           </a:xfrm>
           <a:prstGeom prst="rect">
             <a:avLst/>
@@ -4976,7 +4976,7 @@
         </p:nvSpPr>
         <p:spPr>
           <a:xfrm>
-            <a:off x="5059558" y="3882043"/>
+            <a:off x="5059558" y="3277772"/>
             <a:ext cx="2072579" cy="274320"/>
           </a:xfrm>
           <a:prstGeom prst="rect">
@@ -4997,14 +4997,14 @@
                   <a:srgbClr val="404040"/>
                 </a:solidFill>
               </a:rPr>
-              <a:t>ダイキン工業</a:t>
+              <a:t>キーエンス</a:t>
             </a:r>
           </a:p>
         </p:txBody>
       </p:sp>
       <p:pic>
         <p:nvPicPr>
-          <p:cNvPr id="68" name="Picture 67" descr="トヨタ自動車.png"/>
+          <p:cNvPr id="68" name="Picture 67" descr="コマツ.png"/>
           <p:cNvPicPr>
             <a:picLocks noChangeAspect="1"/>
           </p:cNvPicPr>
@@ -5018,8 +5018,8 @@
         </p:blipFill>
         <p:spPr>
           <a:xfrm>
-            <a:off x="8355144" y="3823854"/>
-            <a:ext cx="83764" cy="58189"/>
+            <a:off x="8461335" y="3305907"/>
+            <a:ext cx="-128618" cy="-28135"/>
           </a:xfrm>
           <a:prstGeom prst="rect">
             <a:avLst/>
@@ -5034,7 +5034,7 @@
         </p:nvSpPr>
         <p:spPr>
           <a:xfrm>
-            <a:off x="7360737" y="3882043"/>
+            <a:off x="7360737" y="3277772"/>
             <a:ext cx="2072579" cy="274320"/>
           </a:xfrm>
           <a:prstGeom prst="rect">
@@ -5055,14 +5055,14 @@
                   <a:srgbClr val="404040"/>
                 </a:solidFill>
               </a:rPr>
-              <a:t>トヨタ自動車</a:t>
+              <a:t>コマツ</a:t>
             </a:r>
           </a:p>
         </p:txBody>
       </p:sp>
       <p:pic>
         <p:nvPicPr>
-          <p:cNvPr id="70" name="Picture 69" descr="ドコモの銀行.png"/>
+          <p:cNvPr id="70" name="Picture 69" descr="セコム.png"/>
           <p:cNvPicPr>
             <a:picLocks noChangeAspect="1"/>
           </p:cNvPicPr>
@@ -5076,8 +5076,8 @@
         </p:blipFill>
         <p:spPr>
           <a:xfrm>
-            <a:off x="10602921" y="3823854"/>
-            <a:ext cx="190569" cy="58189"/>
+            <a:off x="10734628" y="3305907"/>
+            <a:ext cx="-72846" cy="-28135"/>
           </a:xfrm>
           <a:prstGeom prst="rect">
             <a:avLst/>
@@ -5092,7 +5092,7 @@
         </p:nvSpPr>
         <p:spPr>
           <a:xfrm>
-            <a:off x="9661916" y="3882043"/>
+            <a:off x="9661916" y="3277772"/>
             <a:ext cx="2072579" cy="274320"/>
           </a:xfrm>
           <a:prstGeom prst="rect">
@@ -5113,14 +5113,14 @@
                   <a:srgbClr val="404040"/>
                 </a:solidFill>
               </a:rPr>
-              <a:t>ドコモの銀行</a:t>
+              <a:t>セコム</a:t>
             </a:r>
           </a:p>
         </p:txBody>
       </p:sp>
       <p:pic>
         <p:nvPicPr>
-          <p:cNvPr id="72" name="Picture 71" descr="ドコモ光.png"/>
+          <p:cNvPr id="72" name="Picture 71" descr="セブン&amp;アイ・ホールディングス.png"/>
           <p:cNvPicPr>
             <a:picLocks noChangeAspect="1"/>
           </p:cNvPicPr>
@@ -5134,8 +5134,8 @@
         </p:blipFill>
         <p:spPr>
           <a:xfrm>
-            <a:off x="1400835" y="4384963"/>
-            <a:ext cx="185309" cy="58189"/>
+            <a:off x="1509051" y="3780692"/>
+            <a:ext cx="-31123" cy="-28135"/>
           </a:xfrm>
           <a:prstGeom prst="rect">
             <a:avLst/>
@@ -5150,7 +5150,7 @@
         </p:nvSpPr>
         <p:spPr>
           <a:xfrm>
-            <a:off x="457200" y="4443152"/>
+            <a:off x="457200" y="3752556"/>
             <a:ext cx="2072579" cy="274320"/>
           </a:xfrm>
           <a:prstGeom prst="rect">
@@ -5171,14 +5171,14 @@
                   <a:srgbClr val="404040"/>
                 </a:solidFill>
               </a:rPr>
-              <a:t>ドコモ光</a:t>
+              <a:t>セブン&amp;アイ・ホールディングス</a:t>
             </a:r>
           </a:p>
         </p:txBody>
       </p:sp>
       <p:pic>
         <p:nvPicPr>
-          <p:cNvPr id="74" name="Picture 73" descr="パナソニック.png"/>
+          <p:cNvPr id="74" name="Picture 73" descr="ソニーグループ.png"/>
           <p:cNvPicPr>
             <a:picLocks noChangeAspect="1"/>
           </p:cNvPicPr>
@@ -5192,8 +5192,8 @@
         </p:blipFill>
         <p:spPr>
           <a:xfrm>
-            <a:off x="3634649" y="4384963"/>
-            <a:ext cx="320039" cy="58189"/>
+            <a:off x="3861909" y="3780692"/>
+            <a:ext cx="-134481" cy="-28135"/>
           </a:xfrm>
           <a:prstGeom prst="rect">
             <a:avLst/>
@@ -5208,7 +5208,7 @@
         </p:nvSpPr>
         <p:spPr>
           <a:xfrm>
-            <a:off x="2758379" y="4443152"/>
+            <a:off x="2758379" y="3752556"/>
             <a:ext cx="2072579" cy="274320"/>
           </a:xfrm>
           <a:prstGeom prst="rect">
@@ -5229,14 +5229,14 @@
                   <a:srgbClr val="404040"/>
                 </a:solidFill>
               </a:rPr>
-              <a:t>パナソニック</a:t>
+              <a:t>ソニーグループ</a:t>
             </a:r>
           </a:p>
         </p:txBody>
       </p:sp>
       <p:pic>
         <p:nvPicPr>
-          <p:cNvPr id="76" name="Picture 75" descr="ファーストリテイリング.png"/>
+          <p:cNvPr id="76" name="Picture 75" descr="ダイキン工業.png"/>
           <p:cNvPicPr>
             <a:picLocks noChangeAspect="1"/>
           </p:cNvPicPr>
@@ -5250,8 +5250,8 @@
         </p:blipFill>
         <p:spPr>
           <a:xfrm>
-            <a:off x="6038063" y="4384963"/>
-            <a:ext cx="115569" cy="58189"/>
+            <a:off x="6154255" y="3780692"/>
+            <a:ext cx="-116815" cy="-28135"/>
           </a:xfrm>
           <a:prstGeom prst="rect">
             <a:avLst/>
@@ -5266,7 +5266,7 @@
         </p:nvSpPr>
         <p:spPr>
           <a:xfrm>
-            <a:off x="5059558" y="4443152"/>
+            <a:off x="5059558" y="3752556"/>
             <a:ext cx="2072579" cy="274320"/>
           </a:xfrm>
           <a:prstGeom prst="rect">
@@ -5287,14 +5287,14 @@
                   <a:srgbClr val="404040"/>
                 </a:solidFill>
               </a:rPr>
-              <a:t>ファーストリテイリング</a:t>
+              <a:t>ダイキン工業</a:t>
             </a:r>
           </a:p>
         </p:txBody>
       </p:sp>
       <p:pic>
         <p:nvPicPr>
-          <p:cNvPr id="78" name="Picture 77" descr="ホンダ.png"/>
+          <p:cNvPr id="78" name="Picture 77" descr="トヨタ自動車.png"/>
           <p:cNvPicPr>
             <a:picLocks noChangeAspect="1"/>
           </p:cNvPicPr>
@@ -5308,8 +5308,8 @@
         </p:blipFill>
         <p:spPr>
           <a:xfrm>
-            <a:off x="8215436" y="4384963"/>
-            <a:ext cx="363180" cy="58189"/>
+            <a:off x="8417277" y="3780692"/>
+            <a:ext cx="-40501" cy="-28135"/>
           </a:xfrm>
           <a:prstGeom prst="rect">
             <a:avLst/>
@@ -5324,7 +5324,7 @@
         </p:nvSpPr>
         <p:spPr>
           <a:xfrm>
-            <a:off x="7360737" y="4443152"/>
+            <a:off x="7360737" y="3752556"/>
             <a:ext cx="2072579" cy="274320"/>
           </a:xfrm>
           <a:prstGeom prst="rect">
@@ -5345,14 +5345,14 @@
                   <a:srgbClr val="404040"/>
                 </a:solidFill>
               </a:rPr>
-              <a:t>ホンダ</a:t>
+              <a:t>トヨタ自動車</a:t>
             </a:r>
           </a:p>
         </p:txBody>
       </p:sp>
       <p:pic>
         <p:nvPicPr>
-          <p:cNvPr id="80" name="Picture 79" descr="リクルートホールディングス.png"/>
+          <p:cNvPr id="80" name="Picture 79" descr="ドコモの銀行.png"/>
           <p:cNvPicPr>
             <a:picLocks noChangeAspect="1"/>
           </p:cNvPicPr>
@@ -5366,8 +5366,8 @@
         </p:blipFill>
         <p:spPr>
           <a:xfrm>
-            <a:off x="10598185" y="4384963"/>
-            <a:ext cx="200041" cy="58189"/>
+            <a:off x="10744277" y="3780692"/>
+            <a:ext cx="-92143" cy="-28135"/>
           </a:xfrm>
           <a:prstGeom prst="rect">
             <a:avLst/>
@@ -5382,7 +5382,7 @@
         </p:nvSpPr>
         <p:spPr>
           <a:xfrm>
-            <a:off x="9661916" y="4443152"/>
+            <a:off x="9661916" y="3752556"/>
             <a:ext cx="2072579" cy="274320"/>
           </a:xfrm>
           <a:prstGeom prst="rect">
@@ -5403,14 +5403,14 @@
                   <a:srgbClr val="404040"/>
                 </a:solidFill>
               </a:rPr>
-              <a:t>リクルートホールディングス</a:t>
+              <a:t>ドコモの銀行</a:t>
             </a:r>
           </a:p>
         </p:txBody>
       </p:sp>
       <p:pic>
         <p:nvPicPr>
-          <p:cNvPr id="82" name="Picture 81" descr="三井住友銀行.png"/>
+          <p:cNvPr id="82" name="Picture 81" descr="ドコモ光.png"/>
           <p:cNvPicPr>
             <a:picLocks noChangeAspect="1"/>
           </p:cNvPicPr>
@@ -5424,8 +5424,8 @@
         </p:blipFill>
         <p:spPr>
           <a:xfrm>
-            <a:off x="1396760" y="4946072"/>
-            <a:ext cx="193459" cy="58189"/>
+            <a:off x="1538289" y="4255476"/>
+            <a:ext cx="-89600" cy="-28135"/>
           </a:xfrm>
           <a:prstGeom prst="rect">
             <a:avLst/>
@@ -5440,7 +5440,7 @@
         </p:nvSpPr>
         <p:spPr>
           <a:xfrm>
-            <a:off x="457200" y="5004261"/>
+            <a:off x="457200" y="4227341"/>
             <a:ext cx="2072579" cy="274320"/>
           </a:xfrm>
           <a:prstGeom prst="rect">
@@ -5461,14 +5461,14 @@
                   <a:srgbClr val="404040"/>
                 </a:solidFill>
               </a:rPr>
-              <a:t>三井住友銀行</a:t>
+              <a:t>ドコモ光</a:t>
             </a:r>
           </a:p>
         </p:txBody>
       </p:sp>
       <p:pic>
         <p:nvPicPr>
-          <p:cNvPr id="84" name="Picture 83" descr="三菱電機.png"/>
+          <p:cNvPr id="84" name="Picture 83" descr="パナソニック.png"/>
           <p:cNvPicPr>
             <a:picLocks noChangeAspect="1"/>
           </p:cNvPicPr>
@@ -5482,8 +5482,8 @@
         </p:blipFill>
         <p:spPr>
           <a:xfrm>
-            <a:off x="3705147" y="4946072"/>
-            <a:ext cx="179043" cy="58189"/>
+            <a:off x="3872040" y="4255476"/>
+            <a:ext cx="-154744" cy="-28135"/>
           </a:xfrm>
           <a:prstGeom prst="rect">
             <a:avLst/>
@@ -5498,7 +5498,7 @@
         </p:nvSpPr>
         <p:spPr>
           <a:xfrm>
-            <a:off x="2758379" y="5004261"/>
+            <a:off x="2758379" y="4227341"/>
             <a:ext cx="2072579" cy="274320"/>
           </a:xfrm>
           <a:prstGeom prst="rect">
@@ -5519,14 +5519,14 @@
                   <a:srgbClr val="404040"/>
                 </a:solidFill>
               </a:rPr>
-              <a:t>三菱電機</a:t>
+              <a:t>パナソニック</a:t>
             </a:r>
           </a:p>
         </p:txBody>
       </p:sp>
       <p:pic>
         <p:nvPicPr>
-          <p:cNvPr id="86" name="Picture 85" descr="任天堂.png"/>
+          <p:cNvPr id="86" name="Picture 85" descr="ファーストリテイリング.png"/>
           <p:cNvPicPr>
             <a:picLocks noChangeAspect="1"/>
           </p:cNvPicPr>
@@ -5540,8 +5540,8 @@
         </p:blipFill>
         <p:spPr>
           <a:xfrm>
-            <a:off x="5990199" y="4946072"/>
-            <a:ext cx="211296" cy="58189"/>
+            <a:off x="6123787" y="4255476"/>
+            <a:ext cx="-55880" cy="-28135"/>
           </a:xfrm>
           <a:prstGeom prst="rect">
             <a:avLst/>
@@ -5556,7 +5556,7 @@
         </p:nvSpPr>
         <p:spPr>
           <a:xfrm>
-            <a:off x="5059558" y="5004261"/>
+            <a:off x="5059558" y="4227341"/>
             <a:ext cx="2072579" cy="274320"/>
           </a:xfrm>
           <a:prstGeom prst="rect">
@@ -5577,14 +5577,14 @@
                   <a:srgbClr val="404040"/>
                 </a:solidFill>
               </a:rPr>
-              <a:t>任天堂</a:t>
+              <a:t>ファーストリテイリング</a:t>
             </a:r>
           </a:p>
         </p:txBody>
       </p:sp>
       <p:pic>
         <p:nvPicPr>
-          <p:cNvPr id="88" name="Picture 87" descr="味の素.png"/>
+          <p:cNvPr id="88" name="Picture 87" descr="ホンダ.png"/>
           <p:cNvPicPr>
             <a:picLocks noChangeAspect="1"/>
           </p:cNvPicPr>
@@ -5598,8 +5598,8 @@
         </p:blipFill>
         <p:spPr>
           <a:xfrm>
-            <a:off x="8217610" y="4946072"/>
-            <a:ext cx="358832" cy="58189"/>
+            <a:off x="8484828" y="4255476"/>
+            <a:ext cx="-175603" cy="-28135"/>
           </a:xfrm>
           <a:prstGeom prst="rect">
             <a:avLst/>
@@ -5614,7 +5614,7 @@
         </p:nvSpPr>
         <p:spPr>
           <a:xfrm>
-            <a:off x="7360737" y="5004261"/>
+            <a:off x="7360737" y="4227341"/>
             <a:ext cx="2072579" cy="274320"/>
           </a:xfrm>
           <a:prstGeom prst="rect">
@@ -5635,14 +5635,14 @@
                   <a:srgbClr val="404040"/>
                 </a:solidFill>
               </a:rPr>
-              <a:t>味の素</a:t>
+              <a:t>ホンダ</a:t>
             </a:r>
           </a:p>
         </p:txBody>
       </p:sp>
       <p:pic>
         <p:nvPicPr>
-          <p:cNvPr id="90" name="Picture 89" descr="大和ハウス工業.png"/>
+          <p:cNvPr id="90" name="Picture 89" descr="リクルート.png"/>
           <p:cNvPicPr>
             <a:picLocks noChangeAspect="1"/>
           </p:cNvPicPr>
@@ -5656,8 +5656,8 @@
         </p:blipFill>
         <p:spPr>
           <a:xfrm>
-            <a:off x="10661739" y="4946072"/>
-            <a:ext cx="72932" cy="58189"/>
+            <a:off x="10746372" y="4255476"/>
+            <a:ext cx="-96333" cy="-28135"/>
           </a:xfrm>
           <a:prstGeom prst="rect">
             <a:avLst/>
@@ -5672,7 +5672,7 @@
         </p:nvSpPr>
         <p:spPr>
           <a:xfrm>
-            <a:off x="9661916" y="5004261"/>
+            <a:off x="9661916" y="4227341"/>
             <a:ext cx="2072579" cy="274320"/>
           </a:xfrm>
           <a:prstGeom prst="rect">
@@ -5693,14 +5693,14 @@
                   <a:srgbClr val="404040"/>
                 </a:solidFill>
               </a:rPr>
-              <a:t>大和ハウス工業</a:t>
+              <a:t>リクルート</a:t>
             </a:r>
           </a:p>
         </p:txBody>
       </p:sp>
       <p:pic>
         <p:nvPicPr>
-          <p:cNvPr id="92" name="Picture 91" descr="富士通.png"/>
+          <p:cNvPr id="92" name="Picture 91" descr="リクルートホールディングス.png"/>
           <p:cNvPicPr>
             <a:picLocks noChangeAspect="1"/>
           </p:cNvPicPr>
@@ -5714,8 +5714,8 @@
         </p:blipFill>
         <p:spPr>
           <a:xfrm>
-            <a:off x="1436085" y="5507181"/>
-            <a:ext cx="114808" cy="58189"/>
+            <a:off x="1541851" y="4730261"/>
+            <a:ext cx="-96723" cy="-28135"/>
           </a:xfrm>
           <a:prstGeom prst="rect">
             <a:avLst/>
@@ -5730,7 +5730,7 @@
         </p:nvSpPr>
         <p:spPr>
           <a:xfrm>
-            <a:off x="457200" y="5565370"/>
+            <a:off x="457200" y="4702126"/>
             <a:ext cx="2072579" cy="274320"/>
           </a:xfrm>
           <a:prstGeom prst="rect">
@@ -5751,14 +5751,14 @@
                   <a:srgbClr val="404040"/>
                 </a:solidFill>
               </a:rPr>
-              <a:t>富士通</a:t>
+              <a:t>リクルートホールディングス</a:t>
             </a:r>
           </a:p>
         </p:txBody>
       </p:sp>
       <p:pic>
         <p:nvPicPr>
-          <p:cNvPr id="94" name="Picture 93" descr="日本郵政.png"/>
+          <p:cNvPr id="94" name="Picture 93" descr="三井不動産.png"/>
           <p:cNvPicPr>
             <a:picLocks noChangeAspect="1"/>
           </p:cNvPicPr>
@@ -5772,8 +5772,8 @@
         </p:blipFill>
         <p:spPr>
           <a:xfrm>
-            <a:off x="3767370" y="5507181"/>
-            <a:ext cx="54597" cy="58189"/>
+            <a:off x="3835944" y="4730261"/>
+            <a:ext cx="-82551" cy="-28135"/>
           </a:xfrm>
           <a:prstGeom prst="rect">
             <a:avLst/>
@@ -5788,7 +5788,7 @@
         </p:nvSpPr>
         <p:spPr>
           <a:xfrm>
-            <a:off x="2758379" y="5565370"/>
+            <a:off x="2758379" y="4702126"/>
             <a:ext cx="2072579" cy="274320"/>
           </a:xfrm>
           <a:prstGeom prst="rect">
@@ -5809,14 +5809,14 @@
                   <a:srgbClr val="404040"/>
                 </a:solidFill>
               </a:rPr>
-              <a:t>日本郵政</a:t>
+              <a:t>三井不動産</a:t>
             </a:r>
           </a:p>
         </p:txBody>
       </p:sp>
       <p:pic>
         <p:nvPicPr>
-          <p:cNvPr id="96" name="Picture 95" descr="日立製作所.png"/>
+          <p:cNvPr id="96" name="Picture 95" descr="三井住友銀行.png"/>
           <p:cNvPicPr>
             <a:picLocks noChangeAspect="1"/>
           </p:cNvPicPr>
@@ -5830,8 +5830,8 @@
         </p:blipFill>
         <p:spPr>
           <a:xfrm>
-            <a:off x="5943603" y="5507181"/>
-            <a:ext cx="304489" cy="58189"/>
+            <a:off x="6142618" y="4730261"/>
+            <a:ext cx="-93541" cy="-28135"/>
           </a:xfrm>
           <a:prstGeom prst="rect">
             <a:avLst/>
@@ -5846,7 +5846,7 @@
         </p:nvSpPr>
         <p:spPr>
           <a:xfrm>
-            <a:off x="5059558" y="5565370"/>
+            <a:off x="5059558" y="4702126"/>
             <a:ext cx="2072579" cy="274320"/>
           </a:xfrm>
           <a:prstGeom prst="rect">
@@ -5867,14 +5867,14 @@
                   <a:srgbClr val="404040"/>
                 </a:solidFill>
               </a:rPr>
-              <a:t>日立製作所</a:t>
+              <a:t>三井住友銀行</a:t>
             </a:r>
           </a:p>
         </p:txBody>
       </p:sp>
       <p:pic>
         <p:nvPicPr>
-          <p:cNvPr id="98" name="Picture 97" descr="東京ガス.png"/>
+          <p:cNvPr id="98" name="Picture 97" descr="三菱電機.png"/>
           <p:cNvPicPr>
             <a:picLocks noChangeAspect="1"/>
           </p:cNvPicPr>
@@ -5888,8 +5888,8 @@
         </p:blipFill>
         <p:spPr>
           <a:xfrm>
-            <a:off x="8257615" y="5507181"/>
-            <a:ext cx="278822" cy="58189"/>
+            <a:off x="8440311" y="4730261"/>
+            <a:ext cx="-86570" cy="-28135"/>
           </a:xfrm>
           <a:prstGeom prst="rect">
             <a:avLst/>
@@ -5904,7 +5904,7 @@
         </p:nvSpPr>
         <p:spPr>
           <a:xfrm>
-            <a:off x="7360737" y="5565370"/>
+            <a:off x="7360737" y="4702126"/>
             <a:ext cx="2072579" cy="274320"/>
           </a:xfrm>
           <a:prstGeom prst="rect">
@@ -5925,14 +5925,14 @@
                   <a:srgbClr val="404040"/>
                 </a:solidFill>
               </a:rPr>
-              <a:t>東京ガス</a:t>
+              <a:t>三菱電機</a:t>
             </a:r>
           </a:p>
         </p:txBody>
       </p:sp>
       <p:pic>
         <p:nvPicPr>
-          <p:cNvPr id="100" name="Picture 99" descr="楽天.png"/>
+          <p:cNvPr id="100" name="Picture 99" descr="任天堂.png"/>
           <p:cNvPicPr>
             <a:picLocks noChangeAspect="1"/>
           </p:cNvPicPr>
@@ -5946,8 +5946,8 @@
         </p:blipFill>
         <p:spPr>
           <a:xfrm>
-            <a:off x="10608708" y="5507181"/>
-            <a:ext cx="178994" cy="58189"/>
+            <a:off x="10749288" y="4730261"/>
+            <a:ext cx="-102165" cy="-28135"/>
           </a:xfrm>
           <a:prstGeom prst="rect">
             <a:avLst/>
@@ -5962,7 +5962,7 @@
         </p:nvSpPr>
         <p:spPr>
           <a:xfrm>
-            <a:off x="9661916" y="5565370"/>
+            <a:off x="9661916" y="4702126"/>
             <a:ext cx="2072579" cy="274320"/>
           </a:xfrm>
           <a:prstGeom prst="rect">
@@ -5983,14 +5983,14 @@
                   <a:srgbClr val="404040"/>
                 </a:solidFill>
               </a:rPr>
-              <a:t>楽天</a:t>
+              <a:t>任天堂</a:t>
             </a:r>
           </a:p>
         </p:txBody>
       </p:sp>
       <p:pic>
         <p:nvPicPr>
-          <p:cNvPr id="102" name="Picture 101" descr="楽天グループ.png"/>
+          <p:cNvPr id="102" name="Picture 101" descr="味の素.png"/>
           <p:cNvPicPr>
             <a:picLocks noChangeAspect="1"/>
           </p:cNvPicPr>
@@ -6004,8 +6004,8 @@
         </p:blipFill>
         <p:spPr>
           <a:xfrm>
-            <a:off x="1404930" y="6068290"/>
-            <a:ext cx="177119" cy="58189"/>
+            <a:off x="1580240" y="5205045"/>
+            <a:ext cx="-173501" cy="-28135"/>
           </a:xfrm>
           <a:prstGeom prst="rect">
             <a:avLst/>
@@ -6020,7 +6020,7 @@
         </p:nvSpPr>
         <p:spPr>
           <a:xfrm>
-            <a:off x="457200" y="6126479"/>
+            <a:off x="457200" y="5176910"/>
             <a:ext cx="2072579" cy="274320"/>
           </a:xfrm>
           <a:prstGeom prst="rect">
@@ -6041,14 +6041,14 @@
                   <a:srgbClr val="404040"/>
                 </a:solidFill>
               </a:rPr>
-              <a:t>楽天グループ</a:t>
+              <a:t>味の素</a:t>
             </a:r>
           </a:p>
         </p:txBody>
       </p:sp>
       <p:pic>
         <p:nvPicPr>
-          <p:cNvPr id="104" name="Picture 103" descr="花王.png"/>
+          <p:cNvPr id="104" name="Picture 103" descr="大和ハウス工業.png"/>
           <p:cNvPicPr>
             <a:picLocks noChangeAspect="1"/>
           </p:cNvPicPr>
@@ -6062,8 +6062,8 @@
         </p:blipFill>
         <p:spPr>
           <a:xfrm>
-            <a:off x="3743370" y="6068290"/>
-            <a:ext cx="102596" cy="58189"/>
+            <a:off x="3812300" y="5205045"/>
+            <a:ext cx="-35263" cy="-28135"/>
           </a:xfrm>
           <a:prstGeom prst="rect">
             <a:avLst/>
@@ -6078,7 +6078,7 @@
         </p:nvSpPr>
         <p:spPr>
           <a:xfrm>
-            <a:off x="2758379" y="6126479"/>
+            <a:off x="2758379" y="5176910"/>
             <a:ext cx="2072579" cy="274320"/>
           </a:xfrm>
           <a:prstGeom prst="rect">
@@ -6099,14 +6099,14 @@
                   <a:srgbClr val="404040"/>
                 </a:solidFill>
               </a:rPr>
-              <a:t>花王</a:t>
+              <a:t>大和ハウス工業</a:t>
             </a:r>
           </a:p>
         </p:txBody>
       </p:sp>
       <p:pic>
         <p:nvPicPr>
-          <p:cNvPr id="106" name="Picture 105" descr="資生堂.png"/>
+          <p:cNvPr id="106" name="Picture 105" descr="富士通.png"/>
           <p:cNvPicPr>
             <a:picLocks noChangeAspect="1"/>
           </p:cNvPicPr>
@@ -6120,8 +6120,8 @@
         </p:blipFill>
         <p:spPr>
           <a:xfrm>
-            <a:off x="5950517" y="6068290"/>
-            <a:ext cx="290661" cy="58189"/>
+            <a:off x="6123603" y="5205045"/>
+            <a:ext cx="-55511" cy="-28135"/>
           </a:xfrm>
           <a:prstGeom prst="rect">
             <a:avLst/>
@@ -6136,7 +6136,7 @@
         </p:nvSpPr>
         <p:spPr>
           <a:xfrm>
-            <a:off x="5059558" y="6126479"/>
+            <a:off x="5059558" y="5176910"/>
             <a:ext cx="2072579" cy="274320"/>
           </a:xfrm>
           <a:prstGeom prst="rect">
@@ -6157,14 +6157,14 @@
                   <a:srgbClr val="404040"/>
                 </a:solidFill>
               </a:rPr>
-              <a:t>資生堂</a:t>
+              <a:t>富士通</a:t>
             </a:r>
           </a:p>
         </p:txBody>
       </p:sp>
       <p:pic>
         <p:nvPicPr>
-          <p:cNvPr id="108" name="Picture 107" descr="野村ホールディングス.png"/>
+          <p:cNvPr id="108" name="Picture 107" descr="日本郵政.png"/>
           <p:cNvPicPr>
             <a:picLocks noChangeAspect="1"/>
           </p:cNvPicPr>
@@ -6178,8 +6178,8 @@
         </p:blipFill>
         <p:spPr>
           <a:xfrm>
-            <a:off x="8257154" y="6068290"/>
-            <a:ext cx="279744" cy="58189"/>
+            <a:off x="8410225" y="5205045"/>
+            <a:ext cx="-26398" cy="-28135"/>
           </a:xfrm>
           <a:prstGeom prst="rect">
             <a:avLst/>
@@ -6194,7 +6194,471 @@
         </p:nvSpPr>
         <p:spPr>
           <a:xfrm>
-            <a:off x="7360737" y="6126479"/>
+            <a:off x="7360737" y="5176910"/>
+            <a:ext cx="2072579" cy="274320"/>
+          </a:xfrm>
+          <a:prstGeom prst="rect">
+            <a:avLst/>
+          </a:prstGeom>
+          <a:noFill/>
+        </p:spPr>
+        <p:txBody>
+          <a:bodyPr wrap="square">
+            <a:spAutoFit/>
+          </a:bodyPr>
+          <a:lstStyle/>
+          <a:p>
+            <a:pPr algn="ctr"/>
+            <a:r>
+              <a:rPr sz="1000">
+                <a:solidFill>
+                  <a:srgbClr val="404040"/>
+                </a:solidFill>
+              </a:rPr>
+              <a:t>日本郵政</a:t>
+            </a:r>
+          </a:p>
+        </p:txBody>
+      </p:sp>
+      <p:pic>
+        <p:nvPicPr>
+          <p:cNvPr id="110" name="Picture 109" descr="日立製作所.png"/>
+          <p:cNvPicPr>
+            <a:picLocks noChangeAspect="1"/>
+          </p:cNvPicPr>
+          <p:nvPr/>
+        </p:nvPicPr>
+        <p:blipFill>
+          <a:blip r:embed="rId56"/>
+          <a:stretch>
+            <a:fillRect/>
+          </a:stretch>
+        </p:blipFill>
+        <p:spPr>
+          <a:xfrm>
+            <a:off x="10771818" y="5205045"/>
+            <a:ext cx="-147225" cy="-28135"/>
+          </a:xfrm>
+          <a:prstGeom prst="rect">
+            <a:avLst/>
+          </a:prstGeom>
+        </p:spPr>
+      </p:pic>
+      <p:sp>
+        <p:nvSpPr>
+          <p:cNvPr id="111" name="TextBox 110"/>
+          <p:cNvSpPr txBox="1"/>
+          <p:nvPr/>
+        </p:nvSpPr>
+        <p:spPr>
+          <a:xfrm>
+            <a:off x="9661916" y="5176910"/>
+            <a:ext cx="2072579" cy="274320"/>
+          </a:xfrm>
+          <a:prstGeom prst="rect">
+            <a:avLst/>
+          </a:prstGeom>
+          <a:noFill/>
+        </p:spPr>
+        <p:txBody>
+          <a:bodyPr wrap="square">
+            <a:spAutoFit/>
+          </a:bodyPr>
+          <a:lstStyle/>
+          <a:p>
+            <a:pPr algn="ctr"/>
+            <a:r>
+              <a:rPr sz="1000">
+                <a:solidFill>
+                  <a:srgbClr val="404040"/>
+                </a:solidFill>
+              </a:rPr>
+              <a:t>日立製作所</a:t>
+            </a:r>
+          </a:p>
+        </p:txBody>
+      </p:sp>
+      <p:pic>
+        <p:nvPicPr>
+          <p:cNvPr id="112" name="Picture 111" descr="東京ガス.png"/>
+          <p:cNvPicPr>
+            <a:picLocks noChangeAspect="1"/>
+          </p:cNvPicPr>
+          <p:nvPr/>
+        </p:nvPicPr>
+        <p:blipFill>
+          <a:blip r:embed="rId57"/>
+          <a:stretch>
+            <a:fillRect/>
+          </a:stretch>
+        </p:blipFill>
+        <p:spPr>
+          <a:xfrm>
+            <a:off x="1560897" y="5679830"/>
+            <a:ext cx="-134815" cy="-28135"/>
+          </a:xfrm>
+          <a:prstGeom prst="rect">
+            <a:avLst/>
+          </a:prstGeom>
+        </p:spPr>
+      </p:pic>
+      <p:sp>
+        <p:nvSpPr>
+          <p:cNvPr id="113" name="TextBox 112"/>
+          <p:cNvSpPr txBox="1"/>
+          <p:nvPr/>
+        </p:nvSpPr>
+        <p:spPr>
+          <a:xfrm>
+            <a:off x="457200" y="5651695"/>
+            <a:ext cx="2072579" cy="274320"/>
+          </a:xfrm>
+          <a:prstGeom prst="rect">
+            <a:avLst/>
+          </a:prstGeom>
+          <a:noFill/>
+        </p:spPr>
+        <p:txBody>
+          <a:bodyPr wrap="square">
+            <a:spAutoFit/>
+          </a:bodyPr>
+          <a:lstStyle/>
+          <a:p>
+            <a:pPr algn="ctr"/>
+            <a:r>
+              <a:rPr sz="1000">
+                <a:solidFill>
+                  <a:srgbClr val="404040"/>
+                </a:solidFill>
+              </a:rPr>
+              <a:t>東京ガス</a:t>
+            </a:r>
+          </a:p>
+        </p:txBody>
+      </p:sp>
+      <p:pic>
+        <p:nvPicPr>
+          <p:cNvPr id="114" name="Picture 113" descr="東京海上日動.png"/>
+          <p:cNvPicPr>
+            <a:picLocks noChangeAspect="1"/>
+          </p:cNvPicPr>
+          <p:nvPr/>
+        </p:nvPicPr>
+        <p:blipFill>
+          <a:blip r:embed="rId58"/>
+          <a:stretch>
+            <a:fillRect/>
+          </a:stretch>
+        </p:blipFill>
+        <p:spPr>
+          <a:xfrm>
+            <a:off x="3810088" y="5679830"/>
+            <a:ext cx="-30840" cy="-28135"/>
+          </a:xfrm>
+          <a:prstGeom prst="rect">
+            <a:avLst/>
+          </a:prstGeom>
+        </p:spPr>
+      </p:pic>
+      <p:sp>
+        <p:nvSpPr>
+          <p:cNvPr id="115" name="TextBox 114"/>
+          <p:cNvSpPr txBox="1"/>
+          <p:nvPr/>
+        </p:nvSpPr>
+        <p:spPr>
+          <a:xfrm>
+            <a:off x="2758379" y="5651695"/>
+            <a:ext cx="2072579" cy="274320"/>
+          </a:xfrm>
+          <a:prstGeom prst="rect">
+            <a:avLst/>
+          </a:prstGeom>
+          <a:noFill/>
+        </p:spPr>
+        <p:txBody>
+          <a:bodyPr wrap="square">
+            <a:spAutoFit/>
+          </a:bodyPr>
+          <a:lstStyle/>
+          <a:p>
+            <a:pPr algn="ctr"/>
+            <a:r>
+              <a:rPr sz="1000">
+                <a:solidFill>
+                  <a:srgbClr val="404040"/>
+                </a:solidFill>
+              </a:rPr>
+              <a:t>東京海上日動</a:t>
+            </a:r>
+          </a:p>
+        </p:txBody>
+      </p:sp>
+      <p:pic>
+        <p:nvPicPr>
+          <p:cNvPr id="116" name="Picture 115" descr="楽天.png"/>
+          <p:cNvPicPr>
+            <a:picLocks noChangeAspect="1"/>
+          </p:cNvPicPr>
+          <p:nvPr/>
+        </p:nvPicPr>
+        <p:blipFill>
+          <a:blip r:embed="rId59"/>
+          <a:stretch>
+            <a:fillRect/>
+          </a:stretch>
+        </p:blipFill>
+        <p:spPr>
+          <a:xfrm>
+            <a:off x="6139120" y="5679830"/>
+            <a:ext cx="-86546" cy="-28135"/>
+          </a:xfrm>
+          <a:prstGeom prst="rect">
+            <a:avLst/>
+          </a:prstGeom>
+        </p:spPr>
+      </p:pic>
+      <p:sp>
+        <p:nvSpPr>
+          <p:cNvPr id="117" name="TextBox 116"/>
+          <p:cNvSpPr txBox="1"/>
+          <p:nvPr/>
+        </p:nvSpPr>
+        <p:spPr>
+          <a:xfrm>
+            <a:off x="5059558" y="5651695"/>
+            <a:ext cx="2072579" cy="274320"/>
+          </a:xfrm>
+          <a:prstGeom prst="rect">
+            <a:avLst/>
+          </a:prstGeom>
+          <a:noFill/>
+        </p:spPr>
+        <p:txBody>
+          <a:bodyPr wrap="square">
+            <a:spAutoFit/>
+          </a:bodyPr>
+          <a:lstStyle/>
+          <a:p>
+            <a:pPr algn="ctr"/>
+            <a:r>
+              <a:rPr sz="1000">
+                <a:solidFill>
+                  <a:srgbClr val="404040"/>
+                </a:solidFill>
+              </a:rPr>
+              <a:t>楽天</a:t>
+            </a:r>
+          </a:p>
+        </p:txBody>
+      </p:sp>
+      <p:pic>
+        <p:nvPicPr>
+          <p:cNvPr id="118" name="Picture 117" descr="楽天グループ.png"/>
+          <p:cNvPicPr>
+            <a:picLocks noChangeAspect="1"/>
+          </p:cNvPicPr>
+          <p:nvPr/>
+        </p:nvPicPr>
+        <p:blipFill>
+          <a:blip r:embed="rId60"/>
+          <a:stretch>
+            <a:fillRect/>
+          </a:stretch>
+        </p:blipFill>
+        <p:spPr>
+          <a:xfrm>
+            <a:off x="8439846" y="5679830"/>
+            <a:ext cx="-85640" cy="-28135"/>
+          </a:xfrm>
+          <a:prstGeom prst="rect">
+            <a:avLst/>
+          </a:prstGeom>
+        </p:spPr>
+      </p:pic>
+      <p:sp>
+        <p:nvSpPr>
+          <p:cNvPr id="119" name="TextBox 118"/>
+          <p:cNvSpPr txBox="1"/>
+          <p:nvPr/>
+        </p:nvSpPr>
+        <p:spPr>
+          <a:xfrm>
+            <a:off x="7360737" y="5651695"/>
+            <a:ext cx="2072579" cy="274320"/>
+          </a:xfrm>
+          <a:prstGeom prst="rect">
+            <a:avLst/>
+          </a:prstGeom>
+          <a:noFill/>
+        </p:spPr>
+        <p:txBody>
+          <a:bodyPr wrap="square">
+            <a:spAutoFit/>
+          </a:bodyPr>
+          <a:lstStyle/>
+          <a:p>
+            <a:pPr algn="ctr"/>
+            <a:r>
+              <a:rPr sz="1000">
+                <a:solidFill>
+                  <a:srgbClr val="404040"/>
+                </a:solidFill>
+              </a:rPr>
+              <a:t>楽天グループ</a:t>
+            </a:r>
+          </a:p>
+        </p:txBody>
+      </p:sp>
+      <p:pic>
+        <p:nvPicPr>
+          <p:cNvPr id="120" name="Picture 119" descr="花王.png"/>
+          <p:cNvPicPr>
+            <a:picLocks noChangeAspect="1"/>
+          </p:cNvPicPr>
+          <p:nvPr/>
+        </p:nvPicPr>
+        <p:blipFill>
+          <a:blip r:embed="rId61"/>
+          <a:stretch>
+            <a:fillRect/>
+          </a:stretch>
+        </p:blipFill>
+        <p:spPr>
+          <a:xfrm>
+            <a:off x="10723009" y="5679830"/>
+            <a:ext cx="-49607" cy="-28135"/>
+          </a:xfrm>
+          <a:prstGeom prst="rect">
+            <a:avLst/>
+          </a:prstGeom>
+        </p:spPr>
+      </p:pic>
+      <p:sp>
+        <p:nvSpPr>
+          <p:cNvPr id="121" name="TextBox 120"/>
+          <p:cNvSpPr txBox="1"/>
+          <p:nvPr/>
+        </p:nvSpPr>
+        <p:spPr>
+          <a:xfrm>
+            <a:off x="9661916" y="5651695"/>
+            <a:ext cx="2072579" cy="274320"/>
+          </a:xfrm>
+          <a:prstGeom prst="rect">
+            <a:avLst/>
+          </a:prstGeom>
+          <a:noFill/>
+        </p:spPr>
+        <p:txBody>
+          <a:bodyPr wrap="square">
+            <a:spAutoFit/>
+          </a:bodyPr>
+          <a:lstStyle/>
+          <a:p>
+            <a:pPr algn="ctr"/>
+            <a:r>
+              <a:rPr sz="1000">
+                <a:solidFill>
+                  <a:srgbClr val="404040"/>
+                </a:solidFill>
+              </a:rPr>
+              <a:t>花王</a:t>
+            </a:r>
+          </a:p>
+        </p:txBody>
+      </p:sp>
+      <p:pic>
+        <p:nvPicPr>
+          <p:cNvPr id="122" name="Picture 121" descr="資生堂.png"/>
+          <p:cNvPicPr>
+            <a:picLocks noChangeAspect="1"/>
+          </p:cNvPicPr>
+          <p:nvPr/>
+        </p:nvPicPr>
+        <p:blipFill>
+          <a:blip r:embed="rId62"/>
+          <a:stretch>
+            <a:fillRect/>
+          </a:stretch>
+        </p:blipFill>
+        <p:spPr>
+          <a:xfrm>
+            <a:off x="1563759" y="6154615"/>
+            <a:ext cx="-140539" cy="-28135"/>
+          </a:xfrm>
+          <a:prstGeom prst="rect">
+            <a:avLst/>
+          </a:prstGeom>
+        </p:spPr>
+      </p:pic>
+      <p:sp>
+        <p:nvSpPr>
+          <p:cNvPr id="123" name="TextBox 122"/>
+          <p:cNvSpPr txBox="1"/>
+          <p:nvPr/>
+        </p:nvSpPr>
+        <p:spPr>
+          <a:xfrm>
+            <a:off x="457200" y="6126479"/>
+            <a:ext cx="2072579" cy="274320"/>
+          </a:xfrm>
+          <a:prstGeom prst="rect">
+            <a:avLst/>
+          </a:prstGeom>
+          <a:noFill/>
+        </p:spPr>
+        <p:txBody>
+          <a:bodyPr wrap="square">
+            <a:spAutoFit/>
+          </a:bodyPr>
+          <a:lstStyle/>
+          <a:p>
+            <a:pPr algn="ctr"/>
+            <a:r>
+              <a:rPr sz="1000">
+                <a:solidFill>
+                  <a:srgbClr val="404040"/>
+                </a:solidFill>
+              </a:rPr>
+              <a:t>資生堂</a:t>
+            </a:r>
+          </a:p>
+        </p:txBody>
+      </p:sp>
+      <p:pic>
+        <p:nvPicPr>
+          <p:cNvPr id="124" name="Picture 123" descr="野村ホールディングス.png"/>
+          <p:cNvPicPr>
+            <a:picLocks noChangeAspect="1"/>
+          </p:cNvPicPr>
+          <p:nvPr/>
+        </p:nvPicPr>
+        <p:blipFill>
+          <a:blip r:embed="rId63"/>
+          <a:stretch>
+            <a:fillRect/>
+          </a:stretch>
+        </p:blipFill>
+        <p:spPr>
+          <a:xfrm>
+            <a:off x="3862299" y="6154615"/>
+            <a:ext cx="-135261" cy="-28135"/>
+          </a:xfrm>
+          <a:prstGeom prst="rect">
+            <a:avLst/>
+          </a:prstGeom>
+        </p:spPr>
+      </p:pic>
+      <p:sp>
+        <p:nvSpPr>
+          <p:cNvPr id="125" name="TextBox 124"/>
+          <p:cNvSpPr txBox="1"/>
+          <p:nvPr/>
+        </p:nvSpPr>
+        <p:spPr>
+          <a:xfrm>
+            <a:off x="2758379" y="6126479"/>
             <a:ext cx="2072579" cy="274320"/>
           </a:xfrm>
           <a:prstGeom prst="rect">

--- a/docs/logos.pptx
+++ b/docs/logos.pptx
@@ -3742,8 +3742,8 @@
         </p:blipFill>
         <p:spPr>
           <a:xfrm>
-            <a:off x="3821362" y="1406769"/>
-            <a:ext cx="-53388" cy="-28135"/>
+            <a:off x="3841795" y="1406769"/>
+            <a:ext cx="-94253" cy="-28135"/>
           </a:xfrm>
           <a:prstGeom prst="rect">
             <a:avLst/>
@@ -4728,8 +4728,8 @@
         </p:blipFill>
         <p:spPr>
           <a:xfrm>
-            <a:off x="8470442" y="2831122"/>
-            <a:ext cx="-146831" cy="-28135"/>
+            <a:off x="8450622" y="2831122"/>
+            <a:ext cx="-107191" cy="-28135"/>
           </a:xfrm>
           <a:prstGeom prst="rect">
             <a:avLst/>

--- a/docs/logos.pptx
+++ b/docs/logos.pptx
@@ -4728,8 +4728,8 @@
         </p:blipFill>
         <p:spPr>
           <a:xfrm>
-            <a:off x="8450622" y="2831122"/>
-            <a:ext cx="-107191" cy="-28135"/>
+            <a:off x="8469529" y="2831122"/>
+            <a:ext cx="-145005" cy="-28135"/>
           </a:xfrm>
           <a:prstGeom prst="rect">
             <a:avLst/>
